--- a/docs/plots/carbo/jx_carbo_linsubhr_dosedisc_anemia2.pptx
+++ b/docs/plots/carbo/jx_carbo_linsubhr_dosedisc_anemia2.pptx
@@ -3132,566 +3132,578 @@
           <p:spPr>
             <a:xfrm>
               <a:off x="1172049" y="1896563"/>
-              <a:ext cx="7090630" cy="3465030"/>
+              <a:ext cx="7090630" cy="3433023"/>
             </a:xfrm>
             <a:custGeom>
               <a:avLst/>
               <a:pathLst>
-                <a:path w="7090630" h="3465030">
+                <a:path w="7090630" h="3433023">
                   <a:moveTo>
-                    <a:pt x="0" y="2734013"/>
+                    <a:pt x="0" y="2538674"/>
                   </a:moveTo>
                   <a:lnTo>
-                    <a:pt x="71622" y="2735194"/>
-                  </a:lnTo>
-                  <a:lnTo>
-                    <a:pt x="143245" y="2736373"/>
-                  </a:lnTo>
-                  <a:lnTo>
-                    <a:pt x="214867" y="2737550"/>
-                  </a:lnTo>
-                  <a:lnTo>
-                    <a:pt x="286490" y="2738726"/>
-                  </a:lnTo>
-                  <a:lnTo>
-                    <a:pt x="358112" y="2739900"/>
-                  </a:lnTo>
-                  <a:lnTo>
-                    <a:pt x="429735" y="2741073"/>
-                  </a:lnTo>
-                  <a:lnTo>
-                    <a:pt x="501357" y="2742245"/>
-                  </a:lnTo>
-                  <a:lnTo>
-                    <a:pt x="572980" y="2743415"/>
-                  </a:lnTo>
-                  <a:lnTo>
-                    <a:pt x="644602" y="2744583"/>
-                  </a:lnTo>
-                  <a:lnTo>
-                    <a:pt x="716225" y="2745750"/>
-                  </a:lnTo>
-                  <a:lnTo>
-                    <a:pt x="787847" y="2746916"/>
-                  </a:lnTo>
-                  <a:lnTo>
-                    <a:pt x="859470" y="2748080"/>
-                  </a:lnTo>
-                  <a:lnTo>
-                    <a:pt x="931092" y="2749242"/>
-                  </a:lnTo>
-                  <a:lnTo>
-                    <a:pt x="1002715" y="2750403"/>
-                  </a:lnTo>
-                  <a:lnTo>
-                    <a:pt x="1074337" y="2751562"/>
-                  </a:lnTo>
-                  <a:lnTo>
-                    <a:pt x="1145960" y="2752720"/>
-                  </a:lnTo>
-                  <a:lnTo>
-                    <a:pt x="1217582" y="2753877"/>
-                  </a:lnTo>
-                  <a:lnTo>
-                    <a:pt x="1289205" y="2755032"/>
-                  </a:lnTo>
-                  <a:lnTo>
-                    <a:pt x="1360827" y="2756185"/>
-                  </a:lnTo>
-                  <a:lnTo>
-                    <a:pt x="1432450" y="2757337"/>
-                  </a:lnTo>
-                  <a:lnTo>
-                    <a:pt x="1504073" y="2758488"/>
-                  </a:lnTo>
-                  <a:lnTo>
-                    <a:pt x="1575695" y="2759637"/>
-                  </a:lnTo>
-                  <a:lnTo>
-                    <a:pt x="1647318" y="2760785"/>
-                  </a:lnTo>
-                  <a:lnTo>
-                    <a:pt x="1718940" y="2761931"/>
-                  </a:lnTo>
-                  <a:lnTo>
-                    <a:pt x="1790563" y="2763075"/>
-                  </a:lnTo>
-                  <a:lnTo>
-                    <a:pt x="1862185" y="2764218"/>
-                  </a:lnTo>
-                  <a:lnTo>
-                    <a:pt x="1933808" y="2765360"/>
-                  </a:lnTo>
-                  <a:lnTo>
-                    <a:pt x="2005430" y="2766500"/>
-                  </a:lnTo>
-                  <a:lnTo>
-                    <a:pt x="2077053" y="2767639"/>
-                  </a:lnTo>
-                  <a:lnTo>
-                    <a:pt x="2148675" y="2768776"/>
-                  </a:lnTo>
-                  <a:lnTo>
-                    <a:pt x="2220298" y="2769912"/>
-                  </a:lnTo>
-                  <a:lnTo>
-                    <a:pt x="2291920" y="2771047"/>
-                  </a:lnTo>
-                  <a:lnTo>
-                    <a:pt x="2363543" y="2772180"/>
-                  </a:lnTo>
-                  <a:lnTo>
-                    <a:pt x="2435165" y="2773311"/>
-                  </a:lnTo>
-                  <a:lnTo>
-                    <a:pt x="2506788" y="2774441"/>
-                  </a:lnTo>
-                  <a:lnTo>
-                    <a:pt x="2578410" y="2775570"/>
-                  </a:lnTo>
-                  <a:lnTo>
-                    <a:pt x="2650033" y="2776697"/>
-                  </a:lnTo>
-                  <a:lnTo>
-                    <a:pt x="2721655" y="2777822"/>
-                  </a:lnTo>
-                  <a:lnTo>
-                    <a:pt x="2793278" y="2778947"/>
-                  </a:lnTo>
-                  <a:lnTo>
-                    <a:pt x="2864901" y="2780069"/>
-                  </a:lnTo>
-                  <a:lnTo>
-                    <a:pt x="2936523" y="2781191"/>
-                  </a:lnTo>
-                  <a:lnTo>
-                    <a:pt x="3008146" y="2782311"/>
-                  </a:lnTo>
-                  <a:lnTo>
-                    <a:pt x="3079768" y="2769901"/>
-                  </a:lnTo>
-                  <a:lnTo>
-                    <a:pt x="3151391" y="2737529"/>
-                  </a:lnTo>
-                  <a:lnTo>
-                    <a:pt x="3223013" y="2703971"/>
-                  </a:lnTo>
-                  <a:lnTo>
-                    <a:pt x="3294636" y="2669181"/>
-                  </a:lnTo>
-                  <a:lnTo>
-                    <a:pt x="3366258" y="2633116"/>
-                  </a:lnTo>
-                  <a:lnTo>
-                    <a:pt x="3437881" y="2595729"/>
-                  </a:lnTo>
-                  <a:lnTo>
-                    <a:pt x="3509503" y="2556970"/>
-                  </a:lnTo>
-                  <a:lnTo>
-                    <a:pt x="3581126" y="2516790"/>
-                  </a:lnTo>
-                  <a:lnTo>
-                    <a:pt x="3652748" y="2475137"/>
-                  </a:lnTo>
-                  <a:lnTo>
-                    <a:pt x="3724371" y="2431956"/>
-                  </a:lnTo>
-                  <a:lnTo>
-                    <a:pt x="3795993" y="2387191"/>
-                  </a:lnTo>
-                  <a:lnTo>
-                    <a:pt x="3867616" y="2340785"/>
-                  </a:lnTo>
-                  <a:lnTo>
-                    <a:pt x="3939238" y="2292677"/>
-                  </a:lnTo>
-                  <a:lnTo>
-                    <a:pt x="4010861" y="2242805"/>
-                  </a:lnTo>
-                  <a:lnTo>
-                    <a:pt x="4082483" y="2191105"/>
-                  </a:lnTo>
-                  <a:lnTo>
-                    <a:pt x="4154106" y="2137508"/>
-                  </a:lnTo>
-                  <a:lnTo>
-                    <a:pt x="4225729" y="2081945"/>
-                  </a:lnTo>
-                  <a:lnTo>
-                    <a:pt x="4297351" y="2024346"/>
-                  </a:lnTo>
-                  <a:lnTo>
-                    <a:pt x="4368974" y="1964633"/>
-                  </a:lnTo>
-                  <a:lnTo>
-                    <a:pt x="4440596" y="1902732"/>
-                  </a:lnTo>
-                  <a:lnTo>
-                    <a:pt x="4512219" y="1838560"/>
-                  </a:lnTo>
-                  <a:lnTo>
-                    <a:pt x="4583841" y="1772034"/>
-                  </a:lnTo>
-                  <a:lnTo>
-                    <a:pt x="4655464" y="1703070"/>
-                  </a:lnTo>
-                  <a:lnTo>
-                    <a:pt x="4727086" y="1631576"/>
-                  </a:lnTo>
-                  <a:lnTo>
-                    <a:pt x="4798709" y="1557460"/>
-                  </a:lnTo>
-                  <a:lnTo>
-                    <a:pt x="4870331" y="1480627"/>
-                  </a:lnTo>
-                  <a:lnTo>
-                    <a:pt x="4941954" y="1400976"/>
-                  </a:lnTo>
-                  <a:lnTo>
-                    <a:pt x="5013576" y="1318403"/>
-                  </a:lnTo>
-                  <a:lnTo>
-                    <a:pt x="5085199" y="1232803"/>
-                  </a:lnTo>
-                  <a:lnTo>
-                    <a:pt x="5156821" y="1144064"/>
-                  </a:lnTo>
-                  <a:lnTo>
-                    <a:pt x="5228444" y="1052071"/>
-                  </a:lnTo>
-                  <a:lnTo>
-                    <a:pt x="5300066" y="956704"/>
-                  </a:lnTo>
-                  <a:lnTo>
-                    <a:pt x="5371689" y="857840"/>
-                  </a:lnTo>
-                  <a:lnTo>
-                    <a:pt x="5443311" y="755350"/>
-                  </a:lnTo>
-                  <a:lnTo>
-                    <a:pt x="5514934" y="649102"/>
-                  </a:lnTo>
-                  <a:lnTo>
-                    <a:pt x="5586557" y="538957"/>
-                  </a:lnTo>
-                  <a:lnTo>
-                    <a:pt x="5658179" y="424774"/>
-                  </a:lnTo>
-                  <a:lnTo>
-                    <a:pt x="5729802" y="306403"/>
-                  </a:lnTo>
-                  <a:lnTo>
-                    <a:pt x="5801424" y="183691"/>
-                  </a:lnTo>
-                  <a:lnTo>
-                    <a:pt x="5873047" y="56480"/>
-                  </a:lnTo>
-                  <a:lnTo>
-                    <a:pt x="5903721" y="0"/>
+                    <a:pt x="71622" y="2545131"/>
+                  </a:lnTo>
+                  <a:lnTo>
+                    <a:pt x="143245" y="2551551"/>
+                  </a:lnTo>
+                  <a:lnTo>
+                    <a:pt x="214867" y="2557933"/>
+                  </a:lnTo>
+                  <a:lnTo>
+                    <a:pt x="286490" y="2564278"/>
+                  </a:lnTo>
+                  <a:lnTo>
+                    <a:pt x="358112" y="2570587"/>
+                  </a:lnTo>
+                  <a:lnTo>
+                    <a:pt x="429735" y="2576859"/>
+                  </a:lnTo>
+                  <a:lnTo>
+                    <a:pt x="501357" y="2583095"/>
+                  </a:lnTo>
+                  <a:lnTo>
+                    <a:pt x="572980" y="2589294"/>
+                  </a:lnTo>
+                  <a:lnTo>
+                    <a:pt x="644602" y="2595458"/>
+                  </a:lnTo>
+                  <a:lnTo>
+                    <a:pt x="716225" y="2601586"/>
+                  </a:lnTo>
+                  <a:lnTo>
+                    <a:pt x="787847" y="2607678"/>
+                  </a:lnTo>
+                  <a:lnTo>
+                    <a:pt x="859470" y="2613735"/>
+                  </a:lnTo>
+                  <a:lnTo>
+                    <a:pt x="931092" y="2619757"/>
+                  </a:lnTo>
+                  <a:lnTo>
+                    <a:pt x="1002715" y="2625744"/>
+                  </a:lnTo>
+                  <a:lnTo>
+                    <a:pt x="1074337" y="2631696"/>
+                  </a:lnTo>
+                  <a:lnTo>
+                    <a:pt x="1145960" y="2637614"/>
+                  </a:lnTo>
+                  <a:lnTo>
+                    <a:pt x="1217582" y="2643497"/>
+                  </a:lnTo>
+                  <a:lnTo>
+                    <a:pt x="1289205" y="2649347"/>
+                  </a:lnTo>
+                  <a:lnTo>
+                    <a:pt x="1360827" y="2655162"/>
+                  </a:lnTo>
+                  <a:lnTo>
+                    <a:pt x="1432450" y="2660944"/>
+                  </a:lnTo>
+                  <a:lnTo>
+                    <a:pt x="1504073" y="2666692"/>
+                  </a:lnTo>
+                  <a:lnTo>
+                    <a:pt x="1575695" y="2672407"/>
+                  </a:lnTo>
+                  <a:lnTo>
+                    <a:pt x="1647318" y="2678089"/>
+                  </a:lnTo>
+                  <a:lnTo>
+                    <a:pt x="1718940" y="2683738"/>
+                  </a:lnTo>
+                  <a:lnTo>
+                    <a:pt x="1790563" y="2689354"/>
+                  </a:lnTo>
+                  <a:lnTo>
+                    <a:pt x="1862185" y="2694938"/>
+                  </a:lnTo>
+                  <a:lnTo>
+                    <a:pt x="1933808" y="2700489"/>
+                  </a:lnTo>
+                  <a:lnTo>
+                    <a:pt x="2005430" y="2706008"/>
+                  </a:lnTo>
+                  <a:lnTo>
+                    <a:pt x="2077053" y="2711495"/>
+                  </a:lnTo>
+                  <a:lnTo>
+                    <a:pt x="2148675" y="2716950"/>
+                  </a:lnTo>
+                  <a:lnTo>
+                    <a:pt x="2220298" y="2722374"/>
+                  </a:lnTo>
+                  <a:lnTo>
+                    <a:pt x="2291920" y="2727766"/>
+                  </a:lnTo>
+                  <a:lnTo>
+                    <a:pt x="2363543" y="2733127"/>
+                  </a:lnTo>
+                  <a:lnTo>
+                    <a:pt x="2435165" y="2738457"/>
+                  </a:lnTo>
+                  <a:lnTo>
+                    <a:pt x="2506788" y="2743756"/>
+                  </a:lnTo>
+                  <a:lnTo>
+                    <a:pt x="2578410" y="2749024"/>
+                  </a:lnTo>
+                  <a:lnTo>
+                    <a:pt x="2650033" y="2754262"/>
+                  </a:lnTo>
+                  <a:lnTo>
+                    <a:pt x="2721655" y="2759469"/>
+                  </a:lnTo>
+                  <a:lnTo>
+                    <a:pt x="2793278" y="2764647"/>
+                  </a:lnTo>
+                  <a:lnTo>
+                    <a:pt x="2864901" y="2769794"/>
+                  </a:lnTo>
+                  <a:lnTo>
+                    <a:pt x="2936523" y="2774911"/>
+                  </a:lnTo>
+                  <a:lnTo>
+                    <a:pt x="3008146" y="2779999"/>
+                  </a:lnTo>
+                  <a:lnTo>
+                    <a:pt x="3079768" y="2771252"/>
+                  </a:lnTo>
+                  <a:lnTo>
+                    <a:pt x="3151391" y="2742303"/>
+                  </a:lnTo>
+                  <a:lnTo>
+                    <a:pt x="3223013" y="2712404"/>
+                  </a:lnTo>
+                  <a:lnTo>
+                    <a:pt x="3294636" y="2681522"/>
+                  </a:lnTo>
+                  <a:lnTo>
+                    <a:pt x="3366258" y="2649627"/>
+                  </a:lnTo>
+                  <a:lnTo>
+                    <a:pt x="3437881" y="2616684"/>
+                  </a:lnTo>
+                  <a:lnTo>
+                    <a:pt x="3509503" y="2582658"/>
+                  </a:lnTo>
+                  <a:lnTo>
+                    <a:pt x="3581126" y="2547516"/>
+                  </a:lnTo>
+                  <a:lnTo>
+                    <a:pt x="3652748" y="2511219"/>
+                  </a:lnTo>
+                  <a:lnTo>
+                    <a:pt x="3724371" y="2473730"/>
+                  </a:lnTo>
+                  <a:lnTo>
+                    <a:pt x="3795993" y="2435009"/>
+                  </a:lnTo>
+                  <a:lnTo>
+                    <a:pt x="3867616" y="2395017"/>
+                  </a:lnTo>
+                  <a:lnTo>
+                    <a:pt x="3939238" y="2353711"/>
+                  </a:lnTo>
+                  <a:lnTo>
+                    <a:pt x="4010861" y="2311049"/>
+                  </a:lnTo>
+                  <a:lnTo>
+                    <a:pt x="4082483" y="2266986"/>
+                  </a:lnTo>
+                  <a:lnTo>
+                    <a:pt x="4154106" y="2221475"/>
+                  </a:lnTo>
+                  <a:lnTo>
+                    <a:pt x="4225729" y="2174469"/>
+                  </a:lnTo>
+                  <a:lnTo>
+                    <a:pt x="4297351" y="2125920"/>
+                  </a:lnTo>
+                  <a:lnTo>
+                    <a:pt x="4368974" y="2075776"/>
+                  </a:lnTo>
+                  <a:lnTo>
+                    <a:pt x="4440596" y="2023985"/>
+                  </a:lnTo>
+                  <a:lnTo>
+                    <a:pt x="4512219" y="1970493"/>
+                  </a:lnTo>
+                  <a:lnTo>
+                    <a:pt x="4583841" y="1915245"/>
+                  </a:lnTo>
+                  <a:lnTo>
+                    <a:pt x="4655464" y="1858181"/>
+                  </a:lnTo>
+                  <a:lnTo>
+                    <a:pt x="4727086" y="1799244"/>
+                  </a:lnTo>
+                  <a:lnTo>
+                    <a:pt x="4798709" y="1738370"/>
+                  </a:lnTo>
+                  <a:lnTo>
+                    <a:pt x="4870331" y="1675498"/>
+                  </a:lnTo>
+                  <a:lnTo>
+                    <a:pt x="4941954" y="1610560"/>
+                  </a:lnTo>
+                  <a:lnTo>
+                    <a:pt x="5013576" y="1543490"/>
+                  </a:lnTo>
+                  <a:lnTo>
+                    <a:pt x="5085199" y="1474216"/>
+                  </a:lnTo>
+                  <a:lnTo>
+                    <a:pt x="5156821" y="1402668"/>
+                  </a:lnTo>
+                  <a:lnTo>
+                    <a:pt x="5228444" y="1328769"/>
+                  </a:lnTo>
+                  <a:lnTo>
+                    <a:pt x="5300066" y="1252444"/>
+                  </a:lnTo>
+                  <a:lnTo>
+                    <a:pt x="5371689" y="1173611"/>
+                  </a:lnTo>
+                  <a:lnTo>
+                    <a:pt x="5443311" y="1092190"/>
+                  </a:lnTo>
+                  <a:lnTo>
+                    <a:pt x="5514934" y="1008094"/>
+                  </a:lnTo>
+                  <a:lnTo>
+                    <a:pt x="5586557" y="921236"/>
+                  </a:lnTo>
+                  <a:lnTo>
+                    <a:pt x="5658179" y="831525"/>
+                  </a:lnTo>
+                  <a:lnTo>
+                    <a:pt x="5729802" y="738868"/>
+                  </a:lnTo>
+                  <a:lnTo>
+                    <a:pt x="5801424" y="643167"/>
+                  </a:lnTo>
+                  <a:lnTo>
+                    <a:pt x="5873047" y="544324"/>
+                  </a:lnTo>
+                  <a:lnTo>
+                    <a:pt x="5944669" y="442234"/>
+                  </a:lnTo>
+                  <a:lnTo>
+                    <a:pt x="6016292" y="336791"/>
+                  </a:lnTo>
+                  <a:lnTo>
+                    <a:pt x="6087914" y="227884"/>
+                  </a:lnTo>
+                  <a:lnTo>
+                    <a:pt x="6159537" y="115401"/>
+                  </a:lnTo>
+                  <a:lnTo>
+                    <a:pt x="6230681" y="0"/>
                   </a:lnTo>
                   <a:lnTo>
                     <a:pt x="7090630" y="0"/>
                   </a:lnTo>
                   <a:lnTo>
-                    <a:pt x="7090630" y="2843822"/>
-                  </a:lnTo>
-                  <a:lnTo>
-                    <a:pt x="7019007" y="2842781"/>
-                  </a:lnTo>
-                  <a:lnTo>
-                    <a:pt x="6947385" y="2841739"/>
-                  </a:lnTo>
-                  <a:lnTo>
-                    <a:pt x="6875762" y="2840695"/>
-                  </a:lnTo>
-                  <a:lnTo>
-                    <a:pt x="6804139" y="2839651"/>
-                  </a:lnTo>
-                  <a:lnTo>
-                    <a:pt x="6732517" y="2838604"/>
-                  </a:lnTo>
-                  <a:lnTo>
-                    <a:pt x="6660894" y="2837557"/>
-                  </a:lnTo>
-                  <a:lnTo>
-                    <a:pt x="6589272" y="2836508"/>
-                  </a:lnTo>
-                  <a:lnTo>
-                    <a:pt x="6517649" y="2835458"/>
-                  </a:lnTo>
-                  <a:lnTo>
-                    <a:pt x="6446027" y="2834407"/>
-                  </a:lnTo>
-                  <a:lnTo>
-                    <a:pt x="6374404" y="2833354"/>
-                  </a:lnTo>
-                  <a:lnTo>
-                    <a:pt x="6302782" y="2832299"/>
-                  </a:lnTo>
-                  <a:lnTo>
-                    <a:pt x="6231159" y="2831244"/>
-                  </a:lnTo>
-                  <a:lnTo>
-                    <a:pt x="6159537" y="2830187"/>
-                  </a:lnTo>
-                  <a:lnTo>
-                    <a:pt x="6087914" y="2829129"/>
-                  </a:lnTo>
-                  <a:lnTo>
-                    <a:pt x="6016292" y="2828069"/>
-                  </a:lnTo>
-                  <a:lnTo>
-                    <a:pt x="5944669" y="2827008"/>
-                  </a:lnTo>
-                  <a:lnTo>
-                    <a:pt x="5873047" y="2825946"/>
-                  </a:lnTo>
-                  <a:lnTo>
-                    <a:pt x="5801424" y="2824882"/>
-                  </a:lnTo>
-                  <a:lnTo>
-                    <a:pt x="5729802" y="2823817"/>
-                  </a:lnTo>
-                  <a:lnTo>
-                    <a:pt x="5658179" y="2822750"/>
-                  </a:lnTo>
-                  <a:lnTo>
-                    <a:pt x="5586557" y="2821682"/>
-                  </a:lnTo>
-                  <a:lnTo>
-                    <a:pt x="5514934" y="2820613"/>
-                  </a:lnTo>
-                  <a:lnTo>
-                    <a:pt x="5443311" y="2819543"/>
-                  </a:lnTo>
-                  <a:lnTo>
-                    <a:pt x="5371689" y="2818471"/>
-                  </a:lnTo>
-                  <a:lnTo>
-                    <a:pt x="5300066" y="2817397"/>
-                  </a:lnTo>
-                  <a:lnTo>
-                    <a:pt x="5228444" y="2816323"/>
-                  </a:lnTo>
-                  <a:lnTo>
-                    <a:pt x="5156821" y="2815246"/>
-                  </a:lnTo>
-                  <a:lnTo>
-                    <a:pt x="5085199" y="2814169"/>
-                  </a:lnTo>
-                  <a:lnTo>
-                    <a:pt x="5013576" y="2813090"/>
-                  </a:lnTo>
-                  <a:lnTo>
-                    <a:pt x="4941954" y="2812010"/>
-                  </a:lnTo>
-                  <a:lnTo>
-                    <a:pt x="4870331" y="2810928"/>
-                  </a:lnTo>
-                  <a:lnTo>
-                    <a:pt x="4798709" y="2809845"/>
-                  </a:lnTo>
-                  <a:lnTo>
-                    <a:pt x="4727086" y="2808761"/>
-                  </a:lnTo>
-                  <a:lnTo>
-                    <a:pt x="4655464" y="2807675"/>
-                  </a:lnTo>
-                  <a:lnTo>
-                    <a:pt x="4583841" y="2806587"/>
-                  </a:lnTo>
-                  <a:lnTo>
-                    <a:pt x="4512219" y="2805499"/>
-                  </a:lnTo>
-                  <a:lnTo>
-                    <a:pt x="4440596" y="2804409"/>
-                  </a:lnTo>
-                  <a:lnTo>
-                    <a:pt x="4368974" y="2803317"/>
-                  </a:lnTo>
-                  <a:lnTo>
-                    <a:pt x="4297351" y="2802224"/>
-                  </a:lnTo>
-                  <a:lnTo>
-                    <a:pt x="4225729" y="2801130"/>
-                  </a:lnTo>
-                  <a:lnTo>
-                    <a:pt x="4154106" y="2800034"/>
-                  </a:lnTo>
-                  <a:lnTo>
-                    <a:pt x="4082483" y="2798937"/>
-                  </a:lnTo>
-                  <a:lnTo>
-                    <a:pt x="4010861" y="2797839"/>
-                  </a:lnTo>
-                  <a:lnTo>
-                    <a:pt x="3939238" y="2796739"/>
-                  </a:lnTo>
-                  <a:lnTo>
-                    <a:pt x="3867616" y="2795638"/>
-                  </a:lnTo>
-                  <a:lnTo>
-                    <a:pt x="3795993" y="2794535"/>
-                  </a:lnTo>
-                  <a:lnTo>
-                    <a:pt x="3724371" y="2793431"/>
-                  </a:lnTo>
-                  <a:lnTo>
-                    <a:pt x="3652748" y="2792325"/>
-                  </a:lnTo>
-                  <a:lnTo>
-                    <a:pt x="3581126" y="2791218"/>
-                  </a:lnTo>
-                  <a:lnTo>
-                    <a:pt x="3509503" y="2790110"/>
-                  </a:lnTo>
-                  <a:lnTo>
-                    <a:pt x="3437881" y="2789000"/>
-                  </a:lnTo>
-                  <a:lnTo>
-                    <a:pt x="3366258" y="2787889"/>
-                  </a:lnTo>
-                  <a:lnTo>
-                    <a:pt x="3294636" y="2786776"/>
-                  </a:lnTo>
-                  <a:lnTo>
-                    <a:pt x="3223013" y="2785662"/>
-                  </a:lnTo>
-                  <a:lnTo>
-                    <a:pt x="3151391" y="2784546"/>
-                  </a:lnTo>
-                  <a:lnTo>
-                    <a:pt x="3079768" y="2783429"/>
-                  </a:lnTo>
-                  <a:lnTo>
-                    <a:pt x="3008146" y="2801127"/>
-                  </a:lnTo>
-                  <a:lnTo>
-                    <a:pt x="2936523" y="2831249"/>
-                  </a:lnTo>
-                  <a:lnTo>
-                    <a:pt x="2864901" y="2860305"/>
-                  </a:lnTo>
-                  <a:lnTo>
-                    <a:pt x="2793278" y="2888334"/>
-                  </a:lnTo>
-                  <a:lnTo>
-                    <a:pt x="2721655" y="2915371"/>
-                  </a:lnTo>
-                  <a:lnTo>
-                    <a:pt x="2650033" y="2941451"/>
-                  </a:lnTo>
-                  <a:lnTo>
-                    <a:pt x="2578410" y="2966609"/>
-                  </a:lnTo>
-                  <a:lnTo>
-                    <a:pt x="2506788" y="2990877"/>
-                  </a:lnTo>
-                  <a:lnTo>
-                    <a:pt x="2435165" y="3014286"/>
-                  </a:lnTo>
-                  <a:lnTo>
-                    <a:pt x="2363543" y="3036868"/>
-                  </a:lnTo>
-                  <a:lnTo>
-                    <a:pt x="2291920" y="3058650"/>
-                  </a:lnTo>
-                  <a:lnTo>
-                    <a:pt x="2220298" y="3079663"/>
-                  </a:lnTo>
-                  <a:lnTo>
-                    <a:pt x="2148675" y="3099931"/>
-                  </a:lnTo>
-                  <a:lnTo>
-                    <a:pt x="2077053" y="3119483"/>
-                  </a:lnTo>
-                  <a:lnTo>
-                    <a:pt x="2005430" y="3138343"/>
-                  </a:lnTo>
-                  <a:lnTo>
-                    <a:pt x="1933808" y="3156536"/>
-                  </a:lnTo>
-                  <a:lnTo>
-                    <a:pt x="1862185" y="3174086"/>
-                  </a:lnTo>
-                  <a:lnTo>
-                    <a:pt x="1790563" y="3191014"/>
-                  </a:lnTo>
-                  <a:lnTo>
-                    <a:pt x="1718940" y="3207344"/>
-                  </a:lnTo>
-                  <a:lnTo>
-                    <a:pt x="1647318" y="3223096"/>
-                  </a:lnTo>
-                  <a:lnTo>
-                    <a:pt x="1575695" y="3238291"/>
-                  </a:lnTo>
-                  <a:lnTo>
-                    <a:pt x="1504073" y="3252949"/>
-                  </a:lnTo>
-                  <a:lnTo>
-                    <a:pt x="1432450" y="3267088"/>
-                  </a:lnTo>
-                  <a:lnTo>
-                    <a:pt x="1360827" y="3280726"/>
-                  </a:lnTo>
-                  <a:lnTo>
-                    <a:pt x="1289205" y="3293883"/>
-                  </a:lnTo>
-                  <a:lnTo>
-                    <a:pt x="1217582" y="3306573"/>
-                  </a:lnTo>
-                  <a:lnTo>
-                    <a:pt x="1145960" y="3318815"/>
-                  </a:lnTo>
-                  <a:lnTo>
-                    <a:pt x="1074337" y="3330624"/>
-                  </a:lnTo>
-                  <a:lnTo>
-                    <a:pt x="1002715" y="3342016"/>
-                  </a:lnTo>
-                  <a:lnTo>
-                    <a:pt x="931092" y="3353004"/>
-                  </a:lnTo>
-                  <a:lnTo>
-                    <a:pt x="859470" y="3363603"/>
-                  </a:lnTo>
-                  <a:lnTo>
-                    <a:pt x="787847" y="3373828"/>
-                  </a:lnTo>
-                  <a:lnTo>
-                    <a:pt x="716225" y="3383691"/>
-                  </a:lnTo>
-                  <a:lnTo>
-                    <a:pt x="644602" y="3393205"/>
-                  </a:lnTo>
-                  <a:lnTo>
-                    <a:pt x="572980" y="3402382"/>
-                  </a:lnTo>
-                  <a:lnTo>
-                    <a:pt x="501357" y="3411235"/>
-                  </a:lnTo>
-                  <a:lnTo>
-                    <a:pt x="429735" y="3419775"/>
-                  </a:lnTo>
-                  <a:lnTo>
-                    <a:pt x="358112" y="3428012"/>
-                  </a:lnTo>
-                  <a:lnTo>
-                    <a:pt x="286490" y="3435958"/>
-                  </a:lnTo>
-                  <a:lnTo>
-                    <a:pt x="214867" y="3443624"/>
-                  </a:lnTo>
-                  <a:lnTo>
-                    <a:pt x="143245" y="3451017"/>
-                  </a:lnTo>
-                  <a:lnTo>
-                    <a:pt x="71622" y="3458150"/>
-                  </a:lnTo>
-                  <a:lnTo>
-                    <a:pt x="0" y="3465030"/>
+                    <a:pt x="7090630" y="3026128"/>
+                  </a:lnTo>
+                  <a:lnTo>
+                    <a:pt x="7019007" y="3022475"/>
+                  </a:lnTo>
+                  <a:lnTo>
+                    <a:pt x="6947385" y="3018801"/>
+                  </a:lnTo>
+                  <a:lnTo>
+                    <a:pt x="6875762" y="3015106"/>
+                  </a:lnTo>
+                  <a:lnTo>
+                    <a:pt x="6804139" y="3011389"/>
+                  </a:lnTo>
+                  <a:lnTo>
+                    <a:pt x="6732517" y="3007650"/>
+                  </a:lnTo>
+                  <a:lnTo>
+                    <a:pt x="6660894" y="3003890"/>
+                  </a:lnTo>
+                  <a:lnTo>
+                    <a:pt x="6589272" y="3000108"/>
+                  </a:lnTo>
+                  <a:lnTo>
+                    <a:pt x="6517649" y="2996303"/>
+                  </a:lnTo>
+                  <a:lnTo>
+                    <a:pt x="6446027" y="2992477"/>
+                  </a:lnTo>
+                  <a:lnTo>
+                    <a:pt x="6374404" y="2988628"/>
+                  </a:lnTo>
+                  <a:lnTo>
+                    <a:pt x="6302782" y="2984756"/>
+                  </a:lnTo>
+                  <a:lnTo>
+                    <a:pt x="6231159" y="2980862"/>
+                  </a:lnTo>
+                  <a:lnTo>
+                    <a:pt x="6159537" y="2976946"/>
+                  </a:lnTo>
+                  <a:lnTo>
+                    <a:pt x="6087914" y="2973006"/>
+                  </a:lnTo>
+                  <a:lnTo>
+                    <a:pt x="6016292" y="2969044"/>
+                  </a:lnTo>
+                  <a:lnTo>
+                    <a:pt x="5944669" y="2965059"/>
+                  </a:lnTo>
+                  <a:lnTo>
+                    <a:pt x="5873047" y="2961050"/>
+                  </a:lnTo>
+                  <a:lnTo>
+                    <a:pt x="5801424" y="2957018"/>
+                  </a:lnTo>
+                  <a:lnTo>
+                    <a:pt x="5729802" y="2952962"/>
+                  </a:lnTo>
+                  <a:lnTo>
+                    <a:pt x="5658179" y="2948883"/>
+                  </a:lnTo>
+                  <a:lnTo>
+                    <a:pt x="5586557" y="2944780"/>
+                  </a:lnTo>
+                  <a:lnTo>
+                    <a:pt x="5514934" y="2940653"/>
+                  </a:lnTo>
+                  <a:lnTo>
+                    <a:pt x="5443311" y="2936502"/>
+                  </a:lnTo>
+                  <a:lnTo>
+                    <a:pt x="5371689" y="2932326"/>
+                  </a:lnTo>
+                  <a:lnTo>
+                    <a:pt x="5300066" y="2928127"/>
+                  </a:lnTo>
+                  <a:lnTo>
+                    <a:pt x="5228444" y="2923903"/>
+                  </a:lnTo>
+                  <a:lnTo>
+                    <a:pt x="5156821" y="2919654"/>
+                  </a:lnTo>
+                  <a:lnTo>
+                    <a:pt x="5085199" y="2915381"/>
+                  </a:lnTo>
+                  <a:lnTo>
+                    <a:pt x="5013576" y="2911082"/>
+                  </a:lnTo>
+                  <a:lnTo>
+                    <a:pt x="4941954" y="2906759"/>
+                  </a:lnTo>
+                  <a:lnTo>
+                    <a:pt x="4870331" y="2902410"/>
+                  </a:lnTo>
+                  <a:lnTo>
+                    <a:pt x="4798709" y="2898036"/>
+                  </a:lnTo>
+                  <a:lnTo>
+                    <a:pt x="4727086" y="2893637"/>
+                  </a:lnTo>
+                  <a:lnTo>
+                    <a:pt x="4655464" y="2889212"/>
+                  </a:lnTo>
+                  <a:lnTo>
+                    <a:pt x="4583841" y="2884761"/>
+                  </a:lnTo>
+                  <a:lnTo>
+                    <a:pt x="4512219" y="2880284"/>
+                  </a:lnTo>
+                  <a:lnTo>
+                    <a:pt x="4440596" y="2875781"/>
+                  </a:lnTo>
+                  <a:lnTo>
+                    <a:pt x="4368974" y="2871252"/>
+                  </a:lnTo>
+                  <a:lnTo>
+                    <a:pt x="4297351" y="2866696"/>
+                  </a:lnTo>
+                  <a:lnTo>
+                    <a:pt x="4225729" y="2862114"/>
+                  </a:lnTo>
+                  <a:lnTo>
+                    <a:pt x="4154106" y="2857505"/>
+                  </a:lnTo>
+                  <a:lnTo>
+                    <a:pt x="4082483" y="2852869"/>
+                  </a:lnTo>
+                  <a:lnTo>
+                    <a:pt x="4010861" y="2848206"/>
+                  </a:lnTo>
+                  <a:lnTo>
+                    <a:pt x="3939238" y="2843516"/>
+                  </a:lnTo>
+                  <a:lnTo>
+                    <a:pt x="3867616" y="2838799"/>
+                  </a:lnTo>
+                  <a:lnTo>
+                    <a:pt x="3795993" y="2834054"/>
+                  </a:lnTo>
+                  <a:lnTo>
+                    <a:pt x="3724371" y="2829281"/>
+                  </a:lnTo>
+                  <a:lnTo>
+                    <a:pt x="3652748" y="2824481"/>
+                  </a:lnTo>
+                  <a:lnTo>
+                    <a:pt x="3581126" y="2819653"/>
+                  </a:lnTo>
+                  <a:lnTo>
+                    <a:pt x="3509503" y="2814796"/>
+                  </a:lnTo>
+                  <a:lnTo>
+                    <a:pt x="3437881" y="2809911"/>
+                  </a:lnTo>
+                  <a:lnTo>
+                    <a:pt x="3366258" y="2804998"/>
+                  </a:lnTo>
+                  <a:lnTo>
+                    <a:pt x="3294636" y="2800056"/>
+                  </a:lnTo>
+                  <a:lnTo>
+                    <a:pt x="3223013" y="2795085"/>
+                  </a:lnTo>
+                  <a:lnTo>
+                    <a:pt x="3151391" y="2790086"/>
+                  </a:lnTo>
+                  <a:lnTo>
+                    <a:pt x="3079768" y="2785057"/>
+                  </a:lnTo>
+                  <a:lnTo>
+                    <a:pt x="3008146" y="2799280"/>
+                  </a:lnTo>
+                  <a:lnTo>
+                    <a:pt x="2936523" y="2826416"/>
+                  </a:lnTo>
+                  <a:lnTo>
+                    <a:pt x="2864901" y="2852690"/>
+                  </a:lnTo>
+                  <a:lnTo>
+                    <a:pt x="2793278" y="2878128"/>
+                  </a:lnTo>
+                  <a:lnTo>
+                    <a:pt x="2721655" y="2902758"/>
+                  </a:lnTo>
+                  <a:lnTo>
+                    <a:pt x="2650033" y="2926604"/>
+                  </a:lnTo>
+                  <a:lnTo>
+                    <a:pt x="2578410" y="2949692"/>
+                  </a:lnTo>
+                  <a:lnTo>
+                    <a:pt x="2506788" y="2972045"/>
+                  </a:lnTo>
+                  <a:lnTo>
+                    <a:pt x="2435165" y="2993688"/>
+                  </a:lnTo>
+                  <a:lnTo>
+                    <a:pt x="2363543" y="3014643"/>
+                  </a:lnTo>
+                  <a:lnTo>
+                    <a:pt x="2291920" y="3034931"/>
+                  </a:lnTo>
+                  <a:lnTo>
+                    <a:pt x="2220298" y="3054574"/>
+                  </a:lnTo>
+                  <a:lnTo>
+                    <a:pt x="2148675" y="3073592"/>
+                  </a:lnTo>
+                  <a:lnTo>
+                    <a:pt x="2077053" y="3092006"/>
+                  </a:lnTo>
+                  <a:lnTo>
+                    <a:pt x="2005430" y="3109834"/>
+                  </a:lnTo>
+                  <a:lnTo>
+                    <a:pt x="1933808" y="3127095"/>
+                  </a:lnTo>
+                  <a:lnTo>
+                    <a:pt x="1862185" y="3143808"/>
+                  </a:lnTo>
+                  <a:lnTo>
+                    <a:pt x="1790563" y="3159988"/>
+                  </a:lnTo>
+                  <a:lnTo>
+                    <a:pt x="1718940" y="3175655"/>
+                  </a:lnTo>
+                  <a:lnTo>
+                    <a:pt x="1647318" y="3190823"/>
+                  </a:lnTo>
+                  <a:lnTo>
+                    <a:pt x="1575695" y="3205509"/>
+                  </a:lnTo>
+                  <a:lnTo>
+                    <a:pt x="1504073" y="3219727"/>
+                  </a:lnTo>
+                  <a:lnTo>
+                    <a:pt x="1432450" y="3233494"/>
+                  </a:lnTo>
+                  <a:lnTo>
+                    <a:pt x="1360827" y="3246823"/>
+                  </a:lnTo>
+                  <a:lnTo>
+                    <a:pt x="1289205" y="3259728"/>
+                  </a:lnTo>
+                  <a:lnTo>
+                    <a:pt x="1217582" y="3272222"/>
+                  </a:lnTo>
+                  <a:lnTo>
+                    <a:pt x="1145960" y="3284320"/>
+                  </a:lnTo>
+                  <a:lnTo>
+                    <a:pt x="1074337" y="3296032"/>
+                  </a:lnTo>
+                  <a:lnTo>
+                    <a:pt x="1002715" y="3307372"/>
+                  </a:lnTo>
+                  <a:lnTo>
+                    <a:pt x="931092" y="3318352"/>
+                  </a:lnTo>
+                  <a:lnTo>
+                    <a:pt x="859470" y="3328982"/>
+                  </a:lnTo>
+                  <a:lnTo>
+                    <a:pt x="787847" y="3339275"/>
+                  </a:lnTo>
+                  <a:lnTo>
+                    <a:pt x="716225" y="3349240"/>
+                  </a:lnTo>
+                  <a:lnTo>
+                    <a:pt x="644602" y="3358888"/>
+                  </a:lnTo>
+                  <a:lnTo>
+                    <a:pt x="572980" y="3368229"/>
+                  </a:lnTo>
+                  <a:lnTo>
+                    <a:pt x="501357" y="3377273"/>
+                  </a:lnTo>
+                  <a:lnTo>
+                    <a:pt x="429735" y="3386030"/>
+                  </a:lnTo>
+                  <a:lnTo>
+                    <a:pt x="358112" y="3394508"/>
+                  </a:lnTo>
+                  <a:lnTo>
+                    <a:pt x="286490" y="3402717"/>
+                  </a:lnTo>
+                  <a:lnTo>
+                    <a:pt x="214867" y="3410664"/>
+                  </a:lnTo>
+                  <a:lnTo>
+                    <a:pt x="143245" y="3418359"/>
+                  </a:lnTo>
+                  <a:lnTo>
+                    <a:pt x="71622" y="3425809"/>
+                  </a:lnTo>
+                  <a:lnTo>
+                    <a:pt x="0" y="3433023"/>
                   </a:lnTo>
                   <a:close/>
                 </a:path>
@@ -3718,263 +3730,275 @@
           <p:spPr>
             <a:xfrm>
               <a:off x="1172049" y="1896563"/>
-              <a:ext cx="5903721" cy="2782311"/>
+              <a:ext cx="6230681" cy="2779999"/>
             </a:xfrm>
             <a:custGeom>
               <a:avLst/>
               <a:pathLst>
-                <a:path w="5903721" h="2782311">
+                <a:path w="6230681" h="2779999">
                   <a:moveTo>
-                    <a:pt x="0" y="2734013"/>
+                    <a:pt x="0" y="2538674"/>
                   </a:moveTo>
                   <a:lnTo>
-                    <a:pt x="71622" y="2735194"/>
-                  </a:lnTo>
-                  <a:lnTo>
-                    <a:pt x="143245" y="2736373"/>
-                  </a:lnTo>
-                  <a:lnTo>
-                    <a:pt x="214867" y="2737550"/>
-                  </a:lnTo>
-                  <a:lnTo>
-                    <a:pt x="286490" y="2738726"/>
-                  </a:lnTo>
-                  <a:lnTo>
-                    <a:pt x="358112" y="2739900"/>
-                  </a:lnTo>
-                  <a:lnTo>
-                    <a:pt x="429735" y="2741073"/>
-                  </a:lnTo>
-                  <a:lnTo>
-                    <a:pt x="501357" y="2742245"/>
-                  </a:lnTo>
-                  <a:lnTo>
-                    <a:pt x="572980" y="2743415"/>
-                  </a:lnTo>
-                  <a:lnTo>
-                    <a:pt x="644602" y="2744583"/>
-                  </a:lnTo>
-                  <a:lnTo>
-                    <a:pt x="716225" y="2745750"/>
-                  </a:lnTo>
-                  <a:lnTo>
-                    <a:pt x="787847" y="2746916"/>
-                  </a:lnTo>
-                  <a:lnTo>
-                    <a:pt x="859470" y="2748080"/>
-                  </a:lnTo>
-                  <a:lnTo>
-                    <a:pt x="931092" y="2749242"/>
-                  </a:lnTo>
-                  <a:lnTo>
-                    <a:pt x="1002715" y="2750403"/>
-                  </a:lnTo>
-                  <a:lnTo>
-                    <a:pt x="1074337" y="2751562"/>
-                  </a:lnTo>
-                  <a:lnTo>
-                    <a:pt x="1145960" y="2752720"/>
-                  </a:lnTo>
-                  <a:lnTo>
-                    <a:pt x="1217582" y="2753877"/>
-                  </a:lnTo>
-                  <a:lnTo>
-                    <a:pt x="1289205" y="2755032"/>
-                  </a:lnTo>
-                  <a:lnTo>
-                    <a:pt x="1360827" y="2756185"/>
-                  </a:lnTo>
-                  <a:lnTo>
-                    <a:pt x="1432450" y="2757337"/>
-                  </a:lnTo>
-                  <a:lnTo>
-                    <a:pt x="1504073" y="2758488"/>
-                  </a:lnTo>
-                  <a:lnTo>
-                    <a:pt x="1575695" y="2759637"/>
-                  </a:lnTo>
-                  <a:lnTo>
-                    <a:pt x="1647318" y="2760785"/>
-                  </a:lnTo>
-                  <a:lnTo>
-                    <a:pt x="1718940" y="2761931"/>
-                  </a:lnTo>
-                  <a:lnTo>
-                    <a:pt x="1790563" y="2763075"/>
-                  </a:lnTo>
-                  <a:lnTo>
-                    <a:pt x="1862185" y="2764218"/>
-                  </a:lnTo>
-                  <a:lnTo>
-                    <a:pt x="1933808" y="2765360"/>
-                  </a:lnTo>
-                  <a:lnTo>
-                    <a:pt x="2005430" y="2766500"/>
-                  </a:lnTo>
-                  <a:lnTo>
-                    <a:pt x="2077053" y="2767639"/>
-                  </a:lnTo>
-                  <a:lnTo>
-                    <a:pt x="2148675" y="2768776"/>
-                  </a:lnTo>
-                  <a:lnTo>
-                    <a:pt x="2220298" y="2769912"/>
-                  </a:lnTo>
-                  <a:lnTo>
-                    <a:pt x="2291920" y="2771047"/>
-                  </a:lnTo>
-                  <a:lnTo>
-                    <a:pt x="2363543" y="2772180"/>
-                  </a:lnTo>
-                  <a:lnTo>
-                    <a:pt x="2435165" y="2773311"/>
-                  </a:lnTo>
-                  <a:lnTo>
-                    <a:pt x="2506788" y="2774441"/>
-                  </a:lnTo>
-                  <a:lnTo>
-                    <a:pt x="2578410" y="2775570"/>
-                  </a:lnTo>
-                  <a:lnTo>
-                    <a:pt x="2650033" y="2776697"/>
-                  </a:lnTo>
-                  <a:lnTo>
-                    <a:pt x="2721655" y="2777822"/>
-                  </a:lnTo>
-                  <a:lnTo>
-                    <a:pt x="2793278" y="2778947"/>
-                  </a:lnTo>
-                  <a:lnTo>
-                    <a:pt x="2864901" y="2780069"/>
-                  </a:lnTo>
-                  <a:lnTo>
-                    <a:pt x="2936523" y="2781191"/>
-                  </a:lnTo>
-                  <a:lnTo>
-                    <a:pt x="3008146" y="2782311"/>
-                  </a:lnTo>
-                  <a:lnTo>
-                    <a:pt x="3079768" y="2769901"/>
-                  </a:lnTo>
-                  <a:lnTo>
-                    <a:pt x="3151391" y="2737529"/>
-                  </a:lnTo>
-                  <a:lnTo>
-                    <a:pt x="3223013" y="2703971"/>
-                  </a:lnTo>
-                  <a:lnTo>
-                    <a:pt x="3294636" y="2669181"/>
-                  </a:lnTo>
-                  <a:lnTo>
-                    <a:pt x="3366258" y="2633116"/>
-                  </a:lnTo>
-                  <a:lnTo>
-                    <a:pt x="3437881" y="2595729"/>
-                  </a:lnTo>
-                  <a:lnTo>
-                    <a:pt x="3509503" y="2556970"/>
-                  </a:lnTo>
-                  <a:lnTo>
-                    <a:pt x="3581126" y="2516790"/>
-                  </a:lnTo>
-                  <a:lnTo>
-                    <a:pt x="3652748" y="2475137"/>
-                  </a:lnTo>
-                  <a:lnTo>
-                    <a:pt x="3724371" y="2431956"/>
-                  </a:lnTo>
-                  <a:lnTo>
-                    <a:pt x="3795993" y="2387191"/>
-                  </a:lnTo>
-                  <a:lnTo>
-                    <a:pt x="3867616" y="2340785"/>
-                  </a:lnTo>
-                  <a:lnTo>
-                    <a:pt x="3939238" y="2292677"/>
-                  </a:lnTo>
-                  <a:lnTo>
-                    <a:pt x="4010861" y="2242805"/>
-                  </a:lnTo>
-                  <a:lnTo>
-                    <a:pt x="4082483" y="2191105"/>
-                  </a:lnTo>
-                  <a:lnTo>
-                    <a:pt x="4154106" y="2137508"/>
-                  </a:lnTo>
-                  <a:lnTo>
-                    <a:pt x="4225729" y="2081945"/>
-                  </a:lnTo>
-                  <a:lnTo>
-                    <a:pt x="4297351" y="2024346"/>
-                  </a:lnTo>
-                  <a:lnTo>
-                    <a:pt x="4368974" y="1964633"/>
-                  </a:lnTo>
-                  <a:lnTo>
-                    <a:pt x="4440596" y="1902732"/>
-                  </a:lnTo>
-                  <a:lnTo>
-                    <a:pt x="4512219" y="1838560"/>
-                  </a:lnTo>
-                  <a:lnTo>
-                    <a:pt x="4583841" y="1772034"/>
-                  </a:lnTo>
-                  <a:lnTo>
-                    <a:pt x="4655464" y="1703070"/>
-                  </a:lnTo>
-                  <a:lnTo>
-                    <a:pt x="4727086" y="1631576"/>
-                  </a:lnTo>
-                  <a:lnTo>
-                    <a:pt x="4798709" y="1557460"/>
-                  </a:lnTo>
-                  <a:lnTo>
-                    <a:pt x="4870331" y="1480627"/>
-                  </a:lnTo>
-                  <a:lnTo>
-                    <a:pt x="4941954" y="1400976"/>
-                  </a:lnTo>
-                  <a:lnTo>
-                    <a:pt x="5013576" y="1318403"/>
-                  </a:lnTo>
-                  <a:lnTo>
-                    <a:pt x="5085199" y="1232803"/>
-                  </a:lnTo>
-                  <a:lnTo>
-                    <a:pt x="5156821" y="1144064"/>
-                  </a:lnTo>
-                  <a:lnTo>
-                    <a:pt x="5228444" y="1052071"/>
-                  </a:lnTo>
-                  <a:lnTo>
-                    <a:pt x="5300066" y="956704"/>
-                  </a:lnTo>
-                  <a:lnTo>
-                    <a:pt x="5371689" y="857840"/>
-                  </a:lnTo>
-                  <a:lnTo>
-                    <a:pt x="5443311" y="755350"/>
-                  </a:lnTo>
-                  <a:lnTo>
-                    <a:pt x="5514934" y="649102"/>
-                  </a:lnTo>
-                  <a:lnTo>
-                    <a:pt x="5586557" y="538957"/>
-                  </a:lnTo>
-                  <a:lnTo>
-                    <a:pt x="5658179" y="424774"/>
-                  </a:lnTo>
-                  <a:lnTo>
-                    <a:pt x="5729802" y="306403"/>
-                  </a:lnTo>
-                  <a:lnTo>
-                    <a:pt x="5801424" y="183691"/>
-                  </a:lnTo>
-                  <a:lnTo>
-                    <a:pt x="5873047" y="56480"/>
-                  </a:lnTo>
-                  <a:lnTo>
-                    <a:pt x="5903721" y="0"/>
+                    <a:pt x="71622" y="2545131"/>
+                  </a:lnTo>
+                  <a:lnTo>
+                    <a:pt x="143245" y="2551551"/>
+                  </a:lnTo>
+                  <a:lnTo>
+                    <a:pt x="214867" y="2557933"/>
+                  </a:lnTo>
+                  <a:lnTo>
+                    <a:pt x="286490" y="2564278"/>
+                  </a:lnTo>
+                  <a:lnTo>
+                    <a:pt x="358112" y="2570587"/>
+                  </a:lnTo>
+                  <a:lnTo>
+                    <a:pt x="429735" y="2576859"/>
+                  </a:lnTo>
+                  <a:lnTo>
+                    <a:pt x="501357" y="2583095"/>
+                  </a:lnTo>
+                  <a:lnTo>
+                    <a:pt x="572980" y="2589294"/>
+                  </a:lnTo>
+                  <a:lnTo>
+                    <a:pt x="644602" y="2595458"/>
+                  </a:lnTo>
+                  <a:lnTo>
+                    <a:pt x="716225" y="2601586"/>
+                  </a:lnTo>
+                  <a:lnTo>
+                    <a:pt x="787847" y="2607678"/>
+                  </a:lnTo>
+                  <a:lnTo>
+                    <a:pt x="859470" y="2613735"/>
+                  </a:lnTo>
+                  <a:lnTo>
+                    <a:pt x="931092" y="2619757"/>
+                  </a:lnTo>
+                  <a:lnTo>
+                    <a:pt x="1002715" y="2625744"/>
+                  </a:lnTo>
+                  <a:lnTo>
+                    <a:pt x="1074337" y="2631696"/>
+                  </a:lnTo>
+                  <a:lnTo>
+                    <a:pt x="1145960" y="2637614"/>
+                  </a:lnTo>
+                  <a:lnTo>
+                    <a:pt x="1217582" y="2643497"/>
+                  </a:lnTo>
+                  <a:lnTo>
+                    <a:pt x="1289205" y="2649347"/>
+                  </a:lnTo>
+                  <a:lnTo>
+                    <a:pt x="1360827" y="2655162"/>
+                  </a:lnTo>
+                  <a:lnTo>
+                    <a:pt x="1432450" y="2660944"/>
+                  </a:lnTo>
+                  <a:lnTo>
+                    <a:pt x="1504073" y="2666692"/>
+                  </a:lnTo>
+                  <a:lnTo>
+                    <a:pt x="1575695" y="2672407"/>
+                  </a:lnTo>
+                  <a:lnTo>
+                    <a:pt x="1647318" y="2678089"/>
+                  </a:lnTo>
+                  <a:lnTo>
+                    <a:pt x="1718940" y="2683738"/>
+                  </a:lnTo>
+                  <a:lnTo>
+                    <a:pt x="1790563" y="2689354"/>
+                  </a:lnTo>
+                  <a:lnTo>
+                    <a:pt x="1862185" y="2694938"/>
+                  </a:lnTo>
+                  <a:lnTo>
+                    <a:pt x="1933808" y="2700489"/>
+                  </a:lnTo>
+                  <a:lnTo>
+                    <a:pt x="2005430" y="2706008"/>
+                  </a:lnTo>
+                  <a:lnTo>
+                    <a:pt x="2077053" y="2711495"/>
+                  </a:lnTo>
+                  <a:lnTo>
+                    <a:pt x="2148675" y="2716950"/>
+                  </a:lnTo>
+                  <a:lnTo>
+                    <a:pt x="2220298" y="2722374"/>
+                  </a:lnTo>
+                  <a:lnTo>
+                    <a:pt x="2291920" y="2727766"/>
+                  </a:lnTo>
+                  <a:lnTo>
+                    <a:pt x="2363543" y="2733127"/>
+                  </a:lnTo>
+                  <a:lnTo>
+                    <a:pt x="2435165" y="2738457"/>
+                  </a:lnTo>
+                  <a:lnTo>
+                    <a:pt x="2506788" y="2743756"/>
+                  </a:lnTo>
+                  <a:lnTo>
+                    <a:pt x="2578410" y="2749024"/>
+                  </a:lnTo>
+                  <a:lnTo>
+                    <a:pt x="2650033" y="2754262"/>
+                  </a:lnTo>
+                  <a:lnTo>
+                    <a:pt x="2721655" y="2759469"/>
+                  </a:lnTo>
+                  <a:lnTo>
+                    <a:pt x="2793278" y="2764647"/>
+                  </a:lnTo>
+                  <a:lnTo>
+                    <a:pt x="2864901" y="2769794"/>
+                  </a:lnTo>
+                  <a:lnTo>
+                    <a:pt x="2936523" y="2774911"/>
+                  </a:lnTo>
+                  <a:lnTo>
+                    <a:pt x="3008146" y="2779999"/>
+                  </a:lnTo>
+                  <a:lnTo>
+                    <a:pt x="3079768" y="2771252"/>
+                  </a:lnTo>
+                  <a:lnTo>
+                    <a:pt x="3151391" y="2742303"/>
+                  </a:lnTo>
+                  <a:lnTo>
+                    <a:pt x="3223013" y="2712404"/>
+                  </a:lnTo>
+                  <a:lnTo>
+                    <a:pt x="3294636" y="2681522"/>
+                  </a:lnTo>
+                  <a:lnTo>
+                    <a:pt x="3366258" y="2649627"/>
+                  </a:lnTo>
+                  <a:lnTo>
+                    <a:pt x="3437881" y="2616684"/>
+                  </a:lnTo>
+                  <a:lnTo>
+                    <a:pt x="3509503" y="2582658"/>
+                  </a:lnTo>
+                  <a:lnTo>
+                    <a:pt x="3581126" y="2547516"/>
+                  </a:lnTo>
+                  <a:lnTo>
+                    <a:pt x="3652748" y="2511219"/>
+                  </a:lnTo>
+                  <a:lnTo>
+                    <a:pt x="3724371" y="2473730"/>
+                  </a:lnTo>
+                  <a:lnTo>
+                    <a:pt x="3795993" y="2435009"/>
+                  </a:lnTo>
+                  <a:lnTo>
+                    <a:pt x="3867616" y="2395017"/>
+                  </a:lnTo>
+                  <a:lnTo>
+                    <a:pt x="3939238" y="2353711"/>
+                  </a:lnTo>
+                  <a:lnTo>
+                    <a:pt x="4010861" y="2311049"/>
+                  </a:lnTo>
+                  <a:lnTo>
+                    <a:pt x="4082483" y="2266986"/>
+                  </a:lnTo>
+                  <a:lnTo>
+                    <a:pt x="4154106" y="2221475"/>
+                  </a:lnTo>
+                  <a:lnTo>
+                    <a:pt x="4225729" y="2174469"/>
+                  </a:lnTo>
+                  <a:lnTo>
+                    <a:pt x="4297351" y="2125920"/>
+                  </a:lnTo>
+                  <a:lnTo>
+                    <a:pt x="4368974" y="2075776"/>
+                  </a:lnTo>
+                  <a:lnTo>
+                    <a:pt x="4440596" y="2023985"/>
+                  </a:lnTo>
+                  <a:lnTo>
+                    <a:pt x="4512219" y="1970493"/>
+                  </a:lnTo>
+                  <a:lnTo>
+                    <a:pt x="4583841" y="1915245"/>
+                  </a:lnTo>
+                  <a:lnTo>
+                    <a:pt x="4655464" y="1858181"/>
+                  </a:lnTo>
+                  <a:lnTo>
+                    <a:pt x="4727086" y="1799244"/>
+                  </a:lnTo>
+                  <a:lnTo>
+                    <a:pt x="4798709" y="1738370"/>
+                  </a:lnTo>
+                  <a:lnTo>
+                    <a:pt x="4870331" y="1675498"/>
+                  </a:lnTo>
+                  <a:lnTo>
+                    <a:pt x="4941954" y="1610560"/>
+                  </a:lnTo>
+                  <a:lnTo>
+                    <a:pt x="5013576" y="1543490"/>
+                  </a:lnTo>
+                  <a:lnTo>
+                    <a:pt x="5085199" y="1474216"/>
+                  </a:lnTo>
+                  <a:lnTo>
+                    <a:pt x="5156821" y="1402668"/>
+                  </a:lnTo>
+                  <a:lnTo>
+                    <a:pt x="5228444" y="1328769"/>
+                  </a:lnTo>
+                  <a:lnTo>
+                    <a:pt x="5300066" y="1252444"/>
+                  </a:lnTo>
+                  <a:lnTo>
+                    <a:pt x="5371689" y="1173611"/>
+                  </a:lnTo>
+                  <a:lnTo>
+                    <a:pt x="5443311" y="1092190"/>
+                  </a:lnTo>
+                  <a:lnTo>
+                    <a:pt x="5514934" y="1008094"/>
+                  </a:lnTo>
+                  <a:lnTo>
+                    <a:pt x="5586557" y="921236"/>
+                  </a:lnTo>
+                  <a:lnTo>
+                    <a:pt x="5658179" y="831525"/>
+                  </a:lnTo>
+                  <a:lnTo>
+                    <a:pt x="5729802" y="738868"/>
+                  </a:lnTo>
+                  <a:lnTo>
+                    <a:pt x="5801424" y="643167"/>
+                  </a:lnTo>
+                  <a:lnTo>
+                    <a:pt x="5873047" y="544324"/>
+                  </a:lnTo>
+                  <a:lnTo>
+                    <a:pt x="5944669" y="442234"/>
+                  </a:lnTo>
+                  <a:lnTo>
+                    <a:pt x="6016292" y="336791"/>
+                  </a:lnTo>
+                  <a:lnTo>
+                    <a:pt x="6087914" y="227884"/>
+                  </a:lnTo>
+                  <a:lnTo>
+                    <a:pt x="6159537" y="115401"/>
+                  </a:lnTo>
+                  <a:lnTo>
+                    <a:pt x="6230681" y="0"/>
                   </a:lnTo>
                 </a:path>
               </a:pathLst>
@@ -3994,312 +4018,312 @@
           </p:nvSpPr>
           <p:spPr>
             <a:xfrm>
-              <a:off x="1172049" y="4679993"/>
-              <a:ext cx="7090630" cy="681600"/>
+              <a:off x="1172049" y="4681620"/>
+              <a:ext cx="7090630" cy="647965"/>
             </a:xfrm>
             <a:custGeom>
               <a:avLst/>
               <a:pathLst>
-                <a:path w="7090630" h="681600">
+                <a:path w="7090630" h="647965">
                   <a:moveTo>
-                    <a:pt x="7090630" y="60392"/>
+                    <a:pt x="7090630" y="241071"/>
                   </a:moveTo>
                   <a:lnTo>
-                    <a:pt x="7019007" y="59351"/>
-                  </a:lnTo>
-                  <a:lnTo>
-                    <a:pt x="6947385" y="58309"/>
-                  </a:lnTo>
-                  <a:lnTo>
-                    <a:pt x="6875762" y="57266"/>
-                  </a:lnTo>
-                  <a:lnTo>
-                    <a:pt x="6804139" y="56221"/>
-                  </a:lnTo>
-                  <a:lnTo>
-                    <a:pt x="6732517" y="55175"/>
-                  </a:lnTo>
-                  <a:lnTo>
-                    <a:pt x="6660894" y="54127"/>
-                  </a:lnTo>
-                  <a:lnTo>
-                    <a:pt x="6589272" y="53079"/>
-                  </a:lnTo>
-                  <a:lnTo>
-                    <a:pt x="6517649" y="52028"/>
-                  </a:lnTo>
-                  <a:lnTo>
-                    <a:pt x="6446027" y="50977"/>
-                  </a:lnTo>
-                  <a:lnTo>
-                    <a:pt x="6374404" y="49924"/>
-                  </a:lnTo>
-                  <a:lnTo>
-                    <a:pt x="6302782" y="48870"/>
-                  </a:lnTo>
-                  <a:lnTo>
-                    <a:pt x="6231159" y="47814"/>
-                  </a:lnTo>
-                  <a:lnTo>
-                    <a:pt x="6159537" y="46757"/>
-                  </a:lnTo>
-                  <a:lnTo>
-                    <a:pt x="6087914" y="45699"/>
-                  </a:lnTo>
-                  <a:lnTo>
-                    <a:pt x="6016292" y="44639"/>
-                  </a:lnTo>
-                  <a:lnTo>
-                    <a:pt x="5944669" y="43578"/>
-                  </a:lnTo>
-                  <a:lnTo>
-                    <a:pt x="5873047" y="42516"/>
-                  </a:lnTo>
-                  <a:lnTo>
-                    <a:pt x="5801424" y="41452"/>
-                  </a:lnTo>
-                  <a:lnTo>
-                    <a:pt x="5729802" y="40387"/>
-                  </a:lnTo>
-                  <a:lnTo>
-                    <a:pt x="5658179" y="39321"/>
-                  </a:lnTo>
-                  <a:lnTo>
-                    <a:pt x="5586557" y="38253"/>
-                  </a:lnTo>
-                  <a:lnTo>
-                    <a:pt x="5514934" y="37184"/>
-                  </a:lnTo>
-                  <a:lnTo>
-                    <a:pt x="5443311" y="36113"/>
-                  </a:lnTo>
-                  <a:lnTo>
-                    <a:pt x="5371689" y="35041"/>
-                  </a:lnTo>
-                  <a:lnTo>
-                    <a:pt x="5300066" y="33968"/>
-                  </a:lnTo>
-                  <a:lnTo>
-                    <a:pt x="5228444" y="32893"/>
-                  </a:lnTo>
-                  <a:lnTo>
-                    <a:pt x="5156821" y="31817"/>
-                  </a:lnTo>
-                  <a:lnTo>
-                    <a:pt x="5085199" y="30739"/>
-                  </a:lnTo>
-                  <a:lnTo>
-                    <a:pt x="5013576" y="29660"/>
-                  </a:lnTo>
-                  <a:lnTo>
-                    <a:pt x="4941954" y="28580"/>
-                  </a:lnTo>
-                  <a:lnTo>
-                    <a:pt x="4870331" y="27498"/>
-                  </a:lnTo>
-                  <a:lnTo>
-                    <a:pt x="4798709" y="26415"/>
-                  </a:lnTo>
-                  <a:lnTo>
-                    <a:pt x="4727086" y="25331"/>
-                  </a:lnTo>
-                  <a:lnTo>
-                    <a:pt x="4655464" y="24245"/>
-                  </a:lnTo>
-                  <a:lnTo>
-                    <a:pt x="4583841" y="23158"/>
-                  </a:lnTo>
-                  <a:lnTo>
-                    <a:pt x="4512219" y="22069"/>
-                  </a:lnTo>
-                  <a:lnTo>
-                    <a:pt x="4440596" y="20979"/>
-                  </a:lnTo>
-                  <a:lnTo>
-                    <a:pt x="4368974" y="19888"/>
-                  </a:lnTo>
-                  <a:lnTo>
-                    <a:pt x="4297351" y="18795"/>
-                  </a:lnTo>
-                  <a:lnTo>
-                    <a:pt x="4225729" y="17701"/>
-                  </a:lnTo>
-                  <a:lnTo>
-                    <a:pt x="4154106" y="16605"/>
-                  </a:lnTo>
-                  <a:lnTo>
-                    <a:pt x="4082483" y="15508"/>
-                  </a:lnTo>
-                  <a:lnTo>
-                    <a:pt x="4010861" y="14409"/>
-                  </a:lnTo>
-                  <a:lnTo>
-                    <a:pt x="3939238" y="13309"/>
-                  </a:lnTo>
-                  <a:lnTo>
-                    <a:pt x="3867616" y="12208"/>
-                  </a:lnTo>
-                  <a:lnTo>
-                    <a:pt x="3795993" y="11105"/>
-                  </a:lnTo>
-                  <a:lnTo>
-                    <a:pt x="3724371" y="10001"/>
-                  </a:lnTo>
-                  <a:lnTo>
-                    <a:pt x="3652748" y="8896"/>
-                  </a:lnTo>
-                  <a:lnTo>
-                    <a:pt x="3581126" y="7789"/>
-                  </a:lnTo>
-                  <a:lnTo>
-                    <a:pt x="3509503" y="6680"/>
-                  </a:lnTo>
-                  <a:lnTo>
-                    <a:pt x="3437881" y="5570"/>
-                  </a:lnTo>
-                  <a:lnTo>
-                    <a:pt x="3366258" y="4459"/>
-                  </a:lnTo>
-                  <a:lnTo>
-                    <a:pt x="3294636" y="3346"/>
-                  </a:lnTo>
-                  <a:lnTo>
-                    <a:pt x="3223013" y="2232"/>
-                  </a:lnTo>
-                  <a:lnTo>
-                    <a:pt x="3151391" y="1117"/>
+                    <a:pt x="7019007" y="237418"/>
+                  </a:lnTo>
+                  <a:lnTo>
+                    <a:pt x="6947385" y="233744"/>
+                  </a:lnTo>
+                  <a:lnTo>
+                    <a:pt x="6875762" y="230049"/>
+                  </a:lnTo>
+                  <a:lnTo>
+                    <a:pt x="6804139" y="226332"/>
+                  </a:lnTo>
+                  <a:lnTo>
+                    <a:pt x="6732517" y="222593"/>
+                  </a:lnTo>
+                  <a:lnTo>
+                    <a:pt x="6660894" y="218832"/>
+                  </a:lnTo>
+                  <a:lnTo>
+                    <a:pt x="6589272" y="215050"/>
+                  </a:lnTo>
+                  <a:lnTo>
+                    <a:pt x="6517649" y="211246"/>
+                  </a:lnTo>
+                  <a:lnTo>
+                    <a:pt x="6446027" y="207419"/>
+                  </a:lnTo>
+                  <a:lnTo>
+                    <a:pt x="6374404" y="203570"/>
+                  </a:lnTo>
+                  <a:lnTo>
+                    <a:pt x="6302782" y="199699"/>
+                  </a:lnTo>
+                  <a:lnTo>
+                    <a:pt x="6231159" y="195805"/>
+                  </a:lnTo>
+                  <a:lnTo>
+                    <a:pt x="6159537" y="191888"/>
+                  </a:lnTo>
+                  <a:lnTo>
+                    <a:pt x="6087914" y="187949"/>
+                  </a:lnTo>
+                  <a:lnTo>
+                    <a:pt x="6016292" y="183987"/>
+                  </a:lnTo>
+                  <a:lnTo>
+                    <a:pt x="5944669" y="180001"/>
+                  </a:lnTo>
+                  <a:lnTo>
+                    <a:pt x="5873047" y="175992"/>
+                  </a:lnTo>
+                  <a:lnTo>
+                    <a:pt x="5801424" y="171960"/>
+                  </a:lnTo>
+                  <a:lnTo>
+                    <a:pt x="5729802" y="167905"/>
+                  </a:lnTo>
+                  <a:lnTo>
+                    <a:pt x="5658179" y="163825"/>
+                  </a:lnTo>
+                  <a:lnTo>
+                    <a:pt x="5586557" y="159722"/>
+                  </a:lnTo>
+                  <a:lnTo>
+                    <a:pt x="5514934" y="155595"/>
+                  </a:lnTo>
+                  <a:lnTo>
+                    <a:pt x="5443311" y="151444"/>
+                  </a:lnTo>
+                  <a:lnTo>
+                    <a:pt x="5371689" y="147269"/>
+                  </a:lnTo>
+                  <a:lnTo>
+                    <a:pt x="5300066" y="143069"/>
+                  </a:lnTo>
+                  <a:lnTo>
+                    <a:pt x="5228444" y="138845"/>
+                  </a:lnTo>
+                  <a:lnTo>
+                    <a:pt x="5156821" y="134597"/>
+                  </a:lnTo>
+                  <a:lnTo>
+                    <a:pt x="5085199" y="130323"/>
+                  </a:lnTo>
+                  <a:lnTo>
+                    <a:pt x="5013576" y="126025"/>
+                  </a:lnTo>
+                  <a:lnTo>
+                    <a:pt x="4941954" y="121701"/>
+                  </a:lnTo>
+                  <a:lnTo>
+                    <a:pt x="4870331" y="117353"/>
+                  </a:lnTo>
+                  <a:lnTo>
+                    <a:pt x="4798709" y="112979"/>
+                  </a:lnTo>
+                  <a:lnTo>
+                    <a:pt x="4727086" y="108579"/>
+                  </a:lnTo>
+                  <a:lnTo>
+                    <a:pt x="4655464" y="104154"/>
+                  </a:lnTo>
+                  <a:lnTo>
+                    <a:pt x="4583841" y="99703"/>
+                  </a:lnTo>
+                  <a:lnTo>
+                    <a:pt x="4512219" y="95226"/>
+                  </a:lnTo>
+                  <a:lnTo>
+                    <a:pt x="4440596" y="90723"/>
+                  </a:lnTo>
+                  <a:lnTo>
+                    <a:pt x="4368974" y="86194"/>
+                  </a:lnTo>
+                  <a:lnTo>
+                    <a:pt x="4297351" y="81638"/>
+                  </a:lnTo>
+                  <a:lnTo>
+                    <a:pt x="4225729" y="77056"/>
+                  </a:lnTo>
+                  <a:lnTo>
+                    <a:pt x="4154106" y="72447"/>
+                  </a:lnTo>
+                  <a:lnTo>
+                    <a:pt x="4082483" y="67812"/>
+                  </a:lnTo>
+                  <a:lnTo>
+                    <a:pt x="4010861" y="63149"/>
+                  </a:lnTo>
+                  <a:lnTo>
+                    <a:pt x="3939238" y="58459"/>
+                  </a:lnTo>
+                  <a:lnTo>
+                    <a:pt x="3867616" y="53741"/>
+                  </a:lnTo>
+                  <a:lnTo>
+                    <a:pt x="3795993" y="48996"/>
+                  </a:lnTo>
+                  <a:lnTo>
+                    <a:pt x="3724371" y="44224"/>
+                  </a:lnTo>
+                  <a:lnTo>
+                    <a:pt x="3652748" y="39424"/>
+                  </a:lnTo>
+                  <a:lnTo>
+                    <a:pt x="3581126" y="34595"/>
+                  </a:lnTo>
+                  <a:lnTo>
+                    <a:pt x="3509503" y="29739"/>
+                  </a:lnTo>
+                  <a:lnTo>
+                    <a:pt x="3437881" y="24854"/>
+                  </a:lnTo>
+                  <a:lnTo>
+                    <a:pt x="3366258" y="19941"/>
+                  </a:lnTo>
+                  <a:lnTo>
+                    <a:pt x="3294636" y="14999"/>
+                  </a:lnTo>
+                  <a:lnTo>
+                    <a:pt x="3223013" y="10028"/>
+                  </a:lnTo>
+                  <a:lnTo>
+                    <a:pt x="3151391" y="5028"/>
                   </a:lnTo>
                   <a:lnTo>
                     <a:pt x="3079768" y="0"/>
                   </a:lnTo>
                   <a:lnTo>
-                    <a:pt x="3008146" y="17698"/>
-                  </a:lnTo>
-                  <a:lnTo>
-                    <a:pt x="2936523" y="47819"/>
-                  </a:lnTo>
-                  <a:lnTo>
-                    <a:pt x="2864901" y="76876"/>
-                  </a:lnTo>
-                  <a:lnTo>
-                    <a:pt x="2793278" y="104904"/>
-                  </a:lnTo>
-                  <a:lnTo>
-                    <a:pt x="2721655" y="131941"/>
-                  </a:lnTo>
-                  <a:lnTo>
-                    <a:pt x="2650033" y="158021"/>
-                  </a:lnTo>
-                  <a:lnTo>
-                    <a:pt x="2578410" y="183179"/>
-                  </a:lnTo>
-                  <a:lnTo>
-                    <a:pt x="2506788" y="207447"/>
-                  </a:lnTo>
-                  <a:lnTo>
-                    <a:pt x="2435165" y="230857"/>
-                  </a:lnTo>
-                  <a:lnTo>
-                    <a:pt x="2363543" y="253438"/>
-                  </a:lnTo>
-                  <a:lnTo>
-                    <a:pt x="2291920" y="275221"/>
-                  </a:lnTo>
-                  <a:lnTo>
-                    <a:pt x="2220298" y="296233"/>
-                  </a:lnTo>
-                  <a:lnTo>
-                    <a:pt x="2148675" y="316502"/>
-                  </a:lnTo>
-                  <a:lnTo>
-                    <a:pt x="2077053" y="336054"/>
-                  </a:lnTo>
-                  <a:lnTo>
-                    <a:pt x="2005430" y="354914"/>
-                  </a:lnTo>
-                  <a:lnTo>
-                    <a:pt x="1933808" y="373107"/>
-                  </a:lnTo>
-                  <a:lnTo>
-                    <a:pt x="1862185" y="390656"/>
-                  </a:lnTo>
-                  <a:lnTo>
-                    <a:pt x="1790563" y="407585"/>
-                  </a:lnTo>
-                  <a:lnTo>
-                    <a:pt x="1718940" y="423915"/>
-                  </a:lnTo>
-                  <a:lnTo>
-                    <a:pt x="1647318" y="439667"/>
-                  </a:lnTo>
-                  <a:lnTo>
-                    <a:pt x="1575695" y="454862"/>
-                  </a:lnTo>
-                  <a:lnTo>
-                    <a:pt x="1504073" y="469519"/>
-                  </a:lnTo>
-                  <a:lnTo>
-                    <a:pt x="1432450" y="483658"/>
-                  </a:lnTo>
-                  <a:lnTo>
-                    <a:pt x="1360827" y="497297"/>
-                  </a:lnTo>
-                  <a:lnTo>
-                    <a:pt x="1289205" y="510453"/>
-                  </a:lnTo>
-                  <a:lnTo>
-                    <a:pt x="1217582" y="523144"/>
-                  </a:lnTo>
-                  <a:lnTo>
-                    <a:pt x="1145960" y="535386"/>
-                  </a:lnTo>
-                  <a:lnTo>
-                    <a:pt x="1074337" y="547195"/>
-                  </a:lnTo>
-                  <a:lnTo>
-                    <a:pt x="1002715" y="558586"/>
-                  </a:lnTo>
-                  <a:lnTo>
-                    <a:pt x="931092" y="569574"/>
-                  </a:lnTo>
-                  <a:lnTo>
-                    <a:pt x="859470" y="580174"/>
-                  </a:lnTo>
-                  <a:lnTo>
-                    <a:pt x="787847" y="590398"/>
-                  </a:lnTo>
-                  <a:lnTo>
-                    <a:pt x="716225" y="600261"/>
-                  </a:lnTo>
-                  <a:lnTo>
-                    <a:pt x="644602" y="609775"/>
-                  </a:lnTo>
-                  <a:lnTo>
-                    <a:pt x="572980" y="618953"/>
-                  </a:lnTo>
-                  <a:lnTo>
-                    <a:pt x="501357" y="627805"/>
-                  </a:lnTo>
-                  <a:lnTo>
-                    <a:pt x="429735" y="636345"/>
-                  </a:lnTo>
-                  <a:lnTo>
-                    <a:pt x="358112" y="644583"/>
-                  </a:lnTo>
-                  <a:lnTo>
-                    <a:pt x="286490" y="652529"/>
-                  </a:lnTo>
-                  <a:lnTo>
-                    <a:pt x="214867" y="660194"/>
-                  </a:lnTo>
-                  <a:lnTo>
-                    <a:pt x="143245" y="667588"/>
-                  </a:lnTo>
-                  <a:lnTo>
-                    <a:pt x="71622" y="674720"/>
-                  </a:lnTo>
-                  <a:lnTo>
-                    <a:pt x="0" y="681600"/>
+                    <a:pt x="3008146" y="14222"/>
+                  </a:lnTo>
+                  <a:lnTo>
+                    <a:pt x="2936523" y="41359"/>
+                  </a:lnTo>
+                  <a:lnTo>
+                    <a:pt x="2864901" y="67633"/>
+                  </a:lnTo>
+                  <a:lnTo>
+                    <a:pt x="2793278" y="93071"/>
+                  </a:lnTo>
+                  <a:lnTo>
+                    <a:pt x="2721655" y="117700"/>
+                  </a:lnTo>
+                  <a:lnTo>
+                    <a:pt x="2650033" y="141546"/>
+                  </a:lnTo>
+                  <a:lnTo>
+                    <a:pt x="2578410" y="164634"/>
+                  </a:lnTo>
+                  <a:lnTo>
+                    <a:pt x="2506788" y="186988"/>
+                  </a:lnTo>
+                  <a:lnTo>
+                    <a:pt x="2435165" y="208631"/>
+                  </a:lnTo>
+                  <a:lnTo>
+                    <a:pt x="2363543" y="229585"/>
+                  </a:lnTo>
+                  <a:lnTo>
+                    <a:pt x="2291920" y="249874"/>
+                  </a:lnTo>
+                  <a:lnTo>
+                    <a:pt x="2220298" y="269517"/>
+                  </a:lnTo>
+                  <a:lnTo>
+                    <a:pt x="2148675" y="288535"/>
+                  </a:lnTo>
+                  <a:lnTo>
+                    <a:pt x="2077053" y="306949"/>
+                  </a:lnTo>
+                  <a:lnTo>
+                    <a:pt x="2005430" y="324777"/>
+                  </a:lnTo>
+                  <a:lnTo>
+                    <a:pt x="1933808" y="342038"/>
+                  </a:lnTo>
+                  <a:lnTo>
+                    <a:pt x="1862185" y="358750"/>
+                  </a:lnTo>
+                  <a:lnTo>
+                    <a:pt x="1790563" y="374931"/>
+                  </a:lnTo>
+                  <a:lnTo>
+                    <a:pt x="1718940" y="390597"/>
+                  </a:lnTo>
+                  <a:lnTo>
+                    <a:pt x="1647318" y="405765"/>
+                  </a:lnTo>
+                  <a:lnTo>
+                    <a:pt x="1575695" y="420451"/>
+                  </a:lnTo>
+                  <a:lnTo>
+                    <a:pt x="1504073" y="434670"/>
+                  </a:lnTo>
+                  <a:lnTo>
+                    <a:pt x="1432450" y="448437"/>
+                  </a:lnTo>
+                  <a:lnTo>
+                    <a:pt x="1360827" y="461765"/>
+                  </a:lnTo>
+                  <a:lnTo>
+                    <a:pt x="1289205" y="474670"/>
+                  </a:lnTo>
+                  <a:lnTo>
+                    <a:pt x="1217582" y="487165"/>
+                  </a:lnTo>
+                  <a:lnTo>
+                    <a:pt x="1145960" y="499262"/>
+                  </a:lnTo>
+                  <a:lnTo>
+                    <a:pt x="1074337" y="510975"/>
+                  </a:lnTo>
+                  <a:lnTo>
+                    <a:pt x="1002715" y="522315"/>
+                  </a:lnTo>
+                  <a:lnTo>
+                    <a:pt x="931092" y="533294"/>
+                  </a:lnTo>
+                  <a:lnTo>
+                    <a:pt x="859470" y="543925"/>
+                  </a:lnTo>
+                  <a:lnTo>
+                    <a:pt x="787847" y="554217"/>
+                  </a:lnTo>
+                  <a:lnTo>
+                    <a:pt x="716225" y="564182"/>
+                  </a:lnTo>
+                  <a:lnTo>
+                    <a:pt x="644602" y="573830"/>
+                  </a:lnTo>
+                  <a:lnTo>
+                    <a:pt x="572980" y="583172"/>
+                  </a:lnTo>
+                  <a:lnTo>
+                    <a:pt x="501357" y="592216"/>
+                  </a:lnTo>
+                  <a:lnTo>
+                    <a:pt x="429735" y="600973"/>
+                  </a:lnTo>
+                  <a:lnTo>
+                    <a:pt x="358112" y="609451"/>
+                  </a:lnTo>
+                  <a:lnTo>
+                    <a:pt x="286490" y="617659"/>
+                  </a:lnTo>
+                  <a:lnTo>
+                    <a:pt x="214867" y="625607"/>
+                  </a:lnTo>
+                  <a:lnTo>
+                    <a:pt x="143245" y="633302"/>
+                  </a:lnTo>
+                  <a:lnTo>
+                    <a:pt x="71622" y="640752"/>
+                  </a:lnTo>
+                  <a:lnTo>
+                    <a:pt x="0" y="647965"/>
                   </a:lnTo>
                 </a:path>
               </a:pathLst>
@@ -4319,309 +4343,309 @@
           </p:nvSpPr>
           <p:spPr>
             <a:xfrm>
-              <a:off x="1172049" y="3232900"/>
-              <a:ext cx="7090630" cy="1901159"/>
+              <a:off x="1172049" y="3712565"/>
+              <a:ext cx="7090630" cy="1342019"/>
             </a:xfrm>
             <a:custGeom>
               <a:avLst/>
               <a:pathLst>
-                <a:path w="7090630" h="1901159">
+                <a:path w="7090630" h="1342019">
                   <a:moveTo>
-                    <a:pt x="0" y="1901159"/>
+                    <a:pt x="0" y="1342019"/>
                   </a:moveTo>
                   <a:lnTo>
-                    <a:pt x="71622" y="1893887"/>
-                  </a:lnTo>
-                  <a:lnTo>
-                    <a:pt x="143245" y="1886488"/>
-                  </a:lnTo>
-                  <a:lnTo>
-                    <a:pt x="214867" y="1878959"/>
-                  </a:lnTo>
-                  <a:lnTo>
-                    <a:pt x="286490" y="1871298"/>
-                  </a:lnTo>
-                  <a:lnTo>
-                    <a:pt x="358112" y="1863503"/>
-                  </a:lnTo>
-                  <a:lnTo>
-                    <a:pt x="429735" y="1855572"/>
-                  </a:lnTo>
-                  <a:lnTo>
-                    <a:pt x="501357" y="1847501"/>
-                  </a:lnTo>
-                  <a:lnTo>
-                    <a:pt x="572980" y="1839290"/>
-                  </a:lnTo>
-                  <a:lnTo>
-                    <a:pt x="644602" y="1830934"/>
-                  </a:lnTo>
-                  <a:lnTo>
-                    <a:pt x="716225" y="1822432"/>
-                  </a:lnTo>
-                  <a:lnTo>
-                    <a:pt x="787847" y="1813782"/>
-                  </a:lnTo>
-                  <a:lnTo>
-                    <a:pt x="859470" y="1804979"/>
-                  </a:lnTo>
-                  <a:lnTo>
-                    <a:pt x="931092" y="1796023"/>
-                  </a:lnTo>
-                  <a:lnTo>
-                    <a:pt x="1002715" y="1786909"/>
-                  </a:lnTo>
-                  <a:lnTo>
-                    <a:pt x="1074337" y="1777636"/>
-                  </a:lnTo>
-                  <a:lnTo>
-                    <a:pt x="1145960" y="1768201"/>
-                  </a:lnTo>
-                  <a:lnTo>
-                    <a:pt x="1217582" y="1758600"/>
-                  </a:lnTo>
-                  <a:lnTo>
-                    <a:pt x="1289205" y="1748831"/>
-                  </a:lnTo>
-                  <a:lnTo>
-                    <a:pt x="1360827" y="1738891"/>
-                  </a:lnTo>
-                  <a:lnTo>
-                    <a:pt x="1432450" y="1728777"/>
-                  </a:lnTo>
-                  <a:lnTo>
-                    <a:pt x="1504073" y="1718486"/>
-                  </a:lnTo>
-                  <a:lnTo>
-                    <a:pt x="1575695" y="1708014"/>
-                  </a:lnTo>
-                  <a:lnTo>
-                    <a:pt x="1647318" y="1697359"/>
-                  </a:lnTo>
-                  <a:lnTo>
-                    <a:pt x="1718940" y="1686517"/>
-                  </a:lnTo>
-                  <a:lnTo>
-                    <a:pt x="1790563" y="1675486"/>
-                  </a:lnTo>
-                  <a:lnTo>
-                    <a:pt x="1862185" y="1664261"/>
-                  </a:lnTo>
-                  <a:lnTo>
-                    <a:pt x="1933808" y="1652840"/>
-                  </a:lnTo>
-                  <a:lnTo>
-                    <a:pt x="2005430" y="1641218"/>
-                  </a:lnTo>
-                  <a:lnTo>
-                    <a:pt x="2077053" y="1629393"/>
-                  </a:lnTo>
-                  <a:lnTo>
-                    <a:pt x="2148675" y="1617361"/>
-                  </a:lnTo>
-                  <a:lnTo>
-                    <a:pt x="2220298" y="1605118"/>
-                  </a:lnTo>
-                  <a:lnTo>
-                    <a:pt x="2291920" y="1592661"/>
-                  </a:lnTo>
-                  <a:lnTo>
-                    <a:pt x="2363543" y="1579985"/>
-                  </a:lnTo>
-                  <a:lnTo>
-                    <a:pt x="2435165" y="1567088"/>
-                  </a:lnTo>
-                  <a:lnTo>
-                    <a:pt x="2506788" y="1553964"/>
-                  </a:lnTo>
-                  <a:lnTo>
-                    <a:pt x="2578410" y="1540611"/>
-                  </a:lnTo>
-                  <a:lnTo>
-                    <a:pt x="2650033" y="1527024"/>
-                  </a:lnTo>
-                  <a:lnTo>
-                    <a:pt x="2721655" y="1513199"/>
-                  </a:lnTo>
-                  <a:lnTo>
-                    <a:pt x="2793278" y="1499131"/>
-                  </a:lnTo>
-                  <a:lnTo>
-                    <a:pt x="2864901" y="1484817"/>
-                  </a:lnTo>
-                  <a:lnTo>
-                    <a:pt x="2936523" y="1470253"/>
-                  </a:lnTo>
-                  <a:lnTo>
-                    <a:pt x="3008146" y="1455433"/>
-                  </a:lnTo>
-                  <a:lnTo>
-                    <a:pt x="3079768" y="1440354"/>
-                  </a:lnTo>
-                  <a:lnTo>
-                    <a:pt x="3151391" y="1425010"/>
-                  </a:lnTo>
-                  <a:lnTo>
-                    <a:pt x="3223013" y="1409398"/>
-                  </a:lnTo>
-                  <a:lnTo>
-                    <a:pt x="3294636" y="1393513"/>
-                  </a:lnTo>
-                  <a:lnTo>
-                    <a:pt x="3366258" y="1377349"/>
-                  </a:lnTo>
-                  <a:lnTo>
-                    <a:pt x="3437881" y="1360902"/>
-                  </a:lnTo>
-                  <a:lnTo>
-                    <a:pt x="3509503" y="1344167"/>
-                  </a:lnTo>
-                  <a:lnTo>
-                    <a:pt x="3581126" y="1327138"/>
-                  </a:lnTo>
-                  <a:lnTo>
-                    <a:pt x="3652748" y="1309812"/>
-                  </a:lnTo>
-                  <a:lnTo>
-                    <a:pt x="3724371" y="1292182"/>
-                  </a:lnTo>
-                  <a:lnTo>
-                    <a:pt x="3795993" y="1274243"/>
-                  </a:lnTo>
-                  <a:lnTo>
-                    <a:pt x="3867616" y="1255990"/>
-                  </a:lnTo>
-                  <a:lnTo>
-                    <a:pt x="3939238" y="1237417"/>
-                  </a:lnTo>
-                  <a:lnTo>
-                    <a:pt x="4010861" y="1218519"/>
-                  </a:lnTo>
-                  <a:lnTo>
-                    <a:pt x="4082483" y="1199290"/>
-                  </a:lnTo>
-                  <a:lnTo>
-                    <a:pt x="4154106" y="1179724"/>
-                  </a:lnTo>
-                  <a:lnTo>
-                    <a:pt x="4225729" y="1159816"/>
-                  </a:lnTo>
-                  <a:lnTo>
-                    <a:pt x="4297351" y="1139558"/>
-                  </a:lnTo>
-                  <a:lnTo>
-                    <a:pt x="4368974" y="1118946"/>
-                  </a:lnTo>
-                  <a:lnTo>
-                    <a:pt x="4440596" y="1097973"/>
-                  </a:lnTo>
-                  <a:lnTo>
-                    <a:pt x="4512219" y="1076632"/>
-                  </a:lnTo>
-                  <a:lnTo>
-                    <a:pt x="4583841" y="1054918"/>
-                  </a:lnTo>
-                  <a:lnTo>
-                    <a:pt x="4655464" y="1032823"/>
-                  </a:lnTo>
-                  <a:lnTo>
-                    <a:pt x="4727086" y="1010341"/>
-                  </a:lnTo>
-                  <a:lnTo>
-                    <a:pt x="4798709" y="987466"/>
-                  </a:lnTo>
-                  <a:lnTo>
-                    <a:pt x="4870331" y="964189"/>
-                  </a:lnTo>
-                  <a:lnTo>
-                    <a:pt x="4941954" y="940505"/>
-                  </a:lnTo>
-                  <a:lnTo>
-                    <a:pt x="5013576" y="916406"/>
-                  </a:lnTo>
-                  <a:lnTo>
-                    <a:pt x="5085199" y="891885"/>
-                  </a:lnTo>
-                  <a:lnTo>
-                    <a:pt x="5156821" y="866935"/>
-                  </a:lnTo>
-                  <a:lnTo>
-                    <a:pt x="5228444" y="841547"/>
-                  </a:lnTo>
-                  <a:lnTo>
-                    <a:pt x="5300066" y="815715"/>
-                  </a:lnTo>
-                  <a:lnTo>
-                    <a:pt x="5371689" y="789431"/>
-                  </a:lnTo>
-                  <a:lnTo>
-                    <a:pt x="5443311" y="762685"/>
-                  </a:lnTo>
-                  <a:lnTo>
-                    <a:pt x="5514934" y="735472"/>
-                  </a:lnTo>
-                  <a:lnTo>
-                    <a:pt x="5586557" y="707782"/>
-                  </a:lnTo>
-                  <a:lnTo>
-                    <a:pt x="5658179" y="679606"/>
-                  </a:lnTo>
-                  <a:lnTo>
-                    <a:pt x="5729802" y="650937"/>
-                  </a:lnTo>
-                  <a:lnTo>
-                    <a:pt x="5801424" y="621766"/>
-                  </a:lnTo>
-                  <a:lnTo>
-                    <a:pt x="5873047" y="592084"/>
-                  </a:lnTo>
-                  <a:lnTo>
-                    <a:pt x="5944669" y="561883"/>
-                  </a:lnTo>
-                  <a:lnTo>
-                    <a:pt x="6016292" y="531152"/>
-                  </a:lnTo>
-                  <a:lnTo>
-                    <a:pt x="6087914" y="499882"/>
-                  </a:lnTo>
-                  <a:lnTo>
-                    <a:pt x="6159537" y="468066"/>
-                  </a:lnTo>
-                  <a:lnTo>
-                    <a:pt x="6231159" y="435691"/>
-                  </a:lnTo>
-                  <a:lnTo>
-                    <a:pt x="6302782" y="402750"/>
-                  </a:lnTo>
-                  <a:lnTo>
-                    <a:pt x="6374404" y="369232"/>
-                  </a:lnTo>
-                  <a:lnTo>
-                    <a:pt x="6446027" y="335126"/>
-                  </a:lnTo>
-                  <a:lnTo>
-                    <a:pt x="6517649" y="300423"/>
-                  </a:lnTo>
-                  <a:lnTo>
-                    <a:pt x="6589272" y="265113"/>
-                  </a:lnTo>
-                  <a:lnTo>
-                    <a:pt x="6660894" y="229184"/>
-                  </a:lnTo>
-                  <a:lnTo>
-                    <a:pt x="6732517" y="192625"/>
-                  </a:lnTo>
-                  <a:lnTo>
-                    <a:pt x="6804139" y="155426"/>
-                  </a:lnTo>
-                  <a:lnTo>
-                    <a:pt x="6875762" y="117576"/>
-                  </a:lnTo>
-                  <a:lnTo>
-                    <a:pt x="6947385" y="79062"/>
-                  </a:lnTo>
-                  <a:lnTo>
-                    <a:pt x="7019007" y="39874"/>
+                    <a:pt x="71622" y="1335421"/>
+                  </a:lnTo>
+                  <a:lnTo>
+                    <a:pt x="143245" y="1328735"/>
+                  </a:lnTo>
+                  <a:lnTo>
+                    <a:pt x="214867" y="1321960"/>
+                  </a:lnTo>
+                  <a:lnTo>
+                    <a:pt x="286490" y="1315094"/>
+                  </a:lnTo>
+                  <a:lnTo>
+                    <a:pt x="358112" y="1308137"/>
+                  </a:lnTo>
+                  <a:lnTo>
+                    <a:pt x="429735" y="1301087"/>
+                  </a:lnTo>
+                  <a:lnTo>
+                    <a:pt x="501357" y="1293942"/>
+                  </a:lnTo>
+                  <a:lnTo>
+                    <a:pt x="572980" y="1286703"/>
+                  </a:lnTo>
+                  <a:lnTo>
+                    <a:pt x="644602" y="1279367"/>
+                  </a:lnTo>
+                  <a:lnTo>
+                    <a:pt x="716225" y="1271933"/>
+                  </a:lnTo>
+                  <a:lnTo>
+                    <a:pt x="787847" y="1264400"/>
+                  </a:lnTo>
+                  <a:lnTo>
+                    <a:pt x="859470" y="1256767"/>
+                  </a:lnTo>
+                  <a:lnTo>
+                    <a:pt x="931092" y="1249031"/>
+                  </a:lnTo>
+                  <a:lnTo>
+                    <a:pt x="1002715" y="1241193"/>
+                  </a:lnTo>
+                  <a:lnTo>
+                    <a:pt x="1074337" y="1233250"/>
+                  </a:lnTo>
+                  <a:lnTo>
+                    <a:pt x="1145960" y="1225200"/>
+                  </a:lnTo>
+                  <a:lnTo>
+                    <a:pt x="1217582" y="1217044"/>
+                  </a:lnTo>
+                  <a:lnTo>
+                    <a:pt x="1289205" y="1208779"/>
+                  </a:lnTo>
+                  <a:lnTo>
+                    <a:pt x="1360827" y="1200403"/>
+                  </a:lnTo>
+                  <a:lnTo>
+                    <a:pt x="1432450" y="1191916"/>
+                  </a:lnTo>
+                  <a:lnTo>
+                    <a:pt x="1504073" y="1183316"/>
+                  </a:lnTo>
+                  <a:lnTo>
+                    <a:pt x="1575695" y="1174600"/>
+                  </a:lnTo>
+                  <a:lnTo>
+                    <a:pt x="1647318" y="1165769"/>
+                  </a:lnTo>
+                  <a:lnTo>
+                    <a:pt x="1718940" y="1156820"/>
+                  </a:lnTo>
+                  <a:lnTo>
+                    <a:pt x="1790563" y="1147751"/>
+                  </a:lnTo>
+                  <a:lnTo>
+                    <a:pt x="1862185" y="1138562"/>
+                  </a:lnTo>
+                  <a:lnTo>
+                    <a:pt x="1933808" y="1129249"/>
+                  </a:lnTo>
+                  <a:lnTo>
+                    <a:pt x="2005430" y="1119813"/>
+                  </a:lnTo>
+                  <a:lnTo>
+                    <a:pt x="2077053" y="1110251"/>
+                  </a:lnTo>
+                  <a:lnTo>
+                    <a:pt x="2148675" y="1100561"/>
+                  </a:lnTo>
+                  <a:lnTo>
+                    <a:pt x="2220298" y="1090742"/>
+                  </a:lnTo>
+                  <a:lnTo>
+                    <a:pt x="2291920" y="1080792"/>
+                  </a:lnTo>
+                  <a:lnTo>
+                    <a:pt x="2363543" y="1070709"/>
+                  </a:lnTo>
+                  <a:lnTo>
+                    <a:pt x="2435165" y="1060492"/>
+                  </a:lnTo>
+                  <a:lnTo>
+                    <a:pt x="2506788" y="1050138"/>
+                  </a:lnTo>
+                  <a:lnTo>
+                    <a:pt x="2578410" y="1039646"/>
+                  </a:lnTo>
+                  <a:lnTo>
+                    <a:pt x="2650033" y="1029015"/>
+                  </a:lnTo>
+                  <a:lnTo>
+                    <a:pt x="2721655" y="1018241"/>
+                  </a:lnTo>
+                  <a:lnTo>
+                    <a:pt x="2793278" y="1007324"/>
+                  </a:lnTo>
+                  <a:lnTo>
+                    <a:pt x="2864901" y="996261"/>
+                  </a:lnTo>
+                  <a:lnTo>
+                    <a:pt x="2936523" y="985051"/>
+                  </a:lnTo>
+                  <a:lnTo>
+                    <a:pt x="3008146" y="973691"/>
+                  </a:lnTo>
+                  <a:lnTo>
+                    <a:pt x="3079768" y="962179"/>
+                  </a:lnTo>
+                  <a:lnTo>
+                    <a:pt x="3151391" y="950514"/>
+                  </a:lnTo>
+                  <a:lnTo>
+                    <a:pt x="3223013" y="938693"/>
+                  </a:lnTo>
+                  <a:lnTo>
+                    <a:pt x="3294636" y="926715"/>
+                  </a:lnTo>
+                  <a:lnTo>
+                    <a:pt x="3366258" y="914577"/>
+                  </a:lnTo>
+                  <a:lnTo>
+                    <a:pt x="3437881" y="902277"/>
+                  </a:lnTo>
+                  <a:lnTo>
+                    <a:pt x="3509503" y="889813"/>
+                  </a:lnTo>
+                  <a:lnTo>
+                    <a:pt x="3581126" y="877182"/>
+                  </a:lnTo>
+                  <a:lnTo>
+                    <a:pt x="3652748" y="864383"/>
+                  </a:lnTo>
+                  <a:lnTo>
+                    <a:pt x="3724371" y="851414"/>
+                  </a:lnTo>
+                  <a:lnTo>
+                    <a:pt x="3795993" y="838271"/>
+                  </a:lnTo>
+                  <a:lnTo>
+                    <a:pt x="3867616" y="824953"/>
+                  </a:lnTo>
+                  <a:lnTo>
+                    <a:pt x="3939238" y="811457"/>
+                  </a:lnTo>
+                  <a:lnTo>
+                    <a:pt x="4010861" y="797782"/>
+                  </a:lnTo>
+                  <a:lnTo>
+                    <a:pt x="4082483" y="783924"/>
+                  </a:lnTo>
+                  <a:lnTo>
+                    <a:pt x="4154106" y="769881"/>
+                  </a:lnTo>
+                  <a:lnTo>
+                    <a:pt x="4225729" y="755650"/>
+                  </a:lnTo>
+                  <a:lnTo>
+                    <a:pt x="4297351" y="741230"/>
+                  </a:lnTo>
+                  <a:lnTo>
+                    <a:pt x="4368974" y="726618"/>
+                  </a:lnTo>
+                  <a:lnTo>
+                    <a:pt x="4440596" y="711811"/>
+                  </a:lnTo>
+                  <a:lnTo>
+                    <a:pt x="4512219" y="696806"/>
+                  </a:lnTo>
+                  <a:lnTo>
+                    <a:pt x="4583841" y="681601"/>
+                  </a:lnTo>
+                  <a:lnTo>
+                    <a:pt x="4655464" y="666193"/>
+                  </a:lnTo>
+                  <a:lnTo>
+                    <a:pt x="4727086" y="650579"/>
+                  </a:lnTo>
+                  <a:lnTo>
+                    <a:pt x="4798709" y="634757"/>
+                  </a:lnTo>
+                  <a:lnTo>
+                    <a:pt x="4870331" y="618725"/>
+                  </a:lnTo>
+                  <a:lnTo>
+                    <a:pt x="4941954" y="602478"/>
+                  </a:lnTo>
+                  <a:lnTo>
+                    <a:pt x="5013576" y="586015"/>
+                  </a:lnTo>
+                  <a:lnTo>
+                    <a:pt x="5085199" y="569332"/>
+                  </a:lnTo>
+                  <a:lnTo>
+                    <a:pt x="5156821" y="552426"/>
+                  </a:lnTo>
+                  <a:lnTo>
+                    <a:pt x="5228444" y="535295"/>
+                  </a:lnTo>
+                  <a:lnTo>
+                    <a:pt x="5300066" y="517935"/>
+                  </a:lnTo>
+                  <a:lnTo>
+                    <a:pt x="5371689" y="500344"/>
+                  </a:lnTo>
+                  <a:lnTo>
+                    <a:pt x="5443311" y="482519"/>
+                  </a:lnTo>
+                  <a:lnTo>
+                    <a:pt x="5514934" y="464455"/>
+                  </a:lnTo>
+                  <a:lnTo>
+                    <a:pt x="5586557" y="446150"/>
+                  </a:lnTo>
+                  <a:lnTo>
+                    <a:pt x="5658179" y="427602"/>
+                  </a:lnTo>
+                  <a:lnTo>
+                    <a:pt x="5729802" y="408805"/>
+                  </a:lnTo>
+                  <a:lnTo>
+                    <a:pt x="5801424" y="389758"/>
+                  </a:lnTo>
+                  <a:lnTo>
+                    <a:pt x="5873047" y="370457"/>
+                  </a:lnTo>
+                  <a:lnTo>
+                    <a:pt x="5944669" y="350899"/>
+                  </a:lnTo>
+                  <a:lnTo>
+                    <a:pt x="6016292" y="331080"/>
+                  </a:lnTo>
+                  <a:lnTo>
+                    <a:pt x="6087914" y="310996"/>
+                  </a:lnTo>
+                  <a:lnTo>
+                    <a:pt x="6159537" y="290644"/>
+                  </a:lnTo>
+                  <a:lnTo>
+                    <a:pt x="6231159" y="270021"/>
+                  </a:lnTo>
+                  <a:lnTo>
+                    <a:pt x="6302782" y="249123"/>
+                  </a:lnTo>
+                  <a:lnTo>
+                    <a:pt x="6374404" y="227946"/>
+                  </a:lnTo>
+                  <a:lnTo>
+                    <a:pt x="6446027" y="206486"/>
+                  </a:lnTo>
+                  <a:lnTo>
+                    <a:pt x="6517649" y="184740"/>
+                  </a:lnTo>
+                  <a:lnTo>
+                    <a:pt x="6589272" y="162705"/>
+                  </a:lnTo>
+                  <a:lnTo>
+                    <a:pt x="6660894" y="140375"/>
+                  </a:lnTo>
+                  <a:lnTo>
+                    <a:pt x="6732517" y="117747"/>
+                  </a:lnTo>
+                  <a:lnTo>
+                    <a:pt x="6804139" y="94818"/>
+                  </a:lnTo>
+                  <a:lnTo>
+                    <a:pt x="6875762" y="71582"/>
+                  </a:lnTo>
+                  <a:lnTo>
+                    <a:pt x="6947385" y="48037"/>
+                  </a:lnTo>
+                  <a:lnTo>
+                    <a:pt x="7019007" y="24177"/>
                   </a:lnTo>
                   <a:lnTo>
                     <a:pt x="7090630" y="0"/>

--- a/docs/plots/carbo/jx_carbo_linsubhr_dosedisc_anemia2.pptx
+++ b/docs/plots/carbo/jx_carbo_linsubhr_dosedisc_anemia2.pptx
@@ -3132,578 +3132,572 @@
           <p:spPr>
             <a:xfrm>
               <a:off x="1172049" y="1896563"/>
-              <a:ext cx="7090630" cy="3433023"/>
+              <a:ext cx="7090630" cy="3451358"/>
             </a:xfrm>
             <a:custGeom>
               <a:avLst/>
               <a:pathLst>
-                <a:path w="7090630" h="3433023">
+                <a:path w="7090630" h="3451358">
                   <a:moveTo>
-                    <a:pt x="0" y="2538674"/>
+                    <a:pt x="0" y="2625624"/>
                   </a:moveTo>
                   <a:lnTo>
-                    <a:pt x="71622" y="2545131"/>
-                  </a:lnTo>
-                  <a:lnTo>
-                    <a:pt x="143245" y="2551551"/>
-                  </a:lnTo>
-                  <a:lnTo>
-                    <a:pt x="214867" y="2557933"/>
-                  </a:lnTo>
-                  <a:lnTo>
-                    <a:pt x="286490" y="2564278"/>
-                  </a:lnTo>
-                  <a:lnTo>
-                    <a:pt x="358112" y="2570587"/>
-                  </a:lnTo>
-                  <a:lnTo>
-                    <a:pt x="429735" y="2576859"/>
-                  </a:lnTo>
-                  <a:lnTo>
-                    <a:pt x="501357" y="2583095"/>
-                  </a:lnTo>
-                  <a:lnTo>
-                    <a:pt x="572980" y="2589294"/>
-                  </a:lnTo>
-                  <a:lnTo>
-                    <a:pt x="644602" y="2595458"/>
-                  </a:lnTo>
-                  <a:lnTo>
-                    <a:pt x="716225" y="2601586"/>
-                  </a:lnTo>
-                  <a:lnTo>
-                    <a:pt x="787847" y="2607678"/>
-                  </a:lnTo>
-                  <a:lnTo>
-                    <a:pt x="859470" y="2613735"/>
-                  </a:lnTo>
-                  <a:lnTo>
-                    <a:pt x="931092" y="2619757"/>
-                  </a:lnTo>
-                  <a:lnTo>
-                    <a:pt x="1002715" y="2625744"/>
-                  </a:lnTo>
-                  <a:lnTo>
-                    <a:pt x="1074337" y="2631696"/>
-                  </a:lnTo>
-                  <a:lnTo>
-                    <a:pt x="1145960" y="2637614"/>
-                  </a:lnTo>
-                  <a:lnTo>
-                    <a:pt x="1217582" y="2643497"/>
-                  </a:lnTo>
-                  <a:lnTo>
-                    <a:pt x="1289205" y="2649347"/>
-                  </a:lnTo>
-                  <a:lnTo>
-                    <a:pt x="1360827" y="2655162"/>
-                  </a:lnTo>
-                  <a:lnTo>
-                    <a:pt x="1432450" y="2660944"/>
-                  </a:lnTo>
-                  <a:lnTo>
-                    <a:pt x="1504073" y="2666692"/>
-                  </a:lnTo>
-                  <a:lnTo>
-                    <a:pt x="1575695" y="2672407"/>
-                  </a:lnTo>
-                  <a:lnTo>
-                    <a:pt x="1647318" y="2678089"/>
-                  </a:lnTo>
-                  <a:lnTo>
-                    <a:pt x="1718940" y="2683738"/>
-                  </a:lnTo>
-                  <a:lnTo>
-                    <a:pt x="1790563" y="2689354"/>
-                  </a:lnTo>
-                  <a:lnTo>
-                    <a:pt x="1862185" y="2694938"/>
-                  </a:lnTo>
-                  <a:lnTo>
-                    <a:pt x="1933808" y="2700489"/>
-                  </a:lnTo>
-                  <a:lnTo>
-                    <a:pt x="2005430" y="2706008"/>
-                  </a:lnTo>
-                  <a:lnTo>
-                    <a:pt x="2077053" y="2711495"/>
-                  </a:lnTo>
-                  <a:lnTo>
-                    <a:pt x="2148675" y="2716950"/>
-                  </a:lnTo>
-                  <a:lnTo>
-                    <a:pt x="2220298" y="2722374"/>
-                  </a:lnTo>
-                  <a:lnTo>
-                    <a:pt x="2291920" y="2727766"/>
-                  </a:lnTo>
-                  <a:lnTo>
-                    <a:pt x="2363543" y="2733127"/>
-                  </a:lnTo>
-                  <a:lnTo>
-                    <a:pt x="2435165" y="2738457"/>
-                  </a:lnTo>
-                  <a:lnTo>
-                    <a:pt x="2506788" y="2743756"/>
-                  </a:lnTo>
-                  <a:lnTo>
-                    <a:pt x="2578410" y="2749024"/>
-                  </a:lnTo>
-                  <a:lnTo>
-                    <a:pt x="2650033" y="2754262"/>
-                  </a:lnTo>
-                  <a:lnTo>
-                    <a:pt x="2721655" y="2759469"/>
-                  </a:lnTo>
-                  <a:lnTo>
-                    <a:pt x="2793278" y="2764647"/>
-                  </a:lnTo>
-                  <a:lnTo>
-                    <a:pt x="2864901" y="2769794"/>
-                  </a:lnTo>
-                  <a:lnTo>
-                    <a:pt x="2936523" y="2774911"/>
-                  </a:lnTo>
-                  <a:lnTo>
-                    <a:pt x="3008146" y="2779999"/>
-                  </a:lnTo>
-                  <a:lnTo>
-                    <a:pt x="3079768" y="2771252"/>
-                  </a:lnTo>
-                  <a:lnTo>
-                    <a:pt x="3151391" y="2742303"/>
-                  </a:lnTo>
-                  <a:lnTo>
-                    <a:pt x="3223013" y="2712404"/>
-                  </a:lnTo>
-                  <a:lnTo>
-                    <a:pt x="3294636" y="2681522"/>
-                  </a:lnTo>
-                  <a:lnTo>
-                    <a:pt x="3366258" y="2649627"/>
-                  </a:lnTo>
-                  <a:lnTo>
-                    <a:pt x="3437881" y="2616684"/>
-                  </a:lnTo>
-                  <a:lnTo>
-                    <a:pt x="3509503" y="2582658"/>
-                  </a:lnTo>
-                  <a:lnTo>
-                    <a:pt x="3581126" y="2547516"/>
-                  </a:lnTo>
-                  <a:lnTo>
-                    <a:pt x="3652748" y="2511219"/>
-                  </a:lnTo>
-                  <a:lnTo>
-                    <a:pt x="3724371" y="2473730"/>
-                  </a:lnTo>
-                  <a:lnTo>
-                    <a:pt x="3795993" y="2435009"/>
-                  </a:lnTo>
-                  <a:lnTo>
-                    <a:pt x="3867616" y="2395017"/>
-                  </a:lnTo>
-                  <a:lnTo>
-                    <a:pt x="3939238" y="2353711"/>
-                  </a:lnTo>
-                  <a:lnTo>
-                    <a:pt x="4010861" y="2311049"/>
-                  </a:lnTo>
-                  <a:lnTo>
-                    <a:pt x="4082483" y="2266986"/>
-                  </a:lnTo>
-                  <a:lnTo>
-                    <a:pt x="4154106" y="2221475"/>
-                  </a:lnTo>
-                  <a:lnTo>
-                    <a:pt x="4225729" y="2174469"/>
-                  </a:lnTo>
-                  <a:lnTo>
-                    <a:pt x="4297351" y="2125920"/>
-                  </a:lnTo>
-                  <a:lnTo>
-                    <a:pt x="4368974" y="2075776"/>
-                  </a:lnTo>
-                  <a:lnTo>
-                    <a:pt x="4440596" y="2023985"/>
-                  </a:lnTo>
-                  <a:lnTo>
-                    <a:pt x="4512219" y="1970493"/>
-                  </a:lnTo>
-                  <a:lnTo>
-                    <a:pt x="4583841" y="1915245"/>
-                  </a:lnTo>
-                  <a:lnTo>
-                    <a:pt x="4655464" y="1858181"/>
-                  </a:lnTo>
-                  <a:lnTo>
-                    <a:pt x="4727086" y="1799244"/>
-                  </a:lnTo>
-                  <a:lnTo>
-                    <a:pt x="4798709" y="1738370"/>
-                  </a:lnTo>
-                  <a:lnTo>
-                    <a:pt x="4870331" y="1675498"/>
-                  </a:lnTo>
-                  <a:lnTo>
-                    <a:pt x="4941954" y="1610560"/>
-                  </a:lnTo>
-                  <a:lnTo>
-                    <a:pt x="5013576" y="1543490"/>
-                  </a:lnTo>
-                  <a:lnTo>
-                    <a:pt x="5085199" y="1474216"/>
-                  </a:lnTo>
-                  <a:lnTo>
-                    <a:pt x="5156821" y="1402668"/>
-                  </a:lnTo>
-                  <a:lnTo>
-                    <a:pt x="5228444" y="1328769"/>
-                  </a:lnTo>
-                  <a:lnTo>
-                    <a:pt x="5300066" y="1252444"/>
-                  </a:lnTo>
-                  <a:lnTo>
-                    <a:pt x="5371689" y="1173611"/>
-                  </a:lnTo>
-                  <a:lnTo>
-                    <a:pt x="5443311" y="1092190"/>
-                  </a:lnTo>
-                  <a:lnTo>
-                    <a:pt x="5514934" y="1008094"/>
-                  </a:lnTo>
-                  <a:lnTo>
-                    <a:pt x="5586557" y="921236"/>
-                  </a:lnTo>
-                  <a:lnTo>
-                    <a:pt x="5658179" y="831525"/>
-                  </a:lnTo>
-                  <a:lnTo>
-                    <a:pt x="5729802" y="738868"/>
-                  </a:lnTo>
-                  <a:lnTo>
-                    <a:pt x="5801424" y="643167"/>
-                  </a:lnTo>
-                  <a:lnTo>
-                    <a:pt x="5873047" y="544324"/>
-                  </a:lnTo>
-                  <a:lnTo>
-                    <a:pt x="5944669" y="442234"/>
-                  </a:lnTo>
-                  <a:lnTo>
-                    <a:pt x="6016292" y="336791"/>
-                  </a:lnTo>
-                  <a:lnTo>
-                    <a:pt x="6087914" y="227884"/>
-                  </a:lnTo>
-                  <a:lnTo>
-                    <a:pt x="6159537" y="115401"/>
-                  </a:lnTo>
-                  <a:lnTo>
-                    <a:pt x="6230681" y="0"/>
+                    <a:pt x="71622" y="2629627"/>
+                  </a:lnTo>
+                  <a:lnTo>
+                    <a:pt x="143245" y="2633614"/>
+                  </a:lnTo>
+                  <a:lnTo>
+                    <a:pt x="214867" y="2637585"/>
+                  </a:lnTo>
+                  <a:lnTo>
+                    <a:pt x="286490" y="2641541"/>
+                  </a:lnTo>
+                  <a:lnTo>
+                    <a:pt x="358112" y="2645482"/>
+                  </a:lnTo>
+                  <a:lnTo>
+                    <a:pt x="429735" y="2649407"/>
+                  </a:lnTo>
+                  <a:lnTo>
+                    <a:pt x="501357" y="2653317"/>
+                  </a:lnTo>
+                  <a:lnTo>
+                    <a:pt x="572980" y="2657211"/>
+                  </a:lnTo>
+                  <a:lnTo>
+                    <a:pt x="644602" y="2661091"/>
+                  </a:lnTo>
+                  <a:lnTo>
+                    <a:pt x="716225" y="2664955"/>
+                  </a:lnTo>
+                  <a:lnTo>
+                    <a:pt x="787847" y="2668804"/>
+                  </a:lnTo>
+                  <a:lnTo>
+                    <a:pt x="859470" y="2672639"/>
+                  </a:lnTo>
+                  <a:lnTo>
+                    <a:pt x="931092" y="2676458"/>
+                  </a:lnTo>
+                  <a:lnTo>
+                    <a:pt x="1002715" y="2680263"/>
+                  </a:lnTo>
+                  <a:lnTo>
+                    <a:pt x="1074337" y="2684052"/>
+                  </a:lnTo>
+                  <a:lnTo>
+                    <a:pt x="1145960" y="2687827"/>
+                  </a:lnTo>
+                  <a:lnTo>
+                    <a:pt x="1217582" y="2691587"/>
+                  </a:lnTo>
+                  <a:lnTo>
+                    <a:pt x="1289205" y="2695333"/>
+                  </a:lnTo>
+                  <a:lnTo>
+                    <a:pt x="1360827" y="2699064"/>
+                  </a:lnTo>
+                  <a:lnTo>
+                    <a:pt x="1432450" y="2702780"/>
+                  </a:lnTo>
+                  <a:lnTo>
+                    <a:pt x="1504073" y="2706482"/>
+                  </a:lnTo>
+                  <a:lnTo>
+                    <a:pt x="1575695" y="2710169"/>
+                  </a:lnTo>
+                  <a:lnTo>
+                    <a:pt x="1647318" y="2713843"/>
+                  </a:lnTo>
+                  <a:lnTo>
+                    <a:pt x="1718940" y="2717501"/>
+                  </a:lnTo>
+                  <a:lnTo>
+                    <a:pt x="1790563" y="2721146"/>
+                  </a:lnTo>
+                  <a:lnTo>
+                    <a:pt x="1862185" y="2724776"/>
+                  </a:lnTo>
+                  <a:lnTo>
+                    <a:pt x="1933808" y="2728392"/>
+                  </a:lnTo>
+                  <a:lnTo>
+                    <a:pt x="2005430" y="2731994"/>
+                  </a:lnTo>
+                  <a:lnTo>
+                    <a:pt x="2077053" y="2735582"/>
+                  </a:lnTo>
+                  <a:lnTo>
+                    <a:pt x="2148675" y="2739156"/>
+                  </a:lnTo>
+                  <a:lnTo>
+                    <a:pt x="2220298" y="2742717"/>
+                  </a:lnTo>
+                  <a:lnTo>
+                    <a:pt x="2291920" y="2746263"/>
+                  </a:lnTo>
+                  <a:lnTo>
+                    <a:pt x="2363543" y="2749795"/>
+                  </a:lnTo>
+                  <a:lnTo>
+                    <a:pt x="2435165" y="2753314"/>
+                  </a:lnTo>
+                  <a:lnTo>
+                    <a:pt x="2506788" y="2756819"/>
+                  </a:lnTo>
+                  <a:lnTo>
+                    <a:pt x="2578410" y="2760310"/>
+                  </a:lnTo>
+                  <a:lnTo>
+                    <a:pt x="2650033" y="2763788"/>
+                  </a:lnTo>
+                  <a:lnTo>
+                    <a:pt x="2721655" y="2767252"/>
+                  </a:lnTo>
+                  <a:lnTo>
+                    <a:pt x="2793278" y="2770703"/>
+                  </a:lnTo>
+                  <a:lnTo>
+                    <a:pt x="2864901" y="2774140"/>
+                  </a:lnTo>
+                  <a:lnTo>
+                    <a:pt x="2936523" y="2777564"/>
+                  </a:lnTo>
+                  <a:lnTo>
+                    <a:pt x="3008146" y="2780974"/>
+                  </a:lnTo>
+                  <a:lnTo>
+                    <a:pt x="3079768" y="2770504"/>
+                  </a:lnTo>
+                  <a:lnTo>
+                    <a:pt x="3151391" y="2739664"/>
+                  </a:lnTo>
+                  <a:lnTo>
+                    <a:pt x="3223013" y="2707746"/>
+                  </a:lnTo>
+                  <a:lnTo>
+                    <a:pt x="3294636" y="2674712"/>
+                  </a:lnTo>
+                  <a:lnTo>
+                    <a:pt x="3366258" y="2640523"/>
+                  </a:lnTo>
+                  <a:lnTo>
+                    <a:pt x="3437881" y="2605138"/>
+                  </a:lnTo>
+                  <a:lnTo>
+                    <a:pt x="3509503" y="2568517"/>
+                  </a:lnTo>
+                  <a:lnTo>
+                    <a:pt x="3581126" y="2530615"/>
+                  </a:lnTo>
+                  <a:lnTo>
+                    <a:pt x="3652748" y="2491388"/>
+                  </a:lnTo>
+                  <a:lnTo>
+                    <a:pt x="3724371" y="2450790"/>
+                  </a:lnTo>
+                  <a:lnTo>
+                    <a:pt x="3795993" y="2408772"/>
+                  </a:lnTo>
+                  <a:lnTo>
+                    <a:pt x="3867616" y="2365286"/>
+                  </a:lnTo>
+                  <a:lnTo>
+                    <a:pt x="3939238" y="2320279"/>
+                  </a:lnTo>
+                  <a:lnTo>
+                    <a:pt x="4010861" y="2273699"/>
+                  </a:lnTo>
+                  <a:lnTo>
+                    <a:pt x="4082483" y="2225490"/>
+                  </a:lnTo>
+                  <a:lnTo>
+                    <a:pt x="4154106" y="2175596"/>
+                  </a:lnTo>
+                  <a:lnTo>
+                    <a:pt x="4225729" y="2123957"/>
+                  </a:lnTo>
+                  <a:lnTo>
+                    <a:pt x="4297351" y="2070513"/>
+                  </a:lnTo>
+                  <a:lnTo>
+                    <a:pt x="4368974" y="2015201"/>
+                  </a:lnTo>
+                  <a:lnTo>
+                    <a:pt x="4440596" y="1957955"/>
+                  </a:lnTo>
+                  <a:lnTo>
+                    <a:pt x="4512219" y="1898708"/>
+                  </a:lnTo>
+                  <a:lnTo>
+                    <a:pt x="4583841" y="1837389"/>
+                  </a:lnTo>
+                  <a:lnTo>
+                    <a:pt x="4655464" y="1773927"/>
+                  </a:lnTo>
+                  <a:lnTo>
+                    <a:pt x="4727086" y="1708245"/>
+                  </a:lnTo>
+                  <a:lnTo>
+                    <a:pt x="4798709" y="1640268"/>
+                  </a:lnTo>
+                  <a:lnTo>
+                    <a:pt x="4870331" y="1569914"/>
+                  </a:lnTo>
+                  <a:lnTo>
+                    <a:pt x="4941954" y="1497101"/>
+                  </a:lnTo>
+                  <a:lnTo>
+                    <a:pt x="5013576" y="1421741"/>
+                  </a:lnTo>
+                  <a:lnTo>
+                    <a:pt x="5085199" y="1343748"/>
+                  </a:lnTo>
+                  <a:lnTo>
+                    <a:pt x="5156821" y="1263027"/>
+                  </a:lnTo>
+                  <a:lnTo>
+                    <a:pt x="5228444" y="1179485"/>
+                  </a:lnTo>
+                  <a:lnTo>
+                    <a:pt x="5300066" y="1093022"/>
+                  </a:lnTo>
+                  <a:lnTo>
+                    <a:pt x="5371689" y="1003536"/>
+                  </a:lnTo>
+                  <a:lnTo>
+                    <a:pt x="5443311" y="910921"/>
+                  </a:lnTo>
+                  <a:lnTo>
+                    <a:pt x="5514934" y="815069"/>
+                  </a:lnTo>
+                  <a:lnTo>
+                    <a:pt x="5586557" y="715865"/>
+                  </a:lnTo>
+                  <a:lnTo>
+                    <a:pt x="5658179" y="613194"/>
+                  </a:lnTo>
+                  <a:lnTo>
+                    <a:pt x="5729802" y="506933"/>
+                  </a:lnTo>
+                  <a:lnTo>
+                    <a:pt x="5801424" y="396957"/>
+                  </a:lnTo>
+                  <a:lnTo>
+                    <a:pt x="5873047" y="283136"/>
+                  </a:lnTo>
+                  <a:lnTo>
+                    <a:pt x="5944669" y="165336"/>
+                  </a:lnTo>
+                  <a:lnTo>
+                    <a:pt x="6016292" y="43417"/>
+                  </a:lnTo>
+                  <a:lnTo>
+                    <a:pt x="6040936" y="0"/>
                   </a:lnTo>
                   <a:lnTo>
                     <a:pt x="7090630" y="0"/>
                   </a:lnTo>
                   <a:lnTo>
-                    <a:pt x="7090630" y="3026128"/>
-                  </a:lnTo>
-                  <a:lnTo>
-                    <a:pt x="7019007" y="3022475"/>
-                  </a:lnTo>
-                  <a:lnTo>
-                    <a:pt x="6947385" y="3018801"/>
-                  </a:lnTo>
-                  <a:lnTo>
-                    <a:pt x="6875762" y="3015106"/>
-                  </a:lnTo>
-                  <a:lnTo>
-                    <a:pt x="6804139" y="3011389"/>
-                  </a:lnTo>
-                  <a:lnTo>
-                    <a:pt x="6732517" y="3007650"/>
-                  </a:lnTo>
-                  <a:lnTo>
-                    <a:pt x="6660894" y="3003890"/>
-                  </a:lnTo>
-                  <a:lnTo>
-                    <a:pt x="6589272" y="3000108"/>
-                  </a:lnTo>
-                  <a:lnTo>
-                    <a:pt x="6517649" y="2996303"/>
-                  </a:lnTo>
-                  <a:lnTo>
-                    <a:pt x="6446027" y="2992477"/>
-                  </a:lnTo>
-                  <a:lnTo>
-                    <a:pt x="6374404" y="2988628"/>
-                  </a:lnTo>
-                  <a:lnTo>
-                    <a:pt x="6302782" y="2984756"/>
-                  </a:lnTo>
-                  <a:lnTo>
-                    <a:pt x="6231159" y="2980862"/>
-                  </a:lnTo>
-                  <a:lnTo>
-                    <a:pt x="6159537" y="2976946"/>
-                  </a:lnTo>
-                  <a:lnTo>
-                    <a:pt x="6087914" y="2973006"/>
-                  </a:lnTo>
-                  <a:lnTo>
-                    <a:pt x="6016292" y="2969044"/>
-                  </a:lnTo>
-                  <a:lnTo>
-                    <a:pt x="5944669" y="2965059"/>
-                  </a:lnTo>
-                  <a:lnTo>
-                    <a:pt x="5873047" y="2961050"/>
-                  </a:lnTo>
-                  <a:lnTo>
-                    <a:pt x="5801424" y="2957018"/>
-                  </a:lnTo>
-                  <a:lnTo>
-                    <a:pt x="5729802" y="2952962"/>
-                  </a:lnTo>
-                  <a:lnTo>
-                    <a:pt x="5658179" y="2948883"/>
-                  </a:lnTo>
-                  <a:lnTo>
-                    <a:pt x="5586557" y="2944780"/>
-                  </a:lnTo>
-                  <a:lnTo>
-                    <a:pt x="5514934" y="2940653"/>
-                  </a:lnTo>
-                  <a:lnTo>
-                    <a:pt x="5443311" y="2936502"/>
-                  </a:lnTo>
-                  <a:lnTo>
-                    <a:pt x="5371689" y="2932326"/>
-                  </a:lnTo>
-                  <a:lnTo>
-                    <a:pt x="5300066" y="2928127"/>
-                  </a:lnTo>
-                  <a:lnTo>
-                    <a:pt x="5228444" y="2923903"/>
-                  </a:lnTo>
-                  <a:lnTo>
-                    <a:pt x="5156821" y="2919654"/>
-                  </a:lnTo>
-                  <a:lnTo>
-                    <a:pt x="5085199" y="2915381"/>
-                  </a:lnTo>
-                  <a:lnTo>
-                    <a:pt x="5013576" y="2911082"/>
-                  </a:lnTo>
-                  <a:lnTo>
-                    <a:pt x="4941954" y="2906759"/>
-                  </a:lnTo>
-                  <a:lnTo>
-                    <a:pt x="4870331" y="2902410"/>
-                  </a:lnTo>
-                  <a:lnTo>
-                    <a:pt x="4798709" y="2898036"/>
-                  </a:lnTo>
-                  <a:lnTo>
-                    <a:pt x="4727086" y="2893637"/>
-                  </a:lnTo>
-                  <a:lnTo>
-                    <a:pt x="4655464" y="2889212"/>
-                  </a:lnTo>
-                  <a:lnTo>
-                    <a:pt x="4583841" y="2884761"/>
-                  </a:lnTo>
-                  <a:lnTo>
-                    <a:pt x="4512219" y="2880284"/>
-                  </a:lnTo>
-                  <a:lnTo>
-                    <a:pt x="4440596" y="2875781"/>
-                  </a:lnTo>
-                  <a:lnTo>
-                    <a:pt x="4368974" y="2871252"/>
-                  </a:lnTo>
-                  <a:lnTo>
-                    <a:pt x="4297351" y="2866696"/>
-                  </a:lnTo>
-                  <a:lnTo>
-                    <a:pt x="4225729" y="2862114"/>
-                  </a:lnTo>
-                  <a:lnTo>
-                    <a:pt x="4154106" y="2857505"/>
-                  </a:lnTo>
-                  <a:lnTo>
-                    <a:pt x="4082483" y="2852869"/>
-                  </a:lnTo>
-                  <a:lnTo>
-                    <a:pt x="4010861" y="2848206"/>
-                  </a:lnTo>
-                  <a:lnTo>
-                    <a:pt x="3939238" y="2843516"/>
-                  </a:lnTo>
-                  <a:lnTo>
-                    <a:pt x="3867616" y="2838799"/>
-                  </a:lnTo>
-                  <a:lnTo>
-                    <a:pt x="3795993" y="2834054"/>
-                  </a:lnTo>
-                  <a:lnTo>
-                    <a:pt x="3724371" y="2829281"/>
-                  </a:lnTo>
-                  <a:lnTo>
-                    <a:pt x="3652748" y="2824481"/>
-                  </a:lnTo>
-                  <a:lnTo>
-                    <a:pt x="3581126" y="2819653"/>
-                  </a:lnTo>
-                  <a:lnTo>
-                    <a:pt x="3509503" y="2814796"/>
-                  </a:lnTo>
-                  <a:lnTo>
-                    <a:pt x="3437881" y="2809911"/>
-                  </a:lnTo>
-                  <a:lnTo>
-                    <a:pt x="3366258" y="2804998"/>
-                  </a:lnTo>
-                  <a:lnTo>
-                    <a:pt x="3294636" y="2800056"/>
-                  </a:lnTo>
-                  <a:lnTo>
-                    <a:pt x="3223013" y="2795085"/>
-                  </a:lnTo>
-                  <a:lnTo>
-                    <a:pt x="3151391" y="2790086"/>
-                  </a:lnTo>
-                  <a:lnTo>
-                    <a:pt x="3079768" y="2785057"/>
-                  </a:lnTo>
-                  <a:lnTo>
-                    <a:pt x="3008146" y="2799280"/>
-                  </a:lnTo>
-                  <a:lnTo>
-                    <a:pt x="2936523" y="2826416"/>
-                  </a:lnTo>
-                  <a:lnTo>
-                    <a:pt x="2864901" y="2852690"/>
-                  </a:lnTo>
-                  <a:lnTo>
-                    <a:pt x="2793278" y="2878128"/>
-                  </a:lnTo>
-                  <a:lnTo>
-                    <a:pt x="2721655" y="2902758"/>
-                  </a:lnTo>
-                  <a:lnTo>
-                    <a:pt x="2650033" y="2926604"/>
-                  </a:lnTo>
-                  <a:lnTo>
-                    <a:pt x="2578410" y="2949692"/>
-                  </a:lnTo>
-                  <a:lnTo>
-                    <a:pt x="2506788" y="2972045"/>
-                  </a:lnTo>
-                  <a:lnTo>
-                    <a:pt x="2435165" y="2993688"/>
-                  </a:lnTo>
-                  <a:lnTo>
-                    <a:pt x="2363543" y="3014643"/>
-                  </a:lnTo>
-                  <a:lnTo>
-                    <a:pt x="2291920" y="3034931"/>
-                  </a:lnTo>
-                  <a:lnTo>
-                    <a:pt x="2220298" y="3054574"/>
-                  </a:lnTo>
-                  <a:lnTo>
-                    <a:pt x="2148675" y="3073592"/>
-                  </a:lnTo>
-                  <a:lnTo>
-                    <a:pt x="2077053" y="3092006"/>
-                  </a:lnTo>
-                  <a:lnTo>
-                    <a:pt x="2005430" y="3109834"/>
-                  </a:lnTo>
-                  <a:lnTo>
-                    <a:pt x="1933808" y="3127095"/>
-                  </a:lnTo>
-                  <a:lnTo>
-                    <a:pt x="1862185" y="3143808"/>
-                  </a:lnTo>
-                  <a:lnTo>
-                    <a:pt x="1790563" y="3159988"/>
-                  </a:lnTo>
-                  <a:lnTo>
-                    <a:pt x="1718940" y="3175655"/>
-                  </a:lnTo>
-                  <a:lnTo>
-                    <a:pt x="1647318" y="3190823"/>
-                  </a:lnTo>
-                  <a:lnTo>
-                    <a:pt x="1575695" y="3205509"/>
-                  </a:lnTo>
-                  <a:lnTo>
-                    <a:pt x="1504073" y="3219727"/>
-                  </a:lnTo>
-                  <a:lnTo>
-                    <a:pt x="1432450" y="3233494"/>
-                  </a:lnTo>
-                  <a:lnTo>
-                    <a:pt x="1360827" y="3246823"/>
-                  </a:lnTo>
-                  <a:lnTo>
-                    <a:pt x="1289205" y="3259728"/>
-                  </a:lnTo>
-                  <a:lnTo>
-                    <a:pt x="1217582" y="3272222"/>
-                  </a:lnTo>
-                  <a:lnTo>
-                    <a:pt x="1145960" y="3284320"/>
-                  </a:lnTo>
-                  <a:lnTo>
-                    <a:pt x="1074337" y="3296032"/>
-                  </a:lnTo>
-                  <a:lnTo>
-                    <a:pt x="1002715" y="3307372"/>
-                  </a:lnTo>
-                  <a:lnTo>
-                    <a:pt x="931092" y="3318352"/>
-                  </a:lnTo>
-                  <a:lnTo>
-                    <a:pt x="859470" y="3328982"/>
-                  </a:lnTo>
-                  <a:lnTo>
-                    <a:pt x="787847" y="3339275"/>
-                  </a:lnTo>
-                  <a:lnTo>
-                    <a:pt x="716225" y="3349240"/>
-                  </a:lnTo>
-                  <a:lnTo>
-                    <a:pt x="644602" y="3358888"/>
-                  </a:lnTo>
-                  <a:lnTo>
-                    <a:pt x="572980" y="3368229"/>
-                  </a:lnTo>
-                  <a:lnTo>
-                    <a:pt x="501357" y="3377273"/>
-                  </a:lnTo>
-                  <a:lnTo>
-                    <a:pt x="429735" y="3386030"/>
-                  </a:lnTo>
-                  <a:lnTo>
-                    <a:pt x="358112" y="3394508"/>
-                  </a:lnTo>
-                  <a:lnTo>
-                    <a:pt x="286490" y="3402717"/>
-                  </a:lnTo>
-                  <a:lnTo>
-                    <a:pt x="214867" y="3410664"/>
-                  </a:lnTo>
-                  <a:lnTo>
-                    <a:pt x="143245" y="3418359"/>
-                  </a:lnTo>
-                  <a:lnTo>
-                    <a:pt x="71622" y="3425809"/>
-                  </a:lnTo>
-                  <a:lnTo>
-                    <a:pt x="0" y="3433023"/>
+                    <a:pt x="7090630" y="2954914"/>
+                  </a:lnTo>
+                  <a:lnTo>
+                    <a:pt x="7019007" y="2952185"/>
+                  </a:lnTo>
+                  <a:lnTo>
+                    <a:pt x="6947385" y="2949444"/>
+                  </a:lnTo>
+                  <a:lnTo>
+                    <a:pt x="6875762" y="2946693"/>
+                  </a:lnTo>
+                  <a:lnTo>
+                    <a:pt x="6804139" y="2943931"/>
+                  </a:lnTo>
+                  <a:lnTo>
+                    <a:pt x="6732517" y="2941158"/>
+                  </a:lnTo>
+                  <a:lnTo>
+                    <a:pt x="6660894" y="2938374"/>
+                  </a:lnTo>
+                  <a:lnTo>
+                    <a:pt x="6589272" y="2935579"/>
+                  </a:lnTo>
+                  <a:lnTo>
+                    <a:pt x="6517649" y="2932774"/>
+                  </a:lnTo>
+                  <a:lnTo>
+                    <a:pt x="6446027" y="2929957"/>
+                  </a:lnTo>
+                  <a:lnTo>
+                    <a:pt x="6374404" y="2927130"/>
+                  </a:lnTo>
+                  <a:lnTo>
+                    <a:pt x="6302782" y="2924291"/>
+                  </a:lnTo>
+                  <a:lnTo>
+                    <a:pt x="6231159" y="2921441"/>
+                  </a:lnTo>
+                  <a:lnTo>
+                    <a:pt x="6159537" y="2918581"/>
+                  </a:lnTo>
+                  <a:lnTo>
+                    <a:pt x="6087914" y="2915709"/>
+                  </a:lnTo>
+                  <a:lnTo>
+                    <a:pt x="6016292" y="2912825"/>
+                  </a:lnTo>
+                  <a:lnTo>
+                    <a:pt x="5944669" y="2909931"/>
+                  </a:lnTo>
+                  <a:lnTo>
+                    <a:pt x="5873047" y="2907025"/>
+                  </a:lnTo>
+                  <a:lnTo>
+                    <a:pt x="5801424" y="2904108"/>
+                  </a:lnTo>
+                  <a:lnTo>
+                    <a:pt x="5729802" y="2901179"/>
+                  </a:lnTo>
+                  <a:lnTo>
+                    <a:pt x="5658179" y="2898239"/>
+                  </a:lnTo>
+                  <a:lnTo>
+                    <a:pt x="5586557" y="2895287"/>
+                  </a:lnTo>
+                  <a:lnTo>
+                    <a:pt x="5514934" y="2892324"/>
+                  </a:lnTo>
+                  <a:lnTo>
+                    <a:pt x="5443311" y="2889349"/>
+                  </a:lnTo>
+                  <a:lnTo>
+                    <a:pt x="5371689" y="2886363"/>
+                  </a:lnTo>
+                  <a:lnTo>
+                    <a:pt x="5300066" y="2883365"/>
+                  </a:lnTo>
+                  <a:lnTo>
+                    <a:pt x="5228444" y="2880355"/>
+                  </a:lnTo>
+                  <a:lnTo>
+                    <a:pt x="5156821" y="2877333"/>
+                  </a:lnTo>
+                  <a:lnTo>
+                    <a:pt x="5085199" y="2874300"/>
+                  </a:lnTo>
+                  <a:lnTo>
+                    <a:pt x="5013576" y="2871255"/>
+                  </a:lnTo>
+                  <a:lnTo>
+                    <a:pt x="4941954" y="2868197"/>
+                  </a:lnTo>
+                  <a:lnTo>
+                    <a:pt x="4870331" y="2865128"/>
+                  </a:lnTo>
+                  <a:lnTo>
+                    <a:pt x="4798709" y="2862047"/>
+                  </a:lnTo>
+                  <a:lnTo>
+                    <a:pt x="4727086" y="2858954"/>
+                  </a:lnTo>
+                  <a:lnTo>
+                    <a:pt x="4655464" y="2855848"/>
+                  </a:lnTo>
+                  <a:lnTo>
+                    <a:pt x="4583841" y="2852731"/>
+                  </a:lnTo>
+                  <a:lnTo>
+                    <a:pt x="4512219" y="2849601"/>
+                  </a:lnTo>
+                  <a:lnTo>
+                    <a:pt x="4440596" y="2846459"/>
+                  </a:lnTo>
+                  <a:lnTo>
+                    <a:pt x="4368974" y="2843305"/>
+                  </a:lnTo>
+                  <a:lnTo>
+                    <a:pt x="4297351" y="2840138"/>
+                  </a:lnTo>
+                  <a:lnTo>
+                    <a:pt x="4225729" y="2836960"/>
+                  </a:lnTo>
+                  <a:lnTo>
+                    <a:pt x="4154106" y="2833768"/>
+                  </a:lnTo>
+                  <a:lnTo>
+                    <a:pt x="4082483" y="2830564"/>
+                  </a:lnTo>
+                  <a:lnTo>
+                    <a:pt x="4010861" y="2827348"/>
+                  </a:lnTo>
+                  <a:lnTo>
+                    <a:pt x="3939238" y="2824119"/>
+                  </a:lnTo>
+                  <a:lnTo>
+                    <a:pt x="3867616" y="2820877"/>
+                  </a:lnTo>
+                  <a:lnTo>
+                    <a:pt x="3795993" y="2817623"/>
+                  </a:lnTo>
+                  <a:lnTo>
+                    <a:pt x="3724371" y="2814356"/>
+                  </a:lnTo>
+                  <a:lnTo>
+                    <a:pt x="3652748" y="2811076"/>
+                  </a:lnTo>
+                  <a:lnTo>
+                    <a:pt x="3581126" y="2807783"/>
+                  </a:lnTo>
+                  <a:lnTo>
+                    <a:pt x="3509503" y="2804478"/>
+                  </a:lnTo>
+                  <a:lnTo>
+                    <a:pt x="3437881" y="2801159"/>
+                  </a:lnTo>
+                  <a:lnTo>
+                    <a:pt x="3366258" y="2797828"/>
+                  </a:lnTo>
+                  <a:lnTo>
+                    <a:pt x="3294636" y="2794483"/>
+                  </a:lnTo>
+                  <a:lnTo>
+                    <a:pt x="3223013" y="2791126"/>
+                  </a:lnTo>
+                  <a:lnTo>
+                    <a:pt x="3151391" y="2787755"/>
+                  </a:lnTo>
+                  <a:lnTo>
+                    <a:pt x="3079768" y="2784371"/>
+                  </a:lnTo>
+                  <a:lnTo>
+                    <a:pt x="3008146" y="2800303"/>
+                  </a:lnTo>
+                  <a:lnTo>
+                    <a:pt x="2936523" y="2829094"/>
+                  </a:lnTo>
+                  <a:lnTo>
+                    <a:pt x="2864901" y="2856914"/>
+                  </a:lnTo>
+                  <a:lnTo>
+                    <a:pt x="2793278" y="2883793"/>
+                  </a:lnTo>
+                  <a:lnTo>
+                    <a:pt x="2721655" y="2909765"/>
+                  </a:lnTo>
+                  <a:lnTo>
+                    <a:pt x="2650033" y="2934859"/>
+                  </a:lnTo>
+                  <a:lnTo>
+                    <a:pt x="2578410" y="2959105"/>
+                  </a:lnTo>
+                  <a:lnTo>
+                    <a:pt x="2506788" y="2982533"/>
+                  </a:lnTo>
+                  <a:lnTo>
+                    <a:pt x="2435165" y="3005169"/>
+                  </a:lnTo>
+                  <a:lnTo>
+                    <a:pt x="2363543" y="3027040"/>
+                  </a:lnTo>
+                  <a:lnTo>
+                    <a:pt x="2291920" y="3048173"/>
+                  </a:lnTo>
+                  <a:lnTo>
+                    <a:pt x="2220298" y="3068592"/>
+                  </a:lnTo>
+                  <a:lnTo>
+                    <a:pt x="2148675" y="3088321"/>
+                  </a:lnTo>
+                  <a:lnTo>
+                    <a:pt x="2077053" y="3107384"/>
+                  </a:lnTo>
+                  <a:lnTo>
+                    <a:pt x="2005430" y="3125802"/>
+                  </a:lnTo>
+                  <a:lnTo>
+                    <a:pt x="1933808" y="3143599"/>
+                  </a:lnTo>
+                  <a:lnTo>
+                    <a:pt x="1862185" y="3160794"/>
+                  </a:lnTo>
+                  <a:lnTo>
+                    <a:pt x="1790563" y="3177409"/>
+                  </a:lnTo>
+                  <a:lnTo>
+                    <a:pt x="1718940" y="3193462"/>
+                  </a:lnTo>
+                  <a:lnTo>
+                    <a:pt x="1647318" y="3208973"/>
+                  </a:lnTo>
+                  <a:lnTo>
+                    <a:pt x="1575695" y="3223960"/>
+                  </a:lnTo>
+                  <a:lnTo>
+                    <a:pt x="1504073" y="3238441"/>
+                  </a:lnTo>
+                  <a:lnTo>
+                    <a:pt x="1432450" y="3252432"/>
+                  </a:lnTo>
+                  <a:lnTo>
+                    <a:pt x="1360827" y="3265951"/>
+                  </a:lnTo>
+                  <a:lnTo>
+                    <a:pt x="1289205" y="3279014"/>
+                  </a:lnTo>
+                  <a:lnTo>
+                    <a:pt x="1217582" y="3291635"/>
+                  </a:lnTo>
+                  <a:lnTo>
+                    <a:pt x="1145960" y="3303830"/>
+                  </a:lnTo>
+                  <a:lnTo>
+                    <a:pt x="1074337" y="3315612"/>
+                  </a:lnTo>
+                  <a:lnTo>
+                    <a:pt x="1002715" y="3326997"/>
+                  </a:lnTo>
+                  <a:lnTo>
+                    <a:pt x="931092" y="3337997"/>
+                  </a:lnTo>
+                  <a:lnTo>
+                    <a:pt x="859470" y="3348626"/>
+                  </a:lnTo>
+                  <a:lnTo>
+                    <a:pt x="787847" y="3358896"/>
+                  </a:lnTo>
+                  <a:lnTo>
+                    <a:pt x="716225" y="3368818"/>
+                  </a:lnTo>
+                  <a:lnTo>
+                    <a:pt x="644602" y="3378406"/>
+                  </a:lnTo>
+                  <a:lnTo>
+                    <a:pt x="572980" y="3387670"/>
+                  </a:lnTo>
+                  <a:lnTo>
+                    <a:pt x="501357" y="3396620"/>
+                  </a:lnTo>
+                  <a:lnTo>
+                    <a:pt x="429735" y="3405269"/>
+                  </a:lnTo>
+                  <a:lnTo>
+                    <a:pt x="358112" y="3413625"/>
+                  </a:lnTo>
+                  <a:lnTo>
+                    <a:pt x="286490" y="3421699"/>
+                  </a:lnTo>
+                  <a:lnTo>
+                    <a:pt x="214867" y="3429500"/>
+                  </a:lnTo>
+                  <a:lnTo>
+                    <a:pt x="143245" y="3437038"/>
+                  </a:lnTo>
+                  <a:lnTo>
+                    <a:pt x="71622" y="3444321"/>
+                  </a:lnTo>
+                  <a:lnTo>
+                    <a:pt x="0" y="3451358"/>
                   </a:lnTo>
                   <a:close/>
                 </a:path>
@@ -3730,275 +3724,269 @@
           <p:spPr>
             <a:xfrm>
               <a:off x="1172049" y="1896563"/>
-              <a:ext cx="6230681" cy="2779999"/>
+              <a:ext cx="6040936" cy="2780974"/>
             </a:xfrm>
             <a:custGeom>
               <a:avLst/>
               <a:pathLst>
-                <a:path w="6230681" h="2779999">
+                <a:path w="6040936" h="2780974">
                   <a:moveTo>
-                    <a:pt x="0" y="2538674"/>
+                    <a:pt x="0" y="2625624"/>
                   </a:moveTo>
                   <a:lnTo>
-                    <a:pt x="71622" y="2545131"/>
-                  </a:lnTo>
-                  <a:lnTo>
-                    <a:pt x="143245" y="2551551"/>
-                  </a:lnTo>
-                  <a:lnTo>
-                    <a:pt x="214867" y="2557933"/>
-                  </a:lnTo>
-                  <a:lnTo>
-                    <a:pt x="286490" y="2564278"/>
-                  </a:lnTo>
-                  <a:lnTo>
-                    <a:pt x="358112" y="2570587"/>
-                  </a:lnTo>
-                  <a:lnTo>
-                    <a:pt x="429735" y="2576859"/>
-                  </a:lnTo>
-                  <a:lnTo>
-                    <a:pt x="501357" y="2583095"/>
-                  </a:lnTo>
-                  <a:lnTo>
-                    <a:pt x="572980" y="2589294"/>
-                  </a:lnTo>
-                  <a:lnTo>
-                    <a:pt x="644602" y="2595458"/>
-                  </a:lnTo>
-                  <a:lnTo>
-                    <a:pt x="716225" y="2601586"/>
-                  </a:lnTo>
-                  <a:lnTo>
-                    <a:pt x="787847" y="2607678"/>
-                  </a:lnTo>
-                  <a:lnTo>
-                    <a:pt x="859470" y="2613735"/>
-                  </a:lnTo>
-                  <a:lnTo>
-                    <a:pt x="931092" y="2619757"/>
-                  </a:lnTo>
-                  <a:lnTo>
-                    <a:pt x="1002715" y="2625744"/>
-                  </a:lnTo>
-                  <a:lnTo>
-                    <a:pt x="1074337" y="2631696"/>
-                  </a:lnTo>
-                  <a:lnTo>
-                    <a:pt x="1145960" y="2637614"/>
-                  </a:lnTo>
-                  <a:lnTo>
-                    <a:pt x="1217582" y="2643497"/>
-                  </a:lnTo>
-                  <a:lnTo>
-                    <a:pt x="1289205" y="2649347"/>
-                  </a:lnTo>
-                  <a:lnTo>
-                    <a:pt x="1360827" y="2655162"/>
-                  </a:lnTo>
-                  <a:lnTo>
-                    <a:pt x="1432450" y="2660944"/>
-                  </a:lnTo>
-                  <a:lnTo>
-                    <a:pt x="1504073" y="2666692"/>
-                  </a:lnTo>
-                  <a:lnTo>
-                    <a:pt x="1575695" y="2672407"/>
-                  </a:lnTo>
-                  <a:lnTo>
-                    <a:pt x="1647318" y="2678089"/>
-                  </a:lnTo>
-                  <a:lnTo>
-                    <a:pt x="1718940" y="2683738"/>
-                  </a:lnTo>
-                  <a:lnTo>
-                    <a:pt x="1790563" y="2689354"/>
-                  </a:lnTo>
-                  <a:lnTo>
-                    <a:pt x="1862185" y="2694938"/>
-                  </a:lnTo>
-                  <a:lnTo>
-                    <a:pt x="1933808" y="2700489"/>
-                  </a:lnTo>
-                  <a:lnTo>
-                    <a:pt x="2005430" y="2706008"/>
-                  </a:lnTo>
-                  <a:lnTo>
-                    <a:pt x="2077053" y="2711495"/>
-                  </a:lnTo>
-                  <a:lnTo>
-                    <a:pt x="2148675" y="2716950"/>
-                  </a:lnTo>
-                  <a:lnTo>
-                    <a:pt x="2220298" y="2722374"/>
-                  </a:lnTo>
-                  <a:lnTo>
-                    <a:pt x="2291920" y="2727766"/>
-                  </a:lnTo>
-                  <a:lnTo>
-                    <a:pt x="2363543" y="2733127"/>
-                  </a:lnTo>
-                  <a:lnTo>
-                    <a:pt x="2435165" y="2738457"/>
-                  </a:lnTo>
-                  <a:lnTo>
-                    <a:pt x="2506788" y="2743756"/>
-                  </a:lnTo>
-                  <a:lnTo>
-                    <a:pt x="2578410" y="2749024"/>
-                  </a:lnTo>
-                  <a:lnTo>
-                    <a:pt x="2650033" y="2754262"/>
-                  </a:lnTo>
-                  <a:lnTo>
-                    <a:pt x="2721655" y="2759469"/>
-                  </a:lnTo>
-                  <a:lnTo>
-                    <a:pt x="2793278" y="2764647"/>
-                  </a:lnTo>
-                  <a:lnTo>
-                    <a:pt x="2864901" y="2769794"/>
-                  </a:lnTo>
-                  <a:lnTo>
-                    <a:pt x="2936523" y="2774911"/>
-                  </a:lnTo>
-                  <a:lnTo>
-                    <a:pt x="3008146" y="2779999"/>
-                  </a:lnTo>
-                  <a:lnTo>
-                    <a:pt x="3079768" y="2771252"/>
-                  </a:lnTo>
-                  <a:lnTo>
-                    <a:pt x="3151391" y="2742303"/>
-                  </a:lnTo>
-                  <a:lnTo>
-                    <a:pt x="3223013" y="2712404"/>
-                  </a:lnTo>
-                  <a:lnTo>
-                    <a:pt x="3294636" y="2681522"/>
-                  </a:lnTo>
-                  <a:lnTo>
-                    <a:pt x="3366258" y="2649627"/>
-                  </a:lnTo>
-                  <a:lnTo>
-                    <a:pt x="3437881" y="2616684"/>
-                  </a:lnTo>
-                  <a:lnTo>
-                    <a:pt x="3509503" y="2582658"/>
-                  </a:lnTo>
-                  <a:lnTo>
-                    <a:pt x="3581126" y="2547516"/>
-                  </a:lnTo>
-                  <a:lnTo>
-                    <a:pt x="3652748" y="2511219"/>
-                  </a:lnTo>
-                  <a:lnTo>
-                    <a:pt x="3724371" y="2473730"/>
-                  </a:lnTo>
-                  <a:lnTo>
-                    <a:pt x="3795993" y="2435009"/>
-                  </a:lnTo>
-                  <a:lnTo>
-                    <a:pt x="3867616" y="2395017"/>
-                  </a:lnTo>
-                  <a:lnTo>
-                    <a:pt x="3939238" y="2353711"/>
-                  </a:lnTo>
-                  <a:lnTo>
-                    <a:pt x="4010861" y="2311049"/>
-                  </a:lnTo>
-                  <a:lnTo>
-                    <a:pt x="4082483" y="2266986"/>
-                  </a:lnTo>
-                  <a:lnTo>
-                    <a:pt x="4154106" y="2221475"/>
-                  </a:lnTo>
-                  <a:lnTo>
-                    <a:pt x="4225729" y="2174469"/>
-                  </a:lnTo>
-                  <a:lnTo>
-                    <a:pt x="4297351" y="2125920"/>
-                  </a:lnTo>
-                  <a:lnTo>
-                    <a:pt x="4368974" y="2075776"/>
-                  </a:lnTo>
-                  <a:lnTo>
-                    <a:pt x="4440596" y="2023985"/>
-                  </a:lnTo>
-                  <a:lnTo>
-                    <a:pt x="4512219" y="1970493"/>
-                  </a:lnTo>
-                  <a:lnTo>
-                    <a:pt x="4583841" y="1915245"/>
-                  </a:lnTo>
-                  <a:lnTo>
-                    <a:pt x="4655464" y="1858181"/>
-                  </a:lnTo>
-                  <a:lnTo>
-                    <a:pt x="4727086" y="1799244"/>
-                  </a:lnTo>
-                  <a:lnTo>
-                    <a:pt x="4798709" y="1738370"/>
-                  </a:lnTo>
-                  <a:lnTo>
-                    <a:pt x="4870331" y="1675498"/>
-                  </a:lnTo>
-                  <a:lnTo>
-                    <a:pt x="4941954" y="1610560"/>
-                  </a:lnTo>
-                  <a:lnTo>
-                    <a:pt x="5013576" y="1543490"/>
-                  </a:lnTo>
-                  <a:lnTo>
-                    <a:pt x="5085199" y="1474216"/>
-                  </a:lnTo>
-                  <a:lnTo>
-                    <a:pt x="5156821" y="1402668"/>
-                  </a:lnTo>
-                  <a:lnTo>
-                    <a:pt x="5228444" y="1328769"/>
-                  </a:lnTo>
-                  <a:lnTo>
-                    <a:pt x="5300066" y="1252444"/>
-                  </a:lnTo>
-                  <a:lnTo>
-                    <a:pt x="5371689" y="1173611"/>
-                  </a:lnTo>
-                  <a:lnTo>
-                    <a:pt x="5443311" y="1092190"/>
-                  </a:lnTo>
-                  <a:lnTo>
-                    <a:pt x="5514934" y="1008094"/>
-                  </a:lnTo>
-                  <a:lnTo>
-                    <a:pt x="5586557" y="921236"/>
-                  </a:lnTo>
-                  <a:lnTo>
-                    <a:pt x="5658179" y="831525"/>
-                  </a:lnTo>
-                  <a:lnTo>
-                    <a:pt x="5729802" y="738868"/>
-                  </a:lnTo>
-                  <a:lnTo>
-                    <a:pt x="5801424" y="643167"/>
-                  </a:lnTo>
-                  <a:lnTo>
-                    <a:pt x="5873047" y="544324"/>
-                  </a:lnTo>
-                  <a:lnTo>
-                    <a:pt x="5944669" y="442234"/>
-                  </a:lnTo>
-                  <a:lnTo>
-                    <a:pt x="6016292" y="336791"/>
-                  </a:lnTo>
-                  <a:lnTo>
-                    <a:pt x="6087914" y="227884"/>
-                  </a:lnTo>
-                  <a:lnTo>
-                    <a:pt x="6159537" y="115401"/>
-                  </a:lnTo>
-                  <a:lnTo>
-                    <a:pt x="6230681" y="0"/>
+                    <a:pt x="71622" y="2629627"/>
+                  </a:lnTo>
+                  <a:lnTo>
+                    <a:pt x="143245" y="2633614"/>
+                  </a:lnTo>
+                  <a:lnTo>
+                    <a:pt x="214867" y="2637585"/>
+                  </a:lnTo>
+                  <a:lnTo>
+                    <a:pt x="286490" y="2641541"/>
+                  </a:lnTo>
+                  <a:lnTo>
+                    <a:pt x="358112" y="2645482"/>
+                  </a:lnTo>
+                  <a:lnTo>
+                    <a:pt x="429735" y="2649407"/>
+                  </a:lnTo>
+                  <a:lnTo>
+                    <a:pt x="501357" y="2653317"/>
+                  </a:lnTo>
+                  <a:lnTo>
+                    <a:pt x="572980" y="2657211"/>
+                  </a:lnTo>
+                  <a:lnTo>
+                    <a:pt x="644602" y="2661091"/>
+                  </a:lnTo>
+                  <a:lnTo>
+                    <a:pt x="716225" y="2664955"/>
+                  </a:lnTo>
+                  <a:lnTo>
+                    <a:pt x="787847" y="2668804"/>
+                  </a:lnTo>
+                  <a:lnTo>
+                    <a:pt x="859470" y="2672639"/>
+                  </a:lnTo>
+                  <a:lnTo>
+                    <a:pt x="931092" y="2676458"/>
+                  </a:lnTo>
+                  <a:lnTo>
+                    <a:pt x="1002715" y="2680263"/>
+                  </a:lnTo>
+                  <a:lnTo>
+                    <a:pt x="1074337" y="2684052"/>
+                  </a:lnTo>
+                  <a:lnTo>
+                    <a:pt x="1145960" y="2687827"/>
+                  </a:lnTo>
+                  <a:lnTo>
+                    <a:pt x="1217582" y="2691587"/>
+                  </a:lnTo>
+                  <a:lnTo>
+                    <a:pt x="1289205" y="2695333"/>
+                  </a:lnTo>
+                  <a:lnTo>
+                    <a:pt x="1360827" y="2699064"/>
+                  </a:lnTo>
+                  <a:lnTo>
+                    <a:pt x="1432450" y="2702780"/>
+                  </a:lnTo>
+                  <a:lnTo>
+                    <a:pt x="1504073" y="2706482"/>
+                  </a:lnTo>
+                  <a:lnTo>
+                    <a:pt x="1575695" y="2710169"/>
+                  </a:lnTo>
+                  <a:lnTo>
+                    <a:pt x="1647318" y="2713843"/>
+                  </a:lnTo>
+                  <a:lnTo>
+                    <a:pt x="1718940" y="2717501"/>
+                  </a:lnTo>
+                  <a:lnTo>
+                    <a:pt x="1790563" y="2721146"/>
+                  </a:lnTo>
+                  <a:lnTo>
+                    <a:pt x="1862185" y="2724776"/>
+                  </a:lnTo>
+                  <a:lnTo>
+                    <a:pt x="1933808" y="2728392"/>
+                  </a:lnTo>
+                  <a:lnTo>
+                    <a:pt x="2005430" y="2731994"/>
+                  </a:lnTo>
+                  <a:lnTo>
+                    <a:pt x="2077053" y="2735582"/>
+                  </a:lnTo>
+                  <a:lnTo>
+                    <a:pt x="2148675" y="2739156"/>
+                  </a:lnTo>
+                  <a:lnTo>
+                    <a:pt x="2220298" y="2742717"/>
+                  </a:lnTo>
+                  <a:lnTo>
+                    <a:pt x="2291920" y="2746263"/>
+                  </a:lnTo>
+                  <a:lnTo>
+                    <a:pt x="2363543" y="2749795"/>
+                  </a:lnTo>
+                  <a:lnTo>
+                    <a:pt x="2435165" y="2753314"/>
+                  </a:lnTo>
+                  <a:lnTo>
+                    <a:pt x="2506788" y="2756819"/>
+                  </a:lnTo>
+                  <a:lnTo>
+                    <a:pt x="2578410" y="2760310"/>
+                  </a:lnTo>
+                  <a:lnTo>
+                    <a:pt x="2650033" y="2763788"/>
+                  </a:lnTo>
+                  <a:lnTo>
+                    <a:pt x="2721655" y="2767252"/>
+                  </a:lnTo>
+                  <a:lnTo>
+                    <a:pt x="2793278" y="2770703"/>
+                  </a:lnTo>
+                  <a:lnTo>
+                    <a:pt x="2864901" y="2774140"/>
+                  </a:lnTo>
+                  <a:lnTo>
+                    <a:pt x="2936523" y="2777564"/>
+                  </a:lnTo>
+                  <a:lnTo>
+                    <a:pt x="3008146" y="2780974"/>
+                  </a:lnTo>
+                  <a:lnTo>
+                    <a:pt x="3079768" y="2770504"/>
+                  </a:lnTo>
+                  <a:lnTo>
+                    <a:pt x="3151391" y="2739664"/>
+                  </a:lnTo>
+                  <a:lnTo>
+                    <a:pt x="3223013" y="2707746"/>
+                  </a:lnTo>
+                  <a:lnTo>
+                    <a:pt x="3294636" y="2674712"/>
+                  </a:lnTo>
+                  <a:lnTo>
+                    <a:pt x="3366258" y="2640523"/>
+                  </a:lnTo>
+                  <a:lnTo>
+                    <a:pt x="3437881" y="2605138"/>
+                  </a:lnTo>
+                  <a:lnTo>
+                    <a:pt x="3509503" y="2568517"/>
+                  </a:lnTo>
+                  <a:lnTo>
+                    <a:pt x="3581126" y="2530615"/>
+                  </a:lnTo>
+                  <a:lnTo>
+                    <a:pt x="3652748" y="2491388"/>
+                  </a:lnTo>
+                  <a:lnTo>
+                    <a:pt x="3724371" y="2450790"/>
+                  </a:lnTo>
+                  <a:lnTo>
+                    <a:pt x="3795993" y="2408772"/>
+                  </a:lnTo>
+                  <a:lnTo>
+                    <a:pt x="3867616" y="2365286"/>
+                  </a:lnTo>
+                  <a:lnTo>
+                    <a:pt x="3939238" y="2320279"/>
+                  </a:lnTo>
+                  <a:lnTo>
+                    <a:pt x="4010861" y="2273699"/>
+                  </a:lnTo>
+                  <a:lnTo>
+                    <a:pt x="4082483" y="2225490"/>
+                  </a:lnTo>
+                  <a:lnTo>
+                    <a:pt x="4154106" y="2175596"/>
+                  </a:lnTo>
+                  <a:lnTo>
+                    <a:pt x="4225729" y="2123957"/>
+                  </a:lnTo>
+                  <a:lnTo>
+                    <a:pt x="4297351" y="2070513"/>
+                  </a:lnTo>
+                  <a:lnTo>
+                    <a:pt x="4368974" y="2015201"/>
+                  </a:lnTo>
+                  <a:lnTo>
+                    <a:pt x="4440596" y="1957955"/>
+                  </a:lnTo>
+                  <a:lnTo>
+                    <a:pt x="4512219" y="1898708"/>
+                  </a:lnTo>
+                  <a:lnTo>
+                    <a:pt x="4583841" y="1837389"/>
+                  </a:lnTo>
+                  <a:lnTo>
+                    <a:pt x="4655464" y="1773927"/>
+                  </a:lnTo>
+                  <a:lnTo>
+                    <a:pt x="4727086" y="1708245"/>
+                  </a:lnTo>
+                  <a:lnTo>
+                    <a:pt x="4798709" y="1640268"/>
+                  </a:lnTo>
+                  <a:lnTo>
+                    <a:pt x="4870331" y="1569914"/>
+                  </a:lnTo>
+                  <a:lnTo>
+                    <a:pt x="4941954" y="1497101"/>
+                  </a:lnTo>
+                  <a:lnTo>
+                    <a:pt x="5013576" y="1421741"/>
+                  </a:lnTo>
+                  <a:lnTo>
+                    <a:pt x="5085199" y="1343748"/>
+                  </a:lnTo>
+                  <a:lnTo>
+                    <a:pt x="5156821" y="1263027"/>
+                  </a:lnTo>
+                  <a:lnTo>
+                    <a:pt x="5228444" y="1179485"/>
+                  </a:lnTo>
+                  <a:lnTo>
+                    <a:pt x="5300066" y="1093022"/>
+                  </a:lnTo>
+                  <a:lnTo>
+                    <a:pt x="5371689" y="1003536"/>
+                  </a:lnTo>
+                  <a:lnTo>
+                    <a:pt x="5443311" y="910921"/>
+                  </a:lnTo>
+                  <a:lnTo>
+                    <a:pt x="5514934" y="815069"/>
+                  </a:lnTo>
+                  <a:lnTo>
+                    <a:pt x="5586557" y="715865"/>
+                  </a:lnTo>
+                  <a:lnTo>
+                    <a:pt x="5658179" y="613194"/>
+                  </a:lnTo>
+                  <a:lnTo>
+                    <a:pt x="5729802" y="506933"/>
+                  </a:lnTo>
+                  <a:lnTo>
+                    <a:pt x="5801424" y="396957"/>
+                  </a:lnTo>
+                  <a:lnTo>
+                    <a:pt x="5873047" y="283136"/>
+                  </a:lnTo>
+                  <a:lnTo>
+                    <a:pt x="5944669" y="165336"/>
+                  </a:lnTo>
+                  <a:lnTo>
+                    <a:pt x="6016292" y="43417"/>
+                  </a:lnTo>
+                  <a:lnTo>
+                    <a:pt x="6040936" y="0"/>
                   </a:lnTo>
                 </a:path>
               </a:pathLst>
@@ -4018,312 +4006,312 @@
           </p:nvSpPr>
           <p:spPr>
             <a:xfrm>
-              <a:off x="1172049" y="4681620"/>
-              <a:ext cx="7090630" cy="647965"/>
+              <a:off x="1172049" y="4680935"/>
+              <a:ext cx="7090630" cy="666986"/>
             </a:xfrm>
             <a:custGeom>
               <a:avLst/>
               <a:pathLst>
-                <a:path w="7090630" h="647965">
+                <a:path w="7090630" h="666986">
                   <a:moveTo>
-                    <a:pt x="7090630" y="241071"/>
+                    <a:pt x="7090630" y="170543"/>
                   </a:moveTo>
                   <a:lnTo>
-                    <a:pt x="7019007" y="237418"/>
-                  </a:lnTo>
-                  <a:lnTo>
-                    <a:pt x="6947385" y="233744"/>
-                  </a:lnTo>
-                  <a:lnTo>
-                    <a:pt x="6875762" y="230049"/>
-                  </a:lnTo>
-                  <a:lnTo>
-                    <a:pt x="6804139" y="226332"/>
-                  </a:lnTo>
-                  <a:lnTo>
-                    <a:pt x="6732517" y="222593"/>
-                  </a:lnTo>
-                  <a:lnTo>
-                    <a:pt x="6660894" y="218832"/>
-                  </a:lnTo>
-                  <a:lnTo>
-                    <a:pt x="6589272" y="215050"/>
-                  </a:lnTo>
-                  <a:lnTo>
-                    <a:pt x="6517649" y="211246"/>
-                  </a:lnTo>
-                  <a:lnTo>
-                    <a:pt x="6446027" y="207419"/>
-                  </a:lnTo>
-                  <a:lnTo>
-                    <a:pt x="6374404" y="203570"/>
-                  </a:lnTo>
-                  <a:lnTo>
-                    <a:pt x="6302782" y="199699"/>
-                  </a:lnTo>
-                  <a:lnTo>
-                    <a:pt x="6231159" y="195805"/>
-                  </a:lnTo>
-                  <a:lnTo>
-                    <a:pt x="6159537" y="191888"/>
-                  </a:lnTo>
-                  <a:lnTo>
-                    <a:pt x="6087914" y="187949"/>
-                  </a:lnTo>
-                  <a:lnTo>
-                    <a:pt x="6016292" y="183987"/>
-                  </a:lnTo>
-                  <a:lnTo>
-                    <a:pt x="5944669" y="180001"/>
-                  </a:lnTo>
-                  <a:lnTo>
-                    <a:pt x="5873047" y="175992"/>
-                  </a:lnTo>
-                  <a:lnTo>
-                    <a:pt x="5801424" y="171960"/>
-                  </a:lnTo>
-                  <a:lnTo>
-                    <a:pt x="5729802" y="167905"/>
-                  </a:lnTo>
-                  <a:lnTo>
-                    <a:pt x="5658179" y="163825"/>
-                  </a:lnTo>
-                  <a:lnTo>
-                    <a:pt x="5586557" y="159722"/>
-                  </a:lnTo>
-                  <a:lnTo>
-                    <a:pt x="5514934" y="155595"/>
-                  </a:lnTo>
-                  <a:lnTo>
-                    <a:pt x="5443311" y="151444"/>
-                  </a:lnTo>
-                  <a:lnTo>
-                    <a:pt x="5371689" y="147269"/>
-                  </a:lnTo>
-                  <a:lnTo>
-                    <a:pt x="5300066" y="143069"/>
-                  </a:lnTo>
-                  <a:lnTo>
-                    <a:pt x="5228444" y="138845"/>
-                  </a:lnTo>
-                  <a:lnTo>
-                    <a:pt x="5156821" y="134597"/>
-                  </a:lnTo>
-                  <a:lnTo>
-                    <a:pt x="5085199" y="130323"/>
-                  </a:lnTo>
-                  <a:lnTo>
-                    <a:pt x="5013576" y="126025"/>
-                  </a:lnTo>
-                  <a:lnTo>
-                    <a:pt x="4941954" y="121701"/>
-                  </a:lnTo>
-                  <a:lnTo>
-                    <a:pt x="4870331" y="117353"/>
-                  </a:lnTo>
-                  <a:lnTo>
-                    <a:pt x="4798709" y="112979"/>
-                  </a:lnTo>
-                  <a:lnTo>
-                    <a:pt x="4727086" y="108579"/>
-                  </a:lnTo>
-                  <a:lnTo>
-                    <a:pt x="4655464" y="104154"/>
-                  </a:lnTo>
-                  <a:lnTo>
-                    <a:pt x="4583841" y="99703"/>
-                  </a:lnTo>
-                  <a:lnTo>
-                    <a:pt x="4512219" y="95226"/>
-                  </a:lnTo>
-                  <a:lnTo>
-                    <a:pt x="4440596" y="90723"/>
-                  </a:lnTo>
-                  <a:lnTo>
-                    <a:pt x="4368974" y="86194"/>
-                  </a:lnTo>
-                  <a:lnTo>
-                    <a:pt x="4297351" y="81638"/>
-                  </a:lnTo>
-                  <a:lnTo>
-                    <a:pt x="4225729" y="77056"/>
-                  </a:lnTo>
-                  <a:lnTo>
-                    <a:pt x="4154106" y="72447"/>
-                  </a:lnTo>
-                  <a:lnTo>
-                    <a:pt x="4082483" y="67812"/>
-                  </a:lnTo>
-                  <a:lnTo>
-                    <a:pt x="4010861" y="63149"/>
-                  </a:lnTo>
-                  <a:lnTo>
-                    <a:pt x="3939238" y="58459"/>
-                  </a:lnTo>
-                  <a:lnTo>
-                    <a:pt x="3867616" y="53741"/>
-                  </a:lnTo>
-                  <a:lnTo>
-                    <a:pt x="3795993" y="48996"/>
-                  </a:lnTo>
-                  <a:lnTo>
-                    <a:pt x="3724371" y="44224"/>
-                  </a:lnTo>
-                  <a:lnTo>
-                    <a:pt x="3652748" y="39424"/>
-                  </a:lnTo>
-                  <a:lnTo>
-                    <a:pt x="3581126" y="34595"/>
-                  </a:lnTo>
-                  <a:lnTo>
-                    <a:pt x="3509503" y="29739"/>
-                  </a:lnTo>
-                  <a:lnTo>
-                    <a:pt x="3437881" y="24854"/>
-                  </a:lnTo>
-                  <a:lnTo>
-                    <a:pt x="3366258" y="19941"/>
-                  </a:lnTo>
-                  <a:lnTo>
-                    <a:pt x="3294636" y="14999"/>
-                  </a:lnTo>
-                  <a:lnTo>
-                    <a:pt x="3223013" y="10028"/>
-                  </a:lnTo>
-                  <a:lnTo>
-                    <a:pt x="3151391" y="5028"/>
+                    <a:pt x="7019007" y="167813"/>
+                  </a:lnTo>
+                  <a:lnTo>
+                    <a:pt x="6947385" y="165072"/>
+                  </a:lnTo>
+                  <a:lnTo>
+                    <a:pt x="6875762" y="162321"/>
+                  </a:lnTo>
+                  <a:lnTo>
+                    <a:pt x="6804139" y="159559"/>
+                  </a:lnTo>
+                  <a:lnTo>
+                    <a:pt x="6732517" y="156786"/>
+                  </a:lnTo>
+                  <a:lnTo>
+                    <a:pt x="6660894" y="154002"/>
+                  </a:lnTo>
+                  <a:lnTo>
+                    <a:pt x="6589272" y="151208"/>
+                  </a:lnTo>
+                  <a:lnTo>
+                    <a:pt x="6517649" y="148402"/>
+                  </a:lnTo>
+                  <a:lnTo>
+                    <a:pt x="6446027" y="145586"/>
+                  </a:lnTo>
+                  <a:lnTo>
+                    <a:pt x="6374404" y="142758"/>
+                  </a:lnTo>
+                  <a:lnTo>
+                    <a:pt x="6302782" y="139920"/>
+                  </a:lnTo>
+                  <a:lnTo>
+                    <a:pt x="6231159" y="137070"/>
+                  </a:lnTo>
+                  <a:lnTo>
+                    <a:pt x="6159537" y="134209"/>
+                  </a:lnTo>
+                  <a:lnTo>
+                    <a:pt x="6087914" y="131337"/>
+                  </a:lnTo>
+                  <a:lnTo>
+                    <a:pt x="6016292" y="128454"/>
+                  </a:lnTo>
+                  <a:lnTo>
+                    <a:pt x="5944669" y="125559"/>
+                  </a:lnTo>
+                  <a:lnTo>
+                    <a:pt x="5873047" y="122653"/>
+                  </a:lnTo>
+                  <a:lnTo>
+                    <a:pt x="5801424" y="119736"/>
+                  </a:lnTo>
+                  <a:lnTo>
+                    <a:pt x="5729802" y="116807"/>
+                  </a:lnTo>
+                  <a:lnTo>
+                    <a:pt x="5658179" y="113867"/>
+                  </a:lnTo>
+                  <a:lnTo>
+                    <a:pt x="5586557" y="110916"/>
+                  </a:lnTo>
+                  <a:lnTo>
+                    <a:pt x="5514934" y="107952"/>
+                  </a:lnTo>
+                  <a:lnTo>
+                    <a:pt x="5443311" y="104978"/>
+                  </a:lnTo>
+                  <a:lnTo>
+                    <a:pt x="5371689" y="101991"/>
+                  </a:lnTo>
+                  <a:lnTo>
+                    <a:pt x="5300066" y="98993"/>
+                  </a:lnTo>
+                  <a:lnTo>
+                    <a:pt x="5228444" y="95983"/>
+                  </a:lnTo>
+                  <a:lnTo>
+                    <a:pt x="5156821" y="92962"/>
+                  </a:lnTo>
+                  <a:lnTo>
+                    <a:pt x="5085199" y="89928"/>
+                  </a:lnTo>
+                  <a:lnTo>
+                    <a:pt x="5013576" y="86883"/>
+                  </a:lnTo>
+                  <a:lnTo>
+                    <a:pt x="4941954" y="83826"/>
+                  </a:lnTo>
+                  <a:lnTo>
+                    <a:pt x="4870331" y="80756"/>
+                  </a:lnTo>
+                  <a:lnTo>
+                    <a:pt x="4798709" y="77675"/>
+                  </a:lnTo>
+                  <a:lnTo>
+                    <a:pt x="4727086" y="74582"/>
+                  </a:lnTo>
+                  <a:lnTo>
+                    <a:pt x="4655464" y="71477"/>
+                  </a:lnTo>
+                  <a:lnTo>
+                    <a:pt x="4583841" y="68359"/>
+                  </a:lnTo>
+                  <a:lnTo>
+                    <a:pt x="4512219" y="65230"/>
+                  </a:lnTo>
+                  <a:lnTo>
+                    <a:pt x="4440596" y="62088"/>
+                  </a:lnTo>
+                  <a:lnTo>
+                    <a:pt x="4368974" y="58933"/>
+                  </a:lnTo>
+                  <a:lnTo>
+                    <a:pt x="4297351" y="55767"/>
+                  </a:lnTo>
+                  <a:lnTo>
+                    <a:pt x="4225729" y="52588"/>
+                  </a:lnTo>
+                  <a:lnTo>
+                    <a:pt x="4154106" y="49396"/>
+                  </a:lnTo>
+                  <a:lnTo>
+                    <a:pt x="4082483" y="46193"/>
+                  </a:lnTo>
+                  <a:lnTo>
+                    <a:pt x="4010861" y="42976"/>
+                  </a:lnTo>
+                  <a:lnTo>
+                    <a:pt x="3939238" y="39747"/>
+                  </a:lnTo>
+                  <a:lnTo>
+                    <a:pt x="3867616" y="36506"/>
+                  </a:lnTo>
+                  <a:lnTo>
+                    <a:pt x="3795993" y="33251"/>
+                  </a:lnTo>
+                  <a:lnTo>
+                    <a:pt x="3724371" y="29984"/>
+                  </a:lnTo>
+                  <a:lnTo>
+                    <a:pt x="3652748" y="26704"/>
+                  </a:lnTo>
+                  <a:lnTo>
+                    <a:pt x="3581126" y="23412"/>
+                  </a:lnTo>
+                  <a:lnTo>
+                    <a:pt x="3509503" y="20106"/>
+                  </a:lnTo>
+                  <a:lnTo>
+                    <a:pt x="3437881" y="16788"/>
+                  </a:lnTo>
+                  <a:lnTo>
+                    <a:pt x="3366258" y="13456"/>
+                  </a:lnTo>
+                  <a:lnTo>
+                    <a:pt x="3294636" y="10112"/>
+                  </a:lnTo>
+                  <a:lnTo>
+                    <a:pt x="3223013" y="6754"/>
+                  </a:lnTo>
+                  <a:lnTo>
+                    <a:pt x="3151391" y="3383"/>
                   </a:lnTo>
                   <a:lnTo>
                     <a:pt x="3079768" y="0"/>
                   </a:lnTo>
                   <a:lnTo>
-                    <a:pt x="3008146" y="14222"/>
-                  </a:lnTo>
-                  <a:lnTo>
-                    <a:pt x="2936523" y="41359"/>
-                  </a:lnTo>
-                  <a:lnTo>
-                    <a:pt x="2864901" y="67633"/>
-                  </a:lnTo>
-                  <a:lnTo>
-                    <a:pt x="2793278" y="93071"/>
-                  </a:lnTo>
-                  <a:lnTo>
-                    <a:pt x="2721655" y="117700"/>
-                  </a:lnTo>
-                  <a:lnTo>
-                    <a:pt x="2650033" y="141546"/>
-                  </a:lnTo>
-                  <a:lnTo>
-                    <a:pt x="2578410" y="164634"/>
-                  </a:lnTo>
-                  <a:lnTo>
-                    <a:pt x="2506788" y="186988"/>
-                  </a:lnTo>
-                  <a:lnTo>
-                    <a:pt x="2435165" y="208631"/>
-                  </a:lnTo>
-                  <a:lnTo>
-                    <a:pt x="2363543" y="229585"/>
-                  </a:lnTo>
-                  <a:lnTo>
-                    <a:pt x="2291920" y="249874"/>
-                  </a:lnTo>
-                  <a:lnTo>
-                    <a:pt x="2220298" y="269517"/>
-                  </a:lnTo>
-                  <a:lnTo>
-                    <a:pt x="2148675" y="288535"/>
-                  </a:lnTo>
-                  <a:lnTo>
-                    <a:pt x="2077053" y="306949"/>
-                  </a:lnTo>
-                  <a:lnTo>
-                    <a:pt x="2005430" y="324777"/>
-                  </a:lnTo>
-                  <a:lnTo>
-                    <a:pt x="1933808" y="342038"/>
-                  </a:lnTo>
-                  <a:lnTo>
-                    <a:pt x="1862185" y="358750"/>
-                  </a:lnTo>
-                  <a:lnTo>
-                    <a:pt x="1790563" y="374931"/>
-                  </a:lnTo>
-                  <a:lnTo>
-                    <a:pt x="1718940" y="390597"/>
-                  </a:lnTo>
-                  <a:lnTo>
-                    <a:pt x="1647318" y="405765"/>
-                  </a:lnTo>
-                  <a:lnTo>
-                    <a:pt x="1575695" y="420451"/>
-                  </a:lnTo>
-                  <a:lnTo>
-                    <a:pt x="1504073" y="434670"/>
-                  </a:lnTo>
-                  <a:lnTo>
-                    <a:pt x="1432450" y="448437"/>
-                  </a:lnTo>
-                  <a:lnTo>
-                    <a:pt x="1360827" y="461765"/>
-                  </a:lnTo>
-                  <a:lnTo>
-                    <a:pt x="1289205" y="474670"/>
-                  </a:lnTo>
-                  <a:lnTo>
-                    <a:pt x="1217582" y="487165"/>
-                  </a:lnTo>
-                  <a:lnTo>
-                    <a:pt x="1145960" y="499262"/>
-                  </a:lnTo>
-                  <a:lnTo>
-                    <a:pt x="1074337" y="510975"/>
-                  </a:lnTo>
-                  <a:lnTo>
-                    <a:pt x="1002715" y="522315"/>
-                  </a:lnTo>
-                  <a:lnTo>
-                    <a:pt x="931092" y="533294"/>
-                  </a:lnTo>
-                  <a:lnTo>
-                    <a:pt x="859470" y="543925"/>
-                  </a:lnTo>
-                  <a:lnTo>
-                    <a:pt x="787847" y="554217"/>
-                  </a:lnTo>
-                  <a:lnTo>
-                    <a:pt x="716225" y="564182"/>
-                  </a:lnTo>
-                  <a:lnTo>
-                    <a:pt x="644602" y="573830"/>
-                  </a:lnTo>
-                  <a:lnTo>
-                    <a:pt x="572980" y="583172"/>
-                  </a:lnTo>
-                  <a:lnTo>
-                    <a:pt x="501357" y="592216"/>
-                  </a:lnTo>
-                  <a:lnTo>
-                    <a:pt x="429735" y="600973"/>
-                  </a:lnTo>
-                  <a:lnTo>
-                    <a:pt x="358112" y="609451"/>
-                  </a:lnTo>
-                  <a:lnTo>
-                    <a:pt x="286490" y="617659"/>
-                  </a:lnTo>
-                  <a:lnTo>
-                    <a:pt x="214867" y="625607"/>
-                  </a:lnTo>
-                  <a:lnTo>
-                    <a:pt x="143245" y="633302"/>
-                  </a:lnTo>
-                  <a:lnTo>
-                    <a:pt x="71622" y="640752"/>
-                  </a:lnTo>
-                  <a:lnTo>
-                    <a:pt x="0" y="647965"/>
+                    <a:pt x="3008146" y="15931"/>
+                  </a:lnTo>
+                  <a:lnTo>
+                    <a:pt x="2936523" y="44723"/>
+                  </a:lnTo>
+                  <a:lnTo>
+                    <a:pt x="2864901" y="72542"/>
+                  </a:lnTo>
+                  <a:lnTo>
+                    <a:pt x="2793278" y="99422"/>
+                  </a:lnTo>
+                  <a:lnTo>
+                    <a:pt x="2721655" y="125393"/>
+                  </a:lnTo>
+                  <a:lnTo>
+                    <a:pt x="2650033" y="150487"/>
+                  </a:lnTo>
+                  <a:lnTo>
+                    <a:pt x="2578410" y="174734"/>
+                  </a:lnTo>
+                  <a:lnTo>
+                    <a:pt x="2506788" y="198161"/>
+                  </a:lnTo>
+                  <a:lnTo>
+                    <a:pt x="2435165" y="220797"/>
+                  </a:lnTo>
+                  <a:lnTo>
+                    <a:pt x="2363543" y="242669"/>
+                  </a:lnTo>
+                  <a:lnTo>
+                    <a:pt x="2291920" y="263801"/>
+                  </a:lnTo>
+                  <a:lnTo>
+                    <a:pt x="2220298" y="284220"/>
+                  </a:lnTo>
+                  <a:lnTo>
+                    <a:pt x="2148675" y="303949"/>
+                  </a:lnTo>
+                  <a:lnTo>
+                    <a:pt x="2077053" y="323012"/>
+                  </a:lnTo>
+                  <a:lnTo>
+                    <a:pt x="2005430" y="341431"/>
+                  </a:lnTo>
+                  <a:lnTo>
+                    <a:pt x="1933808" y="359227"/>
+                  </a:lnTo>
+                  <a:lnTo>
+                    <a:pt x="1862185" y="376423"/>
+                  </a:lnTo>
+                  <a:lnTo>
+                    <a:pt x="1790563" y="393037"/>
+                  </a:lnTo>
+                  <a:lnTo>
+                    <a:pt x="1718940" y="409090"/>
+                  </a:lnTo>
+                  <a:lnTo>
+                    <a:pt x="1647318" y="424601"/>
+                  </a:lnTo>
+                  <a:lnTo>
+                    <a:pt x="1575695" y="439588"/>
+                  </a:lnTo>
+                  <a:lnTo>
+                    <a:pt x="1504073" y="454069"/>
+                  </a:lnTo>
+                  <a:lnTo>
+                    <a:pt x="1432450" y="468061"/>
+                  </a:lnTo>
+                  <a:lnTo>
+                    <a:pt x="1360827" y="481580"/>
+                  </a:lnTo>
+                  <a:lnTo>
+                    <a:pt x="1289205" y="494642"/>
+                  </a:lnTo>
+                  <a:lnTo>
+                    <a:pt x="1217582" y="507263"/>
+                  </a:lnTo>
+                  <a:lnTo>
+                    <a:pt x="1145960" y="519458"/>
+                  </a:lnTo>
+                  <a:lnTo>
+                    <a:pt x="1074337" y="531241"/>
+                  </a:lnTo>
+                  <a:lnTo>
+                    <a:pt x="1002715" y="542626"/>
+                  </a:lnTo>
+                  <a:lnTo>
+                    <a:pt x="931092" y="553626"/>
+                  </a:lnTo>
+                  <a:lnTo>
+                    <a:pt x="859470" y="564254"/>
+                  </a:lnTo>
+                  <a:lnTo>
+                    <a:pt x="787847" y="574524"/>
+                  </a:lnTo>
+                  <a:lnTo>
+                    <a:pt x="716225" y="584447"/>
+                  </a:lnTo>
+                  <a:lnTo>
+                    <a:pt x="644602" y="594034"/>
+                  </a:lnTo>
+                  <a:lnTo>
+                    <a:pt x="572980" y="603298"/>
+                  </a:lnTo>
+                  <a:lnTo>
+                    <a:pt x="501357" y="612249"/>
+                  </a:lnTo>
+                  <a:lnTo>
+                    <a:pt x="429735" y="620897"/>
+                  </a:lnTo>
+                  <a:lnTo>
+                    <a:pt x="358112" y="629253"/>
+                  </a:lnTo>
+                  <a:lnTo>
+                    <a:pt x="286490" y="637327"/>
+                  </a:lnTo>
+                  <a:lnTo>
+                    <a:pt x="214867" y="645128"/>
+                  </a:lnTo>
+                  <a:lnTo>
+                    <a:pt x="143245" y="652666"/>
+                  </a:lnTo>
+                  <a:lnTo>
+                    <a:pt x="71622" y="659949"/>
+                  </a:lnTo>
+                  <a:lnTo>
+                    <a:pt x="0" y="666986"/>
                   </a:lnTo>
                 </a:path>
               </a:pathLst>
@@ -4343,309 +4331,309 @@
           </p:nvSpPr>
           <p:spPr>
             <a:xfrm>
-              <a:off x="1172049" y="3712565"/>
-              <a:ext cx="7090630" cy="1342019"/>
+              <a:off x="1172049" y="3495780"/>
+              <a:ext cx="7090630" cy="1598757"/>
             </a:xfrm>
             <a:custGeom>
               <a:avLst/>
               <a:pathLst>
-                <a:path w="7090630" h="1342019">
+                <a:path w="7090630" h="1598757">
                   <a:moveTo>
-                    <a:pt x="0" y="1342019"/>
+                    <a:pt x="0" y="1598757"/>
                   </a:moveTo>
                   <a:lnTo>
-                    <a:pt x="71622" y="1335421"/>
-                  </a:lnTo>
-                  <a:lnTo>
-                    <a:pt x="143245" y="1328735"/>
-                  </a:lnTo>
-                  <a:lnTo>
-                    <a:pt x="214867" y="1321960"/>
-                  </a:lnTo>
-                  <a:lnTo>
-                    <a:pt x="286490" y="1315094"/>
-                  </a:lnTo>
-                  <a:lnTo>
-                    <a:pt x="358112" y="1308137"/>
-                  </a:lnTo>
-                  <a:lnTo>
-                    <a:pt x="429735" y="1301087"/>
-                  </a:lnTo>
-                  <a:lnTo>
-                    <a:pt x="501357" y="1293942"/>
-                  </a:lnTo>
-                  <a:lnTo>
-                    <a:pt x="572980" y="1286703"/>
-                  </a:lnTo>
-                  <a:lnTo>
-                    <a:pt x="644602" y="1279367"/>
-                  </a:lnTo>
-                  <a:lnTo>
-                    <a:pt x="716225" y="1271933"/>
-                  </a:lnTo>
-                  <a:lnTo>
-                    <a:pt x="787847" y="1264400"/>
-                  </a:lnTo>
-                  <a:lnTo>
-                    <a:pt x="859470" y="1256767"/>
-                  </a:lnTo>
-                  <a:lnTo>
-                    <a:pt x="931092" y="1249031"/>
-                  </a:lnTo>
-                  <a:lnTo>
-                    <a:pt x="1002715" y="1241193"/>
-                  </a:lnTo>
-                  <a:lnTo>
-                    <a:pt x="1074337" y="1233250"/>
-                  </a:lnTo>
-                  <a:lnTo>
-                    <a:pt x="1145960" y="1225200"/>
-                  </a:lnTo>
-                  <a:lnTo>
-                    <a:pt x="1217582" y="1217044"/>
-                  </a:lnTo>
-                  <a:lnTo>
-                    <a:pt x="1289205" y="1208779"/>
-                  </a:lnTo>
-                  <a:lnTo>
-                    <a:pt x="1360827" y="1200403"/>
-                  </a:lnTo>
-                  <a:lnTo>
-                    <a:pt x="1432450" y="1191916"/>
-                  </a:lnTo>
-                  <a:lnTo>
-                    <a:pt x="1504073" y="1183316"/>
-                  </a:lnTo>
-                  <a:lnTo>
-                    <a:pt x="1575695" y="1174600"/>
-                  </a:lnTo>
-                  <a:lnTo>
-                    <a:pt x="1647318" y="1165769"/>
-                  </a:lnTo>
-                  <a:lnTo>
-                    <a:pt x="1718940" y="1156820"/>
-                  </a:lnTo>
-                  <a:lnTo>
-                    <a:pt x="1790563" y="1147751"/>
-                  </a:lnTo>
-                  <a:lnTo>
-                    <a:pt x="1862185" y="1138562"/>
-                  </a:lnTo>
-                  <a:lnTo>
-                    <a:pt x="1933808" y="1129249"/>
-                  </a:lnTo>
-                  <a:lnTo>
-                    <a:pt x="2005430" y="1119813"/>
-                  </a:lnTo>
-                  <a:lnTo>
-                    <a:pt x="2077053" y="1110251"/>
-                  </a:lnTo>
-                  <a:lnTo>
-                    <a:pt x="2148675" y="1100561"/>
-                  </a:lnTo>
-                  <a:lnTo>
-                    <a:pt x="2220298" y="1090742"/>
-                  </a:lnTo>
-                  <a:lnTo>
-                    <a:pt x="2291920" y="1080792"/>
-                  </a:lnTo>
-                  <a:lnTo>
-                    <a:pt x="2363543" y="1070709"/>
-                  </a:lnTo>
-                  <a:lnTo>
-                    <a:pt x="2435165" y="1060492"/>
-                  </a:lnTo>
-                  <a:lnTo>
-                    <a:pt x="2506788" y="1050138"/>
-                  </a:lnTo>
-                  <a:lnTo>
-                    <a:pt x="2578410" y="1039646"/>
-                  </a:lnTo>
-                  <a:lnTo>
-                    <a:pt x="2650033" y="1029015"/>
-                  </a:lnTo>
-                  <a:lnTo>
-                    <a:pt x="2721655" y="1018241"/>
-                  </a:lnTo>
-                  <a:lnTo>
-                    <a:pt x="2793278" y="1007324"/>
-                  </a:lnTo>
-                  <a:lnTo>
-                    <a:pt x="2864901" y="996261"/>
-                  </a:lnTo>
-                  <a:lnTo>
-                    <a:pt x="2936523" y="985051"/>
-                  </a:lnTo>
-                  <a:lnTo>
-                    <a:pt x="3008146" y="973691"/>
-                  </a:lnTo>
-                  <a:lnTo>
-                    <a:pt x="3079768" y="962179"/>
-                  </a:lnTo>
-                  <a:lnTo>
-                    <a:pt x="3151391" y="950514"/>
-                  </a:lnTo>
-                  <a:lnTo>
-                    <a:pt x="3223013" y="938693"/>
-                  </a:lnTo>
-                  <a:lnTo>
-                    <a:pt x="3294636" y="926715"/>
-                  </a:lnTo>
-                  <a:lnTo>
-                    <a:pt x="3366258" y="914577"/>
-                  </a:lnTo>
-                  <a:lnTo>
-                    <a:pt x="3437881" y="902277"/>
-                  </a:lnTo>
-                  <a:lnTo>
-                    <a:pt x="3509503" y="889813"/>
-                  </a:lnTo>
-                  <a:lnTo>
-                    <a:pt x="3581126" y="877182"/>
-                  </a:lnTo>
-                  <a:lnTo>
-                    <a:pt x="3652748" y="864383"/>
-                  </a:lnTo>
-                  <a:lnTo>
-                    <a:pt x="3724371" y="851414"/>
-                  </a:lnTo>
-                  <a:lnTo>
-                    <a:pt x="3795993" y="838271"/>
-                  </a:lnTo>
-                  <a:lnTo>
-                    <a:pt x="3867616" y="824953"/>
-                  </a:lnTo>
-                  <a:lnTo>
-                    <a:pt x="3939238" y="811457"/>
-                  </a:lnTo>
-                  <a:lnTo>
-                    <a:pt x="4010861" y="797782"/>
-                  </a:lnTo>
-                  <a:lnTo>
-                    <a:pt x="4082483" y="783924"/>
-                  </a:lnTo>
-                  <a:lnTo>
-                    <a:pt x="4154106" y="769881"/>
-                  </a:lnTo>
-                  <a:lnTo>
-                    <a:pt x="4225729" y="755650"/>
-                  </a:lnTo>
-                  <a:lnTo>
-                    <a:pt x="4297351" y="741230"/>
-                  </a:lnTo>
-                  <a:lnTo>
-                    <a:pt x="4368974" y="726618"/>
-                  </a:lnTo>
-                  <a:lnTo>
-                    <a:pt x="4440596" y="711811"/>
-                  </a:lnTo>
-                  <a:lnTo>
-                    <a:pt x="4512219" y="696806"/>
-                  </a:lnTo>
-                  <a:lnTo>
-                    <a:pt x="4583841" y="681601"/>
-                  </a:lnTo>
-                  <a:lnTo>
-                    <a:pt x="4655464" y="666193"/>
-                  </a:lnTo>
-                  <a:lnTo>
-                    <a:pt x="4727086" y="650579"/>
-                  </a:lnTo>
-                  <a:lnTo>
-                    <a:pt x="4798709" y="634757"/>
-                  </a:lnTo>
-                  <a:lnTo>
-                    <a:pt x="4870331" y="618725"/>
-                  </a:lnTo>
-                  <a:lnTo>
-                    <a:pt x="4941954" y="602478"/>
-                  </a:lnTo>
-                  <a:lnTo>
-                    <a:pt x="5013576" y="586015"/>
-                  </a:lnTo>
-                  <a:lnTo>
-                    <a:pt x="5085199" y="569332"/>
-                  </a:lnTo>
-                  <a:lnTo>
-                    <a:pt x="5156821" y="552426"/>
-                  </a:lnTo>
-                  <a:lnTo>
-                    <a:pt x="5228444" y="535295"/>
-                  </a:lnTo>
-                  <a:lnTo>
-                    <a:pt x="5300066" y="517935"/>
-                  </a:lnTo>
-                  <a:lnTo>
-                    <a:pt x="5371689" y="500344"/>
-                  </a:lnTo>
-                  <a:lnTo>
-                    <a:pt x="5443311" y="482519"/>
-                  </a:lnTo>
-                  <a:lnTo>
-                    <a:pt x="5514934" y="464455"/>
-                  </a:lnTo>
-                  <a:lnTo>
-                    <a:pt x="5586557" y="446150"/>
-                  </a:lnTo>
-                  <a:lnTo>
-                    <a:pt x="5658179" y="427602"/>
-                  </a:lnTo>
-                  <a:lnTo>
-                    <a:pt x="5729802" y="408805"/>
-                  </a:lnTo>
-                  <a:lnTo>
-                    <a:pt x="5801424" y="389758"/>
-                  </a:lnTo>
-                  <a:lnTo>
-                    <a:pt x="5873047" y="370457"/>
-                  </a:lnTo>
-                  <a:lnTo>
-                    <a:pt x="5944669" y="350899"/>
-                  </a:lnTo>
-                  <a:lnTo>
-                    <a:pt x="6016292" y="331080"/>
-                  </a:lnTo>
-                  <a:lnTo>
-                    <a:pt x="6087914" y="310996"/>
-                  </a:lnTo>
-                  <a:lnTo>
-                    <a:pt x="6159537" y="290644"/>
-                  </a:lnTo>
-                  <a:lnTo>
-                    <a:pt x="6231159" y="270021"/>
-                  </a:lnTo>
-                  <a:lnTo>
-                    <a:pt x="6302782" y="249123"/>
-                  </a:lnTo>
-                  <a:lnTo>
-                    <a:pt x="6374404" y="227946"/>
-                  </a:lnTo>
-                  <a:lnTo>
-                    <a:pt x="6446027" y="206486"/>
-                  </a:lnTo>
-                  <a:lnTo>
-                    <a:pt x="6517649" y="184740"/>
-                  </a:lnTo>
-                  <a:lnTo>
-                    <a:pt x="6589272" y="162705"/>
-                  </a:lnTo>
-                  <a:lnTo>
-                    <a:pt x="6660894" y="140375"/>
-                  </a:lnTo>
-                  <a:lnTo>
-                    <a:pt x="6732517" y="117747"/>
-                  </a:lnTo>
-                  <a:lnTo>
-                    <a:pt x="6804139" y="94818"/>
-                  </a:lnTo>
-                  <a:lnTo>
-                    <a:pt x="6875762" y="71582"/>
-                  </a:lnTo>
-                  <a:lnTo>
-                    <a:pt x="6947385" y="48037"/>
-                  </a:lnTo>
-                  <a:lnTo>
-                    <a:pt x="7019007" y="24177"/>
+                    <a:pt x="71622" y="1591780"/>
+                  </a:lnTo>
+                  <a:lnTo>
+                    <a:pt x="143245" y="1584695"/>
+                  </a:lnTo>
+                  <a:lnTo>
+                    <a:pt x="214867" y="1577502"/>
+                  </a:lnTo>
+                  <a:lnTo>
+                    <a:pt x="286490" y="1570199"/>
+                  </a:lnTo>
+                  <a:lnTo>
+                    <a:pt x="358112" y="1562783"/>
+                  </a:lnTo>
+                  <a:lnTo>
+                    <a:pt x="429735" y="1555254"/>
+                  </a:lnTo>
+                  <a:lnTo>
+                    <a:pt x="501357" y="1547609"/>
+                  </a:lnTo>
+                  <a:lnTo>
+                    <a:pt x="572980" y="1539847"/>
+                  </a:lnTo>
+                  <a:lnTo>
+                    <a:pt x="644602" y="1531966"/>
+                  </a:lnTo>
+                  <a:lnTo>
+                    <a:pt x="716225" y="1523963"/>
+                  </a:lnTo>
+                  <a:lnTo>
+                    <a:pt x="787847" y="1515838"/>
+                  </a:lnTo>
+                  <a:lnTo>
+                    <a:pt x="859470" y="1507589"/>
+                  </a:lnTo>
+                  <a:lnTo>
+                    <a:pt x="931092" y="1499212"/>
+                  </a:lnTo>
+                  <a:lnTo>
+                    <a:pt x="1002715" y="1490707"/>
+                  </a:lnTo>
+                  <a:lnTo>
+                    <a:pt x="1074337" y="1482072"/>
+                  </a:lnTo>
+                  <a:lnTo>
+                    <a:pt x="1145960" y="1473304"/>
+                  </a:lnTo>
+                  <a:lnTo>
+                    <a:pt x="1217582" y="1464402"/>
+                  </a:lnTo>
+                  <a:lnTo>
+                    <a:pt x="1289205" y="1455363"/>
+                  </a:lnTo>
+                  <a:lnTo>
+                    <a:pt x="1360827" y="1446185"/>
+                  </a:lnTo>
+                  <a:lnTo>
+                    <a:pt x="1432450" y="1436866"/>
+                  </a:lnTo>
+                  <a:lnTo>
+                    <a:pt x="1504073" y="1427405"/>
+                  </a:lnTo>
+                  <a:lnTo>
+                    <a:pt x="1575695" y="1417798"/>
+                  </a:lnTo>
+                  <a:lnTo>
+                    <a:pt x="1647318" y="1408044"/>
+                  </a:lnTo>
+                  <a:lnTo>
+                    <a:pt x="1718940" y="1398140"/>
+                  </a:lnTo>
+                  <a:lnTo>
+                    <a:pt x="1790563" y="1388084"/>
+                  </a:lnTo>
+                  <a:lnTo>
+                    <a:pt x="1862185" y="1377874"/>
+                  </a:lnTo>
+                  <a:lnTo>
+                    <a:pt x="1933808" y="1367507"/>
+                  </a:lnTo>
+                  <a:lnTo>
+                    <a:pt x="2005430" y="1356981"/>
+                  </a:lnTo>
+                  <a:lnTo>
+                    <a:pt x="2077053" y="1346293"/>
+                  </a:lnTo>
+                  <a:lnTo>
+                    <a:pt x="2148675" y="1335442"/>
+                  </a:lnTo>
+                  <a:lnTo>
+                    <a:pt x="2220298" y="1324424"/>
+                  </a:lnTo>
+                  <a:lnTo>
+                    <a:pt x="2291920" y="1313237"/>
+                  </a:lnTo>
+                  <a:lnTo>
+                    <a:pt x="2363543" y="1301878"/>
+                  </a:lnTo>
+                  <a:lnTo>
+                    <a:pt x="2435165" y="1290345"/>
+                  </a:lnTo>
+                  <a:lnTo>
+                    <a:pt x="2506788" y="1278635"/>
+                  </a:lnTo>
+                  <a:lnTo>
+                    <a:pt x="2578410" y="1266745"/>
+                  </a:lnTo>
+                  <a:lnTo>
+                    <a:pt x="2650033" y="1254673"/>
+                  </a:lnTo>
+                  <a:lnTo>
+                    <a:pt x="2721655" y="1242415"/>
+                  </a:lnTo>
+                  <a:lnTo>
+                    <a:pt x="2793278" y="1229970"/>
+                  </a:lnTo>
+                  <a:lnTo>
+                    <a:pt x="2864901" y="1217333"/>
+                  </a:lnTo>
+                  <a:lnTo>
+                    <a:pt x="2936523" y="1204503"/>
+                  </a:lnTo>
+                  <a:lnTo>
+                    <a:pt x="3008146" y="1191475"/>
+                  </a:lnTo>
+                  <a:lnTo>
+                    <a:pt x="3079768" y="1178248"/>
+                  </a:lnTo>
+                  <a:lnTo>
+                    <a:pt x="3151391" y="1164817"/>
+                  </a:lnTo>
+                  <a:lnTo>
+                    <a:pt x="3223013" y="1151181"/>
+                  </a:lnTo>
+                  <a:lnTo>
+                    <a:pt x="3294636" y="1137335"/>
+                  </a:lnTo>
+                  <a:lnTo>
+                    <a:pt x="3366258" y="1123277"/>
+                  </a:lnTo>
+                  <a:lnTo>
+                    <a:pt x="3437881" y="1109003"/>
+                  </a:lnTo>
+                  <a:lnTo>
+                    <a:pt x="3509503" y="1094510"/>
+                  </a:lnTo>
+                  <a:lnTo>
+                    <a:pt x="3581126" y="1079795"/>
+                  </a:lnTo>
+                  <a:lnTo>
+                    <a:pt x="3652748" y="1064854"/>
+                  </a:lnTo>
+                  <a:lnTo>
+                    <a:pt x="3724371" y="1049684"/>
+                  </a:lnTo>
+                  <a:lnTo>
+                    <a:pt x="3795993" y="1034280"/>
+                  </a:lnTo>
+                  <a:lnTo>
+                    <a:pt x="3867616" y="1018641"/>
+                  </a:lnTo>
+                  <a:lnTo>
+                    <a:pt x="3939238" y="1002761"/>
+                  </a:lnTo>
+                  <a:lnTo>
+                    <a:pt x="4010861" y="986638"/>
+                  </a:lnTo>
+                  <a:lnTo>
+                    <a:pt x="4082483" y="970267"/>
+                  </a:lnTo>
+                  <a:lnTo>
+                    <a:pt x="4154106" y="953645"/>
+                  </a:lnTo>
+                  <a:lnTo>
+                    <a:pt x="4225729" y="936768"/>
+                  </a:lnTo>
+                  <a:lnTo>
+                    <a:pt x="4297351" y="919632"/>
+                  </a:lnTo>
+                  <a:lnTo>
+                    <a:pt x="4368974" y="902233"/>
+                  </a:lnTo>
+                  <a:lnTo>
+                    <a:pt x="4440596" y="884567"/>
+                  </a:lnTo>
+                  <a:lnTo>
+                    <a:pt x="4512219" y="866630"/>
+                  </a:lnTo>
+                  <a:lnTo>
+                    <a:pt x="4583841" y="848418"/>
+                  </a:lnTo>
+                  <a:lnTo>
+                    <a:pt x="4655464" y="829926"/>
+                  </a:lnTo>
+                  <a:lnTo>
+                    <a:pt x="4727086" y="811150"/>
+                  </a:lnTo>
+                  <a:lnTo>
+                    <a:pt x="4798709" y="792087"/>
+                  </a:lnTo>
+                  <a:lnTo>
+                    <a:pt x="4870331" y="772730"/>
+                  </a:lnTo>
+                  <a:lnTo>
+                    <a:pt x="4941954" y="753077"/>
+                  </a:lnTo>
+                  <a:lnTo>
+                    <a:pt x="5013576" y="733122"/>
+                  </a:lnTo>
+                  <a:lnTo>
+                    <a:pt x="5085199" y="712861"/>
+                  </a:lnTo>
+                  <a:lnTo>
+                    <a:pt x="5156821" y="692289"/>
+                  </a:lnTo>
+                  <a:lnTo>
+                    <a:pt x="5228444" y="671401"/>
+                  </a:lnTo>
+                  <a:lnTo>
+                    <a:pt x="5300066" y="650193"/>
+                  </a:lnTo>
+                  <a:lnTo>
+                    <a:pt x="5371689" y="628659"/>
+                  </a:lnTo>
+                  <a:lnTo>
+                    <a:pt x="5443311" y="606795"/>
+                  </a:lnTo>
+                  <a:lnTo>
+                    <a:pt x="5514934" y="584595"/>
+                  </a:lnTo>
+                  <a:lnTo>
+                    <a:pt x="5586557" y="562055"/>
+                  </a:lnTo>
+                  <a:lnTo>
+                    <a:pt x="5658179" y="539169"/>
+                  </a:lnTo>
+                  <a:lnTo>
+                    <a:pt x="5729802" y="515931"/>
+                  </a:lnTo>
+                  <a:lnTo>
+                    <a:pt x="5801424" y="492337"/>
+                  </a:lnTo>
+                  <a:lnTo>
+                    <a:pt x="5873047" y="468381"/>
+                  </a:lnTo>
+                  <a:lnTo>
+                    <a:pt x="5944669" y="444057"/>
+                  </a:lnTo>
+                  <a:lnTo>
+                    <a:pt x="6016292" y="419360"/>
+                  </a:lnTo>
+                  <a:lnTo>
+                    <a:pt x="6087914" y="394284"/>
+                  </a:lnTo>
+                  <a:lnTo>
+                    <a:pt x="6159537" y="368823"/>
+                  </a:lnTo>
+                  <a:lnTo>
+                    <a:pt x="6231159" y="342972"/>
+                  </a:lnTo>
+                  <a:lnTo>
+                    <a:pt x="6302782" y="316724"/>
+                  </a:lnTo>
+                  <a:lnTo>
+                    <a:pt x="6374404" y="290072"/>
+                  </a:lnTo>
+                  <a:lnTo>
+                    <a:pt x="6446027" y="263012"/>
+                  </a:lnTo>
+                  <a:lnTo>
+                    <a:pt x="6517649" y="235537"/>
+                  </a:lnTo>
+                  <a:lnTo>
+                    <a:pt x="6589272" y="207640"/>
+                  </a:lnTo>
+                  <a:lnTo>
+                    <a:pt x="6660894" y="179315"/>
+                  </a:lnTo>
+                  <a:lnTo>
+                    <a:pt x="6732517" y="150555"/>
+                  </a:lnTo>
+                  <a:lnTo>
+                    <a:pt x="6804139" y="121354"/>
+                  </a:lnTo>
+                  <a:lnTo>
+                    <a:pt x="6875762" y="91705"/>
+                  </a:lnTo>
+                  <a:lnTo>
+                    <a:pt x="6947385" y="61601"/>
+                  </a:lnTo>
+                  <a:lnTo>
+                    <a:pt x="7019007" y="31035"/>
                   </a:lnTo>
                   <a:lnTo>
                     <a:pt x="7090630" y="0"/>

--- a/docs/plots/carbo/jx_carbo_linsubhr_dosedisc_anemia2.pptx
+++ b/docs/plots/carbo/jx_carbo_linsubhr_dosedisc_anemia2.pptx
@@ -3132,572 +3132,578 @@
           <p:spPr>
             <a:xfrm>
               <a:off x="1172049" y="1896563"/>
-              <a:ext cx="7090630" cy="3451358"/>
+              <a:ext cx="7090630" cy="3433023"/>
             </a:xfrm>
             <a:custGeom>
               <a:avLst/>
               <a:pathLst>
-                <a:path w="7090630" h="3451358">
+                <a:path w="7090630" h="3433023">
                   <a:moveTo>
-                    <a:pt x="0" y="2625624"/>
+                    <a:pt x="0" y="2538674"/>
                   </a:moveTo>
                   <a:lnTo>
-                    <a:pt x="71622" y="2629627"/>
-                  </a:lnTo>
-                  <a:lnTo>
-                    <a:pt x="143245" y="2633614"/>
-                  </a:lnTo>
-                  <a:lnTo>
-                    <a:pt x="214867" y="2637585"/>
-                  </a:lnTo>
-                  <a:lnTo>
-                    <a:pt x="286490" y="2641541"/>
-                  </a:lnTo>
-                  <a:lnTo>
-                    <a:pt x="358112" y="2645482"/>
-                  </a:lnTo>
-                  <a:lnTo>
-                    <a:pt x="429735" y="2649407"/>
-                  </a:lnTo>
-                  <a:lnTo>
-                    <a:pt x="501357" y="2653317"/>
-                  </a:lnTo>
-                  <a:lnTo>
-                    <a:pt x="572980" y="2657211"/>
-                  </a:lnTo>
-                  <a:lnTo>
-                    <a:pt x="644602" y="2661091"/>
-                  </a:lnTo>
-                  <a:lnTo>
-                    <a:pt x="716225" y="2664955"/>
-                  </a:lnTo>
-                  <a:lnTo>
-                    <a:pt x="787847" y="2668804"/>
-                  </a:lnTo>
-                  <a:lnTo>
-                    <a:pt x="859470" y="2672639"/>
-                  </a:lnTo>
-                  <a:lnTo>
-                    <a:pt x="931092" y="2676458"/>
-                  </a:lnTo>
-                  <a:lnTo>
-                    <a:pt x="1002715" y="2680263"/>
-                  </a:lnTo>
-                  <a:lnTo>
-                    <a:pt x="1074337" y="2684052"/>
-                  </a:lnTo>
-                  <a:lnTo>
-                    <a:pt x="1145960" y="2687827"/>
-                  </a:lnTo>
-                  <a:lnTo>
-                    <a:pt x="1217582" y="2691587"/>
-                  </a:lnTo>
-                  <a:lnTo>
-                    <a:pt x="1289205" y="2695333"/>
-                  </a:lnTo>
-                  <a:lnTo>
-                    <a:pt x="1360827" y="2699064"/>
-                  </a:lnTo>
-                  <a:lnTo>
-                    <a:pt x="1432450" y="2702780"/>
-                  </a:lnTo>
-                  <a:lnTo>
-                    <a:pt x="1504073" y="2706482"/>
-                  </a:lnTo>
-                  <a:lnTo>
-                    <a:pt x="1575695" y="2710169"/>
-                  </a:lnTo>
-                  <a:lnTo>
-                    <a:pt x="1647318" y="2713843"/>
-                  </a:lnTo>
-                  <a:lnTo>
-                    <a:pt x="1718940" y="2717501"/>
-                  </a:lnTo>
-                  <a:lnTo>
-                    <a:pt x="1790563" y="2721146"/>
-                  </a:lnTo>
-                  <a:lnTo>
-                    <a:pt x="1862185" y="2724776"/>
-                  </a:lnTo>
-                  <a:lnTo>
-                    <a:pt x="1933808" y="2728392"/>
-                  </a:lnTo>
-                  <a:lnTo>
-                    <a:pt x="2005430" y="2731994"/>
-                  </a:lnTo>
-                  <a:lnTo>
-                    <a:pt x="2077053" y="2735582"/>
-                  </a:lnTo>
-                  <a:lnTo>
-                    <a:pt x="2148675" y="2739156"/>
-                  </a:lnTo>
-                  <a:lnTo>
-                    <a:pt x="2220298" y="2742717"/>
-                  </a:lnTo>
-                  <a:lnTo>
-                    <a:pt x="2291920" y="2746263"/>
-                  </a:lnTo>
-                  <a:lnTo>
-                    <a:pt x="2363543" y="2749795"/>
-                  </a:lnTo>
-                  <a:lnTo>
-                    <a:pt x="2435165" y="2753314"/>
-                  </a:lnTo>
-                  <a:lnTo>
-                    <a:pt x="2506788" y="2756819"/>
-                  </a:lnTo>
-                  <a:lnTo>
-                    <a:pt x="2578410" y="2760310"/>
-                  </a:lnTo>
-                  <a:lnTo>
-                    <a:pt x="2650033" y="2763788"/>
-                  </a:lnTo>
-                  <a:lnTo>
-                    <a:pt x="2721655" y="2767252"/>
-                  </a:lnTo>
-                  <a:lnTo>
-                    <a:pt x="2793278" y="2770703"/>
-                  </a:lnTo>
-                  <a:lnTo>
-                    <a:pt x="2864901" y="2774140"/>
-                  </a:lnTo>
-                  <a:lnTo>
-                    <a:pt x="2936523" y="2777564"/>
-                  </a:lnTo>
-                  <a:lnTo>
-                    <a:pt x="3008146" y="2780974"/>
-                  </a:lnTo>
-                  <a:lnTo>
-                    <a:pt x="3079768" y="2770504"/>
-                  </a:lnTo>
-                  <a:lnTo>
-                    <a:pt x="3151391" y="2739664"/>
-                  </a:lnTo>
-                  <a:lnTo>
-                    <a:pt x="3223013" y="2707746"/>
-                  </a:lnTo>
-                  <a:lnTo>
-                    <a:pt x="3294636" y="2674712"/>
-                  </a:lnTo>
-                  <a:lnTo>
-                    <a:pt x="3366258" y="2640523"/>
-                  </a:lnTo>
-                  <a:lnTo>
-                    <a:pt x="3437881" y="2605138"/>
-                  </a:lnTo>
-                  <a:lnTo>
-                    <a:pt x="3509503" y="2568517"/>
-                  </a:lnTo>
-                  <a:lnTo>
-                    <a:pt x="3581126" y="2530615"/>
-                  </a:lnTo>
-                  <a:lnTo>
-                    <a:pt x="3652748" y="2491388"/>
-                  </a:lnTo>
-                  <a:lnTo>
-                    <a:pt x="3724371" y="2450790"/>
-                  </a:lnTo>
-                  <a:lnTo>
-                    <a:pt x="3795993" y="2408772"/>
-                  </a:lnTo>
-                  <a:lnTo>
-                    <a:pt x="3867616" y="2365286"/>
-                  </a:lnTo>
-                  <a:lnTo>
-                    <a:pt x="3939238" y="2320279"/>
-                  </a:lnTo>
-                  <a:lnTo>
-                    <a:pt x="4010861" y="2273699"/>
-                  </a:lnTo>
-                  <a:lnTo>
-                    <a:pt x="4082483" y="2225490"/>
-                  </a:lnTo>
-                  <a:lnTo>
-                    <a:pt x="4154106" y="2175596"/>
-                  </a:lnTo>
-                  <a:lnTo>
-                    <a:pt x="4225729" y="2123957"/>
-                  </a:lnTo>
-                  <a:lnTo>
-                    <a:pt x="4297351" y="2070513"/>
-                  </a:lnTo>
-                  <a:lnTo>
-                    <a:pt x="4368974" y="2015201"/>
-                  </a:lnTo>
-                  <a:lnTo>
-                    <a:pt x="4440596" y="1957955"/>
-                  </a:lnTo>
-                  <a:lnTo>
-                    <a:pt x="4512219" y="1898708"/>
-                  </a:lnTo>
-                  <a:lnTo>
-                    <a:pt x="4583841" y="1837389"/>
-                  </a:lnTo>
-                  <a:lnTo>
-                    <a:pt x="4655464" y="1773927"/>
-                  </a:lnTo>
-                  <a:lnTo>
-                    <a:pt x="4727086" y="1708245"/>
-                  </a:lnTo>
-                  <a:lnTo>
-                    <a:pt x="4798709" y="1640268"/>
-                  </a:lnTo>
-                  <a:lnTo>
-                    <a:pt x="4870331" y="1569914"/>
-                  </a:lnTo>
-                  <a:lnTo>
-                    <a:pt x="4941954" y="1497101"/>
-                  </a:lnTo>
-                  <a:lnTo>
-                    <a:pt x="5013576" y="1421741"/>
-                  </a:lnTo>
-                  <a:lnTo>
-                    <a:pt x="5085199" y="1343748"/>
-                  </a:lnTo>
-                  <a:lnTo>
-                    <a:pt x="5156821" y="1263027"/>
-                  </a:lnTo>
-                  <a:lnTo>
-                    <a:pt x="5228444" y="1179485"/>
-                  </a:lnTo>
-                  <a:lnTo>
-                    <a:pt x="5300066" y="1093022"/>
-                  </a:lnTo>
-                  <a:lnTo>
-                    <a:pt x="5371689" y="1003536"/>
-                  </a:lnTo>
-                  <a:lnTo>
-                    <a:pt x="5443311" y="910921"/>
-                  </a:lnTo>
-                  <a:lnTo>
-                    <a:pt x="5514934" y="815069"/>
-                  </a:lnTo>
-                  <a:lnTo>
-                    <a:pt x="5586557" y="715865"/>
-                  </a:lnTo>
-                  <a:lnTo>
-                    <a:pt x="5658179" y="613194"/>
-                  </a:lnTo>
-                  <a:lnTo>
-                    <a:pt x="5729802" y="506933"/>
-                  </a:lnTo>
-                  <a:lnTo>
-                    <a:pt x="5801424" y="396957"/>
-                  </a:lnTo>
-                  <a:lnTo>
-                    <a:pt x="5873047" y="283136"/>
-                  </a:lnTo>
-                  <a:lnTo>
-                    <a:pt x="5944669" y="165336"/>
-                  </a:lnTo>
-                  <a:lnTo>
-                    <a:pt x="6016292" y="43417"/>
-                  </a:lnTo>
-                  <a:lnTo>
-                    <a:pt x="6040936" y="0"/>
+                    <a:pt x="71622" y="2545131"/>
+                  </a:lnTo>
+                  <a:lnTo>
+                    <a:pt x="143245" y="2551551"/>
+                  </a:lnTo>
+                  <a:lnTo>
+                    <a:pt x="214867" y="2557933"/>
+                  </a:lnTo>
+                  <a:lnTo>
+                    <a:pt x="286490" y="2564278"/>
+                  </a:lnTo>
+                  <a:lnTo>
+                    <a:pt x="358112" y="2570587"/>
+                  </a:lnTo>
+                  <a:lnTo>
+                    <a:pt x="429735" y="2576859"/>
+                  </a:lnTo>
+                  <a:lnTo>
+                    <a:pt x="501357" y="2583095"/>
+                  </a:lnTo>
+                  <a:lnTo>
+                    <a:pt x="572980" y="2589294"/>
+                  </a:lnTo>
+                  <a:lnTo>
+                    <a:pt x="644602" y="2595458"/>
+                  </a:lnTo>
+                  <a:lnTo>
+                    <a:pt x="716225" y="2601586"/>
+                  </a:lnTo>
+                  <a:lnTo>
+                    <a:pt x="787847" y="2607678"/>
+                  </a:lnTo>
+                  <a:lnTo>
+                    <a:pt x="859470" y="2613735"/>
+                  </a:lnTo>
+                  <a:lnTo>
+                    <a:pt x="931092" y="2619757"/>
+                  </a:lnTo>
+                  <a:lnTo>
+                    <a:pt x="1002715" y="2625744"/>
+                  </a:lnTo>
+                  <a:lnTo>
+                    <a:pt x="1074337" y="2631696"/>
+                  </a:lnTo>
+                  <a:lnTo>
+                    <a:pt x="1145960" y="2637614"/>
+                  </a:lnTo>
+                  <a:lnTo>
+                    <a:pt x="1217582" y="2643497"/>
+                  </a:lnTo>
+                  <a:lnTo>
+                    <a:pt x="1289205" y="2649347"/>
+                  </a:lnTo>
+                  <a:lnTo>
+                    <a:pt x="1360827" y="2655162"/>
+                  </a:lnTo>
+                  <a:lnTo>
+                    <a:pt x="1432450" y="2660944"/>
+                  </a:lnTo>
+                  <a:lnTo>
+                    <a:pt x="1504073" y="2666692"/>
+                  </a:lnTo>
+                  <a:lnTo>
+                    <a:pt x="1575695" y="2672407"/>
+                  </a:lnTo>
+                  <a:lnTo>
+                    <a:pt x="1647318" y="2678089"/>
+                  </a:lnTo>
+                  <a:lnTo>
+                    <a:pt x="1718940" y="2683738"/>
+                  </a:lnTo>
+                  <a:lnTo>
+                    <a:pt x="1790563" y="2689354"/>
+                  </a:lnTo>
+                  <a:lnTo>
+                    <a:pt x="1862185" y="2694938"/>
+                  </a:lnTo>
+                  <a:lnTo>
+                    <a:pt x="1933808" y="2700489"/>
+                  </a:lnTo>
+                  <a:lnTo>
+                    <a:pt x="2005430" y="2706008"/>
+                  </a:lnTo>
+                  <a:lnTo>
+                    <a:pt x="2077053" y="2711495"/>
+                  </a:lnTo>
+                  <a:lnTo>
+                    <a:pt x="2148675" y="2716950"/>
+                  </a:lnTo>
+                  <a:lnTo>
+                    <a:pt x="2220298" y="2722374"/>
+                  </a:lnTo>
+                  <a:lnTo>
+                    <a:pt x="2291920" y="2727766"/>
+                  </a:lnTo>
+                  <a:lnTo>
+                    <a:pt x="2363543" y="2733127"/>
+                  </a:lnTo>
+                  <a:lnTo>
+                    <a:pt x="2435165" y="2738457"/>
+                  </a:lnTo>
+                  <a:lnTo>
+                    <a:pt x="2506788" y="2743756"/>
+                  </a:lnTo>
+                  <a:lnTo>
+                    <a:pt x="2578410" y="2749024"/>
+                  </a:lnTo>
+                  <a:lnTo>
+                    <a:pt x="2650033" y="2754262"/>
+                  </a:lnTo>
+                  <a:lnTo>
+                    <a:pt x="2721655" y="2759469"/>
+                  </a:lnTo>
+                  <a:lnTo>
+                    <a:pt x="2793278" y="2764647"/>
+                  </a:lnTo>
+                  <a:lnTo>
+                    <a:pt x="2864901" y="2769794"/>
+                  </a:lnTo>
+                  <a:lnTo>
+                    <a:pt x="2936523" y="2774911"/>
+                  </a:lnTo>
+                  <a:lnTo>
+                    <a:pt x="3008146" y="2779999"/>
+                  </a:lnTo>
+                  <a:lnTo>
+                    <a:pt x="3079768" y="2771252"/>
+                  </a:lnTo>
+                  <a:lnTo>
+                    <a:pt x="3151391" y="2742303"/>
+                  </a:lnTo>
+                  <a:lnTo>
+                    <a:pt x="3223013" y="2712404"/>
+                  </a:lnTo>
+                  <a:lnTo>
+                    <a:pt x="3294636" y="2681522"/>
+                  </a:lnTo>
+                  <a:lnTo>
+                    <a:pt x="3366258" y="2649627"/>
+                  </a:lnTo>
+                  <a:lnTo>
+                    <a:pt x="3437881" y="2616684"/>
+                  </a:lnTo>
+                  <a:lnTo>
+                    <a:pt x="3509503" y="2582658"/>
+                  </a:lnTo>
+                  <a:lnTo>
+                    <a:pt x="3581126" y="2547516"/>
+                  </a:lnTo>
+                  <a:lnTo>
+                    <a:pt x="3652748" y="2511219"/>
+                  </a:lnTo>
+                  <a:lnTo>
+                    <a:pt x="3724371" y="2473730"/>
+                  </a:lnTo>
+                  <a:lnTo>
+                    <a:pt x="3795993" y="2435009"/>
+                  </a:lnTo>
+                  <a:lnTo>
+                    <a:pt x="3867616" y="2395017"/>
+                  </a:lnTo>
+                  <a:lnTo>
+                    <a:pt x="3939238" y="2353711"/>
+                  </a:lnTo>
+                  <a:lnTo>
+                    <a:pt x="4010861" y="2311049"/>
+                  </a:lnTo>
+                  <a:lnTo>
+                    <a:pt x="4082483" y="2266986"/>
+                  </a:lnTo>
+                  <a:lnTo>
+                    <a:pt x="4154106" y="2221475"/>
+                  </a:lnTo>
+                  <a:lnTo>
+                    <a:pt x="4225729" y="2174469"/>
+                  </a:lnTo>
+                  <a:lnTo>
+                    <a:pt x="4297351" y="2125920"/>
+                  </a:lnTo>
+                  <a:lnTo>
+                    <a:pt x="4368974" y="2075776"/>
+                  </a:lnTo>
+                  <a:lnTo>
+                    <a:pt x="4440596" y="2023985"/>
+                  </a:lnTo>
+                  <a:lnTo>
+                    <a:pt x="4512219" y="1970493"/>
+                  </a:lnTo>
+                  <a:lnTo>
+                    <a:pt x="4583841" y="1915245"/>
+                  </a:lnTo>
+                  <a:lnTo>
+                    <a:pt x="4655464" y="1858181"/>
+                  </a:lnTo>
+                  <a:lnTo>
+                    <a:pt x="4727086" y="1799244"/>
+                  </a:lnTo>
+                  <a:lnTo>
+                    <a:pt x="4798709" y="1738370"/>
+                  </a:lnTo>
+                  <a:lnTo>
+                    <a:pt x="4870331" y="1675498"/>
+                  </a:lnTo>
+                  <a:lnTo>
+                    <a:pt x="4941954" y="1610560"/>
+                  </a:lnTo>
+                  <a:lnTo>
+                    <a:pt x="5013576" y="1543490"/>
+                  </a:lnTo>
+                  <a:lnTo>
+                    <a:pt x="5085199" y="1474216"/>
+                  </a:lnTo>
+                  <a:lnTo>
+                    <a:pt x="5156821" y="1402668"/>
+                  </a:lnTo>
+                  <a:lnTo>
+                    <a:pt x="5228444" y="1328769"/>
+                  </a:lnTo>
+                  <a:lnTo>
+                    <a:pt x="5300066" y="1252444"/>
+                  </a:lnTo>
+                  <a:lnTo>
+                    <a:pt x="5371689" y="1173611"/>
+                  </a:lnTo>
+                  <a:lnTo>
+                    <a:pt x="5443311" y="1092190"/>
+                  </a:lnTo>
+                  <a:lnTo>
+                    <a:pt x="5514934" y="1008094"/>
+                  </a:lnTo>
+                  <a:lnTo>
+                    <a:pt x="5586557" y="921236"/>
+                  </a:lnTo>
+                  <a:lnTo>
+                    <a:pt x="5658179" y="831525"/>
+                  </a:lnTo>
+                  <a:lnTo>
+                    <a:pt x="5729802" y="738868"/>
+                  </a:lnTo>
+                  <a:lnTo>
+                    <a:pt x="5801424" y="643167"/>
+                  </a:lnTo>
+                  <a:lnTo>
+                    <a:pt x="5873047" y="544324"/>
+                  </a:lnTo>
+                  <a:lnTo>
+                    <a:pt x="5944669" y="442234"/>
+                  </a:lnTo>
+                  <a:lnTo>
+                    <a:pt x="6016292" y="336791"/>
+                  </a:lnTo>
+                  <a:lnTo>
+                    <a:pt x="6087914" y="227884"/>
+                  </a:lnTo>
+                  <a:lnTo>
+                    <a:pt x="6159537" y="115401"/>
+                  </a:lnTo>
+                  <a:lnTo>
+                    <a:pt x="6230681" y="0"/>
                   </a:lnTo>
                   <a:lnTo>
                     <a:pt x="7090630" y="0"/>
                   </a:lnTo>
                   <a:lnTo>
-                    <a:pt x="7090630" y="2954914"/>
-                  </a:lnTo>
-                  <a:lnTo>
-                    <a:pt x="7019007" y="2952185"/>
-                  </a:lnTo>
-                  <a:lnTo>
-                    <a:pt x="6947385" y="2949444"/>
-                  </a:lnTo>
-                  <a:lnTo>
-                    <a:pt x="6875762" y="2946693"/>
-                  </a:lnTo>
-                  <a:lnTo>
-                    <a:pt x="6804139" y="2943931"/>
-                  </a:lnTo>
-                  <a:lnTo>
-                    <a:pt x="6732517" y="2941158"/>
-                  </a:lnTo>
-                  <a:lnTo>
-                    <a:pt x="6660894" y="2938374"/>
-                  </a:lnTo>
-                  <a:lnTo>
-                    <a:pt x="6589272" y="2935579"/>
-                  </a:lnTo>
-                  <a:lnTo>
-                    <a:pt x="6517649" y="2932774"/>
-                  </a:lnTo>
-                  <a:lnTo>
-                    <a:pt x="6446027" y="2929957"/>
-                  </a:lnTo>
-                  <a:lnTo>
-                    <a:pt x="6374404" y="2927130"/>
-                  </a:lnTo>
-                  <a:lnTo>
-                    <a:pt x="6302782" y="2924291"/>
-                  </a:lnTo>
-                  <a:lnTo>
-                    <a:pt x="6231159" y="2921441"/>
-                  </a:lnTo>
-                  <a:lnTo>
-                    <a:pt x="6159537" y="2918581"/>
-                  </a:lnTo>
-                  <a:lnTo>
-                    <a:pt x="6087914" y="2915709"/>
-                  </a:lnTo>
-                  <a:lnTo>
-                    <a:pt x="6016292" y="2912825"/>
-                  </a:lnTo>
-                  <a:lnTo>
-                    <a:pt x="5944669" y="2909931"/>
-                  </a:lnTo>
-                  <a:lnTo>
-                    <a:pt x="5873047" y="2907025"/>
-                  </a:lnTo>
-                  <a:lnTo>
-                    <a:pt x="5801424" y="2904108"/>
-                  </a:lnTo>
-                  <a:lnTo>
-                    <a:pt x="5729802" y="2901179"/>
-                  </a:lnTo>
-                  <a:lnTo>
-                    <a:pt x="5658179" y="2898239"/>
-                  </a:lnTo>
-                  <a:lnTo>
-                    <a:pt x="5586557" y="2895287"/>
-                  </a:lnTo>
-                  <a:lnTo>
-                    <a:pt x="5514934" y="2892324"/>
-                  </a:lnTo>
-                  <a:lnTo>
-                    <a:pt x="5443311" y="2889349"/>
-                  </a:lnTo>
-                  <a:lnTo>
-                    <a:pt x="5371689" y="2886363"/>
-                  </a:lnTo>
-                  <a:lnTo>
-                    <a:pt x="5300066" y="2883365"/>
-                  </a:lnTo>
-                  <a:lnTo>
-                    <a:pt x="5228444" y="2880355"/>
-                  </a:lnTo>
-                  <a:lnTo>
-                    <a:pt x="5156821" y="2877333"/>
-                  </a:lnTo>
-                  <a:lnTo>
-                    <a:pt x="5085199" y="2874300"/>
-                  </a:lnTo>
-                  <a:lnTo>
-                    <a:pt x="5013576" y="2871255"/>
-                  </a:lnTo>
-                  <a:lnTo>
-                    <a:pt x="4941954" y="2868197"/>
-                  </a:lnTo>
-                  <a:lnTo>
-                    <a:pt x="4870331" y="2865128"/>
-                  </a:lnTo>
-                  <a:lnTo>
-                    <a:pt x="4798709" y="2862047"/>
-                  </a:lnTo>
-                  <a:lnTo>
-                    <a:pt x="4727086" y="2858954"/>
-                  </a:lnTo>
-                  <a:lnTo>
-                    <a:pt x="4655464" y="2855848"/>
-                  </a:lnTo>
-                  <a:lnTo>
-                    <a:pt x="4583841" y="2852731"/>
-                  </a:lnTo>
-                  <a:lnTo>
-                    <a:pt x="4512219" y="2849601"/>
-                  </a:lnTo>
-                  <a:lnTo>
-                    <a:pt x="4440596" y="2846459"/>
-                  </a:lnTo>
-                  <a:lnTo>
-                    <a:pt x="4368974" y="2843305"/>
-                  </a:lnTo>
-                  <a:lnTo>
-                    <a:pt x="4297351" y="2840138"/>
-                  </a:lnTo>
-                  <a:lnTo>
-                    <a:pt x="4225729" y="2836960"/>
-                  </a:lnTo>
-                  <a:lnTo>
-                    <a:pt x="4154106" y="2833768"/>
-                  </a:lnTo>
-                  <a:lnTo>
-                    <a:pt x="4082483" y="2830564"/>
-                  </a:lnTo>
-                  <a:lnTo>
-                    <a:pt x="4010861" y="2827348"/>
-                  </a:lnTo>
-                  <a:lnTo>
-                    <a:pt x="3939238" y="2824119"/>
-                  </a:lnTo>
-                  <a:lnTo>
-                    <a:pt x="3867616" y="2820877"/>
-                  </a:lnTo>
-                  <a:lnTo>
-                    <a:pt x="3795993" y="2817623"/>
-                  </a:lnTo>
-                  <a:lnTo>
-                    <a:pt x="3724371" y="2814356"/>
-                  </a:lnTo>
-                  <a:lnTo>
-                    <a:pt x="3652748" y="2811076"/>
-                  </a:lnTo>
-                  <a:lnTo>
-                    <a:pt x="3581126" y="2807783"/>
-                  </a:lnTo>
-                  <a:lnTo>
-                    <a:pt x="3509503" y="2804478"/>
-                  </a:lnTo>
-                  <a:lnTo>
-                    <a:pt x="3437881" y="2801159"/>
-                  </a:lnTo>
-                  <a:lnTo>
-                    <a:pt x="3366258" y="2797828"/>
-                  </a:lnTo>
-                  <a:lnTo>
-                    <a:pt x="3294636" y="2794483"/>
-                  </a:lnTo>
-                  <a:lnTo>
-                    <a:pt x="3223013" y="2791126"/>
-                  </a:lnTo>
-                  <a:lnTo>
-                    <a:pt x="3151391" y="2787755"/>
-                  </a:lnTo>
-                  <a:lnTo>
-                    <a:pt x="3079768" y="2784371"/>
-                  </a:lnTo>
-                  <a:lnTo>
-                    <a:pt x="3008146" y="2800303"/>
-                  </a:lnTo>
-                  <a:lnTo>
-                    <a:pt x="2936523" y="2829094"/>
-                  </a:lnTo>
-                  <a:lnTo>
-                    <a:pt x="2864901" y="2856914"/>
-                  </a:lnTo>
-                  <a:lnTo>
-                    <a:pt x="2793278" y="2883793"/>
-                  </a:lnTo>
-                  <a:lnTo>
-                    <a:pt x="2721655" y="2909765"/>
-                  </a:lnTo>
-                  <a:lnTo>
-                    <a:pt x="2650033" y="2934859"/>
-                  </a:lnTo>
-                  <a:lnTo>
-                    <a:pt x="2578410" y="2959105"/>
-                  </a:lnTo>
-                  <a:lnTo>
-                    <a:pt x="2506788" y="2982533"/>
-                  </a:lnTo>
-                  <a:lnTo>
-                    <a:pt x="2435165" y="3005169"/>
-                  </a:lnTo>
-                  <a:lnTo>
-                    <a:pt x="2363543" y="3027040"/>
-                  </a:lnTo>
-                  <a:lnTo>
-                    <a:pt x="2291920" y="3048173"/>
-                  </a:lnTo>
-                  <a:lnTo>
-                    <a:pt x="2220298" y="3068592"/>
-                  </a:lnTo>
-                  <a:lnTo>
-                    <a:pt x="2148675" y="3088321"/>
-                  </a:lnTo>
-                  <a:lnTo>
-                    <a:pt x="2077053" y="3107384"/>
-                  </a:lnTo>
-                  <a:lnTo>
-                    <a:pt x="2005430" y="3125802"/>
-                  </a:lnTo>
-                  <a:lnTo>
-                    <a:pt x="1933808" y="3143599"/>
-                  </a:lnTo>
-                  <a:lnTo>
-                    <a:pt x="1862185" y="3160794"/>
-                  </a:lnTo>
-                  <a:lnTo>
-                    <a:pt x="1790563" y="3177409"/>
-                  </a:lnTo>
-                  <a:lnTo>
-                    <a:pt x="1718940" y="3193462"/>
-                  </a:lnTo>
-                  <a:lnTo>
-                    <a:pt x="1647318" y="3208973"/>
-                  </a:lnTo>
-                  <a:lnTo>
-                    <a:pt x="1575695" y="3223960"/>
-                  </a:lnTo>
-                  <a:lnTo>
-                    <a:pt x="1504073" y="3238441"/>
-                  </a:lnTo>
-                  <a:lnTo>
-                    <a:pt x="1432450" y="3252432"/>
-                  </a:lnTo>
-                  <a:lnTo>
-                    <a:pt x="1360827" y="3265951"/>
-                  </a:lnTo>
-                  <a:lnTo>
-                    <a:pt x="1289205" y="3279014"/>
-                  </a:lnTo>
-                  <a:lnTo>
-                    <a:pt x="1217582" y="3291635"/>
-                  </a:lnTo>
-                  <a:lnTo>
-                    <a:pt x="1145960" y="3303830"/>
-                  </a:lnTo>
-                  <a:lnTo>
-                    <a:pt x="1074337" y="3315612"/>
-                  </a:lnTo>
-                  <a:lnTo>
-                    <a:pt x="1002715" y="3326997"/>
-                  </a:lnTo>
-                  <a:lnTo>
-                    <a:pt x="931092" y="3337997"/>
-                  </a:lnTo>
-                  <a:lnTo>
-                    <a:pt x="859470" y="3348626"/>
-                  </a:lnTo>
-                  <a:lnTo>
-                    <a:pt x="787847" y="3358896"/>
-                  </a:lnTo>
-                  <a:lnTo>
-                    <a:pt x="716225" y="3368818"/>
-                  </a:lnTo>
-                  <a:lnTo>
-                    <a:pt x="644602" y="3378406"/>
-                  </a:lnTo>
-                  <a:lnTo>
-                    <a:pt x="572980" y="3387670"/>
-                  </a:lnTo>
-                  <a:lnTo>
-                    <a:pt x="501357" y="3396620"/>
-                  </a:lnTo>
-                  <a:lnTo>
-                    <a:pt x="429735" y="3405269"/>
-                  </a:lnTo>
-                  <a:lnTo>
-                    <a:pt x="358112" y="3413625"/>
-                  </a:lnTo>
-                  <a:lnTo>
-                    <a:pt x="286490" y="3421699"/>
-                  </a:lnTo>
-                  <a:lnTo>
-                    <a:pt x="214867" y="3429500"/>
-                  </a:lnTo>
-                  <a:lnTo>
-                    <a:pt x="143245" y="3437038"/>
-                  </a:lnTo>
-                  <a:lnTo>
-                    <a:pt x="71622" y="3444321"/>
-                  </a:lnTo>
-                  <a:lnTo>
-                    <a:pt x="0" y="3451358"/>
+                    <a:pt x="7090630" y="3026128"/>
+                  </a:lnTo>
+                  <a:lnTo>
+                    <a:pt x="7019007" y="3022475"/>
+                  </a:lnTo>
+                  <a:lnTo>
+                    <a:pt x="6947385" y="3018801"/>
+                  </a:lnTo>
+                  <a:lnTo>
+                    <a:pt x="6875762" y="3015106"/>
+                  </a:lnTo>
+                  <a:lnTo>
+                    <a:pt x="6804139" y="3011389"/>
+                  </a:lnTo>
+                  <a:lnTo>
+                    <a:pt x="6732517" y="3007650"/>
+                  </a:lnTo>
+                  <a:lnTo>
+                    <a:pt x="6660894" y="3003890"/>
+                  </a:lnTo>
+                  <a:lnTo>
+                    <a:pt x="6589272" y="3000108"/>
+                  </a:lnTo>
+                  <a:lnTo>
+                    <a:pt x="6517649" y="2996303"/>
+                  </a:lnTo>
+                  <a:lnTo>
+                    <a:pt x="6446027" y="2992477"/>
+                  </a:lnTo>
+                  <a:lnTo>
+                    <a:pt x="6374404" y="2988628"/>
+                  </a:lnTo>
+                  <a:lnTo>
+                    <a:pt x="6302782" y="2984756"/>
+                  </a:lnTo>
+                  <a:lnTo>
+                    <a:pt x="6231159" y="2980862"/>
+                  </a:lnTo>
+                  <a:lnTo>
+                    <a:pt x="6159537" y="2976946"/>
+                  </a:lnTo>
+                  <a:lnTo>
+                    <a:pt x="6087914" y="2973006"/>
+                  </a:lnTo>
+                  <a:lnTo>
+                    <a:pt x="6016292" y="2969044"/>
+                  </a:lnTo>
+                  <a:lnTo>
+                    <a:pt x="5944669" y="2965059"/>
+                  </a:lnTo>
+                  <a:lnTo>
+                    <a:pt x="5873047" y="2961050"/>
+                  </a:lnTo>
+                  <a:lnTo>
+                    <a:pt x="5801424" y="2957018"/>
+                  </a:lnTo>
+                  <a:lnTo>
+                    <a:pt x="5729802" y="2952962"/>
+                  </a:lnTo>
+                  <a:lnTo>
+                    <a:pt x="5658179" y="2948883"/>
+                  </a:lnTo>
+                  <a:lnTo>
+                    <a:pt x="5586557" y="2944780"/>
+                  </a:lnTo>
+                  <a:lnTo>
+                    <a:pt x="5514934" y="2940653"/>
+                  </a:lnTo>
+                  <a:lnTo>
+                    <a:pt x="5443311" y="2936502"/>
+                  </a:lnTo>
+                  <a:lnTo>
+                    <a:pt x="5371689" y="2932326"/>
+                  </a:lnTo>
+                  <a:lnTo>
+                    <a:pt x="5300066" y="2928127"/>
+                  </a:lnTo>
+                  <a:lnTo>
+                    <a:pt x="5228444" y="2923903"/>
+                  </a:lnTo>
+                  <a:lnTo>
+                    <a:pt x="5156821" y="2919654"/>
+                  </a:lnTo>
+                  <a:lnTo>
+                    <a:pt x="5085199" y="2915381"/>
+                  </a:lnTo>
+                  <a:lnTo>
+                    <a:pt x="5013576" y="2911082"/>
+                  </a:lnTo>
+                  <a:lnTo>
+                    <a:pt x="4941954" y="2906759"/>
+                  </a:lnTo>
+                  <a:lnTo>
+                    <a:pt x="4870331" y="2902410"/>
+                  </a:lnTo>
+                  <a:lnTo>
+                    <a:pt x="4798709" y="2898036"/>
+                  </a:lnTo>
+                  <a:lnTo>
+                    <a:pt x="4727086" y="2893637"/>
+                  </a:lnTo>
+                  <a:lnTo>
+                    <a:pt x="4655464" y="2889212"/>
+                  </a:lnTo>
+                  <a:lnTo>
+                    <a:pt x="4583841" y="2884761"/>
+                  </a:lnTo>
+                  <a:lnTo>
+                    <a:pt x="4512219" y="2880284"/>
+                  </a:lnTo>
+                  <a:lnTo>
+                    <a:pt x="4440596" y="2875781"/>
+                  </a:lnTo>
+                  <a:lnTo>
+                    <a:pt x="4368974" y="2871252"/>
+                  </a:lnTo>
+                  <a:lnTo>
+                    <a:pt x="4297351" y="2866696"/>
+                  </a:lnTo>
+                  <a:lnTo>
+                    <a:pt x="4225729" y="2862114"/>
+                  </a:lnTo>
+                  <a:lnTo>
+                    <a:pt x="4154106" y="2857505"/>
+                  </a:lnTo>
+                  <a:lnTo>
+                    <a:pt x="4082483" y="2852869"/>
+                  </a:lnTo>
+                  <a:lnTo>
+                    <a:pt x="4010861" y="2848206"/>
+                  </a:lnTo>
+                  <a:lnTo>
+                    <a:pt x="3939238" y="2843516"/>
+                  </a:lnTo>
+                  <a:lnTo>
+                    <a:pt x="3867616" y="2838799"/>
+                  </a:lnTo>
+                  <a:lnTo>
+                    <a:pt x="3795993" y="2834054"/>
+                  </a:lnTo>
+                  <a:lnTo>
+                    <a:pt x="3724371" y="2829281"/>
+                  </a:lnTo>
+                  <a:lnTo>
+                    <a:pt x="3652748" y="2824481"/>
+                  </a:lnTo>
+                  <a:lnTo>
+                    <a:pt x="3581126" y="2819653"/>
+                  </a:lnTo>
+                  <a:lnTo>
+                    <a:pt x="3509503" y="2814796"/>
+                  </a:lnTo>
+                  <a:lnTo>
+                    <a:pt x="3437881" y="2809911"/>
+                  </a:lnTo>
+                  <a:lnTo>
+                    <a:pt x="3366258" y="2804998"/>
+                  </a:lnTo>
+                  <a:lnTo>
+                    <a:pt x="3294636" y="2800056"/>
+                  </a:lnTo>
+                  <a:lnTo>
+                    <a:pt x="3223013" y="2795085"/>
+                  </a:lnTo>
+                  <a:lnTo>
+                    <a:pt x="3151391" y="2790086"/>
+                  </a:lnTo>
+                  <a:lnTo>
+                    <a:pt x="3079768" y="2785057"/>
+                  </a:lnTo>
+                  <a:lnTo>
+                    <a:pt x="3008146" y="2799280"/>
+                  </a:lnTo>
+                  <a:lnTo>
+                    <a:pt x="2936523" y="2826416"/>
+                  </a:lnTo>
+                  <a:lnTo>
+                    <a:pt x="2864901" y="2852690"/>
+                  </a:lnTo>
+                  <a:lnTo>
+                    <a:pt x="2793278" y="2878128"/>
+                  </a:lnTo>
+                  <a:lnTo>
+                    <a:pt x="2721655" y="2902758"/>
+                  </a:lnTo>
+                  <a:lnTo>
+                    <a:pt x="2650033" y="2926604"/>
+                  </a:lnTo>
+                  <a:lnTo>
+                    <a:pt x="2578410" y="2949692"/>
+                  </a:lnTo>
+                  <a:lnTo>
+                    <a:pt x="2506788" y="2972045"/>
+                  </a:lnTo>
+                  <a:lnTo>
+                    <a:pt x="2435165" y="2993688"/>
+                  </a:lnTo>
+                  <a:lnTo>
+                    <a:pt x="2363543" y="3014643"/>
+                  </a:lnTo>
+                  <a:lnTo>
+                    <a:pt x="2291920" y="3034931"/>
+                  </a:lnTo>
+                  <a:lnTo>
+                    <a:pt x="2220298" y="3054574"/>
+                  </a:lnTo>
+                  <a:lnTo>
+                    <a:pt x="2148675" y="3073592"/>
+                  </a:lnTo>
+                  <a:lnTo>
+                    <a:pt x="2077053" y="3092006"/>
+                  </a:lnTo>
+                  <a:lnTo>
+                    <a:pt x="2005430" y="3109834"/>
+                  </a:lnTo>
+                  <a:lnTo>
+                    <a:pt x="1933808" y="3127095"/>
+                  </a:lnTo>
+                  <a:lnTo>
+                    <a:pt x="1862185" y="3143808"/>
+                  </a:lnTo>
+                  <a:lnTo>
+                    <a:pt x="1790563" y="3159988"/>
+                  </a:lnTo>
+                  <a:lnTo>
+                    <a:pt x="1718940" y="3175655"/>
+                  </a:lnTo>
+                  <a:lnTo>
+                    <a:pt x="1647318" y="3190823"/>
+                  </a:lnTo>
+                  <a:lnTo>
+                    <a:pt x="1575695" y="3205509"/>
+                  </a:lnTo>
+                  <a:lnTo>
+                    <a:pt x="1504073" y="3219727"/>
+                  </a:lnTo>
+                  <a:lnTo>
+                    <a:pt x="1432450" y="3233494"/>
+                  </a:lnTo>
+                  <a:lnTo>
+                    <a:pt x="1360827" y="3246823"/>
+                  </a:lnTo>
+                  <a:lnTo>
+                    <a:pt x="1289205" y="3259728"/>
+                  </a:lnTo>
+                  <a:lnTo>
+                    <a:pt x="1217582" y="3272222"/>
+                  </a:lnTo>
+                  <a:lnTo>
+                    <a:pt x="1145960" y="3284320"/>
+                  </a:lnTo>
+                  <a:lnTo>
+                    <a:pt x="1074337" y="3296032"/>
+                  </a:lnTo>
+                  <a:lnTo>
+                    <a:pt x="1002715" y="3307372"/>
+                  </a:lnTo>
+                  <a:lnTo>
+                    <a:pt x="931092" y="3318352"/>
+                  </a:lnTo>
+                  <a:lnTo>
+                    <a:pt x="859470" y="3328982"/>
+                  </a:lnTo>
+                  <a:lnTo>
+                    <a:pt x="787847" y="3339275"/>
+                  </a:lnTo>
+                  <a:lnTo>
+                    <a:pt x="716225" y="3349240"/>
+                  </a:lnTo>
+                  <a:lnTo>
+                    <a:pt x="644602" y="3358888"/>
+                  </a:lnTo>
+                  <a:lnTo>
+                    <a:pt x="572980" y="3368229"/>
+                  </a:lnTo>
+                  <a:lnTo>
+                    <a:pt x="501357" y="3377273"/>
+                  </a:lnTo>
+                  <a:lnTo>
+                    <a:pt x="429735" y="3386030"/>
+                  </a:lnTo>
+                  <a:lnTo>
+                    <a:pt x="358112" y="3394508"/>
+                  </a:lnTo>
+                  <a:lnTo>
+                    <a:pt x="286490" y="3402717"/>
+                  </a:lnTo>
+                  <a:lnTo>
+                    <a:pt x="214867" y="3410664"/>
+                  </a:lnTo>
+                  <a:lnTo>
+                    <a:pt x="143245" y="3418359"/>
+                  </a:lnTo>
+                  <a:lnTo>
+                    <a:pt x="71622" y="3425809"/>
+                  </a:lnTo>
+                  <a:lnTo>
+                    <a:pt x="0" y="3433023"/>
                   </a:lnTo>
                   <a:close/>
                 </a:path>
@@ -3724,269 +3730,275 @@
           <p:spPr>
             <a:xfrm>
               <a:off x="1172049" y="1896563"/>
-              <a:ext cx="6040936" cy="2780974"/>
+              <a:ext cx="6230681" cy="2779999"/>
             </a:xfrm>
             <a:custGeom>
               <a:avLst/>
               <a:pathLst>
-                <a:path w="6040936" h="2780974">
+                <a:path w="6230681" h="2779999">
                   <a:moveTo>
-                    <a:pt x="0" y="2625624"/>
+                    <a:pt x="0" y="2538674"/>
                   </a:moveTo>
                   <a:lnTo>
-                    <a:pt x="71622" y="2629627"/>
-                  </a:lnTo>
-                  <a:lnTo>
-                    <a:pt x="143245" y="2633614"/>
-                  </a:lnTo>
-                  <a:lnTo>
-                    <a:pt x="214867" y="2637585"/>
-                  </a:lnTo>
-                  <a:lnTo>
-                    <a:pt x="286490" y="2641541"/>
-                  </a:lnTo>
-                  <a:lnTo>
-                    <a:pt x="358112" y="2645482"/>
-                  </a:lnTo>
-                  <a:lnTo>
-                    <a:pt x="429735" y="2649407"/>
-                  </a:lnTo>
-                  <a:lnTo>
-                    <a:pt x="501357" y="2653317"/>
-                  </a:lnTo>
-                  <a:lnTo>
-                    <a:pt x="572980" y="2657211"/>
-                  </a:lnTo>
-                  <a:lnTo>
-                    <a:pt x="644602" y="2661091"/>
-                  </a:lnTo>
-                  <a:lnTo>
-                    <a:pt x="716225" y="2664955"/>
-                  </a:lnTo>
-                  <a:lnTo>
-                    <a:pt x="787847" y="2668804"/>
-                  </a:lnTo>
-                  <a:lnTo>
-                    <a:pt x="859470" y="2672639"/>
-                  </a:lnTo>
-                  <a:lnTo>
-                    <a:pt x="931092" y="2676458"/>
-                  </a:lnTo>
-                  <a:lnTo>
-                    <a:pt x="1002715" y="2680263"/>
-                  </a:lnTo>
-                  <a:lnTo>
-                    <a:pt x="1074337" y="2684052"/>
-                  </a:lnTo>
-                  <a:lnTo>
-                    <a:pt x="1145960" y="2687827"/>
-                  </a:lnTo>
-                  <a:lnTo>
-                    <a:pt x="1217582" y="2691587"/>
-                  </a:lnTo>
-                  <a:lnTo>
-                    <a:pt x="1289205" y="2695333"/>
-                  </a:lnTo>
-                  <a:lnTo>
-                    <a:pt x="1360827" y="2699064"/>
-                  </a:lnTo>
-                  <a:lnTo>
-                    <a:pt x="1432450" y="2702780"/>
-                  </a:lnTo>
-                  <a:lnTo>
-                    <a:pt x="1504073" y="2706482"/>
-                  </a:lnTo>
-                  <a:lnTo>
-                    <a:pt x="1575695" y="2710169"/>
-                  </a:lnTo>
-                  <a:lnTo>
-                    <a:pt x="1647318" y="2713843"/>
-                  </a:lnTo>
-                  <a:lnTo>
-                    <a:pt x="1718940" y="2717501"/>
-                  </a:lnTo>
-                  <a:lnTo>
-                    <a:pt x="1790563" y="2721146"/>
-                  </a:lnTo>
-                  <a:lnTo>
-                    <a:pt x="1862185" y="2724776"/>
-                  </a:lnTo>
-                  <a:lnTo>
-                    <a:pt x="1933808" y="2728392"/>
-                  </a:lnTo>
-                  <a:lnTo>
-                    <a:pt x="2005430" y="2731994"/>
-                  </a:lnTo>
-                  <a:lnTo>
-                    <a:pt x="2077053" y="2735582"/>
-                  </a:lnTo>
-                  <a:lnTo>
-                    <a:pt x="2148675" y="2739156"/>
-                  </a:lnTo>
-                  <a:lnTo>
-                    <a:pt x="2220298" y="2742717"/>
-                  </a:lnTo>
-                  <a:lnTo>
-                    <a:pt x="2291920" y="2746263"/>
-                  </a:lnTo>
-                  <a:lnTo>
-                    <a:pt x="2363543" y="2749795"/>
-                  </a:lnTo>
-                  <a:lnTo>
-                    <a:pt x="2435165" y="2753314"/>
-                  </a:lnTo>
-                  <a:lnTo>
-                    <a:pt x="2506788" y="2756819"/>
-                  </a:lnTo>
-                  <a:lnTo>
-                    <a:pt x="2578410" y="2760310"/>
-                  </a:lnTo>
-                  <a:lnTo>
-                    <a:pt x="2650033" y="2763788"/>
-                  </a:lnTo>
-                  <a:lnTo>
-                    <a:pt x="2721655" y="2767252"/>
-                  </a:lnTo>
-                  <a:lnTo>
-                    <a:pt x="2793278" y="2770703"/>
-                  </a:lnTo>
-                  <a:lnTo>
-                    <a:pt x="2864901" y="2774140"/>
-                  </a:lnTo>
-                  <a:lnTo>
-                    <a:pt x="2936523" y="2777564"/>
-                  </a:lnTo>
-                  <a:lnTo>
-                    <a:pt x="3008146" y="2780974"/>
-                  </a:lnTo>
-                  <a:lnTo>
-                    <a:pt x="3079768" y="2770504"/>
-                  </a:lnTo>
-                  <a:lnTo>
-                    <a:pt x="3151391" y="2739664"/>
-                  </a:lnTo>
-                  <a:lnTo>
-                    <a:pt x="3223013" y="2707746"/>
-                  </a:lnTo>
-                  <a:lnTo>
-                    <a:pt x="3294636" y="2674712"/>
-                  </a:lnTo>
-                  <a:lnTo>
-                    <a:pt x="3366258" y="2640523"/>
-                  </a:lnTo>
-                  <a:lnTo>
-                    <a:pt x="3437881" y="2605138"/>
-                  </a:lnTo>
-                  <a:lnTo>
-                    <a:pt x="3509503" y="2568517"/>
-                  </a:lnTo>
-                  <a:lnTo>
-                    <a:pt x="3581126" y="2530615"/>
-                  </a:lnTo>
-                  <a:lnTo>
-                    <a:pt x="3652748" y="2491388"/>
-                  </a:lnTo>
-                  <a:lnTo>
-                    <a:pt x="3724371" y="2450790"/>
-                  </a:lnTo>
-                  <a:lnTo>
-                    <a:pt x="3795993" y="2408772"/>
-                  </a:lnTo>
-                  <a:lnTo>
-                    <a:pt x="3867616" y="2365286"/>
-                  </a:lnTo>
-                  <a:lnTo>
-                    <a:pt x="3939238" y="2320279"/>
-                  </a:lnTo>
-                  <a:lnTo>
-                    <a:pt x="4010861" y="2273699"/>
-                  </a:lnTo>
-                  <a:lnTo>
-                    <a:pt x="4082483" y="2225490"/>
-                  </a:lnTo>
-                  <a:lnTo>
-                    <a:pt x="4154106" y="2175596"/>
-                  </a:lnTo>
-                  <a:lnTo>
-                    <a:pt x="4225729" y="2123957"/>
-                  </a:lnTo>
-                  <a:lnTo>
-                    <a:pt x="4297351" y="2070513"/>
-                  </a:lnTo>
-                  <a:lnTo>
-                    <a:pt x="4368974" y="2015201"/>
-                  </a:lnTo>
-                  <a:lnTo>
-                    <a:pt x="4440596" y="1957955"/>
-                  </a:lnTo>
-                  <a:lnTo>
-                    <a:pt x="4512219" y="1898708"/>
-                  </a:lnTo>
-                  <a:lnTo>
-                    <a:pt x="4583841" y="1837389"/>
-                  </a:lnTo>
-                  <a:lnTo>
-                    <a:pt x="4655464" y="1773927"/>
-                  </a:lnTo>
-                  <a:lnTo>
-                    <a:pt x="4727086" y="1708245"/>
-                  </a:lnTo>
-                  <a:lnTo>
-                    <a:pt x="4798709" y="1640268"/>
-                  </a:lnTo>
-                  <a:lnTo>
-                    <a:pt x="4870331" y="1569914"/>
-                  </a:lnTo>
-                  <a:lnTo>
-                    <a:pt x="4941954" y="1497101"/>
-                  </a:lnTo>
-                  <a:lnTo>
-                    <a:pt x="5013576" y="1421741"/>
-                  </a:lnTo>
-                  <a:lnTo>
-                    <a:pt x="5085199" y="1343748"/>
-                  </a:lnTo>
-                  <a:lnTo>
-                    <a:pt x="5156821" y="1263027"/>
-                  </a:lnTo>
-                  <a:lnTo>
-                    <a:pt x="5228444" y="1179485"/>
-                  </a:lnTo>
-                  <a:lnTo>
-                    <a:pt x="5300066" y="1093022"/>
-                  </a:lnTo>
-                  <a:lnTo>
-                    <a:pt x="5371689" y="1003536"/>
-                  </a:lnTo>
-                  <a:lnTo>
-                    <a:pt x="5443311" y="910921"/>
-                  </a:lnTo>
-                  <a:lnTo>
-                    <a:pt x="5514934" y="815069"/>
-                  </a:lnTo>
-                  <a:lnTo>
-                    <a:pt x="5586557" y="715865"/>
-                  </a:lnTo>
-                  <a:lnTo>
-                    <a:pt x="5658179" y="613194"/>
-                  </a:lnTo>
-                  <a:lnTo>
-                    <a:pt x="5729802" y="506933"/>
-                  </a:lnTo>
-                  <a:lnTo>
-                    <a:pt x="5801424" y="396957"/>
-                  </a:lnTo>
-                  <a:lnTo>
-                    <a:pt x="5873047" y="283136"/>
-                  </a:lnTo>
-                  <a:lnTo>
-                    <a:pt x="5944669" y="165336"/>
-                  </a:lnTo>
-                  <a:lnTo>
-                    <a:pt x="6016292" y="43417"/>
-                  </a:lnTo>
-                  <a:lnTo>
-                    <a:pt x="6040936" y="0"/>
+                    <a:pt x="71622" y="2545131"/>
+                  </a:lnTo>
+                  <a:lnTo>
+                    <a:pt x="143245" y="2551551"/>
+                  </a:lnTo>
+                  <a:lnTo>
+                    <a:pt x="214867" y="2557933"/>
+                  </a:lnTo>
+                  <a:lnTo>
+                    <a:pt x="286490" y="2564278"/>
+                  </a:lnTo>
+                  <a:lnTo>
+                    <a:pt x="358112" y="2570587"/>
+                  </a:lnTo>
+                  <a:lnTo>
+                    <a:pt x="429735" y="2576859"/>
+                  </a:lnTo>
+                  <a:lnTo>
+                    <a:pt x="501357" y="2583095"/>
+                  </a:lnTo>
+                  <a:lnTo>
+                    <a:pt x="572980" y="2589294"/>
+                  </a:lnTo>
+                  <a:lnTo>
+                    <a:pt x="644602" y="2595458"/>
+                  </a:lnTo>
+                  <a:lnTo>
+                    <a:pt x="716225" y="2601586"/>
+                  </a:lnTo>
+                  <a:lnTo>
+                    <a:pt x="787847" y="2607678"/>
+                  </a:lnTo>
+                  <a:lnTo>
+                    <a:pt x="859470" y="2613735"/>
+                  </a:lnTo>
+                  <a:lnTo>
+                    <a:pt x="931092" y="2619757"/>
+                  </a:lnTo>
+                  <a:lnTo>
+                    <a:pt x="1002715" y="2625744"/>
+                  </a:lnTo>
+                  <a:lnTo>
+                    <a:pt x="1074337" y="2631696"/>
+                  </a:lnTo>
+                  <a:lnTo>
+                    <a:pt x="1145960" y="2637614"/>
+                  </a:lnTo>
+                  <a:lnTo>
+                    <a:pt x="1217582" y="2643497"/>
+                  </a:lnTo>
+                  <a:lnTo>
+                    <a:pt x="1289205" y="2649347"/>
+                  </a:lnTo>
+                  <a:lnTo>
+                    <a:pt x="1360827" y="2655162"/>
+                  </a:lnTo>
+                  <a:lnTo>
+                    <a:pt x="1432450" y="2660944"/>
+                  </a:lnTo>
+                  <a:lnTo>
+                    <a:pt x="1504073" y="2666692"/>
+                  </a:lnTo>
+                  <a:lnTo>
+                    <a:pt x="1575695" y="2672407"/>
+                  </a:lnTo>
+                  <a:lnTo>
+                    <a:pt x="1647318" y="2678089"/>
+                  </a:lnTo>
+                  <a:lnTo>
+                    <a:pt x="1718940" y="2683738"/>
+                  </a:lnTo>
+                  <a:lnTo>
+                    <a:pt x="1790563" y="2689354"/>
+                  </a:lnTo>
+                  <a:lnTo>
+                    <a:pt x="1862185" y="2694938"/>
+                  </a:lnTo>
+                  <a:lnTo>
+                    <a:pt x="1933808" y="2700489"/>
+                  </a:lnTo>
+                  <a:lnTo>
+                    <a:pt x="2005430" y="2706008"/>
+                  </a:lnTo>
+                  <a:lnTo>
+                    <a:pt x="2077053" y="2711495"/>
+                  </a:lnTo>
+                  <a:lnTo>
+                    <a:pt x="2148675" y="2716950"/>
+                  </a:lnTo>
+                  <a:lnTo>
+                    <a:pt x="2220298" y="2722374"/>
+                  </a:lnTo>
+                  <a:lnTo>
+                    <a:pt x="2291920" y="2727766"/>
+                  </a:lnTo>
+                  <a:lnTo>
+                    <a:pt x="2363543" y="2733127"/>
+                  </a:lnTo>
+                  <a:lnTo>
+                    <a:pt x="2435165" y="2738457"/>
+                  </a:lnTo>
+                  <a:lnTo>
+                    <a:pt x="2506788" y="2743756"/>
+                  </a:lnTo>
+                  <a:lnTo>
+                    <a:pt x="2578410" y="2749024"/>
+                  </a:lnTo>
+                  <a:lnTo>
+                    <a:pt x="2650033" y="2754262"/>
+                  </a:lnTo>
+                  <a:lnTo>
+                    <a:pt x="2721655" y="2759469"/>
+                  </a:lnTo>
+                  <a:lnTo>
+                    <a:pt x="2793278" y="2764647"/>
+                  </a:lnTo>
+                  <a:lnTo>
+                    <a:pt x="2864901" y="2769794"/>
+                  </a:lnTo>
+                  <a:lnTo>
+                    <a:pt x="2936523" y="2774911"/>
+                  </a:lnTo>
+                  <a:lnTo>
+                    <a:pt x="3008146" y="2779999"/>
+                  </a:lnTo>
+                  <a:lnTo>
+                    <a:pt x="3079768" y="2771252"/>
+                  </a:lnTo>
+                  <a:lnTo>
+                    <a:pt x="3151391" y="2742303"/>
+                  </a:lnTo>
+                  <a:lnTo>
+                    <a:pt x="3223013" y="2712404"/>
+                  </a:lnTo>
+                  <a:lnTo>
+                    <a:pt x="3294636" y="2681522"/>
+                  </a:lnTo>
+                  <a:lnTo>
+                    <a:pt x="3366258" y="2649627"/>
+                  </a:lnTo>
+                  <a:lnTo>
+                    <a:pt x="3437881" y="2616684"/>
+                  </a:lnTo>
+                  <a:lnTo>
+                    <a:pt x="3509503" y="2582658"/>
+                  </a:lnTo>
+                  <a:lnTo>
+                    <a:pt x="3581126" y="2547516"/>
+                  </a:lnTo>
+                  <a:lnTo>
+                    <a:pt x="3652748" y="2511219"/>
+                  </a:lnTo>
+                  <a:lnTo>
+                    <a:pt x="3724371" y="2473730"/>
+                  </a:lnTo>
+                  <a:lnTo>
+                    <a:pt x="3795993" y="2435009"/>
+                  </a:lnTo>
+                  <a:lnTo>
+                    <a:pt x="3867616" y="2395017"/>
+                  </a:lnTo>
+                  <a:lnTo>
+                    <a:pt x="3939238" y="2353711"/>
+                  </a:lnTo>
+                  <a:lnTo>
+                    <a:pt x="4010861" y="2311049"/>
+                  </a:lnTo>
+                  <a:lnTo>
+                    <a:pt x="4082483" y="2266986"/>
+                  </a:lnTo>
+                  <a:lnTo>
+                    <a:pt x="4154106" y="2221475"/>
+                  </a:lnTo>
+                  <a:lnTo>
+                    <a:pt x="4225729" y="2174469"/>
+                  </a:lnTo>
+                  <a:lnTo>
+                    <a:pt x="4297351" y="2125920"/>
+                  </a:lnTo>
+                  <a:lnTo>
+                    <a:pt x="4368974" y="2075776"/>
+                  </a:lnTo>
+                  <a:lnTo>
+                    <a:pt x="4440596" y="2023985"/>
+                  </a:lnTo>
+                  <a:lnTo>
+                    <a:pt x="4512219" y="1970493"/>
+                  </a:lnTo>
+                  <a:lnTo>
+                    <a:pt x="4583841" y="1915245"/>
+                  </a:lnTo>
+                  <a:lnTo>
+                    <a:pt x="4655464" y="1858181"/>
+                  </a:lnTo>
+                  <a:lnTo>
+                    <a:pt x="4727086" y="1799244"/>
+                  </a:lnTo>
+                  <a:lnTo>
+                    <a:pt x="4798709" y="1738370"/>
+                  </a:lnTo>
+                  <a:lnTo>
+                    <a:pt x="4870331" y="1675498"/>
+                  </a:lnTo>
+                  <a:lnTo>
+                    <a:pt x="4941954" y="1610560"/>
+                  </a:lnTo>
+                  <a:lnTo>
+                    <a:pt x="5013576" y="1543490"/>
+                  </a:lnTo>
+                  <a:lnTo>
+                    <a:pt x="5085199" y="1474216"/>
+                  </a:lnTo>
+                  <a:lnTo>
+                    <a:pt x="5156821" y="1402668"/>
+                  </a:lnTo>
+                  <a:lnTo>
+                    <a:pt x="5228444" y="1328769"/>
+                  </a:lnTo>
+                  <a:lnTo>
+                    <a:pt x="5300066" y="1252444"/>
+                  </a:lnTo>
+                  <a:lnTo>
+                    <a:pt x="5371689" y="1173611"/>
+                  </a:lnTo>
+                  <a:lnTo>
+                    <a:pt x="5443311" y="1092190"/>
+                  </a:lnTo>
+                  <a:lnTo>
+                    <a:pt x="5514934" y="1008094"/>
+                  </a:lnTo>
+                  <a:lnTo>
+                    <a:pt x="5586557" y="921236"/>
+                  </a:lnTo>
+                  <a:lnTo>
+                    <a:pt x="5658179" y="831525"/>
+                  </a:lnTo>
+                  <a:lnTo>
+                    <a:pt x="5729802" y="738868"/>
+                  </a:lnTo>
+                  <a:lnTo>
+                    <a:pt x="5801424" y="643167"/>
+                  </a:lnTo>
+                  <a:lnTo>
+                    <a:pt x="5873047" y="544324"/>
+                  </a:lnTo>
+                  <a:lnTo>
+                    <a:pt x="5944669" y="442234"/>
+                  </a:lnTo>
+                  <a:lnTo>
+                    <a:pt x="6016292" y="336791"/>
+                  </a:lnTo>
+                  <a:lnTo>
+                    <a:pt x="6087914" y="227884"/>
+                  </a:lnTo>
+                  <a:lnTo>
+                    <a:pt x="6159537" y="115401"/>
+                  </a:lnTo>
+                  <a:lnTo>
+                    <a:pt x="6230681" y="0"/>
                   </a:lnTo>
                 </a:path>
               </a:pathLst>
@@ -4006,312 +4018,312 @@
           </p:nvSpPr>
           <p:spPr>
             <a:xfrm>
-              <a:off x="1172049" y="4680935"/>
-              <a:ext cx="7090630" cy="666986"/>
+              <a:off x="1172049" y="4681620"/>
+              <a:ext cx="7090630" cy="647965"/>
             </a:xfrm>
             <a:custGeom>
               <a:avLst/>
               <a:pathLst>
-                <a:path w="7090630" h="666986">
+                <a:path w="7090630" h="647965">
                   <a:moveTo>
-                    <a:pt x="7090630" y="170543"/>
+                    <a:pt x="7090630" y="241071"/>
                   </a:moveTo>
                   <a:lnTo>
-                    <a:pt x="7019007" y="167813"/>
-                  </a:lnTo>
-                  <a:lnTo>
-                    <a:pt x="6947385" y="165072"/>
-                  </a:lnTo>
-                  <a:lnTo>
-                    <a:pt x="6875762" y="162321"/>
-                  </a:lnTo>
-                  <a:lnTo>
-                    <a:pt x="6804139" y="159559"/>
-                  </a:lnTo>
-                  <a:lnTo>
-                    <a:pt x="6732517" y="156786"/>
-                  </a:lnTo>
-                  <a:lnTo>
-                    <a:pt x="6660894" y="154002"/>
-                  </a:lnTo>
-                  <a:lnTo>
-                    <a:pt x="6589272" y="151208"/>
-                  </a:lnTo>
-                  <a:lnTo>
-                    <a:pt x="6517649" y="148402"/>
-                  </a:lnTo>
-                  <a:lnTo>
-                    <a:pt x="6446027" y="145586"/>
-                  </a:lnTo>
-                  <a:lnTo>
-                    <a:pt x="6374404" y="142758"/>
-                  </a:lnTo>
-                  <a:lnTo>
-                    <a:pt x="6302782" y="139920"/>
-                  </a:lnTo>
-                  <a:lnTo>
-                    <a:pt x="6231159" y="137070"/>
-                  </a:lnTo>
-                  <a:lnTo>
-                    <a:pt x="6159537" y="134209"/>
-                  </a:lnTo>
-                  <a:lnTo>
-                    <a:pt x="6087914" y="131337"/>
-                  </a:lnTo>
-                  <a:lnTo>
-                    <a:pt x="6016292" y="128454"/>
-                  </a:lnTo>
-                  <a:lnTo>
-                    <a:pt x="5944669" y="125559"/>
-                  </a:lnTo>
-                  <a:lnTo>
-                    <a:pt x="5873047" y="122653"/>
-                  </a:lnTo>
-                  <a:lnTo>
-                    <a:pt x="5801424" y="119736"/>
-                  </a:lnTo>
-                  <a:lnTo>
-                    <a:pt x="5729802" y="116807"/>
-                  </a:lnTo>
-                  <a:lnTo>
-                    <a:pt x="5658179" y="113867"/>
-                  </a:lnTo>
-                  <a:lnTo>
-                    <a:pt x="5586557" y="110916"/>
-                  </a:lnTo>
-                  <a:lnTo>
-                    <a:pt x="5514934" y="107952"/>
-                  </a:lnTo>
-                  <a:lnTo>
-                    <a:pt x="5443311" y="104978"/>
-                  </a:lnTo>
-                  <a:lnTo>
-                    <a:pt x="5371689" y="101991"/>
-                  </a:lnTo>
-                  <a:lnTo>
-                    <a:pt x="5300066" y="98993"/>
-                  </a:lnTo>
-                  <a:lnTo>
-                    <a:pt x="5228444" y="95983"/>
-                  </a:lnTo>
-                  <a:lnTo>
-                    <a:pt x="5156821" y="92962"/>
-                  </a:lnTo>
-                  <a:lnTo>
-                    <a:pt x="5085199" y="89928"/>
-                  </a:lnTo>
-                  <a:lnTo>
-                    <a:pt x="5013576" y="86883"/>
-                  </a:lnTo>
-                  <a:lnTo>
-                    <a:pt x="4941954" y="83826"/>
-                  </a:lnTo>
-                  <a:lnTo>
-                    <a:pt x="4870331" y="80756"/>
-                  </a:lnTo>
-                  <a:lnTo>
-                    <a:pt x="4798709" y="77675"/>
-                  </a:lnTo>
-                  <a:lnTo>
-                    <a:pt x="4727086" y="74582"/>
-                  </a:lnTo>
-                  <a:lnTo>
-                    <a:pt x="4655464" y="71477"/>
-                  </a:lnTo>
-                  <a:lnTo>
-                    <a:pt x="4583841" y="68359"/>
-                  </a:lnTo>
-                  <a:lnTo>
-                    <a:pt x="4512219" y="65230"/>
-                  </a:lnTo>
-                  <a:lnTo>
-                    <a:pt x="4440596" y="62088"/>
-                  </a:lnTo>
-                  <a:lnTo>
-                    <a:pt x="4368974" y="58933"/>
-                  </a:lnTo>
-                  <a:lnTo>
-                    <a:pt x="4297351" y="55767"/>
-                  </a:lnTo>
-                  <a:lnTo>
-                    <a:pt x="4225729" y="52588"/>
-                  </a:lnTo>
-                  <a:lnTo>
-                    <a:pt x="4154106" y="49396"/>
-                  </a:lnTo>
-                  <a:lnTo>
-                    <a:pt x="4082483" y="46193"/>
-                  </a:lnTo>
-                  <a:lnTo>
-                    <a:pt x="4010861" y="42976"/>
-                  </a:lnTo>
-                  <a:lnTo>
-                    <a:pt x="3939238" y="39747"/>
-                  </a:lnTo>
-                  <a:lnTo>
-                    <a:pt x="3867616" y="36506"/>
-                  </a:lnTo>
-                  <a:lnTo>
-                    <a:pt x="3795993" y="33251"/>
-                  </a:lnTo>
-                  <a:lnTo>
-                    <a:pt x="3724371" y="29984"/>
-                  </a:lnTo>
-                  <a:lnTo>
-                    <a:pt x="3652748" y="26704"/>
-                  </a:lnTo>
-                  <a:lnTo>
-                    <a:pt x="3581126" y="23412"/>
-                  </a:lnTo>
-                  <a:lnTo>
-                    <a:pt x="3509503" y="20106"/>
-                  </a:lnTo>
-                  <a:lnTo>
-                    <a:pt x="3437881" y="16788"/>
-                  </a:lnTo>
-                  <a:lnTo>
-                    <a:pt x="3366258" y="13456"/>
-                  </a:lnTo>
-                  <a:lnTo>
-                    <a:pt x="3294636" y="10112"/>
-                  </a:lnTo>
-                  <a:lnTo>
-                    <a:pt x="3223013" y="6754"/>
-                  </a:lnTo>
-                  <a:lnTo>
-                    <a:pt x="3151391" y="3383"/>
+                    <a:pt x="7019007" y="237418"/>
+                  </a:lnTo>
+                  <a:lnTo>
+                    <a:pt x="6947385" y="233744"/>
+                  </a:lnTo>
+                  <a:lnTo>
+                    <a:pt x="6875762" y="230049"/>
+                  </a:lnTo>
+                  <a:lnTo>
+                    <a:pt x="6804139" y="226332"/>
+                  </a:lnTo>
+                  <a:lnTo>
+                    <a:pt x="6732517" y="222593"/>
+                  </a:lnTo>
+                  <a:lnTo>
+                    <a:pt x="6660894" y="218832"/>
+                  </a:lnTo>
+                  <a:lnTo>
+                    <a:pt x="6589272" y="215050"/>
+                  </a:lnTo>
+                  <a:lnTo>
+                    <a:pt x="6517649" y="211246"/>
+                  </a:lnTo>
+                  <a:lnTo>
+                    <a:pt x="6446027" y="207419"/>
+                  </a:lnTo>
+                  <a:lnTo>
+                    <a:pt x="6374404" y="203570"/>
+                  </a:lnTo>
+                  <a:lnTo>
+                    <a:pt x="6302782" y="199699"/>
+                  </a:lnTo>
+                  <a:lnTo>
+                    <a:pt x="6231159" y="195805"/>
+                  </a:lnTo>
+                  <a:lnTo>
+                    <a:pt x="6159537" y="191888"/>
+                  </a:lnTo>
+                  <a:lnTo>
+                    <a:pt x="6087914" y="187949"/>
+                  </a:lnTo>
+                  <a:lnTo>
+                    <a:pt x="6016292" y="183987"/>
+                  </a:lnTo>
+                  <a:lnTo>
+                    <a:pt x="5944669" y="180001"/>
+                  </a:lnTo>
+                  <a:lnTo>
+                    <a:pt x="5873047" y="175992"/>
+                  </a:lnTo>
+                  <a:lnTo>
+                    <a:pt x="5801424" y="171960"/>
+                  </a:lnTo>
+                  <a:lnTo>
+                    <a:pt x="5729802" y="167905"/>
+                  </a:lnTo>
+                  <a:lnTo>
+                    <a:pt x="5658179" y="163825"/>
+                  </a:lnTo>
+                  <a:lnTo>
+                    <a:pt x="5586557" y="159722"/>
+                  </a:lnTo>
+                  <a:lnTo>
+                    <a:pt x="5514934" y="155595"/>
+                  </a:lnTo>
+                  <a:lnTo>
+                    <a:pt x="5443311" y="151444"/>
+                  </a:lnTo>
+                  <a:lnTo>
+                    <a:pt x="5371689" y="147269"/>
+                  </a:lnTo>
+                  <a:lnTo>
+                    <a:pt x="5300066" y="143069"/>
+                  </a:lnTo>
+                  <a:lnTo>
+                    <a:pt x="5228444" y="138845"/>
+                  </a:lnTo>
+                  <a:lnTo>
+                    <a:pt x="5156821" y="134597"/>
+                  </a:lnTo>
+                  <a:lnTo>
+                    <a:pt x="5085199" y="130323"/>
+                  </a:lnTo>
+                  <a:lnTo>
+                    <a:pt x="5013576" y="126025"/>
+                  </a:lnTo>
+                  <a:lnTo>
+                    <a:pt x="4941954" y="121701"/>
+                  </a:lnTo>
+                  <a:lnTo>
+                    <a:pt x="4870331" y="117353"/>
+                  </a:lnTo>
+                  <a:lnTo>
+                    <a:pt x="4798709" y="112979"/>
+                  </a:lnTo>
+                  <a:lnTo>
+                    <a:pt x="4727086" y="108579"/>
+                  </a:lnTo>
+                  <a:lnTo>
+                    <a:pt x="4655464" y="104154"/>
+                  </a:lnTo>
+                  <a:lnTo>
+                    <a:pt x="4583841" y="99703"/>
+                  </a:lnTo>
+                  <a:lnTo>
+                    <a:pt x="4512219" y="95226"/>
+                  </a:lnTo>
+                  <a:lnTo>
+                    <a:pt x="4440596" y="90723"/>
+                  </a:lnTo>
+                  <a:lnTo>
+                    <a:pt x="4368974" y="86194"/>
+                  </a:lnTo>
+                  <a:lnTo>
+                    <a:pt x="4297351" y="81638"/>
+                  </a:lnTo>
+                  <a:lnTo>
+                    <a:pt x="4225729" y="77056"/>
+                  </a:lnTo>
+                  <a:lnTo>
+                    <a:pt x="4154106" y="72447"/>
+                  </a:lnTo>
+                  <a:lnTo>
+                    <a:pt x="4082483" y="67812"/>
+                  </a:lnTo>
+                  <a:lnTo>
+                    <a:pt x="4010861" y="63149"/>
+                  </a:lnTo>
+                  <a:lnTo>
+                    <a:pt x="3939238" y="58459"/>
+                  </a:lnTo>
+                  <a:lnTo>
+                    <a:pt x="3867616" y="53741"/>
+                  </a:lnTo>
+                  <a:lnTo>
+                    <a:pt x="3795993" y="48996"/>
+                  </a:lnTo>
+                  <a:lnTo>
+                    <a:pt x="3724371" y="44224"/>
+                  </a:lnTo>
+                  <a:lnTo>
+                    <a:pt x="3652748" y="39424"/>
+                  </a:lnTo>
+                  <a:lnTo>
+                    <a:pt x="3581126" y="34595"/>
+                  </a:lnTo>
+                  <a:lnTo>
+                    <a:pt x="3509503" y="29739"/>
+                  </a:lnTo>
+                  <a:lnTo>
+                    <a:pt x="3437881" y="24854"/>
+                  </a:lnTo>
+                  <a:lnTo>
+                    <a:pt x="3366258" y="19941"/>
+                  </a:lnTo>
+                  <a:lnTo>
+                    <a:pt x="3294636" y="14999"/>
+                  </a:lnTo>
+                  <a:lnTo>
+                    <a:pt x="3223013" y="10028"/>
+                  </a:lnTo>
+                  <a:lnTo>
+                    <a:pt x="3151391" y="5028"/>
                   </a:lnTo>
                   <a:lnTo>
                     <a:pt x="3079768" y="0"/>
                   </a:lnTo>
                   <a:lnTo>
-                    <a:pt x="3008146" y="15931"/>
-                  </a:lnTo>
-                  <a:lnTo>
-                    <a:pt x="2936523" y="44723"/>
-                  </a:lnTo>
-                  <a:lnTo>
-                    <a:pt x="2864901" y="72542"/>
-                  </a:lnTo>
-                  <a:lnTo>
-                    <a:pt x="2793278" y="99422"/>
-                  </a:lnTo>
-                  <a:lnTo>
-                    <a:pt x="2721655" y="125393"/>
-                  </a:lnTo>
-                  <a:lnTo>
-                    <a:pt x="2650033" y="150487"/>
-                  </a:lnTo>
-                  <a:lnTo>
-                    <a:pt x="2578410" y="174734"/>
-                  </a:lnTo>
-                  <a:lnTo>
-                    <a:pt x="2506788" y="198161"/>
-                  </a:lnTo>
-                  <a:lnTo>
-                    <a:pt x="2435165" y="220797"/>
-                  </a:lnTo>
-                  <a:lnTo>
-                    <a:pt x="2363543" y="242669"/>
-                  </a:lnTo>
-                  <a:lnTo>
-                    <a:pt x="2291920" y="263801"/>
-                  </a:lnTo>
-                  <a:lnTo>
-                    <a:pt x="2220298" y="284220"/>
-                  </a:lnTo>
-                  <a:lnTo>
-                    <a:pt x="2148675" y="303949"/>
-                  </a:lnTo>
-                  <a:lnTo>
-                    <a:pt x="2077053" y="323012"/>
-                  </a:lnTo>
-                  <a:lnTo>
-                    <a:pt x="2005430" y="341431"/>
-                  </a:lnTo>
-                  <a:lnTo>
-                    <a:pt x="1933808" y="359227"/>
-                  </a:lnTo>
-                  <a:lnTo>
-                    <a:pt x="1862185" y="376423"/>
-                  </a:lnTo>
-                  <a:lnTo>
-                    <a:pt x="1790563" y="393037"/>
-                  </a:lnTo>
-                  <a:lnTo>
-                    <a:pt x="1718940" y="409090"/>
-                  </a:lnTo>
-                  <a:lnTo>
-                    <a:pt x="1647318" y="424601"/>
-                  </a:lnTo>
-                  <a:lnTo>
-                    <a:pt x="1575695" y="439588"/>
-                  </a:lnTo>
-                  <a:lnTo>
-                    <a:pt x="1504073" y="454069"/>
-                  </a:lnTo>
-                  <a:lnTo>
-                    <a:pt x="1432450" y="468061"/>
-                  </a:lnTo>
-                  <a:lnTo>
-                    <a:pt x="1360827" y="481580"/>
-                  </a:lnTo>
-                  <a:lnTo>
-                    <a:pt x="1289205" y="494642"/>
-                  </a:lnTo>
-                  <a:lnTo>
-                    <a:pt x="1217582" y="507263"/>
-                  </a:lnTo>
-                  <a:lnTo>
-                    <a:pt x="1145960" y="519458"/>
-                  </a:lnTo>
-                  <a:lnTo>
-                    <a:pt x="1074337" y="531241"/>
-                  </a:lnTo>
-                  <a:lnTo>
-                    <a:pt x="1002715" y="542626"/>
-                  </a:lnTo>
-                  <a:lnTo>
-                    <a:pt x="931092" y="553626"/>
-                  </a:lnTo>
-                  <a:lnTo>
-                    <a:pt x="859470" y="564254"/>
-                  </a:lnTo>
-                  <a:lnTo>
-                    <a:pt x="787847" y="574524"/>
-                  </a:lnTo>
-                  <a:lnTo>
-                    <a:pt x="716225" y="584447"/>
-                  </a:lnTo>
-                  <a:lnTo>
-                    <a:pt x="644602" y="594034"/>
-                  </a:lnTo>
-                  <a:lnTo>
-                    <a:pt x="572980" y="603298"/>
-                  </a:lnTo>
-                  <a:lnTo>
-                    <a:pt x="501357" y="612249"/>
-                  </a:lnTo>
-                  <a:lnTo>
-                    <a:pt x="429735" y="620897"/>
-                  </a:lnTo>
-                  <a:lnTo>
-                    <a:pt x="358112" y="629253"/>
-                  </a:lnTo>
-                  <a:lnTo>
-                    <a:pt x="286490" y="637327"/>
-                  </a:lnTo>
-                  <a:lnTo>
-                    <a:pt x="214867" y="645128"/>
-                  </a:lnTo>
-                  <a:lnTo>
-                    <a:pt x="143245" y="652666"/>
-                  </a:lnTo>
-                  <a:lnTo>
-                    <a:pt x="71622" y="659949"/>
-                  </a:lnTo>
-                  <a:lnTo>
-                    <a:pt x="0" y="666986"/>
+                    <a:pt x="3008146" y="14222"/>
+                  </a:lnTo>
+                  <a:lnTo>
+                    <a:pt x="2936523" y="41359"/>
+                  </a:lnTo>
+                  <a:lnTo>
+                    <a:pt x="2864901" y="67633"/>
+                  </a:lnTo>
+                  <a:lnTo>
+                    <a:pt x="2793278" y="93071"/>
+                  </a:lnTo>
+                  <a:lnTo>
+                    <a:pt x="2721655" y="117700"/>
+                  </a:lnTo>
+                  <a:lnTo>
+                    <a:pt x="2650033" y="141546"/>
+                  </a:lnTo>
+                  <a:lnTo>
+                    <a:pt x="2578410" y="164634"/>
+                  </a:lnTo>
+                  <a:lnTo>
+                    <a:pt x="2506788" y="186988"/>
+                  </a:lnTo>
+                  <a:lnTo>
+                    <a:pt x="2435165" y="208631"/>
+                  </a:lnTo>
+                  <a:lnTo>
+                    <a:pt x="2363543" y="229585"/>
+                  </a:lnTo>
+                  <a:lnTo>
+                    <a:pt x="2291920" y="249874"/>
+                  </a:lnTo>
+                  <a:lnTo>
+                    <a:pt x="2220298" y="269517"/>
+                  </a:lnTo>
+                  <a:lnTo>
+                    <a:pt x="2148675" y="288535"/>
+                  </a:lnTo>
+                  <a:lnTo>
+                    <a:pt x="2077053" y="306949"/>
+                  </a:lnTo>
+                  <a:lnTo>
+                    <a:pt x="2005430" y="324777"/>
+                  </a:lnTo>
+                  <a:lnTo>
+                    <a:pt x="1933808" y="342038"/>
+                  </a:lnTo>
+                  <a:lnTo>
+                    <a:pt x="1862185" y="358750"/>
+                  </a:lnTo>
+                  <a:lnTo>
+                    <a:pt x="1790563" y="374931"/>
+                  </a:lnTo>
+                  <a:lnTo>
+                    <a:pt x="1718940" y="390597"/>
+                  </a:lnTo>
+                  <a:lnTo>
+                    <a:pt x="1647318" y="405765"/>
+                  </a:lnTo>
+                  <a:lnTo>
+                    <a:pt x="1575695" y="420451"/>
+                  </a:lnTo>
+                  <a:lnTo>
+                    <a:pt x="1504073" y="434670"/>
+                  </a:lnTo>
+                  <a:lnTo>
+                    <a:pt x="1432450" y="448437"/>
+                  </a:lnTo>
+                  <a:lnTo>
+                    <a:pt x="1360827" y="461765"/>
+                  </a:lnTo>
+                  <a:lnTo>
+                    <a:pt x="1289205" y="474670"/>
+                  </a:lnTo>
+                  <a:lnTo>
+                    <a:pt x="1217582" y="487165"/>
+                  </a:lnTo>
+                  <a:lnTo>
+                    <a:pt x="1145960" y="499262"/>
+                  </a:lnTo>
+                  <a:lnTo>
+                    <a:pt x="1074337" y="510975"/>
+                  </a:lnTo>
+                  <a:lnTo>
+                    <a:pt x="1002715" y="522315"/>
+                  </a:lnTo>
+                  <a:lnTo>
+                    <a:pt x="931092" y="533294"/>
+                  </a:lnTo>
+                  <a:lnTo>
+                    <a:pt x="859470" y="543925"/>
+                  </a:lnTo>
+                  <a:lnTo>
+                    <a:pt x="787847" y="554217"/>
+                  </a:lnTo>
+                  <a:lnTo>
+                    <a:pt x="716225" y="564182"/>
+                  </a:lnTo>
+                  <a:lnTo>
+                    <a:pt x="644602" y="573830"/>
+                  </a:lnTo>
+                  <a:lnTo>
+                    <a:pt x="572980" y="583172"/>
+                  </a:lnTo>
+                  <a:lnTo>
+                    <a:pt x="501357" y="592216"/>
+                  </a:lnTo>
+                  <a:lnTo>
+                    <a:pt x="429735" y="600973"/>
+                  </a:lnTo>
+                  <a:lnTo>
+                    <a:pt x="358112" y="609451"/>
+                  </a:lnTo>
+                  <a:lnTo>
+                    <a:pt x="286490" y="617659"/>
+                  </a:lnTo>
+                  <a:lnTo>
+                    <a:pt x="214867" y="625607"/>
+                  </a:lnTo>
+                  <a:lnTo>
+                    <a:pt x="143245" y="633302"/>
+                  </a:lnTo>
+                  <a:lnTo>
+                    <a:pt x="71622" y="640752"/>
+                  </a:lnTo>
+                  <a:lnTo>
+                    <a:pt x="0" y="647965"/>
                   </a:lnTo>
                 </a:path>
               </a:pathLst>
@@ -4331,309 +4343,309 @@
           </p:nvSpPr>
           <p:spPr>
             <a:xfrm>
-              <a:off x="1172049" y="3495780"/>
-              <a:ext cx="7090630" cy="1598757"/>
+              <a:off x="1172049" y="3712565"/>
+              <a:ext cx="7090630" cy="1342019"/>
             </a:xfrm>
             <a:custGeom>
               <a:avLst/>
               <a:pathLst>
-                <a:path w="7090630" h="1598757">
+                <a:path w="7090630" h="1342019">
                   <a:moveTo>
-                    <a:pt x="0" y="1598757"/>
+                    <a:pt x="0" y="1342019"/>
                   </a:moveTo>
                   <a:lnTo>
-                    <a:pt x="71622" y="1591780"/>
-                  </a:lnTo>
-                  <a:lnTo>
-                    <a:pt x="143245" y="1584695"/>
-                  </a:lnTo>
-                  <a:lnTo>
-                    <a:pt x="214867" y="1577502"/>
-                  </a:lnTo>
-                  <a:lnTo>
-                    <a:pt x="286490" y="1570199"/>
-                  </a:lnTo>
-                  <a:lnTo>
-                    <a:pt x="358112" y="1562783"/>
-                  </a:lnTo>
-                  <a:lnTo>
-                    <a:pt x="429735" y="1555254"/>
-                  </a:lnTo>
-                  <a:lnTo>
-                    <a:pt x="501357" y="1547609"/>
-                  </a:lnTo>
-                  <a:lnTo>
-                    <a:pt x="572980" y="1539847"/>
-                  </a:lnTo>
-                  <a:lnTo>
-                    <a:pt x="644602" y="1531966"/>
-                  </a:lnTo>
-                  <a:lnTo>
-                    <a:pt x="716225" y="1523963"/>
-                  </a:lnTo>
-                  <a:lnTo>
-                    <a:pt x="787847" y="1515838"/>
-                  </a:lnTo>
-                  <a:lnTo>
-                    <a:pt x="859470" y="1507589"/>
-                  </a:lnTo>
-                  <a:lnTo>
-                    <a:pt x="931092" y="1499212"/>
-                  </a:lnTo>
-                  <a:lnTo>
-                    <a:pt x="1002715" y="1490707"/>
-                  </a:lnTo>
-                  <a:lnTo>
-                    <a:pt x="1074337" y="1482072"/>
-                  </a:lnTo>
-                  <a:lnTo>
-                    <a:pt x="1145960" y="1473304"/>
-                  </a:lnTo>
-                  <a:lnTo>
-                    <a:pt x="1217582" y="1464402"/>
-                  </a:lnTo>
-                  <a:lnTo>
-                    <a:pt x="1289205" y="1455363"/>
-                  </a:lnTo>
-                  <a:lnTo>
-                    <a:pt x="1360827" y="1446185"/>
-                  </a:lnTo>
-                  <a:lnTo>
-                    <a:pt x="1432450" y="1436866"/>
-                  </a:lnTo>
-                  <a:lnTo>
-                    <a:pt x="1504073" y="1427405"/>
-                  </a:lnTo>
-                  <a:lnTo>
-                    <a:pt x="1575695" y="1417798"/>
-                  </a:lnTo>
-                  <a:lnTo>
-                    <a:pt x="1647318" y="1408044"/>
-                  </a:lnTo>
-                  <a:lnTo>
-                    <a:pt x="1718940" y="1398140"/>
-                  </a:lnTo>
-                  <a:lnTo>
-                    <a:pt x="1790563" y="1388084"/>
-                  </a:lnTo>
-                  <a:lnTo>
-                    <a:pt x="1862185" y="1377874"/>
-                  </a:lnTo>
-                  <a:lnTo>
-                    <a:pt x="1933808" y="1367507"/>
-                  </a:lnTo>
-                  <a:lnTo>
-                    <a:pt x="2005430" y="1356981"/>
-                  </a:lnTo>
-                  <a:lnTo>
-                    <a:pt x="2077053" y="1346293"/>
-                  </a:lnTo>
-                  <a:lnTo>
-                    <a:pt x="2148675" y="1335442"/>
-                  </a:lnTo>
-                  <a:lnTo>
-                    <a:pt x="2220298" y="1324424"/>
-                  </a:lnTo>
-                  <a:lnTo>
-                    <a:pt x="2291920" y="1313237"/>
-                  </a:lnTo>
-                  <a:lnTo>
-                    <a:pt x="2363543" y="1301878"/>
-                  </a:lnTo>
-                  <a:lnTo>
-                    <a:pt x="2435165" y="1290345"/>
-                  </a:lnTo>
-                  <a:lnTo>
-                    <a:pt x="2506788" y="1278635"/>
-                  </a:lnTo>
-                  <a:lnTo>
-                    <a:pt x="2578410" y="1266745"/>
-                  </a:lnTo>
-                  <a:lnTo>
-                    <a:pt x="2650033" y="1254673"/>
-                  </a:lnTo>
-                  <a:lnTo>
-                    <a:pt x="2721655" y="1242415"/>
-                  </a:lnTo>
-                  <a:lnTo>
-                    <a:pt x="2793278" y="1229970"/>
-                  </a:lnTo>
-                  <a:lnTo>
-                    <a:pt x="2864901" y="1217333"/>
-                  </a:lnTo>
-                  <a:lnTo>
-                    <a:pt x="2936523" y="1204503"/>
-                  </a:lnTo>
-                  <a:lnTo>
-                    <a:pt x="3008146" y="1191475"/>
-                  </a:lnTo>
-                  <a:lnTo>
-                    <a:pt x="3079768" y="1178248"/>
-                  </a:lnTo>
-                  <a:lnTo>
-                    <a:pt x="3151391" y="1164817"/>
-                  </a:lnTo>
-                  <a:lnTo>
-                    <a:pt x="3223013" y="1151181"/>
-                  </a:lnTo>
-                  <a:lnTo>
-                    <a:pt x="3294636" y="1137335"/>
-                  </a:lnTo>
-                  <a:lnTo>
-                    <a:pt x="3366258" y="1123277"/>
-                  </a:lnTo>
-                  <a:lnTo>
-                    <a:pt x="3437881" y="1109003"/>
-                  </a:lnTo>
-                  <a:lnTo>
-                    <a:pt x="3509503" y="1094510"/>
-                  </a:lnTo>
-                  <a:lnTo>
-                    <a:pt x="3581126" y="1079795"/>
-                  </a:lnTo>
-                  <a:lnTo>
-                    <a:pt x="3652748" y="1064854"/>
-                  </a:lnTo>
-                  <a:lnTo>
-                    <a:pt x="3724371" y="1049684"/>
-                  </a:lnTo>
-                  <a:lnTo>
-                    <a:pt x="3795993" y="1034280"/>
-                  </a:lnTo>
-                  <a:lnTo>
-                    <a:pt x="3867616" y="1018641"/>
-                  </a:lnTo>
-                  <a:lnTo>
-                    <a:pt x="3939238" y="1002761"/>
-                  </a:lnTo>
-                  <a:lnTo>
-                    <a:pt x="4010861" y="986638"/>
-                  </a:lnTo>
-                  <a:lnTo>
-                    <a:pt x="4082483" y="970267"/>
-                  </a:lnTo>
-                  <a:lnTo>
-                    <a:pt x="4154106" y="953645"/>
-                  </a:lnTo>
-                  <a:lnTo>
-                    <a:pt x="4225729" y="936768"/>
-                  </a:lnTo>
-                  <a:lnTo>
-                    <a:pt x="4297351" y="919632"/>
-                  </a:lnTo>
-                  <a:lnTo>
-                    <a:pt x="4368974" y="902233"/>
-                  </a:lnTo>
-                  <a:lnTo>
-                    <a:pt x="4440596" y="884567"/>
-                  </a:lnTo>
-                  <a:lnTo>
-                    <a:pt x="4512219" y="866630"/>
-                  </a:lnTo>
-                  <a:lnTo>
-                    <a:pt x="4583841" y="848418"/>
-                  </a:lnTo>
-                  <a:lnTo>
-                    <a:pt x="4655464" y="829926"/>
-                  </a:lnTo>
-                  <a:lnTo>
-                    <a:pt x="4727086" y="811150"/>
-                  </a:lnTo>
-                  <a:lnTo>
-                    <a:pt x="4798709" y="792087"/>
-                  </a:lnTo>
-                  <a:lnTo>
-                    <a:pt x="4870331" y="772730"/>
-                  </a:lnTo>
-                  <a:lnTo>
-                    <a:pt x="4941954" y="753077"/>
-                  </a:lnTo>
-                  <a:lnTo>
-                    <a:pt x="5013576" y="733122"/>
-                  </a:lnTo>
-                  <a:lnTo>
-                    <a:pt x="5085199" y="712861"/>
-                  </a:lnTo>
-                  <a:lnTo>
-                    <a:pt x="5156821" y="692289"/>
-                  </a:lnTo>
-                  <a:lnTo>
-                    <a:pt x="5228444" y="671401"/>
-                  </a:lnTo>
-                  <a:lnTo>
-                    <a:pt x="5300066" y="650193"/>
-                  </a:lnTo>
-                  <a:lnTo>
-                    <a:pt x="5371689" y="628659"/>
-                  </a:lnTo>
-                  <a:lnTo>
-                    <a:pt x="5443311" y="606795"/>
-                  </a:lnTo>
-                  <a:lnTo>
-                    <a:pt x="5514934" y="584595"/>
-                  </a:lnTo>
-                  <a:lnTo>
-                    <a:pt x="5586557" y="562055"/>
-                  </a:lnTo>
-                  <a:lnTo>
-                    <a:pt x="5658179" y="539169"/>
-                  </a:lnTo>
-                  <a:lnTo>
-                    <a:pt x="5729802" y="515931"/>
-                  </a:lnTo>
-                  <a:lnTo>
-                    <a:pt x="5801424" y="492337"/>
-                  </a:lnTo>
-                  <a:lnTo>
-                    <a:pt x="5873047" y="468381"/>
-                  </a:lnTo>
-                  <a:lnTo>
-                    <a:pt x="5944669" y="444057"/>
-                  </a:lnTo>
-                  <a:lnTo>
-                    <a:pt x="6016292" y="419360"/>
-                  </a:lnTo>
-                  <a:lnTo>
-                    <a:pt x="6087914" y="394284"/>
-                  </a:lnTo>
-                  <a:lnTo>
-                    <a:pt x="6159537" y="368823"/>
-                  </a:lnTo>
-                  <a:lnTo>
-                    <a:pt x="6231159" y="342972"/>
-                  </a:lnTo>
-                  <a:lnTo>
-                    <a:pt x="6302782" y="316724"/>
-                  </a:lnTo>
-                  <a:lnTo>
-                    <a:pt x="6374404" y="290072"/>
-                  </a:lnTo>
-                  <a:lnTo>
-                    <a:pt x="6446027" y="263012"/>
-                  </a:lnTo>
-                  <a:lnTo>
-                    <a:pt x="6517649" y="235537"/>
-                  </a:lnTo>
-                  <a:lnTo>
-                    <a:pt x="6589272" y="207640"/>
-                  </a:lnTo>
-                  <a:lnTo>
-                    <a:pt x="6660894" y="179315"/>
-                  </a:lnTo>
-                  <a:lnTo>
-                    <a:pt x="6732517" y="150555"/>
-                  </a:lnTo>
-                  <a:lnTo>
-                    <a:pt x="6804139" y="121354"/>
-                  </a:lnTo>
-                  <a:lnTo>
-                    <a:pt x="6875762" y="91705"/>
-                  </a:lnTo>
-                  <a:lnTo>
-                    <a:pt x="6947385" y="61601"/>
-                  </a:lnTo>
-                  <a:lnTo>
-                    <a:pt x="7019007" y="31035"/>
+                    <a:pt x="71622" y="1335421"/>
+                  </a:lnTo>
+                  <a:lnTo>
+                    <a:pt x="143245" y="1328735"/>
+                  </a:lnTo>
+                  <a:lnTo>
+                    <a:pt x="214867" y="1321960"/>
+                  </a:lnTo>
+                  <a:lnTo>
+                    <a:pt x="286490" y="1315094"/>
+                  </a:lnTo>
+                  <a:lnTo>
+                    <a:pt x="358112" y="1308137"/>
+                  </a:lnTo>
+                  <a:lnTo>
+                    <a:pt x="429735" y="1301087"/>
+                  </a:lnTo>
+                  <a:lnTo>
+                    <a:pt x="501357" y="1293942"/>
+                  </a:lnTo>
+                  <a:lnTo>
+                    <a:pt x="572980" y="1286703"/>
+                  </a:lnTo>
+                  <a:lnTo>
+                    <a:pt x="644602" y="1279367"/>
+                  </a:lnTo>
+                  <a:lnTo>
+                    <a:pt x="716225" y="1271933"/>
+                  </a:lnTo>
+                  <a:lnTo>
+                    <a:pt x="787847" y="1264400"/>
+                  </a:lnTo>
+                  <a:lnTo>
+                    <a:pt x="859470" y="1256767"/>
+                  </a:lnTo>
+                  <a:lnTo>
+                    <a:pt x="931092" y="1249031"/>
+                  </a:lnTo>
+                  <a:lnTo>
+                    <a:pt x="1002715" y="1241193"/>
+                  </a:lnTo>
+                  <a:lnTo>
+                    <a:pt x="1074337" y="1233250"/>
+                  </a:lnTo>
+                  <a:lnTo>
+                    <a:pt x="1145960" y="1225200"/>
+                  </a:lnTo>
+                  <a:lnTo>
+                    <a:pt x="1217582" y="1217044"/>
+                  </a:lnTo>
+                  <a:lnTo>
+                    <a:pt x="1289205" y="1208779"/>
+                  </a:lnTo>
+                  <a:lnTo>
+                    <a:pt x="1360827" y="1200403"/>
+                  </a:lnTo>
+                  <a:lnTo>
+                    <a:pt x="1432450" y="1191916"/>
+                  </a:lnTo>
+                  <a:lnTo>
+                    <a:pt x="1504073" y="1183316"/>
+                  </a:lnTo>
+                  <a:lnTo>
+                    <a:pt x="1575695" y="1174600"/>
+                  </a:lnTo>
+                  <a:lnTo>
+                    <a:pt x="1647318" y="1165769"/>
+                  </a:lnTo>
+                  <a:lnTo>
+                    <a:pt x="1718940" y="1156820"/>
+                  </a:lnTo>
+                  <a:lnTo>
+                    <a:pt x="1790563" y="1147751"/>
+                  </a:lnTo>
+                  <a:lnTo>
+                    <a:pt x="1862185" y="1138562"/>
+                  </a:lnTo>
+                  <a:lnTo>
+                    <a:pt x="1933808" y="1129249"/>
+                  </a:lnTo>
+                  <a:lnTo>
+                    <a:pt x="2005430" y="1119813"/>
+                  </a:lnTo>
+                  <a:lnTo>
+                    <a:pt x="2077053" y="1110251"/>
+                  </a:lnTo>
+                  <a:lnTo>
+                    <a:pt x="2148675" y="1100561"/>
+                  </a:lnTo>
+                  <a:lnTo>
+                    <a:pt x="2220298" y="1090742"/>
+                  </a:lnTo>
+                  <a:lnTo>
+                    <a:pt x="2291920" y="1080792"/>
+                  </a:lnTo>
+                  <a:lnTo>
+                    <a:pt x="2363543" y="1070709"/>
+                  </a:lnTo>
+                  <a:lnTo>
+                    <a:pt x="2435165" y="1060492"/>
+                  </a:lnTo>
+                  <a:lnTo>
+                    <a:pt x="2506788" y="1050138"/>
+                  </a:lnTo>
+                  <a:lnTo>
+                    <a:pt x="2578410" y="1039646"/>
+                  </a:lnTo>
+                  <a:lnTo>
+                    <a:pt x="2650033" y="1029015"/>
+                  </a:lnTo>
+                  <a:lnTo>
+                    <a:pt x="2721655" y="1018241"/>
+                  </a:lnTo>
+                  <a:lnTo>
+                    <a:pt x="2793278" y="1007324"/>
+                  </a:lnTo>
+                  <a:lnTo>
+                    <a:pt x="2864901" y="996261"/>
+                  </a:lnTo>
+                  <a:lnTo>
+                    <a:pt x="2936523" y="985051"/>
+                  </a:lnTo>
+                  <a:lnTo>
+                    <a:pt x="3008146" y="973691"/>
+                  </a:lnTo>
+                  <a:lnTo>
+                    <a:pt x="3079768" y="962179"/>
+                  </a:lnTo>
+                  <a:lnTo>
+                    <a:pt x="3151391" y="950514"/>
+                  </a:lnTo>
+                  <a:lnTo>
+                    <a:pt x="3223013" y="938693"/>
+                  </a:lnTo>
+                  <a:lnTo>
+                    <a:pt x="3294636" y="926715"/>
+                  </a:lnTo>
+                  <a:lnTo>
+                    <a:pt x="3366258" y="914577"/>
+                  </a:lnTo>
+                  <a:lnTo>
+                    <a:pt x="3437881" y="902277"/>
+                  </a:lnTo>
+                  <a:lnTo>
+                    <a:pt x="3509503" y="889813"/>
+                  </a:lnTo>
+                  <a:lnTo>
+                    <a:pt x="3581126" y="877182"/>
+                  </a:lnTo>
+                  <a:lnTo>
+                    <a:pt x="3652748" y="864383"/>
+                  </a:lnTo>
+                  <a:lnTo>
+                    <a:pt x="3724371" y="851414"/>
+                  </a:lnTo>
+                  <a:lnTo>
+                    <a:pt x="3795993" y="838271"/>
+                  </a:lnTo>
+                  <a:lnTo>
+                    <a:pt x="3867616" y="824953"/>
+                  </a:lnTo>
+                  <a:lnTo>
+                    <a:pt x="3939238" y="811457"/>
+                  </a:lnTo>
+                  <a:lnTo>
+                    <a:pt x="4010861" y="797782"/>
+                  </a:lnTo>
+                  <a:lnTo>
+                    <a:pt x="4082483" y="783924"/>
+                  </a:lnTo>
+                  <a:lnTo>
+                    <a:pt x="4154106" y="769881"/>
+                  </a:lnTo>
+                  <a:lnTo>
+                    <a:pt x="4225729" y="755650"/>
+                  </a:lnTo>
+                  <a:lnTo>
+                    <a:pt x="4297351" y="741230"/>
+                  </a:lnTo>
+                  <a:lnTo>
+                    <a:pt x="4368974" y="726618"/>
+                  </a:lnTo>
+                  <a:lnTo>
+                    <a:pt x="4440596" y="711811"/>
+                  </a:lnTo>
+                  <a:lnTo>
+                    <a:pt x="4512219" y="696806"/>
+                  </a:lnTo>
+                  <a:lnTo>
+                    <a:pt x="4583841" y="681601"/>
+                  </a:lnTo>
+                  <a:lnTo>
+                    <a:pt x="4655464" y="666193"/>
+                  </a:lnTo>
+                  <a:lnTo>
+                    <a:pt x="4727086" y="650579"/>
+                  </a:lnTo>
+                  <a:lnTo>
+                    <a:pt x="4798709" y="634757"/>
+                  </a:lnTo>
+                  <a:lnTo>
+                    <a:pt x="4870331" y="618725"/>
+                  </a:lnTo>
+                  <a:lnTo>
+                    <a:pt x="4941954" y="602478"/>
+                  </a:lnTo>
+                  <a:lnTo>
+                    <a:pt x="5013576" y="586015"/>
+                  </a:lnTo>
+                  <a:lnTo>
+                    <a:pt x="5085199" y="569332"/>
+                  </a:lnTo>
+                  <a:lnTo>
+                    <a:pt x="5156821" y="552426"/>
+                  </a:lnTo>
+                  <a:lnTo>
+                    <a:pt x="5228444" y="535295"/>
+                  </a:lnTo>
+                  <a:lnTo>
+                    <a:pt x="5300066" y="517935"/>
+                  </a:lnTo>
+                  <a:lnTo>
+                    <a:pt x="5371689" y="500344"/>
+                  </a:lnTo>
+                  <a:lnTo>
+                    <a:pt x="5443311" y="482519"/>
+                  </a:lnTo>
+                  <a:lnTo>
+                    <a:pt x="5514934" y="464455"/>
+                  </a:lnTo>
+                  <a:lnTo>
+                    <a:pt x="5586557" y="446150"/>
+                  </a:lnTo>
+                  <a:lnTo>
+                    <a:pt x="5658179" y="427602"/>
+                  </a:lnTo>
+                  <a:lnTo>
+                    <a:pt x="5729802" y="408805"/>
+                  </a:lnTo>
+                  <a:lnTo>
+                    <a:pt x="5801424" y="389758"/>
+                  </a:lnTo>
+                  <a:lnTo>
+                    <a:pt x="5873047" y="370457"/>
+                  </a:lnTo>
+                  <a:lnTo>
+                    <a:pt x="5944669" y="350899"/>
+                  </a:lnTo>
+                  <a:lnTo>
+                    <a:pt x="6016292" y="331080"/>
+                  </a:lnTo>
+                  <a:lnTo>
+                    <a:pt x="6087914" y="310996"/>
+                  </a:lnTo>
+                  <a:lnTo>
+                    <a:pt x="6159537" y="290644"/>
+                  </a:lnTo>
+                  <a:lnTo>
+                    <a:pt x="6231159" y="270021"/>
+                  </a:lnTo>
+                  <a:lnTo>
+                    <a:pt x="6302782" y="249123"/>
+                  </a:lnTo>
+                  <a:lnTo>
+                    <a:pt x="6374404" y="227946"/>
+                  </a:lnTo>
+                  <a:lnTo>
+                    <a:pt x="6446027" y="206486"/>
+                  </a:lnTo>
+                  <a:lnTo>
+                    <a:pt x="6517649" y="184740"/>
+                  </a:lnTo>
+                  <a:lnTo>
+                    <a:pt x="6589272" y="162705"/>
+                  </a:lnTo>
+                  <a:lnTo>
+                    <a:pt x="6660894" y="140375"/>
+                  </a:lnTo>
+                  <a:lnTo>
+                    <a:pt x="6732517" y="117747"/>
+                  </a:lnTo>
+                  <a:lnTo>
+                    <a:pt x="6804139" y="94818"/>
+                  </a:lnTo>
+                  <a:lnTo>
+                    <a:pt x="6875762" y="71582"/>
+                  </a:lnTo>
+                  <a:lnTo>
+                    <a:pt x="6947385" y="48037"/>
+                  </a:lnTo>
+                  <a:lnTo>
+                    <a:pt x="7019007" y="24177"/>
                   </a:lnTo>
                   <a:lnTo>
                     <a:pt x="7090630" y="0"/>

--- a/docs/plots/carbo/jx_carbo_linsubhr_dosedisc_anemia2.pptx
+++ b/docs/plots/carbo/jx_carbo_linsubhr_dosedisc_anemia2.pptx
@@ -3169,7 +3169,7 @@
                     <a:pt x="644602" y="2595458"/>
                   </a:lnTo>
                   <a:lnTo>
-                    <a:pt x="716225" y="2601586"/>
+                    <a:pt x="716225" y="2601585"/>
                   </a:lnTo>
                   <a:lnTo>
                     <a:pt x="787847" y="2607678"/>
@@ -3304,7 +3304,7 @@
                     <a:pt x="3867616" y="2395017"/>
                   </a:lnTo>
                   <a:lnTo>
-                    <a:pt x="3939238" y="2353711"/>
+                    <a:pt x="3939238" y="2353712"/>
                   </a:lnTo>
                   <a:lnTo>
                     <a:pt x="4010861" y="2311049"/>
@@ -3316,7 +3316,7 @@
                     <a:pt x="4154106" y="2221475"/>
                   </a:lnTo>
                   <a:lnTo>
-                    <a:pt x="4225729" y="2174469"/>
+                    <a:pt x="4225729" y="2174470"/>
                   </a:lnTo>
                   <a:lnTo>
                     <a:pt x="4297351" y="2125920"/>
@@ -3325,46 +3325,46 @@
                     <a:pt x="4368974" y="2075776"/>
                   </a:lnTo>
                   <a:lnTo>
-                    <a:pt x="4440596" y="2023985"/>
-                  </a:lnTo>
-                  <a:lnTo>
-                    <a:pt x="4512219" y="1970493"/>
+                    <a:pt x="4440596" y="2023986"/>
+                  </a:lnTo>
+                  <a:lnTo>
+                    <a:pt x="4512219" y="1970494"/>
                   </a:lnTo>
                   <a:lnTo>
                     <a:pt x="4583841" y="1915245"/>
                   </a:lnTo>
                   <a:lnTo>
-                    <a:pt x="4655464" y="1858181"/>
+                    <a:pt x="4655464" y="1858182"/>
                   </a:lnTo>
                   <a:lnTo>
                     <a:pt x="4727086" y="1799244"/>
                   </a:lnTo>
                   <a:lnTo>
-                    <a:pt x="4798709" y="1738370"/>
+                    <a:pt x="4798709" y="1738371"/>
                   </a:lnTo>
                   <a:lnTo>
                     <a:pt x="4870331" y="1675498"/>
                   </a:lnTo>
                   <a:lnTo>
-                    <a:pt x="4941954" y="1610560"/>
+                    <a:pt x="4941954" y="1610561"/>
                   </a:lnTo>
                   <a:lnTo>
                     <a:pt x="5013576" y="1543490"/>
                   </a:lnTo>
                   <a:lnTo>
-                    <a:pt x="5085199" y="1474216"/>
+                    <a:pt x="5085199" y="1474217"/>
                   </a:lnTo>
                   <a:lnTo>
                     <a:pt x="5156821" y="1402668"/>
                   </a:lnTo>
                   <a:lnTo>
-                    <a:pt x="5228444" y="1328769"/>
+                    <a:pt x="5228444" y="1328770"/>
                   </a:lnTo>
                   <a:lnTo>
                     <a:pt x="5300066" y="1252444"/>
                   </a:lnTo>
                   <a:lnTo>
-                    <a:pt x="5371689" y="1173611"/>
+                    <a:pt x="5371689" y="1173612"/>
                   </a:lnTo>
                   <a:lnTo>
                     <a:pt x="5443311" y="1092190"/>
@@ -3373,34 +3373,34 @@
                     <a:pt x="5514934" y="1008094"/>
                   </a:lnTo>
                   <a:lnTo>
-                    <a:pt x="5586557" y="921236"/>
-                  </a:lnTo>
-                  <a:lnTo>
-                    <a:pt x="5658179" y="831525"/>
-                  </a:lnTo>
-                  <a:lnTo>
-                    <a:pt x="5729802" y="738868"/>
-                  </a:lnTo>
-                  <a:lnTo>
-                    <a:pt x="5801424" y="643167"/>
-                  </a:lnTo>
-                  <a:lnTo>
-                    <a:pt x="5873047" y="544324"/>
-                  </a:lnTo>
-                  <a:lnTo>
-                    <a:pt x="5944669" y="442234"/>
-                  </a:lnTo>
-                  <a:lnTo>
-                    <a:pt x="6016292" y="336791"/>
-                  </a:lnTo>
-                  <a:lnTo>
-                    <a:pt x="6087914" y="227884"/>
-                  </a:lnTo>
-                  <a:lnTo>
-                    <a:pt x="6159537" y="115401"/>
-                  </a:lnTo>
-                  <a:lnTo>
-                    <a:pt x="6230681" y="0"/>
+                    <a:pt x="5586557" y="921237"/>
+                  </a:lnTo>
+                  <a:lnTo>
+                    <a:pt x="5658179" y="831526"/>
+                  </a:lnTo>
+                  <a:lnTo>
+                    <a:pt x="5729802" y="738869"/>
+                  </a:lnTo>
+                  <a:lnTo>
+                    <a:pt x="5801424" y="643168"/>
+                  </a:lnTo>
+                  <a:lnTo>
+                    <a:pt x="5873047" y="544325"/>
+                  </a:lnTo>
+                  <a:lnTo>
+                    <a:pt x="5944669" y="442235"/>
+                  </a:lnTo>
+                  <a:lnTo>
+                    <a:pt x="6016292" y="336792"/>
+                  </a:lnTo>
+                  <a:lnTo>
+                    <a:pt x="6087914" y="227885"/>
+                  </a:lnTo>
+                  <a:lnTo>
+                    <a:pt x="6159537" y="115402"/>
+                  </a:lnTo>
+                  <a:lnTo>
+                    <a:pt x="6230682" y="0"/>
                   </a:lnTo>
                   <a:lnTo>
                     <a:pt x="7090630" y="0"/>
@@ -3442,7 +3442,7 @@
                     <a:pt x="6302782" y="2984756"/>
                   </a:lnTo>
                   <a:lnTo>
-                    <a:pt x="6231159" y="2980862"/>
+                    <a:pt x="6231159" y="2980863"/>
                   </a:lnTo>
                   <a:lnTo>
                     <a:pt x="6159537" y="2976946"/>
@@ -3478,7 +3478,7 @@
                     <a:pt x="5443311" y="2936502"/>
                   </a:lnTo>
                   <a:lnTo>
-                    <a:pt x="5371689" y="2932326"/>
+                    <a:pt x="5371689" y="2932327"/>
                   </a:lnTo>
                   <a:lnTo>
                     <a:pt x="5300066" y="2928127"/>
@@ -3670,10 +3670,10 @@
                     <a:pt x="859470" y="3328982"/>
                   </a:lnTo>
                   <a:lnTo>
-                    <a:pt x="787847" y="3339275"/>
-                  </a:lnTo>
-                  <a:lnTo>
-                    <a:pt x="716225" y="3349240"/>
+                    <a:pt x="787847" y="3339274"/>
+                  </a:lnTo>
+                  <a:lnTo>
+                    <a:pt x="716225" y="3349239"/>
                   </a:lnTo>
                   <a:lnTo>
                     <a:pt x="644602" y="3358888"/>
@@ -3730,12 +3730,12 @@
           <p:spPr>
             <a:xfrm>
               <a:off x="1172049" y="1896563"/>
-              <a:ext cx="6230681" cy="2779999"/>
+              <a:ext cx="6230682" cy="2779999"/>
             </a:xfrm>
             <a:custGeom>
               <a:avLst/>
               <a:pathLst>
-                <a:path w="6230681" h="2779999">
+                <a:path w="6230682" h="2779999">
                   <a:moveTo>
                     <a:pt x="0" y="2538674"/>
                   </a:moveTo>
@@ -3767,7 +3767,7 @@
                     <a:pt x="644602" y="2595458"/>
                   </a:lnTo>
                   <a:lnTo>
-                    <a:pt x="716225" y="2601586"/>
+                    <a:pt x="716225" y="2601585"/>
                   </a:lnTo>
                   <a:lnTo>
                     <a:pt x="787847" y="2607678"/>
@@ -3902,7 +3902,7 @@
                     <a:pt x="3867616" y="2395017"/>
                   </a:lnTo>
                   <a:lnTo>
-                    <a:pt x="3939238" y="2353711"/>
+                    <a:pt x="3939238" y="2353712"/>
                   </a:lnTo>
                   <a:lnTo>
                     <a:pt x="4010861" y="2311049"/>
@@ -3914,7 +3914,7 @@
                     <a:pt x="4154106" y="2221475"/>
                   </a:lnTo>
                   <a:lnTo>
-                    <a:pt x="4225729" y="2174469"/>
+                    <a:pt x="4225729" y="2174470"/>
                   </a:lnTo>
                   <a:lnTo>
                     <a:pt x="4297351" y="2125920"/>
@@ -3923,46 +3923,46 @@
                     <a:pt x="4368974" y="2075776"/>
                   </a:lnTo>
                   <a:lnTo>
-                    <a:pt x="4440596" y="2023985"/>
-                  </a:lnTo>
-                  <a:lnTo>
-                    <a:pt x="4512219" y="1970493"/>
+                    <a:pt x="4440596" y="2023986"/>
+                  </a:lnTo>
+                  <a:lnTo>
+                    <a:pt x="4512219" y="1970494"/>
                   </a:lnTo>
                   <a:lnTo>
                     <a:pt x="4583841" y="1915245"/>
                   </a:lnTo>
                   <a:lnTo>
-                    <a:pt x="4655464" y="1858181"/>
+                    <a:pt x="4655464" y="1858182"/>
                   </a:lnTo>
                   <a:lnTo>
                     <a:pt x="4727086" y="1799244"/>
                   </a:lnTo>
                   <a:lnTo>
-                    <a:pt x="4798709" y="1738370"/>
+                    <a:pt x="4798709" y="1738371"/>
                   </a:lnTo>
                   <a:lnTo>
                     <a:pt x="4870331" y="1675498"/>
                   </a:lnTo>
                   <a:lnTo>
-                    <a:pt x="4941954" y="1610560"/>
+                    <a:pt x="4941954" y="1610561"/>
                   </a:lnTo>
                   <a:lnTo>
                     <a:pt x="5013576" y="1543490"/>
                   </a:lnTo>
                   <a:lnTo>
-                    <a:pt x="5085199" y="1474216"/>
+                    <a:pt x="5085199" y="1474217"/>
                   </a:lnTo>
                   <a:lnTo>
                     <a:pt x="5156821" y="1402668"/>
                   </a:lnTo>
                   <a:lnTo>
-                    <a:pt x="5228444" y="1328769"/>
+                    <a:pt x="5228444" y="1328770"/>
                   </a:lnTo>
                   <a:lnTo>
                     <a:pt x="5300066" y="1252444"/>
                   </a:lnTo>
                   <a:lnTo>
-                    <a:pt x="5371689" y="1173611"/>
+                    <a:pt x="5371689" y="1173612"/>
                   </a:lnTo>
                   <a:lnTo>
                     <a:pt x="5443311" y="1092190"/>
@@ -3971,34 +3971,34 @@
                     <a:pt x="5514934" y="1008094"/>
                   </a:lnTo>
                   <a:lnTo>
-                    <a:pt x="5586557" y="921236"/>
-                  </a:lnTo>
-                  <a:lnTo>
-                    <a:pt x="5658179" y="831525"/>
-                  </a:lnTo>
-                  <a:lnTo>
-                    <a:pt x="5729802" y="738868"/>
-                  </a:lnTo>
-                  <a:lnTo>
-                    <a:pt x="5801424" y="643167"/>
-                  </a:lnTo>
-                  <a:lnTo>
-                    <a:pt x="5873047" y="544324"/>
-                  </a:lnTo>
-                  <a:lnTo>
-                    <a:pt x="5944669" y="442234"/>
-                  </a:lnTo>
-                  <a:lnTo>
-                    <a:pt x="6016292" y="336791"/>
-                  </a:lnTo>
-                  <a:lnTo>
-                    <a:pt x="6087914" y="227884"/>
-                  </a:lnTo>
-                  <a:lnTo>
-                    <a:pt x="6159537" y="115401"/>
-                  </a:lnTo>
-                  <a:lnTo>
-                    <a:pt x="6230681" y="0"/>
+                    <a:pt x="5586557" y="921237"/>
+                  </a:lnTo>
+                  <a:lnTo>
+                    <a:pt x="5658179" y="831526"/>
+                  </a:lnTo>
+                  <a:lnTo>
+                    <a:pt x="5729802" y="738869"/>
+                  </a:lnTo>
+                  <a:lnTo>
+                    <a:pt x="5801424" y="643168"/>
+                  </a:lnTo>
+                  <a:lnTo>
+                    <a:pt x="5873047" y="544325"/>
+                  </a:lnTo>
+                  <a:lnTo>
+                    <a:pt x="5944669" y="442235"/>
+                  </a:lnTo>
+                  <a:lnTo>
+                    <a:pt x="6016292" y="336792"/>
+                  </a:lnTo>
+                  <a:lnTo>
+                    <a:pt x="6087914" y="227885"/>
+                  </a:lnTo>
+                  <a:lnTo>
+                    <a:pt x="6159537" y="115402"/>
+                  </a:lnTo>
+                  <a:lnTo>
+                    <a:pt x="6230682" y="0"/>
                   </a:lnTo>
                 </a:path>
               </a:pathLst>
@@ -4044,7 +4044,7 @@
                     <a:pt x="6732517" y="222593"/>
                   </a:lnTo>
                   <a:lnTo>
-                    <a:pt x="6660894" y="218832"/>
+                    <a:pt x="6660894" y="218833"/>
                   </a:lnTo>
                   <a:lnTo>
                     <a:pt x="6589272" y="215050"/>
@@ -4065,7 +4065,7 @@
                     <a:pt x="6231159" y="195805"/>
                   </a:lnTo>
                   <a:lnTo>
-                    <a:pt x="6159537" y="191888"/>
+                    <a:pt x="6159537" y="191889"/>
                   </a:lnTo>
                   <a:lnTo>
                     <a:pt x="6087914" y="187949"/>
@@ -4101,7 +4101,7 @@
                     <a:pt x="5371689" y="147269"/>
                   </a:lnTo>
                   <a:lnTo>
-                    <a:pt x="5300066" y="143069"/>
+                    <a:pt x="5300066" y="143070"/>
                   </a:lnTo>
                   <a:lnTo>
                     <a:pt x="5228444" y="138845"/>
@@ -4116,7 +4116,7 @@
                     <a:pt x="5013576" y="126025"/>
                   </a:lnTo>
                   <a:lnTo>
-                    <a:pt x="4941954" y="121701"/>
+                    <a:pt x="4941954" y="121702"/>
                   </a:lnTo>
                   <a:lnTo>
                     <a:pt x="4870331" y="117353"/>
@@ -4143,7 +4143,7 @@
                     <a:pt x="4368974" y="86194"/>
                   </a:lnTo>
                   <a:lnTo>
-                    <a:pt x="4297351" y="81638"/>
+                    <a:pt x="4297351" y="81639"/>
                   </a:lnTo>
                   <a:lnTo>
                     <a:pt x="4225729" y="77056"/>
@@ -4164,7 +4164,7 @@
                     <a:pt x="3867616" y="53741"/>
                   </a:lnTo>
                   <a:lnTo>
-                    <a:pt x="3795993" y="48996"/>
+                    <a:pt x="3795993" y="48997"/>
                   </a:lnTo>
                   <a:lnTo>
                     <a:pt x="3724371" y="44224"/>
@@ -4263,7 +4263,7 @@
                     <a:pt x="1504073" y="434670"/>
                   </a:lnTo>
                   <a:lnTo>
-                    <a:pt x="1432450" y="448437"/>
+                    <a:pt x="1432450" y="448436"/>
                   </a:lnTo>
                   <a:lnTo>
                     <a:pt x="1360827" y="461765"/>
@@ -4343,7 +4343,7 @@
           </p:nvSpPr>
           <p:spPr>
             <a:xfrm>
-              <a:off x="1172049" y="3712565"/>
+              <a:off x="1172049" y="3712566"/>
               <a:ext cx="7090630" cy="1342019"/>
             </a:xfrm>
             <a:custGeom>
@@ -4354,151 +4354,151 @@
                     <a:pt x="0" y="1342019"/>
                   </a:moveTo>
                   <a:lnTo>
-                    <a:pt x="71622" y="1335421"/>
-                  </a:lnTo>
-                  <a:lnTo>
-                    <a:pt x="143245" y="1328735"/>
-                  </a:lnTo>
-                  <a:lnTo>
-                    <a:pt x="214867" y="1321960"/>
-                  </a:lnTo>
-                  <a:lnTo>
-                    <a:pt x="286490" y="1315094"/>
-                  </a:lnTo>
-                  <a:lnTo>
-                    <a:pt x="358112" y="1308137"/>
-                  </a:lnTo>
-                  <a:lnTo>
-                    <a:pt x="429735" y="1301087"/>
+                    <a:pt x="71622" y="1335420"/>
+                  </a:lnTo>
+                  <a:lnTo>
+                    <a:pt x="143245" y="1328734"/>
+                  </a:lnTo>
+                  <a:lnTo>
+                    <a:pt x="214867" y="1321959"/>
+                  </a:lnTo>
+                  <a:lnTo>
+                    <a:pt x="286490" y="1315093"/>
+                  </a:lnTo>
+                  <a:lnTo>
+                    <a:pt x="358112" y="1308136"/>
+                  </a:lnTo>
+                  <a:lnTo>
+                    <a:pt x="429735" y="1301086"/>
                   </a:lnTo>
                   <a:lnTo>
                     <a:pt x="501357" y="1293942"/>
                   </a:lnTo>
                   <a:lnTo>
-                    <a:pt x="572980" y="1286703"/>
-                  </a:lnTo>
-                  <a:lnTo>
-                    <a:pt x="644602" y="1279367"/>
-                  </a:lnTo>
-                  <a:lnTo>
-                    <a:pt x="716225" y="1271933"/>
-                  </a:lnTo>
-                  <a:lnTo>
-                    <a:pt x="787847" y="1264400"/>
-                  </a:lnTo>
-                  <a:lnTo>
-                    <a:pt x="859470" y="1256767"/>
+                    <a:pt x="572980" y="1286702"/>
+                  </a:lnTo>
+                  <a:lnTo>
+                    <a:pt x="644602" y="1279366"/>
+                  </a:lnTo>
+                  <a:lnTo>
+                    <a:pt x="716225" y="1271932"/>
+                  </a:lnTo>
+                  <a:lnTo>
+                    <a:pt x="787847" y="1264399"/>
+                  </a:lnTo>
+                  <a:lnTo>
+                    <a:pt x="859470" y="1256766"/>
                   </a:lnTo>
                   <a:lnTo>
                     <a:pt x="931092" y="1249031"/>
                   </a:lnTo>
                   <a:lnTo>
-                    <a:pt x="1002715" y="1241193"/>
-                  </a:lnTo>
-                  <a:lnTo>
-                    <a:pt x="1074337" y="1233250"/>
+                    <a:pt x="1002715" y="1241192"/>
+                  </a:lnTo>
+                  <a:lnTo>
+                    <a:pt x="1074337" y="1233249"/>
                   </a:lnTo>
                   <a:lnTo>
                     <a:pt x="1145960" y="1225200"/>
                   </a:lnTo>
                   <a:lnTo>
-                    <a:pt x="1217582" y="1217044"/>
-                  </a:lnTo>
-                  <a:lnTo>
-                    <a:pt x="1289205" y="1208779"/>
+                    <a:pt x="1217582" y="1217043"/>
+                  </a:lnTo>
+                  <a:lnTo>
+                    <a:pt x="1289205" y="1208778"/>
                   </a:lnTo>
                   <a:lnTo>
                     <a:pt x="1360827" y="1200403"/>
                   </a:lnTo>
                   <a:lnTo>
-                    <a:pt x="1432450" y="1191916"/>
-                  </a:lnTo>
-                  <a:lnTo>
-                    <a:pt x="1504073" y="1183316"/>
+                    <a:pt x="1432450" y="1191915"/>
+                  </a:lnTo>
+                  <a:lnTo>
+                    <a:pt x="1504073" y="1183315"/>
                   </a:lnTo>
                   <a:lnTo>
                     <a:pt x="1575695" y="1174600"/>
                   </a:lnTo>
                   <a:lnTo>
-                    <a:pt x="1647318" y="1165769"/>
-                  </a:lnTo>
-                  <a:lnTo>
-                    <a:pt x="1718940" y="1156820"/>
+                    <a:pt x="1647318" y="1165768"/>
+                  </a:lnTo>
+                  <a:lnTo>
+                    <a:pt x="1718940" y="1156819"/>
                   </a:lnTo>
                   <a:lnTo>
                     <a:pt x="1790563" y="1147751"/>
                   </a:lnTo>
                   <a:lnTo>
-                    <a:pt x="1862185" y="1138562"/>
+                    <a:pt x="1862185" y="1138561"/>
                   </a:lnTo>
                   <a:lnTo>
                     <a:pt x="1933808" y="1129249"/>
                   </a:lnTo>
                   <a:lnTo>
-                    <a:pt x="2005430" y="1119813"/>
-                  </a:lnTo>
-                  <a:lnTo>
-                    <a:pt x="2077053" y="1110251"/>
-                  </a:lnTo>
-                  <a:lnTo>
-                    <a:pt x="2148675" y="1100561"/>
-                  </a:lnTo>
-                  <a:lnTo>
-                    <a:pt x="2220298" y="1090742"/>
-                  </a:lnTo>
-                  <a:lnTo>
-                    <a:pt x="2291920" y="1080792"/>
-                  </a:lnTo>
-                  <a:lnTo>
-                    <a:pt x="2363543" y="1070709"/>
-                  </a:lnTo>
-                  <a:lnTo>
-                    <a:pt x="2435165" y="1060492"/>
-                  </a:lnTo>
-                  <a:lnTo>
-                    <a:pt x="2506788" y="1050138"/>
+                    <a:pt x="2005430" y="1119812"/>
+                  </a:lnTo>
+                  <a:lnTo>
+                    <a:pt x="2077053" y="1110250"/>
+                  </a:lnTo>
+                  <a:lnTo>
+                    <a:pt x="2148675" y="1100560"/>
+                  </a:lnTo>
+                  <a:lnTo>
+                    <a:pt x="2220298" y="1090741"/>
+                  </a:lnTo>
+                  <a:lnTo>
+                    <a:pt x="2291920" y="1080791"/>
+                  </a:lnTo>
+                  <a:lnTo>
+                    <a:pt x="2363543" y="1070708"/>
+                  </a:lnTo>
+                  <a:lnTo>
+                    <a:pt x="2435165" y="1060491"/>
+                  </a:lnTo>
+                  <a:lnTo>
+                    <a:pt x="2506788" y="1050137"/>
                   </a:lnTo>
                   <a:lnTo>
                     <a:pt x="2578410" y="1039646"/>
                   </a:lnTo>
                   <a:lnTo>
-                    <a:pt x="2650033" y="1029015"/>
+                    <a:pt x="2650033" y="1029014"/>
                   </a:lnTo>
                   <a:lnTo>
                     <a:pt x="2721655" y="1018241"/>
                   </a:lnTo>
                   <a:lnTo>
-                    <a:pt x="2793278" y="1007324"/>
-                  </a:lnTo>
-                  <a:lnTo>
-                    <a:pt x="2864901" y="996261"/>
-                  </a:lnTo>
-                  <a:lnTo>
-                    <a:pt x="2936523" y="985051"/>
-                  </a:lnTo>
-                  <a:lnTo>
-                    <a:pt x="3008146" y="973691"/>
+                    <a:pt x="2793278" y="1007323"/>
+                  </a:lnTo>
+                  <a:lnTo>
+                    <a:pt x="2864901" y="996260"/>
+                  </a:lnTo>
+                  <a:lnTo>
+                    <a:pt x="2936523" y="985050"/>
+                  </a:lnTo>
+                  <a:lnTo>
+                    <a:pt x="3008146" y="973690"/>
                   </a:lnTo>
                   <a:lnTo>
                     <a:pt x="3079768" y="962179"/>
                   </a:lnTo>
                   <a:lnTo>
-                    <a:pt x="3151391" y="950514"/>
+                    <a:pt x="3151391" y="950513"/>
                   </a:lnTo>
                   <a:lnTo>
                     <a:pt x="3223013" y="938693"/>
                   </a:lnTo>
                   <a:lnTo>
-                    <a:pt x="3294636" y="926715"/>
-                  </a:lnTo>
-                  <a:lnTo>
-                    <a:pt x="3366258" y="914577"/>
-                  </a:lnTo>
-                  <a:lnTo>
-                    <a:pt x="3437881" y="902277"/>
-                  </a:lnTo>
-                  <a:lnTo>
-                    <a:pt x="3509503" y="889813"/>
+                    <a:pt x="3294636" y="926714"/>
+                  </a:lnTo>
+                  <a:lnTo>
+                    <a:pt x="3366258" y="914576"/>
+                  </a:lnTo>
+                  <a:lnTo>
+                    <a:pt x="3437881" y="902276"/>
+                  </a:lnTo>
+                  <a:lnTo>
+                    <a:pt x="3509503" y="889812"/>
                   </a:lnTo>
                   <a:lnTo>
                     <a:pt x="3581126" y="877182"/>
@@ -4507,7 +4507,7 @@
                     <a:pt x="3652748" y="864383"/>
                   </a:lnTo>
                   <a:lnTo>
-                    <a:pt x="3724371" y="851414"/>
+                    <a:pt x="3724371" y="851413"/>
                   </a:lnTo>
                   <a:lnTo>
                     <a:pt x="3795993" y="838271"/>
@@ -4519,13 +4519,13 @@
                     <a:pt x="3939238" y="811457"/>
                   </a:lnTo>
                   <a:lnTo>
-                    <a:pt x="4010861" y="797782"/>
-                  </a:lnTo>
-                  <a:lnTo>
-                    <a:pt x="4082483" y="783924"/>
-                  </a:lnTo>
-                  <a:lnTo>
-                    <a:pt x="4154106" y="769881"/>
+                    <a:pt x="4010861" y="797781"/>
+                  </a:lnTo>
+                  <a:lnTo>
+                    <a:pt x="4082483" y="783923"/>
+                  </a:lnTo>
+                  <a:lnTo>
+                    <a:pt x="4154106" y="769880"/>
                   </a:lnTo>
                   <a:lnTo>
                     <a:pt x="4225729" y="755650"/>
@@ -4534,19 +4534,19 @@
                     <a:pt x="4297351" y="741230"/>
                   </a:lnTo>
                   <a:lnTo>
-                    <a:pt x="4368974" y="726618"/>
-                  </a:lnTo>
-                  <a:lnTo>
-                    <a:pt x="4440596" y="711811"/>
-                  </a:lnTo>
-                  <a:lnTo>
-                    <a:pt x="4512219" y="696806"/>
-                  </a:lnTo>
-                  <a:lnTo>
-                    <a:pt x="4583841" y="681601"/>
-                  </a:lnTo>
-                  <a:lnTo>
-                    <a:pt x="4655464" y="666193"/>
+                    <a:pt x="4368974" y="726617"/>
+                  </a:lnTo>
+                  <a:lnTo>
+                    <a:pt x="4440596" y="711810"/>
+                  </a:lnTo>
+                  <a:lnTo>
+                    <a:pt x="4512219" y="696805"/>
+                  </a:lnTo>
+                  <a:lnTo>
+                    <a:pt x="4583841" y="681600"/>
+                  </a:lnTo>
+                  <a:lnTo>
+                    <a:pt x="4655464" y="666192"/>
                   </a:lnTo>
                   <a:lnTo>
                     <a:pt x="4727086" y="650579"/>
@@ -4555,16 +4555,16 @@
                     <a:pt x="4798709" y="634757"/>
                   </a:lnTo>
                   <a:lnTo>
-                    <a:pt x="4870331" y="618725"/>
+                    <a:pt x="4870331" y="618724"/>
                   </a:lnTo>
                   <a:lnTo>
                     <a:pt x="4941954" y="602478"/>
                   </a:lnTo>
                   <a:lnTo>
-                    <a:pt x="5013576" y="586015"/>
-                  </a:lnTo>
-                  <a:lnTo>
-                    <a:pt x="5085199" y="569332"/>
+                    <a:pt x="5013576" y="586014"/>
+                  </a:lnTo>
+                  <a:lnTo>
+                    <a:pt x="5085199" y="569331"/>
                   </a:lnTo>
                   <a:lnTo>
                     <a:pt x="5156821" y="552426"/>
@@ -4579,7 +4579,7 @@
                     <a:pt x="5371689" y="500344"/>
                   </a:lnTo>
                   <a:lnTo>
-                    <a:pt x="5443311" y="482519"/>
+                    <a:pt x="5443311" y="482518"/>
                   </a:lnTo>
                   <a:lnTo>
                     <a:pt x="5514934" y="464455"/>
@@ -4588,7 +4588,7 @@
                     <a:pt x="5586557" y="446150"/>
                   </a:lnTo>
                   <a:lnTo>
-                    <a:pt x="5658179" y="427602"/>
+                    <a:pt x="5658179" y="427601"/>
                   </a:lnTo>
                   <a:lnTo>
                     <a:pt x="5729802" y="408805"/>
@@ -4603,7 +4603,7 @@
                     <a:pt x="5944669" y="350899"/>
                   </a:lnTo>
                   <a:lnTo>
-                    <a:pt x="6016292" y="331080"/>
+                    <a:pt x="6016292" y="331079"/>
                   </a:lnTo>
                   <a:lnTo>
                     <a:pt x="6087914" y="310996"/>
@@ -4627,7 +4627,7 @@
                     <a:pt x="6517649" y="184740"/>
                   </a:lnTo>
                   <a:lnTo>
-                    <a:pt x="6589272" y="162705"/>
+                    <a:pt x="6589272" y="162704"/>
                   </a:lnTo>
                   <a:lnTo>
                     <a:pt x="6660894" y="140375"/>
@@ -4636,7 +4636,7 @@
                     <a:pt x="6732517" y="117747"/>
                   </a:lnTo>
                   <a:lnTo>
-                    <a:pt x="6804139" y="94818"/>
+                    <a:pt x="6804139" y="94817"/>
                   </a:lnTo>
                   <a:lnTo>
                     <a:pt x="6875762" y="71582"/>

--- a/docs/plots/carbo/jx_carbo_linsubhr_dosedisc_anemia2.pptx
+++ b/docs/plots/carbo/jx_carbo_linsubhr_dosedisc_anemia2.pptx
@@ -2271,7 +2271,7 @@
           </p:nvSpPr>
           <p:spPr>
             <a:xfrm>
-              <a:off x="817517" y="5114368"/>
+              <a:off x="817517" y="5142518"/>
               <a:ext cx="7799693" cy="0"/>
             </a:xfrm>
             <a:custGeom>
@@ -2314,7 +2314,7 @@
           </p:nvSpPr>
           <p:spPr>
             <a:xfrm>
-              <a:off x="817517" y="4244691"/>
+              <a:off x="817517" y="4313054"/>
               <a:ext cx="7799693" cy="0"/>
             </a:xfrm>
             <a:custGeom>
@@ -2357,7 +2357,7 @@
           </p:nvSpPr>
           <p:spPr>
             <a:xfrm>
-              <a:off x="817517" y="3375014"/>
+              <a:off x="817517" y="3483591"/>
               <a:ext cx="7799693" cy="0"/>
             </a:xfrm>
             <a:custGeom>
@@ -2400,7 +2400,7 @@
           </p:nvSpPr>
           <p:spPr>
             <a:xfrm>
-              <a:off x="817517" y="2505337"/>
+              <a:off x="817517" y="2654127"/>
               <a:ext cx="7799693" cy="0"/>
             </a:xfrm>
             <a:custGeom>
@@ -2443,15 +2443,15 @@
           </p:nvSpPr>
           <p:spPr>
             <a:xfrm>
-              <a:off x="2122745" y="1896563"/>
-              <a:ext cx="0" cy="3826579"/>
+              <a:off x="2122745" y="2073503"/>
+              <a:ext cx="0" cy="3649639"/>
             </a:xfrm>
             <a:custGeom>
               <a:avLst/>
               <a:pathLst>
-                <a:path w="0" h="3826579">
+                <a:path w="0" h="3649639">
                   <a:moveTo>
-                    <a:pt x="0" y="3826579"/>
+                    <a:pt x="0" y="3649639"/>
                   </a:moveTo>
                   <a:lnTo>
                     <a:pt x="0" y="0"/>
@@ -2486,15 +2486,15 @@
           </p:nvSpPr>
           <p:spPr>
             <a:xfrm>
-              <a:off x="3487174" y="1896563"/>
-              <a:ext cx="0" cy="3826579"/>
+              <a:off x="3487174" y="2073503"/>
+              <a:ext cx="0" cy="3649639"/>
             </a:xfrm>
             <a:custGeom>
               <a:avLst/>
               <a:pathLst>
-                <a:path w="0" h="3826579">
+                <a:path w="0" h="3649639">
                   <a:moveTo>
-                    <a:pt x="0" y="3826579"/>
+                    <a:pt x="0" y="3649639"/>
                   </a:moveTo>
                   <a:lnTo>
                     <a:pt x="0" y="0"/>
@@ -2529,15 +2529,15 @@
           </p:nvSpPr>
           <p:spPr>
             <a:xfrm>
-              <a:off x="4851604" y="1896563"/>
-              <a:ext cx="0" cy="3826579"/>
+              <a:off x="4851604" y="2073503"/>
+              <a:ext cx="0" cy="3649639"/>
             </a:xfrm>
             <a:custGeom>
               <a:avLst/>
               <a:pathLst>
-                <a:path w="0" h="3826579">
+                <a:path w="0" h="3649639">
                   <a:moveTo>
-                    <a:pt x="0" y="3826579"/>
+                    <a:pt x="0" y="3649639"/>
                   </a:moveTo>
                   <a:lnTo>
                     <a:pt x="0" y="0"/>
@@ -2572,15 +2572,15 @@
           </p:nvSpPr>
           <p:spPr>
             <a:xfrm>
-              <a:off x="6216034" y="1896563"/>
-              <a:ext cx="0" cy="3826579"/>
+              <a:off x="6216034" y="2073503"/>
+              <a:ext cx="0" cy="3649639"/>
             </a:xfrm>
             <a:custGeom>
               <a:avLst/>
               <a:pathLst>
-                <a:path w="0" h="3826579">
+                <a:path w="0" h="3649639">
                   <a:moveTo>
-                    <a:pt x="0" y="3826579"/>
+                    <a:pt x="0" y="3649639"/>
                   </a:moveTo>
                   <a:lnTo>
                     <a:pt x="0" y="0"/>
@@ -2615,15 +2615,15 @@
           </p:nvSpPr>
           <p:spPr>
             <a:xfrm>
-              <a:off x="7580464" y="1896563"/>
-              <a:ext cx="0" cy="3826579"/>
+              <a:off x="7580464" y="2073503"/>
+              <a:ext cx="0" cy="3649639"/>
             </a:xfrm>
             <a:custGeom>
               <a:avLst/>
               <a:pathLst>
-                <a:path w="0" h="3826579">
+                <a:path w="0" h="3649639">
                   <a:moveTo>
-                    <a:pt x="0" y="3826579"/>
+                    <a:pt x="0" y="3649639"/>
                   </a:moveTo>
                   <a:lnTo>
                     <a:pt x="0" y="0"/>
@@ -2658,7 +2658,7 @@
           </p:nvSpPr>
           <p:spPr>
             <a:xfrm>
-              <a:off x="817517" y="5549207"/>
+              <a:off x="817517" y="5557249"/>
               <a:ext cx="7799693" cy="0"/>
             </a:xfrm>
             <a:custGeom>
@@ -2701,7 +2701,7 @@
           </p:nvSpPr>
           <p:spPr>
             <a:xfrm>
-              <a:off x="817517" y="4679530"/>
+              <a:off x="817517" y="4727786"/>
               <a:ext cx="7799693" cy="0"/>
             </a:xfrm>
             <a:custGeom>
@@ -2744,7 +2744,7 @@
           </p:nvSpPr>
           <p:spPr>
             <a:xfrm>
-              <a:off x="817517" y="3809853"/>
+              <a:off x="817517" y="3898322"/>
               <a:ext cx="7799693" cy="0"/>
             </a:xfrm>
             <a:custGeom>
@@ -2787,7 +2787,7 @@
           </p:nvSpPr>
           <p:spPr>
             <a:xfrm>
-              <a:off x="817517" y="2940175"/>
+              <a:off x="817517" y="3068859"/>
               <a:ext cx="7799693" cy="0"/>
             </a:xfrm>
             <a:custGeom>
@@ -2830,7 +2830,7 @@
           </p:nvSpPr>
           <p:spPr>
             <a:xfrm>
-              <a:off x="817517" y="2070498"/>
+              <a:off x="817517" y="2239395"/>
               <a:ext cx="7799693" cy="0"/>
             </a:xfrm>
             <a:custGeom>
@@ -2873,15 +2873,15 @@
           </p:nvSpPr>
           <p:spPr>
             <a:xfrm>
-              <a:off x="1440530" y="1896563"/>
-              <a:ext cx="0" cy="3826579"/>
+              <a:off x="1440530" y="2073503"/>
+              <a:ext cx="0" cy="3649639"/>
             </a:xfrm>
             <a:custGeom>
               <a:avLst/>
               <a:pathLst>
-                <a:path w="0" h="3826579">
+                <a:path w="0" h="3649639">
                   <a:moveTo>
-                    <a:pt x="0" y="3826579"/>
+                    <a:pt x="0" y="3649639"/>
                   </a:moveTo>
                   <a:lnTo>
                     <a:pt x="0" y="0"/>
@@ -2916,15 +2916,15 @@
           </p:nvSpPr>
           <p:spPr>
             <a:xfrm>
-              <a:off x="2804959" y="1896563"/>
-              <a:ext cx="0" cy="3826579"/>
+              <a:off x="2804959" y="2073503"/>
+              <a:ext cx="0" cy="3649639"/>
             </a:xfrm>
             <a:custGeom>
               <a:avLst/>
               <a:pathLst>
-                <a:path w="0" h="3826579">
+                <a:path w="0" h="3649639">
                   <a:moveTo>
-                    <a:pt x="0" y="3826579"/>
+                    <a:pt x="0" y="3649639"/>
                   </a:moveTo>
                   <a:lnTo>
                     <a:pt x="0" y="0"/>
@@ -2959,15 +2959,15 @@
           </p:nvSpPr>
           <p:spPr>
             <a:xfrm>
-              <a:off x="4169389" y="1896563"/>
-              <a:ext cx="0" cy="3826579"/>
+              <a:off x="4169389" y="2073503"/>
+              <a:ext cx="0" cy="3649639"/>
             </a:xfrm>
             <a:custGeom>
               <a:avLst/>
               <a:pathLst>
-                <a:path w="0" h="3826579">
+                <a:path w="0" h="3649639">
                   <a:moveTo>
-                    <a:pt x="0" y="3826579"/>
+                    <a:pt x="0" y="3649639"/>
                   </a:moveTo>
                   <a:lnTo>
                     <a:pt x="0" y="0"/>
@@ -3002,15 +3002,15 @@
           </p:nvSpPr>
           <p:spPr>
             <a:xfrm>
-              <a:off x="5533819" y="1896563"/>
-              <a:ext cx="0" cy="3826579"/>
+              <a:off x="5533819" y="2073503"/>
+              <a:ext cx="0" cy="3649639"/>
             </a:xfrm>
             <a:custGeom>
               <a:avLst/>
               <a:pathLst>
-                <a:path w="0" h="3826579">
+                <a:path w="0" h="3649639">
                   <a:moveTo>
-                    <a:pt x="0" y="3826579"/>
+                    <a:pt x="0" y="3649639"/>
                   </a:moveTo>
                   <a:lnTo>
                     <a:pt x="0" y="0"/>
@@ -3045,15 +3045,15 @@
           </p:nvSpPr>
           <p:spPr>
             <a:xfrm>
-              <a:off x="6898249" y="1896563"/>
-              <a:ext cx="0" cy="3826579"/>
+              <a:off x="6898249" y="2073503"/>
+              <a:ext cx="0" cy="3649639"/>
             </a:xfrm>
             <a:custGeom>
               <a:avLst/>
               <a:pathLst>
-                <a:path w="0" h="3826579">
+                <a:path w="0" h="3649639">
                   <a:moveTo>
-                    <a:pt x="0" y="3826579"/>
+                    <a:pt x="0" y="3649639"/>
                   </a:moveTo>
                   <a:lnTo>
                     <a:pt x="0" y="0"/>
@@ -3088,15 +3088,15 @@
           </p:nvSpPr>
           <p:spPr>
             <a:xfrm>
-              <a:off x="8262679" y="1896563"/>
-              <a:ext cx="0" cy="3826579"/>
+              <a:off x="8262679" y="2073503"/>
+              <a:ext cx="0" cy="3649639"/>
             </a:xfrm>
             <a:custGeom>
               <a:avLst/>
               <a:pathLst>
-                <a:path w="0" h="3826579">
+                <a:path w="0" h="3649639">
                   <a:moveTo>
-                    <a:pt x="0" y="3826579"/>
+                    <a:pt x="0" y="3649639"/>
                   </a:moveTo>
                   <a:lnTo>
                     <a:pt x="0" y="0"/>
@@ -3131,273 +3131,273 @@
           </p:nvSpPr>
           <p:spPr>
             <a:xfrm>
-              <a:off x="1172049" y="1896563"/>
-              <a:ext cx="7090630" cy="3433023"/>
+              <a:off x="1172049" y="2073503"/>
+              <a:ext cx="7090630" cy="3274281"/>
             </a:xfrm>
             <a:custGeom>
               <a:avLst/>
               <a:pathLst>
-                <a:path w="7090630" h="3433023">
+                <a:path w="7090630" h="3274281">
                   <a:moveTo>
-                    <a:pt x="0" y="2538674"/>
+                    <a:pt x="0" y="2421287"/>
                   </a:moveTo>
                   <a:lnTo>
-                    <a:pt x="71622" y="2545131"/>
-                  </a:lnTo>
-                  <a:lnTo>
-                    <a:pt x="143245" y="2551551"/>
-                  </a:lnTo>
-                  <a:lnTo>
-                    <a:pt x="214867" y="2557933"/>
-                  </a:lnTo>
-                  <a:lnTo>
-                    <a:pt x="286490" y="2564278"/>
-                  </a:lnTo>
-                  <a:lnTo>
-                    <a:pt x="358112" y="2570587"/>
-                  </a:lnTo>
-                  <a:lnTo>
-                    <a:pt x="429735" y="2576859"/>
-                  </a:lnTo>
-                  <a:lnTo>
-                    <a:pt x="501357" y="2583095"/>
-                  </a:lnTo>
-                  <a:lnTo>
-                    <a:pt x="572980" y="2589294"/>
-                  </a:lnTo>
-                  <a:lnTo>
-                    <a:pt x="644602" y="2595458"/>
-                  </a:lnTo>
-                  <a:lnTo>
-                    <a:pt x="716225" y="2601585"/>
-                  </a:lnTo>
-                  <a:lnTo>
-                    <a:pt x="787847" y="2607678"/>
-                  </a:lnTo>
-                  <a:lnTo>
-                    <a:pt x="859470" y="2613735"/>
-                  </a:lnTo>
-                  <a:lnTo>
-                    <a:pt x="931092" y="2619757"/>
-                  </a:lnTo>
-                  <a:lnTo>
-                    <a:pt x="1002715" y="2625744"/>
-                  </a:lnTo>
-                  <a:lnTo>
-                    <a:pt x="1074337" y="2631696"/>
-                  </a:lnTo>
-                  <a:lnTo>
-                    <a:pt x="1145960" y="2637614"/>
-                  </a:lnTo>
-                  <a:lnTo>
-                    <a:pt x="1217582" y="2643497"/>
-                  </a:lnTo>
-                  <a:lnTo>
-                    <a:pt x="1289205" y="2649347"/>
-                  </a:lnTo>
-                  <a:lnTo>
-                    <a:pt x="1360827" y="2655162"/>
-                  </a:lnTo>
-                  <a:lnTo>
-                    <a:pt x="1432450" y="2660944"/>
-                  </a:lnTo>
-                  <a:lnTo>
-                    <a:pt x="1504073" y="2666692"/>
-                  </a:lnTo>
-                  <a:lnTo>
-                    <a:pt x="1575695" y="2672407"/>
-                  </a:lnTo>
-                  <a:lnTo>
-                    <a:pt x="1647318" y="2678089"/>
-                  </a:lnTo>
-                  <a:lnTo>
-                    <a:pt x="1718940" y="2683738"/>
-                  </a:lnTo>
-                  <a:lnTo>
-                    <a:pt x="1790563" y="2689354"/>
-                  </a:lnTo>
-                  <a:lnTo>
-                    <a:pt x="1862185" y="2694938"/>
-                  </a:lnTo>
-                  <a:lnTo>
-                    <a:pt x="1933808" y="2700489"/>
-                  </a:lnTo>
-                  <a:lnTo>
-                    <a:pt x="2005430" y="2706008"/>
-                  </a:lnTo>
-                  <a:lnTo>
-                    <a:pt x="2077053" y="2711495"/>
-                  </a:lnTo>
-                  <a:lnTo>
-                    <a:pt x="2148675" y="2716950"/>
-                  </a:lnTo>
-                  <a:lnTo>
-                    <a:pt x="2220298" y="2722374"/>
-                  </a:lnTo>
-                  <a:lnTo>
-                    <a:pt x="2291920" y="2727766"/>
-                  </a:lnTo>
-                  <a:lnTo>
-                    <a:pt x="2363543" y="2733127"/>
-                  </a:lnTo>
-                  <a:lnTo>
-                    <a:pt x="2435165" y="2738457"/>
-                  </a:lnTo>
-                  <a:lnTo>
-                    <a:pt x="2506788" y="2743756"/>
-                  </a:lnTo>
-                  <a:lnTo>
-                    <a:pt x="2578410" y="2749024"/>
-                  </a:lnTo>
-                  <a:lnTo>
-                    <a:pt x="2650033" y="2754262"/>
-                  </a:lnTo>
-                  <a:lnTo>
-                    <a:pt x="2721655" y="2759469"/>
-                  </a:lnTo>
-                  <a:lnTo>
-                    <a:pt x="2793278" y="2764647"/>
-                  </a:lnTo>
-                  <a:lnTo>
-                    <a:pt x="2864901" y="2769794"/>
-                  </a:lnTo>
-                  <a:lnTo>
-                    <a:pt x="2936523" y="2774911"/>
-                  </a:lnTo>
-                  <a:lnTo>
-                    <a:pt x="3008146" y="2779999"/>
-                  </a:lnTo>
-                  <a:lnTo>
-                    <a:pt x="3079768" y="2771252"/>
-                  </a:lnTo>
-                  <a:lnTo>
-                    <a:pt x="3151391" y="2742303"/>
-                  </a:lnTo>
-                  <a:lnTo>
-                    <a:pt x="3223013" y="2712404"/>
-                  </a:lnTo>
-                  <a:lnTo>
-                    <a:pt x="3294636" y="2681522"/>
-                  </a:lnTo>
-                  <a:lnTo>
-                    <a:pt x="3366258" y="2649627"/>
-                  </a:lnTo>
-                  <a:lnTo>
-                    <a:pt x="3437881" y="2616684"/>
-                  </a:lnTo>
-                  <a:lnTo>
-                    <a:pt x="3509503" y="2582658"/>
-                  </a:lnTo>
-                  <a:lnTo>
-                    <a:pt x="3581126" y="2547516"/>
-                  </a:lnTo>
-                  <a:lnTo>
-                    <a:pt x="3652748" y="2511219"/>
-                  </a:lnTo>
-                  <a:lnTo>
-                    <a:pt x="3724371" y="2473730"/>
-                  </a:lnTo>
-                  <a:lnTo>
-                    <a:pt x="3795993" y="2435009"/>
-                  </a:lnTo>
-                  <a:lnTo>
-                    <a:pt x="3867616" y="2395017"/>
-                  </a:lnTo>
-                  <a:lnTo>
-                    <a:pt x="3939238" y="2353712"/>
-                  </a:lnTo>
-                  <a:lnTo>
-                    <a:pt x="4010861" y="2311049"/>
-                  </a:lnTo>
-                  <a:lnTo>
-                    <a:pt x="4082483" y="2266986"/>
-                  </a:lnTo>
-                  <a:lnTo>
-                    <a:pt x="4154106" y="2221475"/>
-                  </a:lnTo>
-                  <a:lnTo>
-                    <a:pt x="4225729" y="2174470"/>
-                  </a:lnTo>
-                  <a:lnTo>
-                    <a:pt x="4297351" y="2125920"/>
-                  </a:lnTo>
-                  <a:lnTo>
-                    <a:pt x="4368974" y="2075776"/>
-                  </a:lnTo>
-                  <a:lnTo>
-                    <a:pt x="4440596" y="2023986"/>
-                  </a:lnTo>
-                  <a:lnTo>
-                    <a:pt x="4512219" y="1970494"/>
-                  </a:lnTo>
-                  <a:lnTo>
-                    <a:pt x="4583841" y="1915245"/>
-                  </a:lnTo>
-                  <a:lnTo>
-                    <a:pt x="4655464" y="1858182"/>
-                  </a:lnTo>
-                  <a:lnTo>
-                    <a:pt x="4727086" y="1799244"/>
-                  </a:lnTo>
-                  <a:lnTo>
-                    <a:pt x="4798709" y="1738371"/>
-                  </a:lnTo>
-                  <a:lnTo>
-                    <a:pt x="4870331" y="1675498"/>
-                  </a:lnTo>
-                  <a:lnTo>
-                    <a:pt x="4941954" y="1610561"/>
-                  </a:lnTo>
-                  <a:lnTo>
-                    <a:pt x="5013576" y="1543490"/>
-                  </a:lnTo>
-                  <a:lnTo>
-                    <a:pt x="5085199" y="1474217"/>
-                  </a:lnTo>
-                  <a:lnTo>
-                    <a:pt x="5156821" y="1402668"/>
-                  </a:lnTo>
-                  <a:lnTo>
-                    <a:pt x="5228444" y="1328770"/>
-                  </a:lnTo>
-                  <a:lnTo>
-                    <a:pt x="5300066" y="1252444"/>
-                  </a:lnTo>
-                  <a:lnTo>
-                    <a:pt x="5371689" y="1173612"/>
-                  </a:lnTo>
-                  <a:lnTo>
-                    <a:pt x="5443311" y="1092190"/>
-                  </a:lnTo>
-                  <a:lnTo>
-                    <a:pt x="5514934" y="1008094"/>
-                  </a:lnTo>
-                  <a:lnTo>
-                    <a:pt x="5586557" y="921237"/>
-                  </a:lnTo>
-                  <a:lnTo>
-                    <a:pt x="5658179" y="831526"/>
-                  </a:lnTo>
-                  <a:lnTo>
-                    <a:pt x="5729802" y="738869"/>
-                  </a:lnTo>
-                  <a:lnTo>
-                    <a:pt x="5801424" y="643168"/>
-                  </a:lnTo>
-                  <a:lnTo>
-                    <a:pt x="5873047" y="544325"/>
-                  </a:lnTo>
-                  <a:lnTo>
-                    <a:pt x="5944669" y="442235"/>
-                  </a:lnTo>
-                  <a:lnTo>
-                    <a:pt x="6016292" y="336792"/>
-                  </a:lnTo>
-                  <a:lnTo>
-                    <a:pt x="6087914" y="227885"/>
-                  </a:lnTo>
-                  <a:lnTo>
-                    <a:pt x="6159537" y="115402"/>
+                    <a:pt x="71622" y="2427445"/>
+                  </a:lnTo>
+                  <a:lnTo>
+                    <a:pt x="143245" y="2433568"/>
+                  </a:lnTo>
+                  <a:lnTo>
+                    <a:pt x="214867" y="2439655"/>
+                  </a:lnTo>
+                  <a:lnTo>
+                    <a:pt x="286490" y="2445707"/>
+                  </a:lnTo>
+                  <a:lnTo>
+                    <a:pt x="358112" y="2451724"/>
+                  </a:lnTo>
+                  <a:lnTo>
+                    <a:pt x="429735" y="2457706"/>
+                  </a:lnTo>
+                  <a:lnTo>
+                    <a:pt x="501357" y="2463653"/>
+                  </a:lnTo>
+                  <a:lnTo>
+                    <a:pt x="572980" y="2469566"/>
+                  </a:lnTo>
+                  <a:lnTo>
+                    <a:pt x="644602" y="2475445"/>
+                  </a:lnTo>
+                  <a:lnTo>
+                    <a:pt x="716225" y="2481289"/>
+                  </a:lnTo>
+                  <a:lnTo>
+                    <a:pt x="787847" y="2487100"/>
+                  </a:lnTo>
+                  <a:lnTo>
+                    <a:pt x="859470" y="2492877"/>
+                  </a:lnTo>
+                  <a:lnTo>
+                    <a:pt x="931092" y="2498620"/>
+                  </a:lnTo>
+                  <a:lnTo>
+                    <a:pt x="1002715" y="2504330"/>
+                  </a:lnTo>
+                  <a:lnTo>
+                    <a:pt x="1074337" y="2510007"/>
+                  </a:lnTo>
+                  <a:lnTo>
+                    <a:pt x="1145960" y="2515652"/>
+                  </a:lnTo>
+                  <a:lnTo>
+                    <a:pt x="1217582" y="2521263"/>
+                  </a:lnTo>
+                  <a:lnTo>
+                    <a:pt x="1289205" y="2526842"/>
+                  </a:lnTo>
+                  <a:lnTo>
+                    <a:pt x="1360827" y="2532389"/>
+                  </a:lnTo>
+                  <a:lnTo>
+                    <a:pt x="1432450" y="2537903"/>
+                  </a:lnTo>
+                  <a:lnTo>
+                    <a:pt x="1504073" y="2543385"/>
+                  </a:lnTo>
+                  <a:lnTo>
+                    <a:pt x="1575695" y="2548836"/>
+                  </a:lnTo>
+                  <a:lnTo>
+                    <a:pt x="1647318" y="2554255"/>
+                  </a:lnTo>
+                  <a:lnTo>
+                    <a:pt x="1718940" y="2559643"/>
+                  </a:lnTo>
+                  <a:lnTo>
+                    <a:pt x="1790563" y="2564999"/>
+                  </a:lnTo>
+                  <a:lnTo>
+                    <a:pt x="1862185" y="2570325"/>
+                  </a:lnTo>
+                  <a:lnTo>
+                    <a:pt x="1933808" y="2575619"/>
+                  </a:lnTo>
+                  <a:lnTo>
+                    <a:pt x="2005430" y="2580883"/>
+                  </a:lnTo>
+                  <a:lnTo>
+                    <a:pt x="2077053" y="2586117"/>
+                  </a:lnTo>
+                  <a:lnTo>
+                    <a:pt x="2148675" y="2591320"/>
+                  </a:lnTo>
+                  <a:lnTo>
+                    <a:pt x="2220298" y="2596492"/>
+                  </a:lnTo>
+                  <a:lnTo>
+                    <a:pt x="2291920" y="2601635"/>
+                  </a:lnTo>
+                  <a:lnTo>
+                    <a:pt x="2363543" y="2606748"/>
+                  </a:lnTo>
+                  <a:lnTo>
+                    <a:pt x="2435165" y="2611832"/>
+                  </a:lnTo>
+                  <a:lnTo>
+                    <a:pt x="2506788" y="2616886"/>
+                  </a:lnTo>
+                  <a:lnTo>
+                    <a:pt x="2578410" y="2621910"/>
+                  </a:lnTo>
+                  <a:lnTo>
+                    <a:pt x="2650033" y="2626906"/>
+                  </a:lnTo>
+                  <a:lnTo>
+                    <a:pt x="2721655" y="2631872"/>
+                  </a:lnTo>
+                  <a:lnTo>
+                    <a:pt x="2793278" y="2636810"/>
+                  </a:lnTo>
+                  <a:lnTo>
+                    <a:pt x="2864901" y="2641719"/>
+                  </a:lnTo>
+                  <a:lnTo>
+                    <a:pt x="2936523" y="2646600"/>
+                  </a:lnTo>
+                  <a:lnTo>
+                    <a:pt x="3008146" y="2651453"/>
+                  </a:lnTo>
+                  <a:lnTo>
+                    <a:pt x="3079768" y="2643110"/>
+                  </a:lnTo>
+                  <a:lnTo>
+                    <a:pt x="3151391" y="2615500"/>
+                  </a:lnTo>
+                  <a:lnTo>
+                    <a:pt x="3223013" y="2586983"/>
+                  </a:lnTo>
+                  <a:lnTo>
+                    <a:pt x="3294636" y="2557530"/>
+                  </a:lnTo>
+                  <a:lnTo>
+                    <a:pt x="3366258" y="2527109"/>
+                  </a:lnTo>
+                  <a:lnTo>
+                    <a:pt x="3437881" y="2495689"/>
+                  </a:lnTo>
+                  <a:lnTo>
+                    <a:pt x="3509503" y="2463237"/>
+                  </a:lnTo>
+                  <a:lnTo>
+                    <a:pt x="3581126" y="2429720"/>
+                  </a:lnTo>
+                  <a:lnTo>
+                    <a:pt x="3652748" y="2395101"/>
+                  </a:lnTo>
+                  <a:lnTo>
+                    <a:pt x="3724371" y="2359345"/>
+                  </a:lnTo>
+                  <a:lnTo>
+                    <a:pt x="3795993" y="2322415"/>
+                  </a:lnTo>
+                  <a:lnTo>
+                    <a:pt x="3867616" y="2284272"/>
+                  </a:lnTo>
+                  <a:lnTo>
+                    <a:pt x="3939238" y="2244877"/>
+                  </a:lnTo>
+                  <a:lnTo>
+                    <a:pt x="4010861" y="2204187"/>
+                  </a:lnTo>
+                  <a:lnTo>
+                    <a:pt x="4082483" y="2162161"/>
+                  </a:lnTo>
+                  <a:lnTo>
+                    <a:pt x="4154106" y="2118755"/>
+                  </a:lnTo>
+                  <a:lnTo>
+                    <a:pt x="4225729" y="2073923"/>
+                  </a:lnTo>
+                  <a:lnTo>
+                    <a:pt x="4297351" y="2027618"/>
+                  </a:lnTo>
+                  <a:lnTo>
+                    <a:pt x="4368974" y="1979793"/>
+                  </a:lnTo>
+                  <a:lnTo>
+                    <a:pt x="4440596" y="1930397"/>
+                  </a:lnTo>
+                  <a:lnTo>
+                    <a:pt x="4512219" y="1879379"/>
+                  </a:lnTo>
+                  <a:lnTo>
+                    <a:pt x="4583841" y="1826685"/>
+                  </a:lnTo>
+                  <a:lnTo>
+                    <a:pt x="4655464" y="1772260"/>
+                  </a:lnTo>
+                  <a:lnTo>
+                    <a:pt x="4727086" y="1716048"/>
+                  </a:lnTo>
+                  <a:lnTo>
+                    <a:pt x="4798709" y="1657989"/>
+                  </a:lnTo>
+                  <a:lnTo>
+                    <a:pt x="4870331" y="1598024"/>
+                  </a:lnTo>
+                  <a:lnTo>
+                    <a:pt x="4941954" y="1536089"/>
+                  </a:lnTo>
+                  <a:lnTo>
+                    <a:pt x="5013576" y="1472120"/>
+                  </a:lnTo>
+                  <a:lnTo>
+                    <a:pt x="5085199" y="1406050"/>
+                  </a:lnTo>
+                  <a:lnTo>
+                    <a:pt x="5156821" y="1337810"/>
+                  </a:lnTo>
+                  <a:lnTo>
+                    <a:pt x="5228444" y="1267328"/>
+                  </a:lnTo>
+                  <a:lnTo>
+                    <a:pt x="5300066" y="1194532"/>
+                  </a:lnTo>
+                  <a:lnTo>
+                    <a:pt x="5371689" y="1119344"/>
+                  </a:lnTo>
+                  <a:lnTo>
+                    <a:pt x="5443311" y="1041688"/>
+                  </a:lnTo>
+                  <a:lnTo>
+                    <a:pt x="5514934" y="961480"/>
+                  </a:lnTo>
+                  <a:lnTo>
+                    <a:pt x="5586557" y="878639"/>
+                  </a:lnTo>
+                  <a:lnTo>
+                    <a:pt x="5658179" y="793076"/>
+                  </a:lnTo>
+                  <a:lnTo>
+                    <a:pt x="5729802" y="704704"/>
+                  </a:lnTo>
+                  <a:lnTo>
+                    <a:pt x="5801424" y="613428"/>
+                  </a:lnTo>
+                  <a:lnTo>
+                    <a:pt x="5873047" y="519155"/>
+                  </a:lnTo>
+                  <a:lnTo>
+                    <a:pt x="5944669" y="421786"/>
+                  </a:lnTo>
+                  <a:lnTo>
+                    <a:pt x="6016292" y="321219"/>
+                  </a:lnTo>
+                  <a:lnTo>
+                    <a:pt x="6087914" y="217348"/>
+                  </a:lnTo>
+                  <a:lnTo>
+                    <a:pt x="6159537" y="110066"/>
                   </a:lnTo>
                   <a:lnTo>
                     <a:pt x="6230682" y="0"/>
@@ -3406,304 +3406,304 @@
                     <a:pt x="7090630" y="0"/>
                   </a:lnTo>
                   <a:lnTo>
-                    <a:pt x="7090630" y="3026128"/>
-                  </a:lnTo>
-                  <a:lnTo>
-                    <a:pt x="7019007" y="3022475"/>
-                  </a:lnTo>
-                  <a:lnTo>
-                    <a:pt x="6947385" y="3018801"/>
-                  </a:lnTo>
-                  <a:lnTo>
-                    <a:pt x="6875762" y="3015106"/>
-                  </a:lnTo>
-                  <a:lnTo>
-                    <a:pt x="6804139" y="3011389"/>
-                  </a:lnTo>
-                  <a:lnTo>
-                    <a:pt x="6732517" y="3007650"/>
-                  </a:lnTo>
-                  <a:lnTo>
-                    <a:pt x="6660894" y="3003890"/>
-                  </a:lnTo>
-                  <a:lnTo>
-                    <a:pt x="6589272" y="3000108"/>
-                  </a:lnTo>
-                  <a:lnTo>
-                    <a:pt x="6517649" y="2996303"/>
-                  </a:lnTo>
-                  <a:lnTo>
-                    <a:pt x="6446027" y="2992477"/>
-                  </a:lnTo>
-                  <a:lnTo>
-                    <a:pt x="6374404" y="2988628"/>
-                  </a:lnTo>
-                  <a:lnTo>
-                    <a:pt x="6302782" y="2984756"/>
-                  </a:lnTo>
-                  <a:lnTo>
-                    <a:pt x="6231159" y="2980863"/>
-                  </a:lnTo>
-                  <a:lnTo>
-                    <a:pt x="6159537" y="2976946"/>
-                  </a:lnTo>
-                  <a:lnTo>
-                    <a:pt x="6087914" y="2973006"/>
-                  </a:lnTo>
-                  <a:lnTo>
-                    <a:pt x="6016292" y="2969044"/>
-                  </a:lnTo>
-                  <a:lnTo>
-                    <a:pt x="5944669" y="2965059"/>
-                  </a:lnTo>
-                  <a:lnTo>
-                    <a:pt x="5873047" y="2961050"/>
-                  </a:lnTo>
-                  <a:lnTo>
-                    <a:pt x="5801424" y="2957018"/>
-                  </a:lnTo>
-                  <a:lnTo>
-                    <a:pt x="5729802" y="2952962"/>
-                  </a:lnTo>
-                  <a:lnTo>
-                    <a:pt x="5658179" y="2948883"/>
-                  </a:lnTo>
-                  <a:lnTo>
-                    <a:pt x="5586557" y="2944780"/>
-                  </a:lnTo>
-                  <a:lnTo>
-                    <a:pt x="5514934" y="2940653"/>
-                  </a:lnTo>
-                  <a:lnTo>
-                    <a:pt x="5443311" y="2936502"/>
-                  </a:lnTo>
-                  <a:lnTo>
-                    <a:pt x="5371689" y="2932327"/>
-                  </a:lnTo>
-                  <a:lnTo>
-                    <a:pt x="5300066" y="2928127"/>
-                  </a:lnTo>
-                  <a:lnTo>
-                    <a:pt x="5228444" y="2923903"/>
-                  </a:lnTo>
-                  <a:lnTo>
-                    <a:pt x="5156821" y="2919654"/>
-                  </a:lnTo>
-                  <a:lnTo>
-                    <a:pt x="5085199" y="2915381"/>
-                  </a:lnTo>
-                  <a:lnTo>
-                    <a:pt x="5013576" y="2911082"/>
-                  </a:lnTo>
-                  <a:lnTo>
-                    <a:pt x="4941954" y="2906759"/>
-                  </a:lnTo>
-                  <a:lnTo>
-                    <a:pt x="4870331" y="2902410"/>
-                  </a:lnTo>
-                  <a:lnTo>
-                    <a:pt x="4798709" y="2898036"/>
-                  </a:lnTo>
-                  <a:lnTo>
-                    <a:pt x="4727086" y="2893637"/>
-                  </a:lnTo>
-                  <a:lnTo>
-                    <a:pt x="4655464" y="2889212"/>
-                  </a:lnTo>
-                  <a:lnTo>
-                    <a:pt x="4583841" y="2884761"/>
-                  </a:lnTo>
-                  <a:lnTo>
-                    <a:pt x="4512219" y="2880284"/>
-                  </a:lnTo>
-                  <a:lnTo>
-                    <a:pt x="4440596" y="2875781"/>
-                  </a:lnTo>
-                  <a:lnTo>
-                    <a:pt x="4368974" y="2871252"/>
-                  </a:lnTo>
-                  <a:lnTo>
-                    <a:pt x="4297351" y="2866696"/>
-                  </a:lnTo>
-                  <a:lnTo>
-                    <a:pt x="4225729" y="2862114"/>
-                  </a:lnTo>
-                  <a:lnTo>
-                    <a:pt x="4154106" y="2857505"/>
-                  </a:lnTo>
-                  <a:lnTo>
-                    <a:pt x="4082483" y="2852869"/>
-                  </a:lnTo>
-                  <a:lnTo>
-                    <a:pt x="4010861" y="2848206"/>
-                  </a:lnTo>
-                  <a:lnTo>
-                    <a:pt x="3939238" y="2843516"/>
-                  </a:lnTo>
-                  <a:lnTo>
-                    <a:pt x="3867616" y="2838799"/>
-                  </a:lnTo>
-                  <a:lnTo>
-                    <a:pt x="3795993" y="2834054"/>
-                  </a:lnTo>
-                  <a:lnTo>
-                    <a:pt x="3724371" y="2829281"/>
-                  </a:lnTo>
-                  <a:lnTo>
-                    <a:pt x="3652748" y="2824481"/>
-                  </a:lnTo>
-                  <a:lnTo>
-                    <a:pt x="3581126" y="2819653"/>
-                  </a:lnTo>
-                  <a:lnTo>
-                    <a:pt x="3509503" y="2814796"/>
-                  </a:lnTo>
-                  <a:lnTo>
-                    <a:pt x="3437881" y="2809911"/>
-                  </a:lnTo>
-                  <a:lnTo>
-                    <a:pt x="3366258" y="2804998"/>
-                  </a:lnTo>
-                  <a:lnTo>
-                    <a:pt x="3294636" y="2800056"/>
-                  </a:lnTo>
-                  <a:lnTo>
-                    <a:pt x="3223013" y="2795085"/>
-                  </a:lnTo>
-                  <a:lnTo>
-                    <a:pt x="3151391" y="2790086"/>
-                  </a:lnTo>
-                  <a:lnTo>
-                    <a:pt x="3079768" y="2785057"/>
-                  </a:lnTo>
-                  <a:lnTo>
-                    <a:pt x="3008146" y="2799280"/>
-                  </a:lnTo>
-                  <a:lnTo>
-                    <a:pt x="2936523" y="2826416"/>
-                  </a:lnTo>
-                  <a:lnTo>
-                    <a:pt x="2864901" y="2852690"/>
-                  </a:lnTo>
-                  <a:lnTo>
-                    <a:pt x="2793278" y="2878128"/>
-                  </a:lnTo>
-                  <a:lnTo>
-                    <a:pt x="2721655" y="2902758"/>
-                  </a:lnTo>
-                  <a:lnTo>
-                    <a:pt x="2650033" y="2926604"/>
-                  </a:lnTo>
-                  <a:lnTo>
-                    <a:pt x="2578410" y="2949692"/>
-                  </a:lnTo>
-                  <a:lnTo>
-                    <a:pt x="2506788" y="2972045"/>
-                  </a:lnTo>
-                  <a:lnTo>
-                    <a:pt x="2435165" y="2993688"/>
-                  </a:lnTo>
-                  <a:lnTo>
-                    <a:pt x="2363543" y="3014643"/>
-                  </a:lnTo>
-                  <a:lnTo>
-                    <a:pt x="2291920" y="3034931"/>
-                  </a:lnTo>
-                  <a:lnTo>
-                    <a:pt x="2220298" y="3054574"/>
-                  </a:lnTo>
-                  <a:lnTo>
-                    <a:pt x="2148675" y="3073592"/>
-                  </a:lnTo>
-                  <a:lnTo>
-                    <a:pt x="2077053" y="3092006"/>
-                  </a:lnTo>
-                  <a:lnTo>
-                    <a:pt x="2005430" y="3109834"/>
-                  </a:lnTo>
-                  <a:lnTo>
-                    <a:pt x="1933808" y="3127095"/>
-                  </a:lnTo>
-                  <a:lnTo>
-                    <a:pt x="1862185" y="3143808"/>
-                  </a:lnTo>
-                  <a:lnTo>
-                    <a:pt x="1790563" y="3159988"/>
-                  </a:lnTo>
-                  <a:lnTo>
-                    <a:pt x="1718940" y="3175655"/>
-                  </a:lnTo>
-                  <a:lnTo>
-                    <a:pt x="1647318" y="3190823"/>
-                  </a:lnTo>
-                  <a:lnTo>
-                    <a:pt x="1575695" y="3205509"/>
-                  </a:lnTo>
-                  <a:lnTo>
-                    <a:pt x="1504073" y="3219727"/>
-                  </a:lnTo>
-                  <a:lnTo>
-                    <a:pt x="1432450" y="3233494"/>
-                  </a:lnTo>
-                  <a:lnTo>
-                    <a:pt x="1360827" y="3246823"/>
-                  </a:lnTo>
-                  <a:lnTo>
-                    <a:pt x="1289205" y="3259728"/>
-                  </a:lnTo>
-                  <a:lnTo>
-                    <a:pt x="1217582" y="3272222"/>
-                  </a:lnTo>
-                  <a:lnTo>
-                    <a:pt x="1145960" y="3284320"/>
-                  </a:lnTo>
-                  <a:lnTo>
-                    <a:pt x="1074337" y="3296032"/>
-                  </a:lnTo>
-                  <a:lnTo>
-                    <a:pt x="1002715" y="3307372"/>
-                  </a:lnTo>
-                  <a:lnTo>
-                    <a:pt x="931092" y="3318352"/>
-                  </a:lnTo>
-                  <a:lnTo>
-                    <a:pt x="859470" y="3328982"/>
-                  </a:lnTo>
-                  <a:lnTo>
-                    <a:pt x="787847" y="3339274"/>
-                  </a:lnTo>
-                  <a:lnTo>
-                    <a:pt x="716225" y="3349239"/>
-                  </a:lnTo>
-                  <a:lnTo>
-                    <a:pt x="644602" y="3358888"/>
-                  </a:lnTo>
-                  <a:lnTo>
-                    <a:pt x="572980" y="3368229"/>
-                  </a:lnTo>
-                  <a:lnTo>
-                    <a:pt x="501357" y="3377273"/>
-                  </a:lnTo>
-                  <a:lnTo>
-                    <a:pt x="429735" y="3386030"/>
-                  </a:lnTo>
-                  <a:lnTo>
-                    <a:pt x="358112" y="3394508"/>
-                  </a:lnTo>
-                  <a:lnTo>
-                    <a:pt x="286490" y="3402717"/>
-                  </a:lnTo>
-                  <a:lnTo>
-                    <a:pt x="214867" y="3410664"/>
-                  </a:lnTo>
-                  <a:lnTo>
-                    <a:pt x="143245" y="3418359"/>
-                  </a:lnTo>
-                  <a:lnTo>
-                    <a:pt x="71622" y="3425809"/>
-                  </a:lnTo>
-                  <a:lnTo>
-                    <a:pt x="0" y="3433023"/>
+                    <a:pt x="7090630" y="2886201"/>
+                  </a:lnTo>
+                  <a:lnTo>
+                    <a:pt x="7019007" y="2882717"/>
+                  </a:lnTo>
+                  <a:lnTo>
+                    <a:pt x="6947385" y="2879213"/>
+                  </a:lnTo>
+                  <a:lnTo>
+                    <a:pt x="6875762" y="2875689"/>
+                  </a:lnTo>
+                  <a:lnTo>
+                    <a:pt x="6804139" y="2872144"/>
+                  </a:lnTo>
+                  <a:lnTo>
+                    <a:pt x="6732517" y="2868578"/>
+                  </a:lnTo>
+                  <a:lnTo>
+                    <a:pt x="6660894" y="2864991"/>
+                  </a:lnTo>
+                  <a:lnTo>
+                    <a:pt x="6589272" y="2861384"/>
+                  </a:lnTo>
+                  <a:lnTo>
+                    <a:pt x="6517649" y="2857755"/>
+                  </a:lnTo>
+                  <a:lnTo>
+                    <a:pt x="6446027" y="2854106"/>
+                  </a:lnTo>
+                  <a:lnTo>
+                    <a:pt x="6374404" y="2850435"/>
+                  </a:lnTo>
+                  <a:lnTo>
+                    <a:pt x="6302782" y="2846742"/>
+                  </a:lnTo>
+                  <a:lnTo>
+                    <a:pt x="6231159" y="2843029"/>
+                  </a:lnTo>
+                  <a:lnTo>
+                    <a:pt x="6159537" y="2839293"/>
+                  </a:lnTo>
+                  <a:lnTo>
+                    <a:pt x="6087914" y="2835536"/>
+                  </a:lnTo>
+                  <a:lnTo>
+                    <a:pt x="6016292" y="2831757"/>
+                  </a:lnTo>
+                  <a:lnTo>
+                    <a:pt x="5944669" y="2827955"/>
+                  </a:lnTo>
+                  <a:lnTo>
+                    <a:pt x="5873047" y="2824132"/>
+                  </a:lnTo>
+                  <a:lnTo>
+                    <a:pt x="5801424" y="2820286"/>
+                  </a:lnTo>
+                  <a:lnTo>
+                    <a:pt x="5729802" y="2816418"/>
+                  </a:lnTo>
+                  <a:lnTo>
+                    <a:pt x="5658179" y="2812528"/>
+                  </a:lnTo>
+                  <a:lnTo>
+                    <a:pt x="5586557" y="2808614"/>
+                  </a:lnTo>
+                  <a:lnTo>
+                    <a:pt x="5514934" y="2804678"/>
+                  </a:lnTo>
+                  <a:lnTo>
+                    <a:pt x="5443311" y="2800719"/>
+                  </a:lnTo>
+                  <a:lnTo>
+                    <a:pt x="5371689" y="2796737"/>
+                  </a:lnTo>
+                  <a:lnTo>
+                    <a:pt x="5300066" y="2792731"/>
+                  </a:lnTo>
+                  <a:lnTo>
+                    <a:pt x="5228444" y="2788703"/>
+                  </a:lnTo>
+                  <a:lnTo>
+                    <a:pt x="5156821" y="2784650"/>
+                  </a:lnTo>
+                  <a:lnTo>
+                    <a:pt x="5085199" y="2780575"/>
+                  </a:lnTo>
+                  <a:lnTo>
+                    <a:pt x="5013576" y="2776475"/>
+                  </a:lnTo>
+                  <a:lnTo>
+                    <a:pt x="4941954" y="2772351"/>
+                  </a:lnTo>
+                  <a:lnTo>
+                    <a:pt x="4870331" y="2768204"/>
+                  </a:lnTo>
+                  <a:lnTo>
+                    <a:pt x="4798709" y="2764032"/>
+                  </a:lnTo>
+                  <a:lnTo>
+                    <a:pt x="4727086" y="2759836"/>
+                  </a:lnTo>
+                  <a:lnTo>
+                    <a:pt x="4655464" y="2755616"/>
+                  </a:lnTo>
+                  <a:lnTo>
+                    <a:pt x="4583841" y="2751370"/>
+                  </a:lnTo>
+                  <a:lnTo>
+                    <a:pt x="4512219" y="2747101"/>
+                  </a:lnTo>
+                  <a:lnTo>
+                    <a:pt x="4440596" y="2742806"/>
+                  </a:lnTo>
+                  <a:lnTo>
+                    <a:pt x="4368974" y="2738486"/>
+                  </a:lnTo>
+                  <a:lnTo>
+                    <a:pt x="4297351" y="2734141"/>
+                  </a:lnTo>
+                  <a:lnTo>
+                    <a:pt x="4225729" y="2729771"/>
+                  </a:lnTo>
+                  <a:lnTo>
+                    <a:pt x="4154106" y="2725375"/>
+                  </a:lnTo>
+                  <a:lnTo>
+                    <a:pt x="4082483" y="2720953"/>
+                  </a:lnTo>
+                  <a:lnTo>
+                    <a:pt x="4010861" y="2716506"/>
+                  </a:lnTo>
+                  <a:lnTo>
+                    <a:pt x="3939238" y="2712033"/>
+                  </a:lnTo>
+                  <a:lnTo>
+                    <a:pt x="3867616" y="2707534"/>
+                  </a:lnTo>
+                  <a:lnTo>
+                    <a:pt x="3795993" y="2703008"/>
+                  </a:lnTo>
+                  <a:lnTo>
+                    <a:pt x="3724371" y="2698456"/>
+                  </a:lnTo>
+                  <a:lnTo>
+                    <a:pt x="3652748" y="2693878"/>
+                  </a:lnTo>
+                  <a:lnTo>
+                    <a:pt x="3581126" y="2689273"/>
+                  </a:lnTo>
+                  <a:lnTo>
+                    <a:pt x="3509503" y="2684641"/>
+                  </a:lnTo>
+                  <a:lnTo>
+                    <a:pt x="3437881" y="2679982"/>
+                  </a:lnTo>
+                  <a:lnTo>
+                    <a:pt x="3366258" y="2675296"/>
+                  </a:lnTo>
+                  <a:lnTo>
+                    <a:pt x="3294636" y="2670583"/>
+                  </a:lnTo>
+                  <a:lnTo>
+                    <a:pt x="3223013" y="2665842"/>
+                  </a:lnTo>
+                  <a:lnTo>
+                    <a:pt x="3151391" y="2661073"/>
+                  </a:lnTo>
+                  <a:lnTo>
+                    <a:pt x="3079768" y="2656277"/>
+                  </a:lnTo>
+                  <a:lnTo>
+                    <a:pt x="3008146" y="2669842"/>
+                  </a:lnTo>
+                  <a:lnTo>
+                    <a:pt x="2936523" y="2695724"/>
+                  </a:lnTo>
+                  <a:lnTo>
+                    <a:pt x="2864901" y="2720783"/>
+                  </a:lnTo>
+                  <a:lnTo>
+                    <a:pt x="2793278" y="2745045"/>
+                  </a:lnTo>
+                  <a:lnTo>
+                    <a:pt x="2721655" y="2768535"/>
+                  </a:lnTo>
+                  <a:lnTo>
+                    <a:pt x="2650033" y="2791279"/>
+                  </a:lnTo>
+                  <a:lnTo>
+                    <a:pt x="2578410" y="2813299"/>
+                  </a:lnTo>
+                  <a:lnTo>
+                    <a:pt x="2506788" y="2834619"/>
+                  </a:lnTo>
+                  <a:lnTo>
+                    <a:pt x="2435165" y="2855261"/>
+                  </a:lnTo>
+                  <a:lnTo>
+                    <a:pt x="2363543" y="2875247"/>
+                  </a:lnTo>
+                  <a:lnTo>
+                    <a:pt x="2291920" y="2894597"/>
+                  </a:lnTo>
+                  <a:lnTo>
+                    <a:pt x="2220298" y="2913332"/>
+                  </a:lnTo>
+                  <a:lnTo>
+                    <a:pt x="2148675" y="2931471"/>
+                  </a:lnTo>
+                  <a:lnTo>
+                    <a:pt x="2077053" y="2949033"/>
+                  </a:lnTo>
+                  <a:lnTo>
+                    <a:pt x="2005430" y="2966037"/>
+                  </a:lnTo>
+                  <a:lnTo>
+                    <a:pt x="1933808" y="2982500"/>
+                  </a:lnTo>
+                  <a:lnTo>
+                    <a:pt x="1862185" y="2998439"/>
+                  </a:lnTo>
+                  <a:lnTo>
+                    <a:pt x="1790563" y="3013872"/>
+                  </a:lnTo>
+                  <a:lnTo>
+                    <a:pt x="1718940" y="3028814"/>
+                  </a:lnTo>
+                  <a:lnTo>
+                    <a:pt x="1647318" y="3043280"/>
+                  </a:lnTo>
+                  <a:lnTo>
+                    <a:pt x="1575695" y="3057287"/>
+                  </a:lnTo>
+                  <a:lnTo>
+                    <a:pt x="1504073" y="3070848"/>
+                  </a:lnTo>
+                  <a:lnTo>
+                    <a:pt x="1432450" y="3083978"/>
+                  </a:lnTo>
+                  <a:lnTo>
+                    <a:pt x="1360827" y="3096691"/>
+                  </a:lnTo>
+                  <a:lnTo>
+                    <a:pt x="1289205" y="3108999"/>
+                  </a:lnTo>
+                  <a:lnTo>
+                    <a:pt x="1217582" y="3120916"/>
+                  </a:lnTo>
+                  <a:lnTo>
+                    <a:pt x="1145960" y="3132454"/>
+                  </a:lnTo>
+                  <a:lnTo>
+                    <a:pt x="1074337" y="3143625"/>
+                  </a:lnTo>
+                  <a:lnTo>
+                    <a:pt x="1002715" y="3154441"/>
+                  </a:lnTo>
+                  <a:lnTo>
+                    <a:pt x="931092" y="3164912"/>
+                  </a:lnTo>
+                  <a:lnTo>
+                    <a:pt x="859470" y="3175051"/>
+                  </a:lnTo>
+                  <a:lnTo>
+                    <a:pt x="787847" y="3184868"/>
+                  </a:lnTo>
+                  <a:lnTo>
+                    <a:pt x="716225" y="3194372"/>
+                  </a:lnTo>
+                  <a:lnTo>
+                    <a:pt x="644602" y="3203574"/>
+                  </a:lnTo>
+                  <a:lnTo>
+                    <a:pt x="572980" y="3212483"/>
+                  </a:lnTo>
+                  <a:lnTo>
+                    <a:pt x="501357" y="3221109"/>
+                  </a:lnTo>
+                  <a:lnTo>
+                    <a:pt x="429735" y="3229461"/>
+                  </a:lnTo>
+                  <a:lnTo>
+                    <a:pt x="358112" y="3237547"/>
+                  </a:lnTo>
+                  <a:lnTo>
+                    <a:pt x="286490" y="3245376"/>
+                  </a:lnTo>
+                  <a:lnTo>
+                    <a:pt x="214867" y="3252957"/>
+                  </a:lnTo>
+                  <a:lnTo>
+                    <a:pt x="143245" y="3260296"/>
+                  </a:lnTo>
+                  <a:lnTo>
+                    <a:pt x="71622" y="3267401"/>
+                  </a:lnTo>
+                  <a:lnTo>
+                    <a:pt x="0" y="3274281"/>
                   </a:lnTo>
                   <a:close/>
                 </a:path>
@@ -3729,273 +3729,273 @@
           </p:nvSpPr>
           <p:spPr>
             <a:xfrm>
-              <a:off x="1172049" y="1896563"/>
-              <a:ext cx="6230682" cy="2779999"/>
+              <a:off x="1172049" y="2073503"/>
+              <a:ext cx="6230682" cy="2651453"/>
             </a:xfrm>
             <a:custGeom>
               <a:avLst/>
               <a:pathLst>
-                <a:path w="6230682" h="2779999">
+                <a:path w="6230682" h="2651453">
                   <a:moveTo>
-                    <a:pt x="0" y="2538674"/>
+                    <a:pt x="0" y="2421287"/>
                   </a:moveTo>
                   <a:lnTo>
-                    <a:pt x="71622" y="2545131"/>
-                  </a:lnTo>
-                  <a:lnTo>
-                    <a:pt x="143245" y="2551551"/>
-                  </a:lnTo>
-                  <a:lnTo>
-                    <a:pt x="214867" y="2557933"/>
-                  </a:lnTo>
-                  <a:lnTo>
-                    <a:pt x="286490" y="2564278"/>
-                  </a:lnTo>
-                  <a:lnTo>
-                    <a:pt x="358112" y="2570587"/>
-                  </a:lnTo>
-                  <a:lnTo>
-                    <a:pt x="429735" y="2576859"/>
-                  </a:lnTo>
-                  <a:lnTo>
-                    <a:pt x="501357" y="2583095"/>
-                  </a:lnTo>
-                  <a:lnTo>
-                    <a:pt x="572980" y="2589294"/>
-                  </a:lnTo>
-                  <a:lnTo>
-                    <a:pt x="644602" y="2595458"/>
-                  </a:lnTo>
-                  <a:lnTo>
-                    <a:pt x="716225" y="2601585"/>
-                  </a:lnTo>
-                  <a:lnTo>
-                    <a:pt x="787847" y="2607678"/>
-                  </a:lnTo>
-                  <a:lnTo>
-                    <a:pt x="859470" y="2613735"/>
-                  </a:lnTo>
-                  <a:lnTo>
-                    <a:pt x="931092" y="2619757"/>
-                  </a:lnTo>
-                  <a:lnTo>
-                    <a:pt x="1002715" y="2625744"/>
-                  </a:lnTo>
-                  <a:lnTo>
-                    <a:pt x="1074337" y="2631696"/>
-                  </a:lnTo>
-                  <a:lnTo>
-                    <a:pt x="1145960" y="2637614"/>
-                  </a:lnTo>
-                  <a:lnTo>
-                    <a:pt x="1217582" y="2643497"/>
-                  </a:lnTo>
-                  <a:lnTo>
-                    <a:pt x="1289205" y="2649347"/>
-                  </a:lnTo>
-                  <a:lnTo>
-                    <a:pt x="1360827" y="2655162"/>
-                  </a:lnTo>
-                  <a:lnTo>
-                    <a:pt x="1432450" y="2660944"/>
-                  </a:lnTo>
-                  <a:lnTo>
-                    <a:pt x="1504073" y="2666692"/>
-                  </a:lnTo>
-                  <a:lnTo>
-                    <a:pt x="1575695" y="2672407"/>
-                  </a:lnTo>
-                  <a:lnTo>
-                    <a:pt x="1647318" y="2678089"/>
-                  </a:lnTo>
-                  <a:lnTo>
-                    <a:pt x="1718940" y="2683738"/>
-                  </a:lnTo>
-                  <a:lnTo>
-                    <a:pt x="1790563" y="2689354"/>
-                  </a:lnTo>
-                  <a:lnTo>
-                    <a:pt x="1862185" y="2694938"/>
-                  </a:lnTo>
-                  <a:lnTo>
-                    <a:pt x="1933808" y="2700489"/>
-                  </a:lnTo>
-                  <a:lnTo>
-                    <a:pt x="2005430" y="2706008"/>
-                  </a:lnTo>
-                  <a:lnTo>
-                    <a:pt x="2077053" y="2711495"/>
-                  </a:lnTo>
-                  <a:lnTo>
-                    <a:pt x="2148675" y="2716950"/>
-                  </a:lnTo>
-                  <a:lnTo>
-                    <a:pt x="2220298" y="2722374"/>
-                  </a:lnTo>
-                  <a:lnTo>
-                    <a:pt x="2291920" y="2727766"/>
-                  </a:lnTo>
-                  <a:lnTo>
-                    <a:pt x="2363543" y="2733127"/>
-                  </a:lnTo>
-                  <a:lnTo>
-                    <a:pt x="2435165" y="2738457"/>
-                  </a:lnTo>
-                  <a:lnTo>
-                    <a:pt x="2506788" y="2743756"/>
-                  </a:lnTo>
-                  <a:lnTo>
-                    <a:pt x="2578410" y="2749024"/>
-                  </a:lnTo>
-                  <a:lnTo>
-                    <a:pt x="2650033" y="2754262"/>
-                  </a:lnTo>
-                  <a:lnTo>
-                    <a:pt x="2721655" y="2759469"/>
-                  </a:lnTo>
-                  <a:lnTo>
-                    <a:pt x="2793278" y="2764647"/>
-                  </a:lnTo>
-                  <a:lnTo>
-                    <a:pt x="2864901" y="2769794"/>
-                  </a:lnTo>
-                  <a:lnTo>
-                    <a:pt x="2936523" y="2774911"/>
-                  </a:lnTo>
-                  <a:lnTo>
-                    <a:pt x="3008146" y="2779999"/>
-                  </a:lnTo>
-                  <a:lnTo>
-                    <a:pt x="3079768" y="2771252"/>
-                  </a:lnTo>
-                  <a:lnTo>
-                    <a:pt x="3151391" y="2742303"/>
-                  </a:lnTo>
-                  <a:lnTo>
-                    <a:pt x="3223013" y="2712404"/>
-                  </a:lnTo>
-                  <a:lnTo>
-                    <a:pt x="3294636" y="2681522"/>
-                  </a:lnTo>
-                  <a:lnTo>
-                    <a:pt x="3366258" y="2649627"/>
-                  </a:lnTo>
-                  <a:lnTo>
-                    <a:pt x="3437881" y="2616684"/>
-                  </a:lnTo>
-                  <a:lnTo>
-                    <a:pt x="3509503" y="2582658"/>
-                  </a:lnTo>
-                  <a:lnTo>
-                    <a:pt x="3581126" y="2547516"/>
-                  </a:lnTo>
-                  <a:lnTo>
-                    <a:pt x="3652748" y="2511219"/>
-                  </a:lnTo>
-                  <a:lnTo>
-                    <a:pt x="3724371" y="2473730"/>
-                  </a:lnTo>
-                  <a:lnTo>
-                    <a:pt x="3795993" y="2435009"/>
-                  </a:lnTo>
-                  <a:lnTo>
-                    <a:pt x="3867616" y="2395017"/>
-                  </a:lnTo>
-                  <a:lnTo>
-                    <a:pt x="3939238" y="2353712"/>
-                  </a:lnTo>
-                  <a:lnTo>
-                    <a:pt x="4010861" y="2311049"/>
-                  </a:lnTo>
-                  <a:lnTo>
-                    <a:pt x="4082483" y="2266986"/>
-                  </a:lnTo>
-                  <a:lnTo>
-                    <a:pt x="4154106" y="2221475"/>
-                  </a:lnTo>
-                  <a:lnTo>
-                    <a:pt x="4225729" y="2174470"/>
-                  </a:lnTo>
-                  <a:lnTo>
-                    <a:pt x="4297351" y="2125920"/>
-                  </a:lnTo>
-                  <a:lnTo>
-                    <a:pt x="4368974" y="2075776"/>
-                  </a:lnTo>
-                  <a:lnTo>
-                    <a:pt x="4440596" y="2023986"/>
-                  </a:lnTo>
-                  <a:lnTo>
-                    <a:pt x="4512219" y="1970494"/>
-                  </a:lnTo>
-                  <a:lnTo>
-                    <a:pt x="4583841" y="1915245"/>
-                  </a:lnTo>
-                  <a:lnTo>
-                    <a:pt x="4655464" y="1858182"/>
-                  </a:lnTo>
-                  <a:lnTo>
-                    <a:pt x="4727086" y="1799244"/>
-                  </a:lnTo>
-                  <a:lnTo>
-                    <a:pt x="4798709" y="1738371"/>
-                  </a:lnTo>
-                  <a:lnTo>
-                    <a:pt x="4870331" y="1675498"/>
-                  </a:lnTo>
-                  <a:lnTo>
-                    <a:pt x="4941954" y="1610561"/>
-                  </a:lnTo>
-                  <a:lnTo>
-                    <a:pt x="5013576" y="1543490"/>
-                  </a:lnTo>
-                  <a:lnTo>
-                    <a:pt x="5085199" y="1474217"/>
-                  </a:lnTo>
-                  <a:lnTo>
-                    <a:pt x="5156821" y="1402668"/>
-                  </a:lnTo>
-                  <a:lnTo>
-                    <a:pt x="5228444" y="1328770"/>
-                  </a:lnTo>
-                  <a:lnTo>
-                    <a:pt x="5300066" y="1252444"/>
-                  </a:lnTo>
-                  <a:lnTo>
-                    <a:pt x="5371689" y="1173612"/>
-                  </a:lnTo>
-                  <a:lnTo>
-                    <a:pt x="5443311" y="1092190"/>
-                  </a:lnTo>
-                  <a:lnTo>
-                    <a:pt x="5514934" y="1008094"/>
-                  </a:lnTo>
-                  <a:lnTo>
-                    <a:pt x="5586557" y="921237"/>
-                  </a:lnTo>
-                  <a:lnTo>
-                    <a:pt x="5658179" y="831526"/>
-                  </a:lnTo>
-                  <a:lnTo>
-                    <a:pt x="5729802" y="738869"/>
-                  </a:lnTo>
-                  <a:lnTo>
-                    <a:pt x="5801424" y="643168"/>
-                  </a:lnTo>
-                  <a:lnTo>
-                    <a:pt x="5873047" y="544325"/>
-                  </a:lnTo>
-                  <a:lnTo>
-                    <a:pt x="5944669" y="442235"/>
-                  </a:lnTo>
-                  <a:lnTo>
-                    <a:pt x="6016292" y="336792"/>
-                  </a:lnTo>
-                  <a:lnTo>
-                    <a:pt x="6087914" y="227885"/>
-                  </a:lnTo>
-                  <a:lnTo>
-                    <a:pt x="6159537" y="115402"/>
+                    <a:pt x="71622" y="2427445"/>
+                  </a:lnTo>
+                  <a:lnTo>
+                    <a:pt x="143245" y="2433568"/>
+                  </a:lnTo>
+                  <a:lnTo>
+                    <a:pt x="214867" y="2439655"/>
+                  </a:lnTo>
+                  <a:lnTo>
+                    <a:pt x="286490" y="2445707"/>
+                  </a:lnTo>
+                  <a:lnTo>
+                    <a:pt x="358112" y="2451724"/>
+                  </a:lnTo>
+                  <a:lnTo>
+                    <a:pt x="429735" y="2457706"/>
+                  </a:lnTo>
+                  <a:lnTo>
+                    <a:pt x="501357" y="2463653"/>
+                  </a:lnTo>
+                  <a:lnTo>
+                    <a:pt x="572980" y="2469566"/>
+                  </a:lnTo>
+                  <a:lnTo>
+                    <a:pt x="644602" y="2475445"/>
+                  </a:lnTo>
+                  <a:lnTo>
+                    <a:pt x="716225" y="2481289"/>
+                  </a:lnTo>
+                  <a:lnTo>
+                    <a:pt x="787847" y="2487100"/>
+                  </a:lnTo>
+                  <a:lnTo>
+                    <a:pt x="859470" y="2492877"/>
+                  </a:lnTo>
+                  <a:lnTo>
+                    <a:pt x="931092" y="2498620"/>
+                  </a:lnTo>
+                  <a:lnTo>
+                    <a:pt x="1002715" y="2504330"/>
+                  </a:lnTo>
+                  <a:lnTo>
+                    <a:pt x="1074337" y="2510007"/>
+                  </a:lnTo>
+                  <a:lnTo>
+                    <a:pt x="1145960" y="2515652"/>
+                  </a:lnTo>
+                  <a:lnTo>
+                    <a:pt x="1217582" y="2521263"/>
+                  </a:lnTo>
+                  <a:lnTo>
+                    <a:pt x="1289205" y="2526842"/>
+                  </a:lnTo>
+                  <a:lnTo>
+                    <a:pt x="1360827" y="2532389"/>
+                  </a:lnTo>
+                  <a:lnTo>
+                    <a:pt x="1432450" y="2537903"/>
+                  </a:lnTo>
+                  <a:lnTo>
+                    <a:pt x="1504073" y="2543385"/>
+                  </a:lnTo>
+                  <a:lnTo>
+                    <a:pt x="1575695" y="2548836"/>
+                  </a:lnTo>
+                  <a:lnTo>
+                    <a:pt x="1647318" y="2554255"/>
+                  </a:lnTo>
+                  <a:lnTo>
+                    <a:pt x="1718940" y="2559643"/>
+                  </a:lnTo>
+                  <a:lnTo>
+                    <a:pt x="1790563" y="2564999"/>
+                  </a:lnTo>
+                  <a:lnTo>
+                    <a:pt x="1862185" y="2570325"/>
+                  </a:lnTo>
+                  <a:lnTo>
+                    <a:pt x="1933808" y="2575619"/>
+                  </a:lnTo>
+                  <a:lnTo>
+                    <a:pt x="2005430" y="2580883"/>
+                  </a:lnTo>
+                  <a:lnTo>
+                    <a:pt x="2077053" y="2586117"/>
+                  </a:lnTo>
+                  <a:lnTo>
+                    <a:pt x="2148675" y="2591320"/>
+                  </a:lnTo>
+                  <a:lnTo>
+                    <a:pt x="2220298" y="2596492"/>
+                  </a:lnTo>
+                  <a:lnTo>
+                    <a:pt x="2291920" y="2601635"/>
+                  </a:lnTo>
+                  <a:lnTo>
+                    <a:pt x="2363543" y="2606748"/>
+                  </a:lnTo>
+                  <a:lnTo>
+                    <a:pt x="2435165" y="2611832"/>
+                  </a:lnTo>
+                  <a:lnTo>
+                    <a:pt x="2506788" y="2616886"/>
+                  </a:lnTo>
+                  <a:lnTo>
+                    <a:pt x="2578410" y="2621910"/>
+                  </a:lnTo>
+                  <a:lnTo>
+                    <a:pt x="2650033" y="2626906"/>
+                  </a:lnTo>
+                  <a:lnTo>
+                    <a:pt x="2721655" y="2631872"/>
+                  </a:lnTo>
+                  <a:lnTo>
+                    <a:pt x="2793278" y="2636810"/>
+                  </a:lnTo>
+                  <a:lnTo>
+                    <a:pt x="2864901" y="2641719"/>
+                  </a:lnTo>
+                  <a:lnTo>
+                    <a:pt x="2936523" y="2646600"/>
+                  </a:lnTo>
+                  <a:lnTo>
+                    <a:pt x="3008146" y="2651453"/>
+                  </a:lnTo>
+                  <a:lnTo>
+                    <a:pt x="3079768" y="2643110"/>
+                  </a:lnTo>
+                  <a:lnTo>
+                    <a:pt x="3151391" y="2615500"/>
+                  </a:lnTo>
+                  <a:lnTo>
+                    <a:pt x="3223013" y="2586983"/>
+                  </a:lnTo>
+                  <a:lnTo>
+                    <a:pt x="3294636" y="2557530"/>
+                  </a:lnTo>
+                  <a:lnTo>
+                    <a:pt x="3366258" y="2527109"/>
+                  </a:lnTo>
+                  <a:lnTo>
+                    <a:pt x="3437881" y="2495689"/>
+                  </a:lnTo>
+                  <a:lnTo>
+                    <a:pt x="3509503" y="2463237"/>
+                  </a:lnTo>
+                  <a:lnTo>
+                    <a:pt x="3581126" y="2429720"/>
+                  </a:lnTo>
+                  <a:lnTo>
+                    <a:pt x="3652748" y="2395101"/>
+                  </a:lnTo>
+                  <a:lnTo>
+                    <a:pt x="3724371" y="2359345"/>
+                  </a:lnTo>
+                  <a:lnTo>
+                    <a:pt x="3795993" y="2322415"/>
+                  </a:lnTo>
+                  <a:lnTo>
+                    <a:pt x="3867616" y="2284272"/>
+                  </a:lnTo>
+                  <a:lnTo>
+                    <a:pt x="3939238" y="2244877"/>
+                  </a:lnTo>
+                  <a:lnTo>
+                    <a:pt x="4010861" y="2204187"/>
+                  </a:lnTo>
+                  <a:lnTo>
+                    <a:pt x="4082483" y="2162161"/>
+                  </a:lnTo>
+                  <a:lnTo>
+                    <a:pt x="4154106" y="2118755"/>
+                  </a:lnTo>
+                  <a:lnTo>
+                    <a:pt x="4225729" y="2073923"/>
+                  </a:lnTo>
+                  <a:lnTo>
+                    <a:pt x="4297351" y="2027618"/>
+                  </a:lnTo>
+                  <a:lnTo>
+                    <a:pt x="4368974" y="1979793"/>
+                  </a:lnTo>
+                  <a:lnTo>
+                    <a:pt x="4440596" y="1930397"/>
+                  </a:lnTo>
+                  <a:lnTo>
+                    <a:pt x="4512219" y="1879379"/>
+                  </a:lnTo>
+                  <a:lnTo>
+                    <a:pt x="4583841" y="1826685"/>
+                  </a:lnTo>
+                  <a:lnTo>
+                    <a:pt x="4655464" y="1772260"/>
+                  </a:lnTo>
+                  <a:lnTo>
+                    <a:pt x="4727086" y="1716048"/>
+                  </a:lnTo>
+                  <a:lnTo>
+                    <a:pt x="4798709" y="1657989"/>
+                  </a:lnTo>
+                  <a:lnTo>
+                    <a:pt x="4870331" y="1598024"/>
+                  </a:lnTo>
+                  <a:lnTo>
+                    <a:pt x="4941954" y="1536089"/>
+                  </a:lnTo>
+                  <a:lnTo>
+                    <a:pt x="5013576" y="1472120"/>
+                  </a:lnTo>
+                  <a:lnTo>
+                    <a:pt x="5085199" y="1406050"/>
+                  </a:lnTo>
+                  <a:lnTo>
+                    <a:pt x="5156821" y="1337810"/>
+                  </a:lnTo>
+                  <a:lnTo>
+                    <a:pt x="5228444" y="1267328"/>
+                  </a:lnTo>
+                  <a:lnTo>
+                    <a:pt x="5300066" y="1194532"/>
+                  </a:lnTo>
+                  <a:lnTo>
+                    <a:pt x="5371689" y="1119344"/>
+                  </a:lnTo>
+                  <a:lnTo>
+                    <a:pt x="5443311" y="1041688"/>
+                  </a:lnTo>
+                  <a:lnTo>
+                    <a:pt x="5514934" y="961480"/>
+                  </a:lnTo>
+                  <a:lnTo>
+                    <a:pt x="5586557" y="878639"/>
+                  </a:lnTo>
+                  <a:lnTo>
+                    <a:pt x="5658179" y="793076"/>
+                  </a:lnTo>
+                  <a:lnTo>
+                    <a:pt x="5729802" y="704704"/>
+                  </a:lnTo>
+                  <a:lnTo>
+                    <a:pt x="5801424" y="613428"/>
+                  </a:lnTo>
+                  <a:lnTo>
+                    <a:pt x="5873047" y="519155"/>
+                  </a:lnTo>
+                  <a:lnTo>
+                    <a:pt x="5944669" y="421786"/>
+                  </a:lnTo>
+                  <a:lnTo>
+                    <a:pt x="6016292" y="321219"/>
+                  </a:lnTo>
+                  <a:lnTo>
+                    <a:pt x="6087914" y="217348"/>
+                  </a:lnTo>
+                  <a:lnTo>
+                    <a:pt x="6159537" y="110066"/>
                   </a:lnTo>
                   <a:lnTo>
                     <a:pt x="6230682" y="0"/>
@@ -4018,312 +4018,312 @@
           </p:nvSpPr>
           <p:spPr>
             <a:xfrm>
-              <a:off x="1172049" y="4681620"/>
-              <a:ext cx="7090630" cy="647965"/>
+              <a:off x="1172049" y="4729780"/>
+              <a:ext cx="7090630" cy="618004"/>
             </a:xfrm>
             <a:custGeom>
               <a:avLst/>
               <a:pathLst>
-                <a:path w="7090630" h="647965">
+                <a:path w="7090630" h="618004">
                   <a:moveTo>
-                    <a:pt x="7090630" y="241071"/>
+                    <a:pt x="7090630" y="229924"/>
                   </a:moveTo>
                   <a:lnTo>
-                    <a:pt x="7019007" y="237418"/>
-                  </a:lnTo>
-                  <a:lnTo>
-                    <a:pt x="6947385" y="233744"/>
-                  </a:lnTo>
-                  <a:lnTo>
-                    <a:pt x="6875762" y="230049"/>
-                  </a:lnTo>
-                  <a:lnTo>
-                    <a:pt x="6804139" y="226332"/>
-                  </a:lnTo>
-                  <a:lnTo>
-                    <a:pt x="6732517" y="222593"/>
-                  </a:lnTo>
-                  <a:lnTo>
-                    <a:pt x="6660894" y="218833"/>
-                  </a:lnTo>
-                  <a:lnTo>
-                    <a:pt x="6589272" y="215050"/>
-                  </a:lnTo>
-                  <a:lnTo>
-                    <a:pt x="6517649" y="211246"/>
-                  </a:lnTo>
-                  <a:lnTo>
-                    <a:pt x="6446027" y="207419"/>
-                  </a:lnTo>
-                  <a:lnTo>
-                    <a:pt x="6374404" y="203570"/>
-                  </a:lnTo>
-                  <a:lnTo>
-                    <a:pt x="6302782" y="199699"/>
-                  </a:lnTo>
-                  <a:lnTo>
-                    <a:pt x="6231159" y="195805"/>
-                  </a:lnTo>
-                  <a:lnTo>
-                    <a:pt x="6159537" y="191889"/>
-                  </a:lnTo>
-                  <a:lnTo>
-                    <a:pt x="6087914" y="187949"/>
-                  </a:lnTo>
-                  <a:lnTo>
-                    <a:pt x="6016292" y="183987"/>
-                  </a:lnTo>
-                  <a:lnTo>
-                    <a:pt x="5944669" y="180001"/>
-                  </a:lnTo>
-                  <a:lnTo>
-                    <a:pt x="5873047" y="175992"/>
-                  </a:lnTo>
-                  <a:lnTo>
-                    <a:pt x="5801424" y="171960"/>
-                  </a:lnTo>
-                  <a:lnTo>
-                    <a:pt x="5729802" y="167905"/>
-                  </a:lnTo>
-                  <a:lnTo>
-                    <a:pt x="5658179" y="163825"/>
-                  </a:lnTo>
-                  <a:lnTo>
-                    <a:pt x="5586557" y="159722"/>
-                  </a:lnTo>
-                  <a:lnTo>
-                    <a:pt x="5514934" y="155595"/>
-                  </a:lnTo>
-                  <a:lnTo>
-                    <a:pt x="5443311" y="151444"/>
-                  </a:lnTo>
-                  <a:lnTo>
-                    <a:pt x="5371689" y="147269"/>
-                  </a:lnTo>
-                  <a:lnTo>
-                    <a:pt x="5300066" y="143070"/>
-                  </a:lnTo>
-                  <a:lnTo>
-                    <a:pt x="5228444" y="138845"/>
-                  </a:lnTo>
-                  <a:lnTo>
-                    <a:pt x="5156821" y="134597"/>
-                  </a:lnTo>
-                  <a:lnTo>
-                    <a:pt x="5085199" y="130323"/>
-                  </a:lnTo>
-                  <a:lnTo>
-                    <a:pt x="5013576" y="126025"/>
-                  </a:lnTo>
-                  <a:lnTo>
-                    <a:pt x="4941954" y="121702"/>
-                  </a:lnTo>
-                  <a:lnTo>
-                    <a:pt x="4870331" y="117353"/>
-                  </a:lnTo>
-                  <a:lnTo>
-                    <a:pt x="4798709" y="112979"/>
-                  </a:lnTo>
-                  <a:lnTo>
-                    <a:pt x="4727086" y="108579"/>
-                  </a:lnTo>
-                  <a:lnTo>
-                    <a:pt x="4655464" y="104154"/>
-                  </a:lnTo>
-                  <a:lnTo>
-                    <a:pt x="4583841" y="99703"/>
-                  </a:lnTo>
-                  <a:lnTo>
-                    <a:pt x="4512219" y="95226"/>
-                  </a:lnTo>
-                  <a:lnTo>
-                    <a:pt x="4440596" y="90723"/>
-                  </a:lnTo>
-                  <a:lnTo>
-                    <a:pt x="4368974" y="86194"/>
-                  </a:lnTo>
-                  <a:lnTo>
-                    <a:pt x="4297351" y="81639"/>
-                  </a:lnTo>
-                  <a:lnTo>
-                    <a:pt x="4225729" y="77056"/>
-                  </a:lnTo>
-                  <a:lnTo>
-                    <a:pt x="4154106" y="72447"/>
-                  </a:lnTo>
-                  <a:lnTo>
-                    <a:pt x="4082483" y="67812"/>
-                  </a:lnTo>
-                  <a:lnTo>
-                    <a:pt x="4010861" y="63149"/>
-                  </a:lnTo>
-                  <a:lnTo>
-                    <a:pt x="3939238" y="58459"/>
-                  </a:lnTo>
-                  <a:lnTo>
-                    <a:pt x="3867616" y="53741"/>
-                  </a:lnTo>
-                  <a:lnTo>
-                    <a:pt x="3795993" y="48997"/>
-                  </a:lnTo>
-                  <a:lnTo>
-                    <a:pt x="3724371" y="44224"/>
-                  </a:lnTo>
-                  <a:lnTo>
-                    <a:pt x="3652748" y="39424"/>
-                  </a:lnTo>
-                  <a:lnTo>
-                    <a:pt x="3581126" y="34595"/>
-                  </a:lnTo>
-                  <a:lnTo>
-                    <a:pt x="3509503" y="29739"/>
-                  </a:lnTo>
-                  <a:lnTo>
-                    <a:pt x="3437881" y="24854"/>
-                  </a:lnTo>
-                  <a:lnTo>
-                    <a:pt x="3366258" y="19941"/>
-                  </a:lnTo>
-                  <a:lnTo>
-                    <a:pt x="3294636" y="14999"/>
-                  </a:lnTo>
-                  <a:lnTo>
-                    <a:pt x="3223013" y="10028"/>
-                  </a:lnTo>
-                  <a:lnTo>
-                    <a:pt x="3151391" y="5028"/>
+                    <a:pt x="7019007" y="226440"/>
+                  </a:lnTo>
+                  <a:lnTo>
+                    <a:pt x="6947385" y="222936"/>
+                  </a:lnTo>
+                  <a:lnTo>
+                    <a:pt x="6875762" y="219411"/>
+                  </a:lnTo>
+                  <a:lnTo>
+                    <a:pt x="6804139" y="215866"/>
+                  </a:lnTo>
+                  <a:lnTo>
+                    <a:pt x="6732517" y="212300"/>
+                  </a:lnTo>
+                  <a:lnTo>
+                    <a:pt x="6660894" y="208714"/>
+                  </a:lnTo>
+                  <a:lnTo>
+                    <a:pt x="6589272" y="205106"/>
+                  </a:lnTo>
+                  <a:lnTo>
+                    <a:pt x="6517649" y="201478"/>
+                  </a:lnTo>
+                  <a:lnTo>
+                    <a:pt x="6446027" y="197828"/>
+                  </a:lnTo>
+                  <a:lnTo>
+                    <a:pt x="6374404" y="194157"/>
+                  </a:lnTo>
+                  <a:lnTo>
+                    <a:pt x="6302782" y="190465"/>
+                  </a:lnTo>
+                  <a:lnTo>
+                    <a:pt x="6231159" y="186751"/>
+                  </a:lnTo>
+                  <a:lnTo>
+                    <a:pt x="6159537" y="183016"/>
+                  </a:lnTo>
+                  <a:lnTo>
+                    <a:pt x="6087914" y="179258"/>
+                  </a:lnTo>
+                  <a:lnTo>
+                    <a:pt x="6016292" y="175479"/>
+                  </a:lnTo>
+                  <a:lnTo>
+                    <a:pt x="5944669" y="171678"/>
+                  </a:lnTo>
+                  <a:lnTo>
+                    <a:pt x="5873047" y="167855"/>
+                  </a:lnTo>
+                  <a:lnTo>
+                    <a:pt x="5801424" y="164009"/>
+                  </a:lnTo>
+                  <a:lnTo>
+                    <a:pt x="5729802" y="160141"/>
+                  </a:lnTo>
+                  <a:lnTo>
+                    <a:pt x="5658179" y="156250"/>
+                  </a:lnTo>
+                  <a:lnTo>
+                    <a:pt x="5586557" y="152337"/>
+                  </a:lnTo>
+                  <a:lnTo>
+                    <a:pt x="5514934" y="148401"/>
+                  </a:lnTo>
+                  <a:lnTo>
+                    <a:pt x="5443311" y="144442"/>
+                  </a:lnTo>
+                  <a:lnTo>
+                    <a:pt x="5371689" y="140459"/>
+                  </a:lnTo>
+                  <a:lnTo>
+                    <a:pt x="5300066" y="136454"/>
+                  </a:lnTo>
+                  <a:lnTo>
+                    <a:pt x="5228444" y="132425"/>
+                  </a:lnTo>
+                  <a:lnTo>
+                    <a:pt x="5156821" y="128373"/>
+                  </a:lnTo>
+                  <a:lnTo>
+                    <a:pt x="5085199" y="124297"/>
+                  </a:lnTo>
+                  <a:lnTo>
+                    <a:pt x="5013576" y="120198"/>
+                  </a:lnTo>
+                  <a:lnTo>
+                    <a:pt x="4941954" y="116074"/>
+                  </a:lnTo>
+                  <a:lnTo>
+                    <a:pt x="4870331" y="111927"/>
+                  </a:lnTo>
+                  <a:lnTo>
+                    <a:pt x="4798709" y="107755"/>
+                  </a:lnTo>
+                  <a:lnTo>
+                    <a:pt x="4727086" y="103559"/>
+                  </a:lnTo>
+                  <a:lnTo>
+                    <a:pt x="4655464" y="99338"/>
+                  </a:lnTo>
+                  <a:lnTo>
+                    <a:pt x="4583841" y="95093"/>
+                  </a:lnTo>
+                  <a:lnTo>
+                    <a:pt x="4512219" y="90823"/>
+                  </a:lnTo>
+                  <a:lnTo>
+                    <a:pt x="4440596" y="86528"/>
+                  </a:lnTo>
+                  <a:lnTo>
+                    <a:pt x="4368974" y="82209"/>
+                  </a:lnTo>
+                  <a:lnTo>
+                    <a:pt x="4297351" y="77864"/>
+                  </a:lnTo>
+                  <a:lnTo>
+                    <a:pt x="4225729" y="73493"/>
+                  </a:lnTo>
+                  <a:lnTo>
+                    <a:pt x="4154106" y="69097"/>
+                  </a:lnTo>
+                  <a:lnTo>
+                    <a:pt x="4082483" y="64676"/>
+                  </a:lnTo>
+                  <a:lnTo>
+                    <a:pt x="4010861" y="60229"/>
+                  </a:lnTo>
+                  <a:lnTo>
+                    <a:pt x="3939238" y="55756"/>
+                  </a:lnTo>
+                  <a:lnTo>
+                    <a:pt x="3867616" y="51256"/>
+                  </a:lnTo>
+                  <a:lnTo>
+                    <a:pt x="3795993" y="46731"/>
+                  </a:lnTo>
+                  <a:lnTo>
+                    <a:pt x="3724371" y="42179"/>
+                  </a:lnTo>
+                  <a:lnTo>
+                    <a:pt x="3652748" y="37601"/>
+                  </a:lnTo>
+                  <a:lnTo>
+                    <a:pt x="3581126" y="32996"/>
+                  </a:lnTo>
+                  <a:lnTo>
+                    <a:pt x="3509503" y="28364"/>
+                  </a:lnTo>
+                  <a:lnTo>
+                    <a:pt x="3437881" y="23705"/>
+                  </a:lnTo>
+                  <a:lnTo>
+                    <a:pt x="3366258" y="19019"/>
+                  </a:lnTo>
+                  <a:lnTo>
+                    <a:pt x="3294636" y="14305"/>
+                  </a:lnTo>
+                  <a:lnTo>
+                    <a:pt x="3223013" y="9564"/>
+                  </a:lnTo>
+                  <a:lnTo>
+                    <a:pt x="3151391" y="4796"/>
                   </a:lnTo>
                   <a:lnTo>
                     <a:pt x="3079768" y="0"/>
                   </a:lnTo>
                   <a:lnTo>
-                    <a:pt x="3008146" y="14222"/>
-                  </a:lnTo>
-                  <a:lnTo>
-                    <a:pt x="2936523" y="41359"/>
-                  </a:lnTo>
-                  <a:lnTo>
-                    <a:pt x="2864901" y="67633"/>
-                  </a:lnTo>
-                  <a:lnTo>
-                    <a:pt x="2793278" y="93071"/>
-                  </a:lnTo>
-                  <a:lnTo>
-                    <a:pt x="2721655" y="117700"/>
-                  </a:lnTo>
-                  <a:lnTo>
-                    <a:pt x="2650033" y="141546"/>
-                  </a:lnTo>
-                  <a:lnTo>
-                    <a:pt x="2578410" y="164634"/>
-                  </a:lnTo>
-                  <a:lnTo>
-                    <a:pt x="2506788" y="186988"/>
-                  </a:lnTo>
-                  <a:lnTo>
-                    <a:pt x="2435165" y="208631"/>
-                  </a:lnTo>
-                  <a:lnTo>
-                    <a:pt x="2363543" y="229585"/>
-                  </a:lnTo>
-                  <a:lnTo>
-                    <a:pt x="2291920" y="249874"/>
-                  </a:lnTo>
-                  <a:lnTo>
-                    <a:pt x="2220298" y="269517"/>
-                  </a:lnTo>
-                  <a:lnTo>
-                    <a:pt x="2148675" y="288535"/>
-                  </a:lnTo>
-                  <a:lnTo>
-                    <a:pt x="2077053" y="306949"/>
-                  </a:lnTo>
-                  <a:lnTo>
-                    <a:pt x="2005430" y="324777"/>
-                  </a:lnTo>
-                  <a:lnTo>
-                    <a:pt x="1933808" y="342038"/>
-                  </a:lnTo>
-                  <a:lnTo>
-                    <a:pt x="1862185" y="358750"/>
-                  </a:lnTo>
-                  <a:lnTo>
-                    <a:pt x="1790563" y="374931"/>
-                  </a:lnTo>
-                  <a:lnTo>
-                    <a:pt x="1718940" y="390597"/>
-                  </a:lnTo>
-                  <a:lnTo>
-                    <a:pt x="1647318" y="405765"/>
-                  </a:lnTo>
-                  <a:lnTo>
-                    <a:pt x="1575695" y="420451"/>
-                  </a:lnTo>
-                  <a:lnTo>
-                    <a:pt x="1504073" y="434670"/>
-                  </a:lnTo>
-                  <a:lnTo>
-                    <a:pt x="1432450" y="448436"/>
-                  </a:lnTo>
-                  <a:lnTo>
-                    <a:pt x="1360827" y="461765"/>
-                  </a:lnTo>
-                  <a:lnTo>
-                    <a:pt x="1289205" y="474670"/>
-                  </a:lnTo>
-                  <a:lnTo>
-                    <a:pt x="1217582" y="487165"/>
-                  </a:lnTo>
-                  <a:lnTo>
-                    <a:pt x="1145960" y="499262"/>
-                  </a:lnTo>
-                  <a:lnTo>
-                    <a:pt x="1074337" y="510975"/>
-                  </a:lnTo>
-                  <a:lnTo>
-                    <a:pt x="1002715" y="522315"/>
-                  </a:lnTo>
-                  <a:lnTo>
-                    <a:pt x="931092" y="533294"/>
-                  </a:lnTo>
-                  <a:lnTo>
-                    <a:pt x="859470" y="543925"/>
-                  </a:lnTo>
-                  <a:lnTo>
-                    <a:pt x="787847" y="554217"/>
-                  </a:lnTo>
-                  <a:lnTo>
-                    <a:pt x="716225" y="564182"/>
-                  </a:lnTo>
-                  <a:lnTo>
-                    <a:pt x="644602" y="573830"/>
-                  </a:lnTo>
-                  <a:lnTo>
-                    <a:pt x="572980" y="583172"/>
-                  </a:lnTo>
-                  <a:lnTo>
-                    <a:pt x="501357" y="592216"/>
-                  </a:lnTo>
-                  <a:lnTo>
-                    <a:pt x="429735" y="600973"/>
-                  </a:lnTo>
-                  <a:lnTo>
-                    <a:pt x="358112" y="609451"/>
-                  </a:lnTo>
-                  <a:lnTo>
-                    <a:pt x="286490" y="617659"/>
-                  </a:lnTo>
-                  <a:lnTo>
-                    <a:pt x="214867" y="625607"/>
-                  </a:lnTo>
-                  <a:lnTo>
-                    <a:pt x="143245" y="633302"/>
-                  </a:lnTo>
-                  <a:lnTo>
-                    <a:pt x="71622" y="640752"/>
-                  </a:lnTo>
-                  <a:lnTo>
-                    <a:pt x="0" y="647965"/>
+                    <a:pt x="3008146" y="13565"/>
+                  </a:lnTo>
+                  <a:lnTo>
+                    <a:pt x="2936523" y="39447"/>
+                  </a:lnTo>
+                  <a:lnTo>
+                    <a:pt x="2864901" y="64505"/>
+                  </a:lnTo>
+                  <a:lnTo>
+                    <a:pt x="2793278" y="88767"/>
+                  </a:lnTo>
+                  <a:lnTo>
+                    <a:pt x="2721655" y="112258"/>
+                  </a:lnTo>
+                  <a:lnTo>
+                    <a:pt x="2650033" y="135001"/>
+                  </a:lnTo>
+                  <a:lnTo>
+                    <a:pt x="2578410" y="157022"/>
+                  </a:lnTo>
+                  <a:lnTo>
+                    <a:pt x="2506788" y="178342"/>
+                  </a:lnTo>
+                  <a:lnTo>
+                    <a:pt x="2435165" y="198984"/>
+                  </a:lnTo>
+                  <a:lnTo>
+                    <a:pt x="2363543" y="218969"/>
+                  </a:lnTo>
+                  <a:lnTo>
+                    <a:pt x="2291920" y="238319"/>
+                  </a:lnTo>
+                  <a:lnTo>
+                    <a:pt x="2220298" y="257054"/>
+                  </a:lnTo>
+                  <a:lnTo>
+                    <a:pt x="2148675" y="275193"/>
+                  </a:lnTo>
+                  <a:lnTo>
+                    <a:pt x="2077053" y="292755"/>
+                  </a:lnTo>
+                  <a:lnTo>
+                    <a:pt x="2005430" y="309759"/>
+                  </a:lnTo>
+                  <a:lnTo>
+                    <a:pt x="1933808" y="326222"/>
+                  </a:lnTo>
+                  <a:lnTo>
+                    <a:pt x="1862185" y="342162"/>
+                  </a:lnTo>
+                  <a:lnTo>
+                    <a:pt x="1790563" y="357594"/>
+                  </a:lnTo>
+                  <a:lnTo>
+                    <a:pt x="1718940" y="372536"/>
+                  </a:lnTo>
+                  <a:lnTo>
+                    <a:pt x="1647318" y="387003"/>
+                  </a:lnTo>
+                  <a:lnTo>
+                    <a:pt x="1575695" y="401010"/>
+                  </a:lnTo>
+                  <a:lnTo>
+                    <a:pt x="1504073" y="414571"/>
+                  </a:lnTo>
+                  <a:lnTo>
+                    <a:pt x="1432450" y="427701"/>
+                  </a:lnTo>
+                  <a:lnTo>
+                    <a:pt x="1360827" y="440413"/>
+                  </a:lnTo>
+                  <a:lnTo>
+                    <a:pt x="1289205" y="452722"/>
+                  </a:lnTo>
+                  <a:lnTo>
+                    <a:pt x="1217582" y="464639"/>
+                  </a:lnTo>
+                  <a:lnTo>
+                    <a:pt x="1145960" y="476176"/>
+                  </a:lnTo>
+                  <a:lnTo>
+                    <a:pt x="1074337" y="487347"/>
+                  </a:lnTo>
+                  <a:lnTo>
+                    <a:pt x="1002715" y="498163"/>
+                  </a:lnTo>
+                  <a:lnTo>
+                    <a:pt x="931092" y="508635"/>
+                  </a:lnTo>
+                  <a:lnTo>
+                    <a:pt x="859470" y="518774"/>
+                  </a:lnTo>
+                  <a:lnTo>
+                    <a:pt x="787847" y="528590"/>
+                  </a:lnTo>
+                  <a:lnTo>
+                    <a:pt x="716225" y="538094"/>
+                  </a:lnTo>
+                  <a:lnTo>
+                    <a:pt x="644602" y="547297"/>
+                  </a:lnTo>
+                  <a:lnTo>
+                    <a:pt x="572980" y="556206"/>
+                  </a:lnTo>
+                  <a:lnTo>
+                    <a:pt x="501357" y="564832"/>
+                  </a:lnTo>
+                  <a:lnTo>
+                    <a:pt x="429735" y="573184"/>
+                  </a:lnTo>
+                  <a:lnTo>
+                    <a:pt x="358112" y="581270"/>
+                  </a:lnTo>
+                  <a:lnTo>
+                    <a:pt x="286490" y="589099"/>
+                  </a:lnTo>
+                  <a:lnTo>
+                    <a:pt x="214867" y="596679"/>
+                  </a:lnTo>
+                  <a:lnTo>
+                    <a:pt x="143245" y="604018"/>
+                  </a:lnTo>
+                  <a:lnTo>
+                    <a:pt x="71622" y="611124"/>
+                  </a:lnTo>
+                  <a:lnTo>
+                    <a:pt x="0" y="618004"/>
                   </a:lnTo>
                 </a:path>
               </a:pathLst>
@@ -4343,309 +4343,309 @@
           </p:nvSpPr>
           <p:spPr>
             <a:xfrm>
-              <a:off x="1172049" y="3712566"/>
-              <a:ext cx="7090630" cy="1342019"/>
+              <a:off x="1172049" y="3805534"/>
+              <a:ext cx="7090630" cy="1279964"/>
             </a:xfrm>
             <a:custGeom>
               <a:avLst/>
               <a:pathLst>
-                <a:path w="7090630" h="1342019">
+                <a:path w="7090630" h="1279964">
                   <a:moveTo>
-                    <a:pt x="0" y="1342019"/>
+                    <a:pt x="0" y="1279964"/>
                   </a:moveTo>
                   <a:lnTo>
-                    <a:pt x="71622" y="1335420"/>
-                  </a:lnTo>
-                  <a:lnTo>
-                    <a:pt x="143245" y="1328734"/>
-                  </a:lnTo>
-                  <a:lnTo>
-                    <a:pt x="214867" y="1321959"/>
-                  </a:lnTo>
-                  <a:lnTo>
-                    <a:pt x="286490" y="1315093"/>
-                  </a:lnTo>
-                  <a:lnTo>
-                    <a:pt x="358112" y="1308136"/>
-                  </a:lnTo>
-                  <a:lnTo>
-                    <a:pt x="429735" y="1301086"/>
-                  </a:lnTo>
-                  <a:lnTo>
-                    <a:pt x="501357" y="1293942"/>
-                  </a:lnTo>
-                  <a:lnTo>
-                    <a:pt x="572980" y="1286702"/>
-                  </a:lnTo>
-                  <a:lnTo>
-                    <a:pt x="644602" y="1279366"/>
-                  </a:lnTo>
-                  <a:lnTo>
-                    <a:pt x="716225" y="1271932"/>
-                  </a:lnTo>
-                  <a:lnTo>
-                    <a:pt x="787847" y="1264399"/>
-                  </a:lnTo>
-                  <a:lnTo>
-                    <a:pt x="859470" y="1256766"/>
-                  </a:lnTo>
-                  <a:lnTo>
-                    <a:pt x="931092" y="1249031"/>
-                  </a:lnTo>
-                  <a:lnTo>
-                    <a:pt x="1002715" y="1241192"/>
-                  </a:lnTo>
-                  <a:lnTo>
-                    <a:pt x="1074337" y="1233249"/>
-                  </a:lnTo>
-                  <a:lnTo>
-                    <a:pt x="1145960" y="1225200"/>
-                  </a:lnTo>
-                  <a:lnTo>
-                    <a:pt x="1217582" y="1217043"/>
-                  </a:lnTo>
-                  <a:lnTo>
-                    <a:pt x="1289205" y="1208778"/>
-                  </a:lnTo>
-                  <a:lnTo>
-                    <a:pt x="1360827" y="1200403"/>
-                  </a:lnTo>
-                  <a:lnTo>
-                    <a:pt x="1432450" y="1191915"/>
-                  </a:lnTo>
-                  <a:lnTo>
-                    <a:pt x="1504073" y="1183315"/>
-                  </a:lnTo>
-                  <a:lnTo>
-                    <a:pt x="1575695" y="1174600"/>
-                  </a:lnTo>
-                  <a:lnTo>
-                    <a:pt x="1647318" y="1165768"/>
-                  </a:lnTo>
-                  <a:lnTo>
-                    <a:pt x="1718940" y="1156819"/>
-                  </a:lnTo>
-                  <a:lnTo>
-                    <a:pt x="1790563" y="1147751"/>
-                  </a:lnTo>
-                  <a:lnTo>
-                    <a:pt x="1862185" y="1138561"/>
-                  </a:lnTo>
-                  <a:lnTo>
-                    <a:pt x="1933808" y="1129249"/>
-                  </a:lnTo>
-                  <a:lnTo>
-                    <a:pt x="2005430" y="1119812"/>
-                  </a:lnTo>
-                  <a:lnTo>
-                    <a:pt x="2077053" y="1110250"/>
-                  </a:lnTo>
-                  <a:lnTo>
-                    <a:pt x="2148675" y="1100560"/>
-                  </a:lnTo>
-                  <a:lnTo>
-                    <a:pt x="2220298" y="1090741"/>
-                  </a:lnTo>
-                  <a:lnTo>
-                    <a:pt x="2291920" y="1080791"/>
-                  </a:lnTo>
-                  <a:lnTo>
-                    <a:pt x="2363543" y="1070708"/>
-                  </a:lnTo>
-                  <a:lnTo>
-                    <a:pt x="2435165" y="1060491"/>
-                  </a:lnTo>
-                  <a:lnTo>
-                    <a:pt x="2506788" y="1050137"/>
-                  </a:lnTo>
-                  <a:lnTo>
-                    <a:pt x="2578410" y="1039646"/>
-                  </a:lnTo>
-                  <a:lnTo>
-                    <a:pt x="2650033" y="1029014"/>
-                  </a:lnTo>
-                  <a:lnTo>
-                    <a:pt x="2721655" y="1018241"/>
-                  </a:lnTo>
-                  <a:lnTo>
-                    <a:pt x="2793278" y="1007323"/>
-                  </a:lnTo>
-                  <a:lnTo>
-                    <a:pt x="2864901" y="996260"/>
-                  </a:lnTo>
-                  <a:lnTo>
-                    <a:pt x="2936523" y="985050"/>
-                  </a:lnTo>
-                  <a:lnTo>
-                    <a:pt x="3008146" y="973690"/>
-                  </a:lnTo>
-                  <a:lnTo>
-                    <a:pt x="3079768" y="962179"/>
-                  </a:lnTo>
-                  <a:lnTo>
-                    <a:pt x="3151391" y="950513"/>
-                  </a:lnTo>
-                  <a:lnTo>
-                    <a:pt x="3223013" y="938693"/>
-                  </a:lnTo>
-                  <a:lnTo>
-                    <a:pt x="3294636" y="926714"/>
-                  </a:lnTo>
-                  <a:lnTo>
-                    <a:pt x="3366258" y="914576"/>
-                  </a:lnTo>
-                  <a:lnTo>
-                    <a:pt x="3437881" y="902276"/>
-                  </a:lnTo>
-                  <a:lnTo>
-                    <a:pt x="3509503" y="889812"/>
-                  </a:lnTo>
-                  <a:lnTo>
-                    <a:pt x="3581126" y="877182"/>
-                  </a:lnTo>
-                  <a:lnTo>
-                    <a:pt x="3652748" y="864383"/>
-                  </a:lnTo>
-                  <a:lnTo>
-                    <a:pt x="3724371" y="851413"/>
-                  </a:lnTo>
-                  <a:lnTo>
-                    <a:pt x="3795993" y="838271"/>
-                  </a:lnTo>
-                  <a:lnTo>
-                    <a:pt x="3867616" y="824953"/>
-                  </a:lnTo>
-                  <a:lnTo>
-                    <a:pt x="3939238" y="811457"/>
-                  </a:lnTo>
-                  <a:lnTo>
-                    <a:pt x="4010861" y="797781"/>
-                  </a:lnTo>
-                  <a:lnTo>
-                    <a:pt x="4082483" y="783923"/>
-                  </a:lnTo>
-                  <a:lnTo>
-                    <a:pt x="4154106" y="769880"/>
-                  </a:lnTo>
-                  <a:lnTo>
-                    <a:pt x="4225729" y="755650"/>
-                  </a:lnTo>
-                  <a:lnTo>
-                    <a:pt x="4297351" y="741230"/>
-                  </a:lnTo>
-                  <a:lnTo>
-                    <a:pt x="4368974" y="726617"/>
-                  </a:lnTo>
-                  <a:lnTo>
-                    <a:pt x="4440596" y="711810"/>
-                  </a:lnTo>
-                  <a:lnTo>
-                    <a:pt x="4512219" y="696805"/>
-                  </a:lnTo>
-                  <a:lnTo>
-                    <a:pt x="4583841" y="681600"/>
-                  </a:lnTo>
-                  <a:lnTo>
-                    <a:pt x="4655464" y="666192"/>
-                  </a:lnTo>
-                  <a:lnTo>
-                    <a:pt x="4727086" y="650579"/>
-                  </a:lnTo>
-                  <a:lnTo>
-                    <a:pt x="4798709" y="634757"/>
-                  </a:lnTo>
-                  <a:lnTo>
-                    <a:pt x="4870331" y="618724"/>
-                  </a:lnTo>
-                  <a:lnTo>
-                    <a:pt x="4941954" y="602478"/>
-                  </a:lnTo>
-                  <a:lnTo>
-                    <a:pt x="5013576" y="586014"/>
-                  </a:lnTo>
-                  <a:lnTo>
-                    <a:pt x="5085199" y="569331"/>
-                  </a:lnTo>
-                  <a:lnTo>
-                    <a:pt x="5156821" y="552426"/>
-                  </a:lnTo>
-                  <a:lnTo>
-                    <a:pt x="5228444" y="535295"/>
-                  </a:lnTo>
-                  <a:lnTo>
-                    <a:pt x="5300066" y="517935"/>
-                  </a:lnTo>
-                  <a:lnTo>
-                    <a:pt x="5371689" y="500344"/>
-                  </a:lnTo>
-                  <a:lnTo>
-                    <a:pt x="5443311" y="482518"/>
-                  </a:lnTo>
-                  <a:lnTo>
-                    <a:pt x="5514934" y="464455"/>
-                  </a:lnTo>
-                  <a:lnTo>
-                    <a:pt x="5586557" y="446150"/>
-                  </a:lnTo>
-                  <a:lnTo>
-                    <a:pt x="5658179" y="427601"/>
-                  </a:lnTo>
-                  <a:lnTo>
-                    <a:pt x="5729802" y="408805"/>
-                  </a:lnTo>
-                  <a:lnTo>
-                    <a:pt x="5801424" y="389758"/>
-                  </a:lnTo>
-                  <a:lnTo>
-                    <a:pt x="5873047" y="370457"/>
-                  </a:lnTo>
-                  <a:lnTo>
-                    <a:pt x="5944669" y="350899"/>
-                  </a:lnTo>
-                  <a:lnTo>
-                    <a:pt x="6016292" y="331079"/>
-                  </a:lnTo>
-                  <a:lnTo>
-                    <a:pt x="6087914" y="310996"/>
-                  </a:lnTo>
-                  <a:lnTo>
-                    <a:pt x="6159537" y="290644"/>
-                  </a:lnTo>
-                  <a:lnTo>
-                    <a:pt x="6231159" y="270021"/>
-                  </a:lnTo>
-                  <a:lnTo>
-                    <a:pt x="6302782" y="249123"/>
-                  </a:lnTo>
-                  <a:lnTo>
-                    <a:pt x="6374404" y="227946"/>
-                  </a:lnTo>
-                  <a:lnTo>
-                    <a:pt x="6446027" y="206486"/>
-                  </a:lnTo>
-                  <a:lnTo>
-                    <a:pt x="6517649" y="184740"/>
-                  </a:lnTo>
-                  <a:lnTo>
-                    <a:pt x="6589272" y="162704"/>
-                  </a:lnTo>
-                  <a:lnTo>
-                    <a:pt x="6660894" y="140375"/>
-                  </a:lnTo>
-                  <a:lnTo>
-                    <a:pt x="6732517" y="117747"/>
-                  </a:lnTo>
-                  <a:lnTo>
-                    <a:pt x="6804139" y="94817"/>
-                  </a:lnTo>
-                  <a:lnTo>
-                    <a:pt x="6875762" y="71582"/>
-                  </a:lnTo>
-                  <a:lnTo>
-                    <a:pt x="6947385" y="48037"/>
-                  </a:lnTo>
-                  <a:lnTo>
-                    <a:pt x="7019007" y="24177"/>
+                    <a:pt x="71622" y="1273671"/>
+                  </a:lnTo>
+                  <a:lnTo>
+                    <a:pt x="143245" y="1267294"/>
+                  </a:lnTo>
+                  <a:lnTo>
+                    <a:pt x="214867" y="1260832"/>
+                  </a:lnTo>
+                  <a:lnTo>
+                    <a:pt x="286490" y="1254284"/>
+                  </a:lnTo>
+                  <a:lnTo>
+                    <a:pt x="358112" y="1247648"/>
+                  </a:lnTo>
+                  <a:lnTo>
+                    <a:pt x="429735" y="1240924"/>
+                  </a:lnTo>
+                  <a:lnTo>
+                    <a:pt x="501357" y="1234110"/>
+                  </a:lnTo>
+                  <a:lnTo>
+                    <a:pt x="572980" y="1227206"/>
+                  </a:lnTo>
+                  <a:lnTo>
+                    <a:pt x="644602" y="1220209"/>
+                  </a:lnTo>
+                  <a:lnTo>
+                    <a:pt x="716225" y="1213119"/>
+                  </a:lnTo>
+                  <a:lnTo>
+                    <a:pt x="787847" y="1205934"/>
+                  </a:lnTo>
+                  <a:lnTo>
+                    <a:pt x="859470" y="1198654"/>
+                  </a:lnTo>
+                  <a:lnTo>
+                    <a:pt x="931092" y="1191276"/>
+                  </a:lnTo>
+                  <a:lnTo>
+                    <a:pt x="1002715" y="1183800"/>
+                  </a:lnTo>
+                  <a:lnTo>
+                    <a:pt x="1074337" y="1176224"/>
+                  </a:lnTo>
+                  <a:lnTo>
+                    <a:pt x="1145960" y="1168547"/>
+                  </a:lnTo>
+                  <a:lnTo>
+                    <a:pt x="1217582" y="1160768"/>
+                  </a:lnTo>
+                  <a:lnTo>
+                    <a:pt x="1289205" y="1152885"/>
+                  </a:lnTo>
+                  <a:lnTo>
+                    <a:pt x="1360827" y="1144896"/>
+                  </a:lnTo>
+                  <a:lnTo>
+                    <a:pt x="1432450" y="1136802"/>
+                  </a:lnTo>
+                  <a:lnTo>
+                    <a:pt x="1504073" y="1128599"/>
+                  </a:lnTo>
+                  <a:lnTo>
+                    <a:pt x="1575695" y="1120287"/>
+                  </a:lnTo>
+                  <a:lnTo>
+                    <a:pt x="1647318" y="1111864"/>
+                  </a:lnTo>
+                  <a:lnTo>
+                    <a:pt x="1718940" y="1103328"/>
+                  </a:lnTo>
+                  <a:lnTo>
+                    <a:pt x="1790563" y="1094679"/>
+                  </a:lnTo>
+                  <a:lnTo>
+                    <a:pt x="1862185" y="1085914"/>
+                  </a:lnTo>
+                  <a:lnTo>
+                    <a:pt x="1933808" y="1077033"/>
+                  </a:lnTo>
+                  <a:lnTo>
+                    <a:pt x="2005430" y="1068033"/>
+                  </a:lnTo>
+                  <a:lnTo>
+                    <a:pt x="2077053" y="1058913"/>
+                  </a:lnTo>
+                  <a:lnTo>
+                    <a:pt x="2148675" y="1049671"/>
+                  </a:lnTo>
+                  <a:lnTo>
+                    <a:pt x="2220298" y="1040306"/>
+                  </a:lnTo>
+                  <a:lnTo>
+                    <a:pt x="2291920" y="1030816"/>
+                  </a:lnTo>
+                  <a:lnTo>
+                    <a:pt x="2363543" y="1021199"/>
+                  </a:lnTo>
+                  <a:lnTo>
+                    <a:pt x="2435165" y="1011454"/>
+                  </a:lnTo>
+                  <a:lnTo>
+                    <a:pt x="2506788" y="1001579"/>
+                  </a:lnTo>
+                  <a:lnTo>
+                    <a:pt x="2578410" y="991573"/>
+                  </a:lnTo>
+                  <a:lnTo>
+                    <a:pt x="2650033" y="981433"/>
+                  </a:lnTo>
+                  <a:lnTo>
+                    <a:pt x="2721655" y="971157"/>
+                  </a:lnTo>
+                  <a:lnTo>
+                    <a:pt x="2793278" y="960745"/>
+                  </a:lnTo>
+                  <a:lnTo>
+                    <a:pt x="2864901" y="950194"/>
+                  </a:lnTo>
+                  <a:lnTo>
+                    <a:pt x="2936523" y="939502"/>
+                  </a:lnTo>
+                  <a:lnTo>
+                    <a:pt x="3008146" y="928667"/>
+                  </a:lnTo>
+                  <a:lnTo>
+                    <a:pt x="3079768" y="917688"/>
+                  </a:lnTo>
+                  <a:lnTo>
+                    <a:pt x="3151391" y="906562"/>
+                  </a:lnTo>
+                  <a:lnTo>
+                    <a:pt x="3223013" y="895288"/>
+                  </a:lnTo>
+                  <a:lnTo>
+                    <a:pt x="3294636" y="883864"/>
+                  </a:lnTo>
+                  <a:lnTo>
+                    <a:pt x="3366258" y="872287"/>
+                  </a:lnTo>
+                  <a:lnTo>
+                    <a:pt x="3437881" y="860555"/>
+                  </a:lnTo>
+                  <a:lnTo>
+                    <a:pt x="3509503" y="848668"/>
+                  </a:lnTo>
+                  <a:lnTo>
+                    <a:pt x="3581126" y="836621"/>
+                  </a:lnTo>
+                  <a:lnTo>
+                    <a:pt x="3652748" y="824414"/>
+                  </a:lnTo>
+                  <a:lnTo>
+                    <a:pt x="3724371" y="812044"/>
+                  </a:lnTo>
+                  <a:lnTo>
+                    <a:pt x="3795993" y="799509"/>
+                  </a:lnTo>
+                  <a:lnTo>
+                    <a:pt x="3867616" y="786807"/>
+                  </a:lnTo>
+                  <a:lnTo>
+                    <a:pt x="3939238" y="773935"/>
+                  </a:lnTo>
+                  <a:lnTo>
+                    <a:pt x="4010861" y="760892"/>
+                  </a:lnTo>
+                  <a:lnTo>
+                    <a:pt x="4082483" y="747675"/>
+                  </a:lnTo>
+                  <a:lnTo>
+                    <a:pt x="4154106" y="734281"/>
+                  </a:lnTo>
+                  <a:lnTo>
+                    <a:pt x="4225729" y="720709"/>
+                  </a:lnTo>
+                  <a:lnTo>
+                    <a:pt x="4297351" y="706956"/>
+                  </a:lnTo>
+                  <a:lnTo>
+                    <a:pt x="4368974" y="693019"/>
+                  </a:lnTo>
+                  <a:lnTo>
+                    <a:pt x="4440596" y="678896"/>
+                  </a:lnTo>
+                  <a:lnTo>
+                    <a:pt x="4512219" y="664585"/>
+                  </a:lnTo>
+                  <a:lnTo>
+                    <a:pt x="4583841" y="650083"/>
+                  </a:lnTo>
+                  <a:lnTo>
+                    <a:pt x="4655464" y="635388"/>
+                  </a:lnTo>
+                  <a:lnTo>
+                    <a:pt x="4727086" y="620496"/>
+                  </a:lnTo>
+                  <a:lnTo>
+                    <a:pt x="4798709" y="605406"/>
+                  </a:lnTo>
+                  <a:lnTo>
+                    <a:pt x="4870331" y="590115"/>
+                  </a:lnTo>
+                  <a:lnTo>
+                    <a:pt x="4941954" y="574619"/>
+                  </a:lnTo>
+                  <a:lnTo>
+                    <a:pt x="5013576" y="558917"/>
+                  </a:lnTo>
+                  <a:lnTo>
+                    <a:pt x="5085199" y="543006"/>
+                  </a:lnTo>
+                  <a:lnTo>
+                    <a:pt x="5156821" y="526882"/>
+                  </a:lnTo>
+                  <a:lnTo>
+                    <a:pt x="5228444" y="510543"/>
+                  </a:lnTo>
+                  <a:lnTo>
+                    <a:pt x="5300066" y="493986"/>
+                  </a:lnTo>
+                  <a:lnTo>
+                    <a:pt x="5371689" y="477208"/>
+                  </a:lnTo>
+                  <a:lnTo>
+                    <a:pt x="5443311" y="460207"/>
+                  </a:lnTo>
+                  <a:lnTo>
+                    <a:pt x="5514934" y="442978"/>
+                  </a:lnTo>
+                  <a:lnTo>
+                    <a:pt x="5586557" y="425520"/>
+                  </a:lnTo>
+                  <a:lnTo>
+                    <a:pt x="5658179" y="407829"/>
+                  </a:lnTo>
+                  <a:lnTo>
+                    <a:pt x="5729802" y="389902"/>
+                  </a:lnTo>
+                  <a:lnTo>
+                    <a:pt x="5801424" y="371736"/>
+                  </a:lnTo>
+                  <a:lnTo>
+                    <a:pt x="5873047" y="353327"/>
+                  </a:lnTo>
+                  <a:lnTo>
+                    <a:pt x="5944669" y="334673"/>
+                  </a:lnTo>
+                  <a:lnTo>
+                    <a:pt x="6016292" y="315770"/>
+                  </a:lnTo>
+                  <a:lnTo>
+                    <a:pt x="6087914" y="296615"/>
+                  </a:lnTo>
+                  <a:lnTo>
+                    <a:pt x="6159537" y="277205"/>
+                  </a:lnTo>
+                  <a:lnTo>
+                    <a:pt x="6231159" y="257535"/>
+                  </a:lnTo>
+                  <a:lnTo>
+                    <a:pt x="6302782" y="237603"/>
+                  </a:lnTo>
+                  <a:lnTo>
+                    <a:pt x="6374404" y="217406"/>
+                  </a:lnTo>
+                  <a:lnTo>
+                    <a:pt x="6446027" y="196938"/>
+                  </a:lnTo>
+                  <a:lnTo>
+                    <a:pt x="6517649" y="176198"/>
+                  </a:lnTo>
+                  <a:lnTo>
+                    <a:pt x="6589272" y="155181"/>
+                  </a:lnTo>
+                  <a:lnTo>
+                    <a:pt x="6660894" y="133884"/>
+                  </a:lnTo>
+                  <a:lnTo>
+                    <a:pt x="6732517" y="112302"/>
+                  </a:lnTo>
+                  <a:lnTo>
+                    <a:pt x="6804139" y="90433"/>
+                  </a:lnTo>
+                  <a:lnTo>
+                    <a:pt x="6875762" y="68272"/>
+                  </a:lnTo>
+                  <a:lnTo>
+                    <a:pt x="6947385" y="45815"/>
+                  </a:lnTo>
+                  <a:lnTo>
+                    <a:pt x="7019007" y="23059"/>
                   </a:lnTo>
                   <a:lnTo>
                     <a:pt x="7090630" y="0"/>
@@ -4677,7 +4677,7 @@
           </p:nvSpPr>
           <p:spPr>
             <a:xfrm>
-              <a:off x="817517" y="4679530"/>
+              <a:off x="817517" y="4727786"/>
               <a:ext cx="7799693" cy="0"/>
             </a:xfrm>
             <a:custGeom>
@@ -4720,15 +4720,15 @@
           </p:nvSpPr>
           <p:spPr>
             <a:xfrm>
-              <a:off x="4222163" y="1896563"/>
-              <a:ext cx="0" cy="3826579"/>
+              <a:off x="4222163" y="2073503"/>
+              <a:ext cx="0" cy="3649639"/>
             </a:xfrm>
             <a:custGeom>
               <a:avLst/>
               <a:pathLst>
-                <a:path w="0" h="3826579">
+                <a:path w="0" h="3649639">
                   <a:moveTo>
-                    <a:pt x="0" y="3826579"/>
+                    <a:pt x="0" y="3649639"/>
                   </a:moveTo>
                   <a:lnTo>
                     <a:pt x="0" y="0"/>
@@ -4763,7 +4763,7 @@
           </p:nvSpPr>
           <p:spPr>
             <a:xfrm>
-              <a:off x="692708" y="5509156"/>
+              <a:off x="692708" y="5517199"/>
               <a:ext cx="62179" cy="80101"/>
             </a:xfrm>
             <a:prstGeom prst="rect">
@@ -4809,7 +4809,7 @@
           </p:nvSpPr>
           <p:spPr>
             <a:xfrm>
-              <a:off x="692708" y="4639479"/>
+              <a:off x="692708" y="4687735"/>
               <a:ext cx="62179" cy="80101"/>
             </a:xfrm>
             <a:prstGeom prst="rect">
@@ -4855,7 +4855,7 @@
           </p:nvSpPr>
           <p:spPr>
             <a:xfrm>
-              <a:off x="692708" y="3769802"/>
+              <a:off x="692708" y="3858272"/>
               <a:ext cx="62179" cy="80101"/>
             </a:xfrm>
             <a:prstGeom prst="rect">
@@ -4901,7 +4901,7 @@
           </p:nvSpPr>
           <p:spPr>
             <a:xfrm>
-              <a:off x="692708" y="2900125"/>
+              <a:off x="692708" y="3028808"/>
               <a:ext cx="62179" cy="80101"/>
             </a:xfrm>
             <a:prstGeom prst="rect">
@@ -4947,7 +4947,7 @@
           </p:nvSpPr>
           <p:spPr>
             <a:xfrm>
-              <a:off x="692708" y="2030448"/>
+              <a:off x="692708" y="2199345"/>
               <a:ext cx="62179" cy="80101"/>
             </a:xfrm>
             <a:prstGeom prst="rect">
@@ -5315,7 +5315,7 @@
           </p:nvSpPr>
           <p:spPr>
             <a:xfrm rot="-5400000">
-              <a:off x="68446" y="3759743"/>
+              <a:off x="68446" y="3848213"/>
               <a:ext cx="1016904" cy="100218"/>
             </a:xfrm>
             <a:prstGeom prst="rect">
@@ -5356,6 +5356,52 @@
         <p:sp>
           <p:nvSpPr>
             <p:cNvPr id="43" name="tx43"/>
+            <p:cNvSpPr/>
+            <p:nvPr/>
+          </p:nvSpPr>
+          <p:spPr>
+            <a:xfrm>
+              <a:off x="817517" y="1896563"/>
+              <a:ext cx="4433376" cy="82021"/>
+            </a:xfrm>
+            <a:prstGeom prst="rect">
+              <a:avLst/>
+            </a:prstGeom>
+            <a:noFill/>
+          </p:spPr>
+          <p:txBody>
+            <a:bodyPr lIns="0" rIns="0" tIns="0" bIns="0" anchorCtr="1" anchor="ctr" wrap="none"/>
+            <a:lstStyle/>
+            <a:p>
+              <a:pPr algn="l" marL="0" marR="0" indent="0">
+                <a:lnSpc>
+                  <a:spcPts val="900"/>
+                </a:lnSpc>
+                <a:spcBef>
+                  <a:spcPts val="0"/>
+                </a:spcBef>
+                <a:spcAft>
+                  <a:spcPts val="0"/>
+                </a:spcAft>
+              </a:pPr>
+              <a:r>
+                <a:rPr sz="900">
+                  <a:solidFill>
+                    <a:srgbClr val="404040">
+                      <a:alpha val="100000"/>
+                    </a:srgbClr>
+                  </a:solidFill>
+                  <a:latin typeface="Helvetica"/>
+                  <a:cs typeface="Helvetica"/>
+                </a:rPr>
+                <a:t>subHR = 1.13 (95% CI 0.95-1.36), p = 0.173   (per 25 mg increase in dose discrepancy)</a:t>
+              </a:r>
+            </a:p>
+          </p:txBody>
+        </p:sp>
+        <p:sp>
+          <p:nvSpPr>
+            <p:cNvPr id="44" name="tx44"/>
             <p:cNvSpPr/>
             <p:nvPr/>
           </p:nvSpPr>

--- a/docs/plots/carbo/jx_carbo_linsubhr_dosedisc_anemia2.pptx
+++ b/docs/plots/carbo/jx_carbo_linsubhr_dosedisc_anemia2.pptx
@@ -2271,26 +2271,26 @@
           </p:nvSpPr>
           <p:spPr>
             <a:xfrm>
-              <a:off x="817517" y="5142518"/>
-              <a:ext cx="7799693" cy="0"/>
+              <a:off x="915645" y="5071743"/>
+              <a:ext cx="7682587" cy="0"/>
             </a:xfrm>
             <a:custGeom>
               <a:avLst/>
               <a:pathLst>
-                <a:path w="7799693" h="0">
+                <a:path w="7682587" h="0">
                   <a:moveTo>
                     <a:pt x="0" y="0"/>
                   </a:moveTo>
                   <a:lnTo>
-                    <a:pt x="7799693" y="0"/>
-                  </a:lnTo>
-                  <a:lnTo>
-                    <a:pt x="7799693" y="0"/>
+                    <a:pt x="7682587" y="0"/>
+                  </a:lnTo>
+                  <a:lnTo>
+                    <a:pt x="7682587" y="0"/>
                   </a:lnTo>
                 </a:path>
               </a:pathLst>
             </a:custGeom>
-            <a:ln w="6775" cap="flat">
+            <a:ln w="8623" cap="flat">
               <a:solidFill>
                 <a:srgbClr val="EBEBEB">
                   <a:alpha val="100000"/>
@@ -2314,26 +2314,26 @@
           </p:nvSpPr>
           <p:spPr>
             <a:xfrm>
-              <a:off x="817517" y="4313054"/>
-              <a:ext cx="7799693" cy="0"/>
+              <a:off x="915645" y="4298074"/>
+              <a:ext cx="7682587" cy="0"/>
             </a:xfrm>
             <a:custGeom>
               <a:avLst/>
               <a:pathLst>
-                <a:path w="7799693" h="0">
+                <a:path w="7682587" h="0">
                   <a:moveTo>
                     <a:pt x="0" y="0"/>
                   </a:moveTo>
                   <a:lnTo>
-                    <a:pt x="7799693" y="0"/>
-                  </a:lnTo>
-                  <a:lnTo>
-                    <a:pt x="7799693" y="0"/>
+                    <a:pt x="7682587" y="0"/>
+                  </a:lnTo>
+                  <a:lnTo>
+                    <a:pt x="7682587" y="0"/>
                   </a:lnTo>
                 </a:path>
               </a:pathLst>
             </a:custGeom>
-            <a:ln w="6775" cap="flat">
+            <a:ln w="8623" cap="flat">
               <a:solidFill>
                 <a:srgbClr val="EBEBEB">
                   <a:alpha val="100000"/>
@@ -2357,26 +2357,26 @@
           </p:nvSpPr>
           <p:spPr>
             <a:xfrm>
-              <a:off x="817517" y="3483591"/>
-              <a:ext cx="7799693" cy="0"/>
+              <a:off x="915645" y="3524405"/>
+              <a:ext cx="7682587" cy="0"/>
             </a:xfrm>
             <a:custGeom>
               <a:avLst/>
               <a:pathLst>
-                <a:path w="7799693" h="0">
+                <a:path w="7682587" h="0">
                   <a:moveTo>
                     <a:pt x="0" y="0"/>
                   </a:moveTo>
                   <a:lnTo>
-                    <a:pt x="7799693" y="0"/>
-                  </a:lnTo>
-                  <a:lnTo>
-                    <a:pt x="7799693" y="0"/>
+                    <a:pt x="7682587" y="0"/>
+                  </a:lnTo>
+                  <a:lnTo>
+                    <a:pt x="7682587" y="0"/>
                   </a:lnTo>
                 </a:path>
               </a:pathLst>
             </a:custGeom>
-            <a:ln w="6775" cap="flat">
+            <a:ln w="8623" cap="flat">
               <a:solidFill>
                 <a:srgbClr val="EBEBEB">
                   <a:alpha val="100000"/>
@@ -2400,26 +2400,26 @@
           </p:nvSpPr>
           <p:spPr>
             <a:xfrm>
-              <a:off x="817517" y="2654127"/>
-              <a:ext cx="7799693" cy="0"/>
+              <a:off x="915645" y="2750737"/>
+              <a:ext cx="7682587" cy="0"/>
             </a:xfrm>
             <a:custGeom>
               <a:avLst/>
               <a:pathLst>
-                <a:path w="7799693" h="0">
+                <a:path w="7682587" h="0">
                   <a:moveTo>
                     <a:pt x="0" y="0"/>
                   </a:moveTo>
                   <a:lnTo>
-                    <a:pt x="7799693" y="0"/>
-                  </a:lnTo>
-                  <a:lnTo>
-                    <a:pt x="7799693" y="0"/>
+                    <a:pt x="7682587" y="0"/>
+                  </a:lnTo>
+                  <a:lnTo>
+                    <a:pt x="7682587" y="0"/>
                   </a:lnTo>
                 </a:path>
               </a:pathLst>
             </a:custGeom>
-            <a:ln w="6775" cap="flat">
+            <a:ln w="8623" cap="flat">
               <a:solidFill>
                 <a:srgbClr val="EBEBEB">
                   <a:alpha val="100000"/>
@@ -2443,15 +2443,15 @@
           </p:nvSpPr>
           <p:spPr>
             <a:xfrm>
-              <a:off x="2122745" y="2073503"/>
-              <a:ext cx="0" cy="3649639"/>
+              <a:off x="2201275" y="2209169"/>
+              <a:ext cx="0" cy="3404141"/>
             </a:xfrm>
             <a:custGeom>
               <a:avLst/>
               <a:pathLst>
-                <a:path w="0" h="3649639">
+                <a:path w="0" h="3404141">
                   <a:moveTo>
-                    <a:pt x="0" y="3649639"/>
+                    <a:pt x="0" y="3404141"/>
                   </a:moveTo>
                   <a:lnTo>
                     <a:pt x="0" y="0"/>
@@ -2462,7 +2462,7 @@
                 </a:path>
               </a:pathLst>
             </a:custGeom>
-            <a:ln w="6775" cap="flat">
+            <a:ln w="8623" cap="flat">
               <a:solidFill>
                 <a:srgbClr val="EBEBEB">
                   <a:alpha val="100000"/>
@@ -2486,15 +2486,15 @@
           </p:nvSpPr>
           <p:spPr>
             <a:xfrm>
-              <a:off x="3487174" y="2073503"/>
-              <a:ext cx="0" cy="3649639"/>
+              <a:off x="3545219" y="2209169"/>
+              <a:ext cx="0" cy="3404141"/>
             </a:xfrm>
             <a:custGeom>
               <a:avLst/>
               <a:pathLst>
-                <a:path w="0" h="3649639">
+                <a:path w="0" h="3404141">
                   <a:moveTo>
-                    <a:pt x="0" y="3649639"/>
+                    <a:pt x="0" y="3404141"/>
                   </a:moveTo>
                   <a:lnTo>
                     <a:pt x="0" y="0"/>
@@ -2505,7 +2505,7 @@
                 </a:path>
               </a:pathLst>
             </a:custGeom>
-            <a:ln w="6775" cap="flat">
+            <a:ln w="8623" cap="flat">
               <a:solidFill>
                 <a:srgbClr val="EBEBEB">
                   <a:alpha val="100000"/>
@@ -2529,15 +2529,15 @@
           </p:nvSpPr>
           <p:spPr>
             <a:xfrm>
-              <a:off x="4851604" y="2073503"/>
-              <a:ext cx="0" cy="3649639"/>
+              <a:off x="4889163" y="2209169"/>
+              <a:ext cx="0" cy="3404141"/>
             </a:xfrm>
             <a:custGeom>
               <a:avLst/>
               <a:pathLst>
-                <a:path w="0" h="3649639">
+                <a:path w="0" h="3404141">
                   <a:moveTo>
-                    <a:pt x="0" y="3649639"/>
+                    <a:pt x="0" y="3404141"/>
                   </a:moveTo>
                   <a:lnTo>
                     <a:pt x="0" y="0"/>
@@ -2548,7 +2548,7 @@
                 </a:path>
               </a:pathLst>
             </a:custGeom>
-            <a:ln w="6775" cap="flat">
+            <a:ln w="8623" cap="flat">
               <a:solidFill>
                 <a:srgbClr val="EBEBEB">
                   <a:alpha val="100000"/>
@@ -2572,15 +2572,15 @@
           </p:nvSpPr>
           <p:spPr>
             <a:xfrm>
-              <a:off x="6216034" y="2073503"/>
-              <a:ext cx="0" cy="3649639"/>
+              <a:off x="6233107" y="2209169"/>
+              <a:ext cx="0" cy="3404141"/>
             </a:xfrm>
             <a:custGeom>
               <a:avLst/>
               <a:pathLst>
-                <a:path w="0" h="3649639">
+                <a:path w="0" h="3404141">
                   <a:moveTo>
-                    <a:pt x="0" y="3649639"/>
+                    <a:pt x="0" y="3404141"/>
                   </a:moveTo>
                   <a:lnTo>
                     <a:pt x="0" y="0"/>
@@ -2591,7 +2591,7 @@
                 </a:path>
               </a:pathLst>
             </a:custGeom>
-            <a:ln w="6775" cap="flat">
+            <a:ln w="8623" cap="flat">
               <a:solidFill>
                 <a:srgbClr val="EBEBEB">
                   <a:alpha val="100000"/>
@@ -2615,15 +2615,15 @@
           </p:nvSpPr>
           <p:spPr>
             <a:xfrm>
-              <a:off x="7580464" y="2073503"/>
-              <a:ext cx="0" cy="3649639"/>
+              <a:off x="7577051" y="2209169"/>
+              <a:ext cx="0" cy="3404141"/>
             </a:xfrm>
             <a:custGeom>
               <a:avLst/>
               <a:pathLst>
-                <a:path w="0" h="3649639">
+                <a:path w="0" h="3404141">
                   <a:moveTo>
-                    <a:pt x="0" y="3649639"/>
+                    <a:pt x="0" y="3404141"/>
                   </a:moveTo>
                   <a:lnTo>
                     <a:pt x="0" y="0"/>
@@ -2634,7 +2634,7 @@
                 </a:path>
               </a:pathLst>
             </a:custGeom>
-            <a:ln w="6775" cap="flat">
+            <a:ln w="8623" cap="flat">
               <a:solidFill>
                 <a:srgbClr val="EBEBEB">
                   <a:alpha val="100000"/>
@@ -2658,26 +2658,26 @@
           </p:nvSpPr>
           <p:spPr>
             <a:xfrm>
-              <a:off x="817517" y="5557249"/>
-              <a:ext cx="7799693" cy="0"/>
+              <a:off x="915645" y="5458577"/>
+              <a:ext cx="7682587" cy="0"/>
             </a:xfrm>
             <a:custGeom>
               <a:avLst/>
               <a:pathLst>
-                <a:path w="7799693" h="0">
+                <a:path w="7682587" h="0">
                   <a:moveTo>
                     <a:pt x="0" y="0"/>
                   </a:moveTo>
                   <a:lnTo>
-                    <a:pt x="7799693" y="0"/>
-                  </a:lnTo>
-                  <a:lnTo>
-                    <a:pt x="7799693" y="0"/>
+                    <a:pt x="7682587" y="0"/>
+                  </a:lnTo>
+                  <a:lnTo>
+                    <a:pt x="7682587" y="0"/>
                   </a:lnTo>
                 </a:path>
               </a:pathLst>
             </a:custGeom>
-            <a:ln w="13550" cap="flat">
+            <a:ln w="17246" cap="flat">
               <a:solidFill>
                 <a:srgbClr val="EBEBEB">
                   <a:alpha val="100000"/>
@@ -2701,26 +2701,26 @@
           </p:nvSpPr>
           <p:spPr>
             <a:xfrm>
-              <a:off x="817517" y="4727786"/>
-              <a:ext cx="7799693" cy="0"/>
+              <a:off x="915645" y="4684908"/>
+              <a:ext cx="7682587" cy="0"/>
             </a:xfrm>
             <a:custGeom>
               <a:avLst/>
               <a:pathLst>
-                <a:path w="7799693" h="0">
+                <a:path w="7682587" h="0">
                   <a:moveTo>
                     <a:pt x="0" y="0"/>
                   </a:moveTo>
                   <a:lnTo>
-                    <a:pt x="7799693" y="0"/>
-                  </a:lnTo>
-                  <a:lnTo>
-                    <a:pt x="7799693" y="0"/>
+                    <a:pt x="7682587" y="0"/>
+                  </a:lnTo>
+                  <a:lnTo>
+                    <a:pt x="7682587" y="0"/>
                   </a:lnTo>
                 </a:path>
               </a:pathLst>
             </a:custGeom>
-            <a:ln w="13550" cap="flat">
+            <a:ln w="17246" cap="flat">
               <a:solidFill>
                 <a:srgbClr val="EBEBEB">
                   <a:alpha val="100000"/>
@@ -2744,26 +2744,26 @@
           </p:nvSpPr>
           <p:spPr>
             <a:xfrm>
-              <a:off x="817517" y="3898322"/>
-              <a:ext cx="7799693" cy="0"/>
+              <a:off x="915645" y="3911240"/>
+              <a:ext cx="7682587" cy="0"/>
             </a:xfrm>
             <a:custGeom>
               <a:avLst/>
               <a:pathLst>
-                <a:path w="7799693" h="0">
+                <a:path w="7682587" h="0">
                   <a:moveTo>
                     <a:pt x="0" y="0"/>
                   </a:moveTo>
                   <a:lnTo>
-                    <a:pt x="7799693" y="0"/>
-                  </a:lnTo>
-                  <a:lnTo>
-                    <a:pt x="7799693" y="0"/>
+                    <a:pt x="7682587" y="0"/>
+                  </a:lnTo>
+                  <a:lnTo>
+                    <a:pt x="7682587" y="0"/>
                   </a:lnTo>
                 </a:path>
               </a:pathLst>
             </a:custGeom>
-            <a:ln w="13550" cap="flat">
+            <a:ln w="17246" cap="flat">
               <a:solidFill>
                 <a:srgbClr val="EBEBEB">
                   <a:alpha val="100000"/>
@@ -2787,26 +2787,26 @@
           </p:nvSpPr>
           <p:spPr>
             <a:xfrm>
-              <a:off x="817517" y="3068859"/>
-              <a:ext cx="7799693" cy="0"/>
+              <a:off x="915645" y="3137571"/>
+              <a:ext cx="7682587" cy="0"/>
             </a:xfrm>
             <a:custGeom>
               <a:avLst/>
               <a:pathLst>
-                <a:path w="7799693" h="0">
+                <a:path w="7682587" h="0">
                   <a:moveTo>
                     <a:pt x="0" y="0"/>
                   </a:moveTo>
                   <a:lnTo>
-                    <a:pt x="7799693" y="0"/>
-                  </a:lnTo>
-                  <a:lnTo>
-                    <a:pt x="7799693" y="0"/>
+                    <a:pt x="7682587" y="0"/>
+                  </a:lnTo>
+                  <a:lnTo>
+                    <a:pt x="7682587" y="0"/>
                   </a:lnTo>
                 </a:path>
               </a:pathLst>
             </a:custGeom>
-            <a:ln w="13550" cap="flat">
+            <a:ln w="17246" cap="flat">
               <a:solidFill>
                 <a:srgbClr val="EBEBEB">
                   <a:alpha val="100000"/>
@@ -2830,26 +2830,26 @@
           </p:nvSpPr>
           <p:spPr>
             <a:xfrm>
-              <a:off x="817517" y="2239395"/>
-              <a:ext cx="7799693" cy="0"/>
+              <a:off x="915645" y="2363903"/>
+              <a:ext cx="7682587" cy="0"/>
             </a:xfrm>
             <a:custGeom>
               <a:avLst/>
               <a:pathLst>
-                <a:path w="7799693" h="0">
+                <a:path w="7682587" h="0">
                   <a:moveTo>
                     <a:pt x="0" y="0"/>
                   </a:moveTo>
                   <a:lnTo>
-                    <a:pt x="7799693" y="0"/>
-                  </a:lnTo>
-                  <a:lnTo>
-                    <a:pt x="7799693" y="0"/>
+                    <a:pt x="7682587" y="0"/>
+                  </a:lnTo>
+                  <a:lnTo>
+                    <a:pt x="7682587" y="0"/>
                   </a:lnTo>
                 </a:path>
               </a:pathLst>
             </a:custGeom>
-            <a:ln w="13550" cap="flat">
+            <a:ln w="17246" cap="flat">
               <a:solidFill>
                 <a:srgbClr val="EBEBEB">
                   <a:alpha val="100000"/>
@@ -2873,15 +2873,15 @@
           </p:nvSpPr>
           <p:spPr>
             <a:xfrm>
-              <a:off x="1440530" y="2073503"/>
-              <a:ext cx="0" cy="3649639"/>
+              <a:off x="1529303" y="2209169"/>
+              <a:ext cx="0" cy="3404141"/>
             </a:xfrm>
             <a:custGeom>
               <a:avLst/>
               <a:pathLst>
-                <a:path w="0" h="3649639">
+                <a:path w="0" h="3404141">
                   <a:moveTo>
-                    <a:pt x="0" y="3649639"/>
+                    <a:pt x="0" y="3404141"/>
                   </a:moveTo>
                   <a:lnTo>
                     <a:pt x="0" y="0"/>
@@ -2892,7 +2892,7 @@
                 </a:path>
               </a:pathLst>
             </a:custGeom>
-            <a:ln w="13550" cap="flat">
+            <a:ln w="17246" cap="flat">
               <a:solidFill>
                 <a:srgbClr val="EBEBEB">
                   <a:alpha val="100000"/>
@@ -2916,15 +2916,15 @@
           </p:nvSpPr>
           <p:spPr>
             <a:xfrm>
-              <a:off x="2804959" y="2073503"/>
-              <a:ext cx="0" cy="3649639"/>
+              <a:off x="2873247" y="2209169"/>
+              <a:ext cx="0" cy="3404141"/>
             </a:xfrm>
             <a:custGeom>
               <a:avLst/>
               <a:pathLst>
-                <a:path w="0" h="3649639">
+                <a:path w="0" h="3404141">
                   <a:moveTo>
-                    <a:pt x="0" y="3649639"/>
+                    <a:pt x="0" y="3404141"/>
                   </a:moveTo>
                   <a:lnTo>
                     <a:pt x="0" y="0"/>
@@ -2935,7 +2935,7 @@
                 </a:path>
               </a:pathLst>
             </a:custGeom>
-            <a:ln w="13550" cap="flat">
+            <a:ln w="17246" cap="flat">
               <a:solidFill>
                 <a:srgbClr val="EBEBEB">
                   <a:alpha val="100000"/>
@@ -2959,15 +2959,15 @@
           </p:nvSpPr>
           <p:spPr>
             <a:xfrm>
-              <a:off x="4169389" y="2073503"/>
-              <a:ext cx="0" cy="3649639"/>
+              <a:off x="4217191" y="2209169"/>
+              <a:ext cx="0" cy="3404141"/>
             </a:xfrm>
             <a:custGeom>
               <a:avLst/>
               <a:pathLst>
-                <a:path w="0" h="3649639">
+                <a:path w="0" h="3404141">
                   <a:moveTo>
-                    <a:pt x="0" y="3649639"/>
+                    <a:pt x="0" y="3404141"/>
                   </a:moveTo>
                   <a:lnTo>
                     <a:pt x="0" y="0"/>
@@ -2978,7 +2978,7 @@
                 </a:path>
               </a:pathLst>
             </a:custGeom>
-            <a:ln w="13550" cap="flat">
+            <a:ln w="17246" cap="flat">
               <a:solidFill>
                 <a:srgbClr val="EBEBEB">
                   <a:alpha val="100000"/>
@@ -3002,15 +3002,15 @@
           </p:nvSpPr>
           <p:spPr>
             <a:xfrm>
-              <a:off x="5533819" y="2073503"/>
-              <a:ext cx="0" cy="3649639"/>
+              <a:off x="5561135" y="2209169"/>
+              <a:ext cx="0" cy="3404141"/>
             </a:xfrm>
             <a:custGeom>
               <a:avLst/>
               <a:pathLst>
-                <a:path w="0" h="3649639">
+                <a:path w="0" h="3404141">
                   <a:moveTo>
-                    <a:pt x="0" y="3649639"/>
+                    <a:pt x="0" y="3404141"/>
                   </a:moveTo>
                   <a:lnTo>
                     <a:pt x="0" y="0"/>
@@ -3021,7 +3021,7 @@
                 </a:path>
               </a:pathLst>
             </a:custGeom>
-            <a:ln w="13550" cap="flat">
+            <a:ln w="17246" cap="flat">
               <a:solidFill>
                 <a:srgbClr val="EBEBEB">
                   <a:alpha val="100000"/>
@@ -3045,15 +3045,15 @@
           </p:nvSpPr>
           <p:spPr>
             <a:xfrm>
-              <a:off x="6898249" y="2073503"/>
-              <a:ext cx="0" cy="3649639"/>
+              <a:off x="6905079" y="2209169"/>
+              <a:ext cx="0" cy="3404141"/>
             </a:xfrm>
             <a:custGeom>
               <a:avLst/>
               <a:pathLst>
-                <a:path w="0" h="3649639">
+                <a:path w="0" h="3404141">
                   <a:moveTo>
-                    <a:pt x="0" y="3649639"/>
+                    <a:pt x="0" y="3404141"/>
                   </a:moveTo>
                   <a:lnTo>
                     <a:pt x="0" y="0"/>
@@ -3064,7 +3064,7 @@
                 </a:path>
               </a:pathLst>
             </a:custGeom>
-            <a:ln w="13550" cap="flat">
+            <a:ln w="17246" cap="flat">
               <a:solidFill>
                 <a:srgbClr val="EBEBEB">
                   <a:alpha val="100000"/>
@@ -3088,15 +3088,15 @@
           </p:nvSpPr>
           <p:spPr>
             <a:xfrm>
-              <a:off x="8262679" y="2073503"/>
-              <a:ext cx="0" cy="3649639"/>
+              <a:off x="8249023" y="2209169"/>
+              <a:ext cx="0" cy="3404141"/>
             </a:xfrm>
             <a:custGeom>
               <a:avLst/>
               <a:pathLst>
-                <a:path w="0" h="3649639">
+                <a:path w="0" h="3404141">
                   <a:moveTo>
-                    <a:pt x="0" y="3649639"/>
+                    <a:pt x="0" y="3404141"/>
                   </a:moveTo>
                   <a:lnTo>
                     <a:pt x="0" y="0"/>
@@ -3107,7 +3107,7 @@
                 </a:path>
               </a:pathLst>
             </a:custGeom>
-            <a:ln w="13550" cap="flat">
+            <a:ln w="17246" cap="flat">
               <a:solidFill>
                 <a:srgbClr val="EBEBEB">
                   <a:alpha val="100000"/>
@@ -3131,579 +3131,579 @@
           </p:nvSpPr>
           <p:spPr>
             <a:xfrm>
-              <a:off x="1172049" y="2073503"/>
-              <a:ext cx="7090630" cy="3274281"/>
+              <a:off x="1264853" y="2209169"/>
+              <a:ext cx="6984170" cy="3054032"/>
             </a:xfrm>
             <a:custGeom>
               <a:avLst/>
               <a:pathLst>
-                <a:path w="7090630" h="3274281">
+                <a:path w="6984170" h="3054032">
                   <a:moveTo>
-                    <a:pt x="0" y="2421287"/>
+                    <a:pt x="0" y="2258416"/>
                   </a:moveTo>
                   <a:lnTo>
-                    <a:pt x="71622" y="2427445"/>
-                  </a:lnTo>
-                  <a:lnTo>
-                    <a:pt x="143245" y="2433568"/>
-                  </a:lnTo>
-                  <a:lnTo>
-                    <a:pt x="214867" y="2439655"/>
-                  </a:lnTo>
-                  <a:lnTo>
-                    <a:pt x="286490" y="2445707"/>
-                  </a:lnTo>
-                  <a:lnTo>
-                    <a:pt x="358112" y="2451724"/>
-                  </a:lnTo>
-                  <a:lnTo>
-                    <a:pt x="429735" y="2457706"/>
-                  </a:lnTo>
-                  <a:lnTo>
-                    <a:pt x="501357" y="2463653"/>
-                  </a:lnTo>
-                  <a:lnTo>
-                    <a:pt x="572980" y="2469566"/>
-                  </a:lnTo>
-                  <a:lnTo>
-                    <a:pt x="644602" y="2475445"/>
-                  </a:lnTo>
-                  <a:lnTo>
-                    <a:pt x="716225" y="2481289"/>
-                  </a:lnTo>
-                  <a:lnTo>
-                    <a:pt x="787847" y="2487100"/>
-                  </a:lnTo>
-                  <a:lnTo>
-                    <a:pt x="859470" y="2492877"/>
-                  </a:lnTo>
-                  <a:lnTo>
-                    <a:pt x="931092" y="2498620"/>
-                  </a:lnTo>
-                  <a:lnTo>
-                    <a:pt x="1002715" y="2504330"/>
-                  </a:lnTo>
-                  <a:lnTo>
-                    <a:pt x="1074337" y="2510007"/>
-                  </a:lnTo>
-                  <a:lnTo>
-                    <a:pt x="1145960" y="2515652"/>
-                  </a:lnTo>
-                  <a:lnTo>
-                    <a:pt x="1217582" y="2521263"/>
-                  </a:lnTo>
-                  <a:lnTo>
-                    <a:pt x="1289205" y="2526842"/>
-                  </a:lnTo>
-                  <a:lnTo>
-                    <a:pt x="1360827" y="2532389"/>
-                  </a:lnTo>
-                  <a:lnTo>
-                    <a:pt x="1432450" y="2537903"/>
-                  </a:lnTo>
-                  <a:lnTo>
-                    <a:pt x="1504073" y="2543385"/>
-                  </a:lnTo>
-                  <a:lnTo>
-                    <a:pt x="1575695" y="2548836"/>
-                  </a:lnTo>
-                  <a:lnTo>
-                    <a:pt x="1647318" y="2554255"/>
-                  </a:lnTo>
-                  <a:lnTo>
-                    <a:pt x="1718940" y="2559643"/>
-                  </a:lnTo>
-                  <a:lnTo>
-                    <a:pt x="1790563" y="2564999"/>
-                  </a:lnTo>
-                  <a:lnTo>
-                    <a:pt x="1862185" y="2570325"/>
-                  </a:lnTo>
-                  <a:lnTo>
-                    <a:pt x="1933808" y="2575619"/>
-                  </a:lnTo>
-                  <a:lnTo>
-                    <a:pt x="2005430" y="2580883"/>
-                  </a:lnTo>
-                  <a:lnTo>
-                    <a:pt x="2077053" y="2586117"/>
-                  </a:lnTo>
-                  <a:lnTo>
-                    <a:pt x="2148675" y="2591320"/>
-                  </a:lnTo>
-                  <a:lnTo>
-                    <a:pt x="2220298" y="2596492"/>
-                  </a:lnTo>
-                  <a:lnTo>
-                    <a:pt x="2291920" y="2601635"/>
-                  </a:lnTo>
-                  <a:lnTo>
-                    <a:pt x="2363543" y="2606748"/>
-                  </a:lnTo>
-                  <a:lnTo>
-                    <a:pt x="2435165" y="2611832"/>
-                  </a:lnTo>
-                  <a:lnTo>
-                    <a:pt x="2506788" y="2616886"/>
-                  </a:lnTo>
-                  <a:lnTo>
-                    <a:pt x="2578410" y="2621910"/>
-                  </a:lnTo>
-                  <a:lnTo>
-                    <a:pt x="2650033" y="2626906"/>
-                  </a:lnTo>
-                  <a:lnTo>
-                    <a:pt x="2721655" y="2631872"/>
-                  </a:lnTo>
-                  <a:lnTo>
-                    <a:pt x="2793278" y="2636810"/>
-                  </a:lnTo>
-                  <a:lnTo>
-                    <a:pt x="2864901" y="2641719"/>
-                  </a:lnTo>
-                  <a:lnTo>
-                    <a:pt x="2936523" y="2646600"/>
-                  </a:lnTo>
-                  <a:lnTo>
-                    <a:pt x="3008146" y="2651453"/>
-                  </a:lnTo>
-                  <a:lnTo>
-                    <a:pt x="3079768" y="2643110"/>
-                  </a:lnTo>
-                  <a:lnTo>
-                    <a:pt x="3151391" y="2615500"/>
-                  </a:lnTo>
-                  <a:lnTo>
-                    <a:pt x="3223013" y="2586983"/>
-                  </a:lnTo>
-                  <a:lnTo>
-                    <a:pt x="3294636" y="2557530"/>
-                  </a:lnTo>
-                  <a:lnTo>
-                    <a:pt x="3366258" y="2527109"/>
-                  </a:lnTo>
-                  <a:lnTo>
-                    <a:pt x="3437881" y="2495689"/>
-                  </a:lnTo>
-                  <a:lnTo>
-                    <a:pt x="3509503" y="2463237"/>
-                  </a:lnTo>
-                  <a:lnTo>
-                    <a:pt x="3581126" y="2429720"/>
-                  </a:lnTo>
-                  <a:lnTo>
-                    <a:pt x="3652748" y="2395101"/>
-                  </a:lnTo>
-                  <a:lnTo>
-                    <a:pt x="3724371" y="2359345"/>
-                  </a:lnTo>
-                  <a:lnTo>
-                    <a:pt x="3795993" y="2322415"/>
-                  </a:lnTo>
-                  <a:lnTo>
-                    <a:pt x="3867616" y="2284272"/>
-                  </a:lnTo>
-                  <a:lnTo>
-                    <a:pt x="3939238" y="2244877"/>
-                  </a:lnTo>
-                  <a:lnTo>
-                    <a:pt x="4010861" y="2204187"/>
-                  </a:lnTo>
-                  <a:lnTo>
-                    <a:pt x="4082483" y="2162161"/>
-                  </a:lnTo>
-                  <a:lnTo>
-                    <a:pt x="4154106" y="2118755"/>
-                  </a:lnTo>
-                  <a:lnTo>
-                    <a:pt x="4225729" y="2073923"/>
-                  </a:lnTo>
-                  <a:lnTo>
-                    <a:pt x="4297351" y="2027618"/>
-                  </a:lnTo>
-                  <a:lnTo>
-                    <a:pt x="4368974" y="1979793"/>
-                  </a:lnTo>
-                  <a:lnTo>
-                    <a:pt x="4440596" y="1930397"/>
-                  </a:lnTo>
-                  <a:lnTo>
-                    <a:pt x="4512219" y="1879379"/>
-                  </a:lnTo>
-                  <a:lnTo>
-                    <a:pt x="4583841" y="1826685"/>
-                  </a:lnTo>
-                  <a:lnTo>
-                    <a:pt x="4655464" y="1772260"/>
-                  </a:lnTo>
-                  <a:lnTo>
-                    <a:pt x="4727086" y="1716048"/>
-                  </a:lnTo>
-                  <a:lnTo>
-                    <a:pt x="4798709" y="1657989"/>
-                  </a:lnTo>
-                  <a:lnTo>
-                    <a:pt x="4870331" y="1598024"/>
-                  </a:lnTo>
-                  <a:lnTo>
-                    <a:pt x="4941954" y="1536089"/>
-                  </a:lnTo>
-                  <a:lnTo>
-                    <a:pt x="5013576" y="1472120"/>
-                  </a:lnTo>
-                  <a:lnTo>
-                    <a:pt x="5085199" y="1406050"/>
-                  </a:lnTo>
-                  <a:lnTo>
-                    <a:pt x="5156821" y="1337810"/>
-                  </a:lnTo>
-                  <a:lnTo>
-                    <a:pt x="5228444" y="1267328"/>
-                  </a:lnTo>
-                  <a:lnTo>
-                    <a:pt x="5300066" y="1194532"/>
-                  </a:lnTo>
-                  <a:lnTo>
-                    <a:pt x="5371689" y="1119344"/>
-                  </a:lnTo>
-                  <a:lnTo>
-                    <a:pt x="5443311" y="1041688"/>
-                  </a:lnTo>
-                  <a:lnTo>
-                    <a:pt x="5514934" y="961480"/>
-                  </a:lnTo>
-                  <a:lnTo>
-                    <a:pt x="5586557" y="878639"/>
-                  </a:lnTo>
-                  <a:lnTo>
-                    <a:pt x="5658179" y="793076"/>
-                  </a:lnTo>
-                  <a:lnTo>
-                    <a:pt x="5729802" y="704704"/>
-                  </a:lnTo>
-                  <a:lnTo>
-                    <a:pt x="5801424" y="613428"/>
-                  </a:lnTo>
-                  <a:lnTo>
-                    <a:pt x="5873047" y="519155"/>
-                  </a:lnTo>
-                  <a:lnTo>
-                    <a:pt x="5944669" y="421786"/>
-                  </a:lnTo>
-                  <a:lnTo>
-                    <a:pt x="6016292" y="321219"/>
-                  </a:lnTo>
-                  <a:lnTo>
-                    <a:pt x="6087914" y="217348"/>
-                  </a:lnTo>
-                  <a:lnTo>
-                    <a:pt x="6159537" y="110066"/>
-                  </a:lnTo>
-                  <a:lnTo>
-                    <a:pt x="6230682" y="0"/>
-                  </a:lnTo>
-                  <a:lnTo>
-                    <a:pt x="7090630" y="0"/>
-                  </a:lnTo>
-                  <a:lnTo>
-                    <a:pt x="7090630" y="2886201"/>
-                  </a:lnTo>
-                  <a:lnTo>
-                    <a:pt x="7019007" y="2882717"/>
-                  </a:lnTo>
-                  <a:lnTo>
-                    <a:pt x="6947385" y="2879213"/>
-                  </a:lnTo>
-                  <a:lnTo>
-                    <a:pt x="6875762" y="2875689"/>
-                  </a:lnTo>
-                  <a:lnTo>
-                    <a:pt x="6804139" y="2872144"/>
-                  </a:lnTo>
-                  <a:lnTo>
-                    <a:pt x="6732517" y="2868578"/>
-                  </a:lnTo>
-                  <a:lnTo>
-                    <a:pt x="6660894" y="2864991"/>
-                  </a:lnTo>
-                  <a:lnTo>
-                    <a:pt x="6589272" y="2861384"/>
-                  </a:lnTo>
-                  <a:lnTo>
-                    <a:pt x="6517649" y="2857755"/>
-                  </a:lnTo>
-                  <a:lnTo>
-                    <a:pt x="6446027" y="2854106"/>
-                  </a:lnTo>
-                  <a:lnTo>
-                    <a:pt x="6374404" y="2850435"/>
-                  </a:lnTo>
-                  <a:lnTo>
-                    <a:pt x="6302782" y="2846742"/>
-                  </a:lnTo>
-                  <a:lnTo>
-                    <a:pt x="6231159" y="2843029"/>
-                  </a:lnTo>
-                  <a:lnTo>
-                    <a:pt x="6159537" y="2839293"/>
-                  </a:lnTo>
-                  <a:lnTo>
-                    <a:pt x="6087914" y="2835536"/>
-                  </a:lnTo>
-                  <a:lnTo>
-                    <a:pt x="6016292" y="2831757"/>
-                  </a:lnTo>
-                  <a:lnTo>
-                    <a:pt x="5944669" y="2827955"/>
-                  </a:lnTo>
-                  <a:lnTo>
-                    <a:pt x="5873047" y="2824132"/>
-                  </a:lnTo>
-                  <a:lnTo>
-                    <a:pt x="5801424" y="2820286"/>
-                  </a:lnTo>
-                  <a:lnTo>
-                    <a:pt x="5729802" y="2816418"/>
-                  </a:lnTo>
-                  <a:lnTo>
-                    <a:pt x="5658179" y="2812528"/>
-                  </a:lnTo>
-                  <a:lnTo>
-                    <a:pt x="5586557" y="2808614"/>
-                  </a:lnTo>
-                  <a:lnTo>
-                    <a:pt x="5514934" y="2804678"/>
-                  </a:lnTo>
-                  <a:lnTo>
-                    <a:pt x="5443311" y="2800719"/>
-                  </a:lnTo>
-                  <a:lnTo>
-                    <a:pt x="5371689" y="2796737"/>
-                  </a:lnTo>
-                  <a:lnTo>
-                    <a:pt x="5300066" y="2792731"/>
-                  </a:lnTo>
-                  <a:lnTo>
-                    <a:pt x="5228444" y="2788703"/>
-                  </a:lnTo>
-                  <a:lnTo>
-                    <a:pt x="5156821" y="2784650"/>
-                  </a:lnTo>
-                  <a:lnTo>
-                    <a:pt x="5085199" y="2780575"/>
-                  </a:lnTo>
-                  <a:lnTo>
-                    <a:pt x="5013576" y="2776475"/>
-                  </a:lnTo>
-                  <a:lnTo>
-                    <a:pt x="4941954" y="2772351"/>
-                  </a:lnTo>
-                  <a:lnTo>
-                    <a:pt x="4870331" y="2768204"/>
-                  </a:lnTo>
-                  <a:lnTo>
-                    <a:pt x="4798709" y="2764032"/>
-                  </a:lnTo>
-                  <a:lnTo>
-                    <a:pt x="4727086" y="2759836"/>
-                  </a:lnTo>
-                  <a:lnTo>
-                    <a:pt x="4655464" y="2755616"/>
-                  </a:lnTo>
-                  <a:lnTo>
-                    <a:pt x="4583841" y="2751370"/>
-                  </a:lnTo>
-                  <a:lnTo>
-                    <a:pt x="4512219" y="2747101"/>
-                  </a:lnTo>
-                  <a:lnTo>
-                    <a:pt x="4440596" y="2742806"/>
-                  </a:lnTo>
-                  <a:lnTo>
-                    <a:pt x="4368974" y="2738486"/>
-                  </a:lnTo>
-                  <a:lnTo>
-                    <a:pt x="4297351" y="2734141"/>
-                  </a:lnTo>
-                  <a:lnTo>
-                    <a:pt x="4225729" y="2729771"/>
-                  </a:lnTo>
-                  <a:lnTo>
-                    <a:pt x="4154106" y="2725375"/>
-                  </a:lnTo>
-                  <a:lnTo>
-                    <a:pt x="4082483" y="2720953"/>
-                  </a:lnTo>
-                  <a:lnTo>
-                    <a:pt x="4010861" y="2716506"/>
-                  </a:lnTo>
-                  <a:lnTo>
-                    <a:pt x="3939238" y="2712033"/>
-                  </a:lnTo>
-                  <a:lnTo>
-                    <a:pt x="3867616" y="2707534"/>
-                  </a:lnTo>
-                  <a:lnTo>
-                    <a:pt x="3795993" y="2703008"/>
-                  </a:lnTo>
-                  <a:lnTo>
-                    <a:pt x="3724371" y="2698456"/>
-                  </a:lnTo>
-                  <a:lnTo>
-                    <a:pt x="3652748" y="2693878"/>
-                  </a:lnTo>
-                  <a:lnTo>
-                    <a:pt x="3581126" y="2689273"/>
-                  </a:lnTo>
-                  <a:lnTo>
-                    <a:pt x="3509503" y="2684641"/>
-                  </a:lnTo>
-                  <a:lnTo>
-                    <a:pt x="3437881" y="2679982"/>
-                  </a:lnTo>
-                  <a:lnTo>
-                    <a:pt x="3366258" y="2675296"/>
-                  </a:lnTo>
-                  <a:lnTo>
-                    <a:pt x="3294636" y="2670583"/>
-                  </a:lnTo>
-                  <a:lnTo>
-                    <a:pt x="3223013" y="2665842"/>
-                  </a:lnTo>
-                  <a:lnTo>
-                    <a:pt x="3151391" y="2661073"/>
-                  </a:lnTo>
-                  <a:lnTo>
-                    <a:pt x="3079768" y="2656277"/>
-                  </a:lnTo>
-                  <a:lnTo>
-                    <a:pt x="3008146" y="2669842"/>
-                  </a:lnTo>
-                  <a:lnTo>
-                    <a:pt x="2936523" y="2695724"/>
-                  </a:lnTo>
-                  <a:lnTo>
-                    <a:pt x="2864901" y="2720783"/>
-                  </a:lnTo>
-                  <a:lnTo>
-                    <a:pt x="2793278" y="2745045"/>
-                  </a:lnTo>
-                  <a:lnTo>
-                    <a:pt x="2721655" y="2768535"/>
-                  </a:lnTo>
-                  <a:lnTo>
-                    <a:pt x="2650033" y="2791279"/>
-                  </a:lnTo>
-                  <a:lnTo>
-                    <a:pt x="2578410" y="2813299"/>
-                  </a:lnTo>
-                  <a:lnTo>
-                    <a:pt x="2506788" y="2834619"/>
-                  </a:lnTo>
-                  <a:lnTo>
-                    <a:pt x="2435165" y="2855261"/>
-                  </a:lnTo>
-                  <a:lnTo>
-                    <a:pt x="2363543" y="2875247"/>
-                  </a:lnTo>
-                  <a:lnTo>
-                    <a:pt x="2291920" y="2894597"/>
-                  </a:lnTo>
-                  <a:lnTo>
-                    <a:pt x="2220298" y="2913332"/>
-                  </a:lnTo>
-                  <a:lnTo>
-                    <a:pt x="2148675" y="2931471"/>
-                  </a:lnTo>
-                  <a:lnTo>
-                    <a:pt x="2077053" y="2949033"/>
-                  </a:lnTo>
-                  <a:lnTo>
-                    <a:pt x="2005430" y="2966037"/>
-                  </a:lnTo>
-                  <a:lnTo>
-                    <a:pt x="1933808" y="2982500"/>
-                  </a:lnTo>
-                  <a:lnTo>
-                    <a:pt x="1862185" y="2998439"/>
-                  </a:lnTo>
-                  <a:lnTo>
-                    <a:pt x="1790563" y="3013872"/>
-                  </a:lnTo>
-                  <a:lnTo>
-                    <a:pt x="1718940" y="3028814"/>
-                  </a:lnTo>
-                  <a:lnTo>
-                    <a:pt x="1647318" y="3043280"/>
-                  </a:lnTo>
-                  <a:lnTo>
-                    <a:pt x="1575695" y="3057287"/>
-                  </a:lnTo>
-                  <a:lnTo>
-                    <a:pt x="1504073" y="3070848"/>
-                  </a:lnTo>
-                  <a:lnTo>
-                    <a:pt x="1432450" y="3083978"/>
-                  </a:lnTo>
-                  <a:lnTo>
-                    <a:pt x="1360827" y="3096691"/>
-                  </a:lnTo>
-                  <a:lnTo>
-                    <a:pt x="1289205" y="3108999"/>
-                  </a:lnTo>
-                  <a:lnTo>
-                    <a:pt x="1217582" y="3120916"/>
-                  </a:lnTo>
-                  <a:lnTo>
-                    <a:pt x="1145960" y="3132454"/>
-                  </a:lnTo>
-                  <a:lnTo>
-                    <a:pt x="1074337" y="3143625"/>
-                  </a:lnTo>
-                  <a:lnTo>
-                    <a:pt x="1002715" y="3154441"/>
-                  </a:lnTo>
-                  <a:lnTo>
-                    <a:pt x="931092" y="3164912"/>
-                  </a:lnTo>
-                  <a:lnTo>
-                    <a:pt x="859470" y="3175051"/>
-                  </a:lnTo>
-                  <a:lnTo>
-                    <a:pt x="787847" y="3184868"/>
-                  </a:lnTo>
-                  <a:lnTo>
-                    <a:pt x="716225" y="3194372"/>
-                  </a:lnTo>
-                  <a:lnTo>
-                    <a:pt x="644602" y="3203574"/>
-                  </a:lnTo>
-                  <a:lnTo>
-                    <a:pt x="572980" y="3212483"/>
-                  </a:lnTo>
-                  <a:lnTo>
-                    <a:pt x="501357" y="3221109"/>
-                  </a:lnTo>
-                  <a:lnTo>
-                    <a:pt x="429735" y="3229461"/>
-                  </a:lnTo>
-                  <a:lnTo>
-                    <a:pt x="358112" y="3237547"/>
-                  </a:lnTo>
-                  <a:lnTo>
-                    <a:pt x="286490" y="3245376"/>
-                  </a:lnTo>
-                  <a:lnTo>
-                    <a:pt x="214867" y="3252957"/>
-                  </a:lnTo>
-                  <a:lnTo>
-                    <a:pt x="143245" y="3260296"/>
-                  </a:lnTo>
-                  <a:lnTo>
-                    <a:pt x="71622" y="3267401"/>
-                  </a:lnTo>
-                  <a:lnTo>
-                    <a:pt x="0" y="3274281"/>
+                    <a:pt x="70547" y="2264160"/>
+                  </a:lnTo>
+                  <a:lnTo>
+                    <a:pt x="141094" y="2269871"/>
+                  </a:lnTo>
+                  <a:lnTo>
+                    <a:pt x="211641" y="2275548"/>
+                  </a:lnTo>
+                  <a:lnTo>
+                    <a:pt x="282188" y="2281193"/>
+                  </a:lnTo>
+                  <a:lnTo>
+                    <a:pt x="352735" y="2286805"/>
+                  </a:lnTo>
+                  <a:lnTo>
+                    <a:pt x="423283" y="2292385"/>
+                  </a:lnTo>
+                  <a:lnTo>
+                    <a:pt x="493830" y="2297932"/>
+                  </a:lnTo>
+                  <a:lnTo>
+                    <a:pt x="564377" y="2303447"/>
+                  </a:lnTo>
+                  <a:lnTo>
+                    <a:pt x="634924" y="2308931"/>
+                  </a:lnTo>
+                  <a:lnTo>
+                    <a:pt x="705471" y="2314382"/>
+                  </a:lnTo>
+                  <a:lnTo>
+                    <a:pt x="776018" y="2319802"/>
+                  </a:lnTo>
+                  <a:lnTo>
+                    <a:pt x="846566" y="2325190"/>
+                  </a:lnTo>
+                  <a:lnTo>
+                    <a:pt x="917113" y="2330547"/>
+                  </a:lnTo>
+                  <a:lnTo>
+                    <a:pt x="987660" y="2335873"/>
+                  </a:lnTo>
+                  <a:lnTo>
+                    <a:pt x="1058207" y="2341168"/>
+                  </a:lnTo>
+                  <a:lnTo>
+                    <a:pt x="1128754" y="2346433"/>
+                  </a:lnTo>
+                  <a:lnTo>
+                    <a:pt x="1199301" y="2351667"/>
+                  </a:lnTo>
+                  <a:lnTo>
+                    <a:pt x="1269849" y="2356871"/>
+                  </a:lnTo>
+                  <a:lnTo>
+                    <a:pt x="1340396" y="2362044"/>
+                  </a:lnTo>
+                  <a:lnTo>
+                    <a:pt x="1410943" y="2367188"/>
+                  </a:lnTo>
+                  <a:lnTo>
+                    <a:pt x="1481490" y="2372301"/>
+                  </a:lnTo>
+                  <a:lnTo>
+                    <a:pt x="1552037" y="2377385"/>
+                  </a:lnTo>
+                  <a:lnTo>
+                    <a:pt x="1622584" y="2382440"/>
+                  </a:lnTo>
+                  <a:lnTo>
+                    <a:pt x="1693132" y="2387465"/>
+                  </a:lnTo>
+                  <a:lnTo>
+                    <a:pt x="1763679" y="2392461"/>
+                  </a:lnTo>
+                  <a:lnTo>
+                    <a:pt x="1834226" y="2397428"/>
+                  </a:lnTo>
+                  <a:lnTo>
+                    <a:pt x="1904773" y="2402367"/>
+                  </a:lnTo>
+                  <a:lnTo>
+                    <a:pt x="1975320" y="2407277"/>
+                  </a:lnTo>
+                  <a:lnTo>
+                    <a:pt x="2045868" y="2412158"/>
+                  </a:lnTo>
+                  <a:lnTo>
+                    <a:pt x="2116415" y="2417011"/>
+                  </a:lnTo>
+                  <a:lnTo>
+                    <a:pt x="2186962" y="2421836"/>
+                  </a:lnTo>
+                  <a:lnTo>
+                    <a:pt x="2257509" y="2426633"/>
+                  </a:lnTo>
+                  <a:lnTo>
+                    <a:pt x="2328056" y="2431402"/>
+                  </a:lnTo>
+                  <a:lnTo>
+                    <a:pt x="2398603" y="2436143"/>
+                  </a:lnTo>
+                  <a:lnTo>
+                    <a:pt x="2469151" y="2440857"/>
+                  </a:lnTo>
+                  <a:lnTo>
+                    <a:pt x="2539698" y="2445544"/>
+                  </a:lnTo>
+                  <a:lnTo>
+                    <a:pt x="2610245" y="2450204"/>
+                  </a:lnTo>
+                  <a:lnTo>
+                    <a:pt x="2680792" y="2454836"/>
+                  </a:lnTo>
+                  <a:lnTo>
+                    <a:pt x="2751339" y="2459442"/>
+                  </a:lnTo>
+                  <a:lnTo>
+                    <a:pt x="2821886" y="2464021"/>
+                  </a:lnTo>
+                  <a:lnTo>
+                    <a:pt x="2892434" y="2468573"/>
+                  </a:lnTo>
+                  <a:lnTo>
+                    <a:pt x="2962981" y="2473099"/>
+                  </a:lnTo>
+                  <a:lnTo>
+                    <a:pt x="3033528" y="2465318"/>
+                  </a:lnTo>
+                  <a:lnTo>
+                    <a:pt x="3104075" y="2439565"/>
+                  </a:lnTo>
+                  <a:lnTo>
+                    <a:pt x="3174622" y="2412966"/>
+                  </a:lnTo>
+                  <a:lnTo>
+                    <a:pt x="3245169" y="2385494"/>
+                  </a:lnTo>
+                  <a:lnTo>
+                    <a:pt x="3315717" y="2357120"/>
+                  </a:lnTo>
+                  <a:lnTo>
+                    <a:pt x="3386264" y="2327813"/>
+                  </a:lnTo>
+                  <a:lnTo>
+                    <a:pt x="3456811" y="2297544"/>
+                  </a:lnTo>
+                  <a:lnTo>
+                    <a:pt x="3527358" y="2266281"/>
+                  </a:lnTo>
+                  <a:lnTo>
+                    <a:pt x="3597905" y="2233991"/>
+                  </a:lnTo>
+                  <a:lnTo>
+                    <a:pt x="3668452" y="2200641"/>
+                  </a:lnTo>
+                  <a:lnTo>
+                    <a:pt x="3739000" y="2166195"/>
+                  </a:lnTo>
+                  <a:lnTo>
+                    <a:pt x="3809547" y="2130618"/>
+                  </a:lnTo>
+                  <a:lnTo>
+                    <a:pt x="3880094" y="2093872"/>
+                  </a:lnTo>
+                  <a:lnTo>
+                    <a:pt x="3950641" y="2055920"/>
+                  </a:lnTo>
+                  <a:lnTo>
+                    <a:pt x="4021188" y="2016721"/>
+                  </a:lnTo>
+                  <a:lnTo>
+                    <a:pt x="4091736" y="1976234"/>
+                  </a:lnTo>
+                  <a:lnTo>
+                    <a:pt x="4162283" y="1934418"/>
+                  </a:lnTo>
+                  <a:lnTo>
+                    <a:pt x="4232830" y="1891228"/>
+                  </a:lnTo>
+                  <a:lnTo>
+                    <a:pt x="4303377" y="1846620"/>
+                  </a:lnTo>
+                  <a:lnTo>
+                    <a:pt x="4373924" y="1800546"/>
+                  </a:lnTo>
+                  <a:lnTo>
+                    <a:pt x="4444471" y="1752960"/>
+                  </a:lnTo>
+                  <a:lnTo>
+                    <a:pt x="4515019" y="1703810"/>
+                  </a:lnTo>
+                  <a:lnTo>
+                    <a:pt x="4585566" y="1653047"/>
+                  </a:lnTo>
+                  <a:lnTo>
+                    <a:pt x="4656113" y="1600615"/>
+                  </a:lnTo>
+                  <a:lnTo>
+                    <a:pt x="4726660" y="1546462"/>
+                  </a:lnTo>
+                  <a:lnTo>
+                    <a:pt x="4797207" y="1490531"/>
+                  </a:lnTo>
+                  <a:lnTo>
+                    <a:pt x="4867754" y="1432762"/>
+                  </a:lnTo>
+                  <a:lnTo>
+                    <a:pt x="4938302" y="1373096"/>
+                  </a:lnTo>
+                  <a:lnTo>
+                    <a:pt x="5008849" y="1311470"/>
+                  </a:lnTo>
+                  <a:lnTo>
+                    <a:pt x="5079396" y="1247820"/>
+                  </a:lnTo>
+                  <a:lnTo>
+                    <a:pt x="5149943" y="1182080"/>
+                  </a:lnTo>
+                  <a:lnTo>
+                    <a:pt x="5220490" y="1114180"/>
+                  </a:lnTo>
+                  <a:lnTo>
+                    <a:pt x="5291037" y="1044050"/>
+                  </a:lnTo>
+                  <a:lnTo>
+                    <a:pt x="5361585" y="971617"/>
+                  </a:lnTo>
+                  <a:lnTo>
+                    <a:pt x="5432132" y="896805"/>
+                  </a:lnTo>
+                  <a:lnTo>
+                    <a:pt x="5502679" y="819536"/>
+                  </a:lnTo>
+                  <a:lnTo>
+                    <a:pt x="5573226" y="739729"/>
+                  </a:lnTo>
+                  <a:lnTo>
+                    <a:pt x="5643773" y="657301"/>
+                  </a:lnTo>
+                  <a:lnTo>
+                    <a:pt x="5714320" y="572165"/>
+                  </a:lnTo>
+                  <a:lnTo>
+                    <a:pt x="5784868" y="484234"/>
+                  </a:lnTo>
+                  <a:lnTo>
+                    <a:pt x="5855415" y="393414"/>
+                  </a:lnTo>
+                  <a:lnTo>
+                    <a:pt x="5925962" y="299611"/>
+                  </a:lnTo>
+                  <a:lnTo>
+                    <a:pt x="5996509" y="202728"/>
+                  </a:lnTo>
+                  <a:lnTo>
+                    <a:pt x="6067056" y="102662"/>
+                  </a:lnTo>
+                  <a:lnTo>
+                    <a:pt x="6137133" y="0"/>
+                  </a:lnTo>
+                  <a:lnTo>
+                    <a:pt x="6984170" y="0"/>
+                  </a:lnTo>
+                  <a:lnTo>
+                    <a:pt x="6984170" y="2692057"/>
+                  </a:lnTo>
+                  <a:lnTo>
+                    <a:pt x="6913622" y="2688807"/>
+                  </a:lnTo>
+                  <a:lnTo>
+                    <a:pt x="6843075" y="2685539"/>
+                  </a:lnTo>
+                  <a:lnTo>
+                    <a:pt x="6772528" y="2682252"/>
+                  </a:lnTo>
+                  <a:lnTo>
+                    <a:pt x="6701981" y="2678945"/>
+                  </a:lnTo>
+                  <a:lnTo>
+                    <a:pt x="6631434" y="2675619"/>
+                  </a:lnTo>
+                  <a:lnTo>
+                    <a:pt x="6560887" y="2672274"/>
+                  </a:lnTo>
+                  <a:lnTo>
+                    <a:pt x="6490339" y="2668909"/>
+                  </a:lnTo>
+                  <a:lnTo>
+                    <a:pt x="6419792" y="2665525"/>
+                  </a:lnTo>
+                  <a:lnTo>
+                    <a:pt x="6349245" y="2662120"/>
+                  </a:lnTo>
+                  <a:lnTo>
+                    <a:pt x="6278698" y="2658696"/>
+                  </a:lnTo>
+                  <a:lnTo>
+                    <a:pt x="6208151" y="2655252"/>
+                  </a:lnTo>
+                  <a:lnTo>
+                    <a:pt x="6137604" y="2651788"/>
+                  </a:lnTo>
+                  <a:lnTo>
+                    <a:pt x="6067056" y="2648304"/>
+                  </a:lnTo>
+                  <a:lnTo>
+                    <a:pt x="5996509" y="2644800"/>
+                  </a:lnTo>
+                  <a:lnTo>
+                    <a:pt x="5925962" y="2641275"/>
+                  </a:lnTo>
+                  <a:lnTo>
+                    <a:pt x="5855415" y="2637729"/>
+                  </a:lnTo>
+                  <a:lnTo>
+                    <a:pt x="5784868" y="2634163"/>
+                  </a:lnTo>
+                  <a:lnTo>
+                    <a:pt x="5714320" y="2630576"/>
+                  </a:lnTo>
+                  <a:lnTo>
+                    <a:pt x="5643773" y="2626968"/>
+                  </a:lnTo>
+                  <a:lnTo>
+                    <a:pt x="5573226" y="2623339"/>
+                  </a:lnTo>
+                  <a:lnTo>
+                    <a:pt x="5502679" y="2619689"/>
+                  </a:lnTo>
+                  <a:lnTo>
+                    <a:pt x="5432132" y="2616018"/>
+                  </a:lnTo>
+                  <a:lnTo>
+                    <a:pt x="5361585" y="2612325"/>
+                  </a:lnTo>
+                  <a:lnTo>
+                    <a:pt x="5291037" y="2608611"/>
+                  </a:lnTo>
+                  <a:lnTo>
+                    <a:pt x="5220490" y="2604875"/>
+                  </a:lnTo>
+                  <a:lnTo>
+                    <a:pt x="5149943" y="2601117"/>
+                  </a:lnTo>
+                  <a:lnTo>
+                    <a:pt x="5079396" y="2597337"/>
+                  </a:lnTo>
+                  <a:lnTo>
+                    <a:pt x="5008849" y="2593536"/>
+                  </a:lnTo>
+                  <a:lnTo>
+                    <a:pt x="4938302" y="2589712"/>
+                  </a:lnTo>
+                  <a:lnTo>
+                    <a:pt x="4867754" y="2585866"/>
+                  </a:lnTo>
+                  <a:lnTo>
+                    <a:pt x="4797207" y="2581997"/>
+                  </a:lnTo>
+                  <a:lnTo>
+                    <a:pt x="4726660" y="2578106"/>
+                  </a:lnTo>
+                  <a:lnTo>
+                    <a:pt x="4656113" y="2574192"/>
+                  </a:lnTo>
+                  <a:lnTo>
+                    <a:pt x="4585566" y="2570255"/>
+                  </a:lnTo>
+                  <a:lnTo>
+                    <a:pt x="4515019" y="2566296"/>
+                  </a:lnTo>
+                  <a:lnTo>
+                    <a:pt x="4444471" y="2562313"/>
+                  </a:lnTo>
+                  <a:lnTo>
+                    <a:pt x="4373924" y="2558307"/>
+                  </a:lnTo>
+                  <a:lnTo>
+                    <a:pt x="4303377" y="2554278"/>
+                  </a:lnTo>
+                  <a:lnTo>
+                    <a:pt x="4232830" y="2550225"/>
+                  </a:lnTo>
+                  <a:lnTo>
+                    <a:pt x="4162283" y="2546149"/>
+                  </a:lnTo>
+                  <a:lnTo>
+                    <a:pt x="4091736" y="2542049"/>
+                  </a:lnTo>
+                  <a:lnTo>
+                    <a:pt x="4021188" y="2537925"/>
+                  </a:lnTo>
+                  <a:lnTo>
+                    <a:pt x="3950641" y="2533777"/>
+                  </a:lnTo>
+                  <a:lnTo>
+                    <a:pt x="3880094" y="2529604"/>
+                  </a:lnTo>
+                  <a:lnTo>
+                    <a:pt x="3809547" y="2525408"/>
+                  </a:lnTo>
+                  <a:lnTo>
+                    <a:pt x="3739000" y="2521187"/>
+                  </a:lnTo>
+                  <a:lnTo>
+                    <a:pt x="3668452" y="2516941"/>
+                  </a:lnTo>
+                  <a:lnTo>
+                    <a:pt x="3597905" y="2512671"/>
+                  </a:lnTo>
+                  <a:lnTo>
+                    <a:pt x="3527358" y="2508375"/>
+                  </a:lnTo>
+                  <a:lnTo>
+                    <a:pt x="3456811" y="2504055"/>
+                  </a:lnTo>
+                  <a:lnTo>
+                    <a:pt x="3386264" y="2499710"/>
+                  </a:lnTo>
+                  <a:lnTo>
+                    <a:pt x="3315717" y="2495339"/>
+                  </a:lnTo>
+                  <a:lnTo>
+                    <a:pt x="3245169" y="2490942"/>
+                  </a:lnTo>
+                  <a:lnTo>
+                    <a:pt x="3174622" y="2486520"/>
+                  </a:lnTo>
+                  <a:lnTo>
+                    <a:pt x="3104075" y="2482073"/>
+                  </a:lnTo>
+                  <a:lnTo>
+                    <a:pt x="3033528" y="2477599"/>
+                  </a:lnTo>
+                  <a:lnTo>
+                    <a:pt x="2962981" y="2490251"/>
+                  </a:lnTo>
+                  <a:lnTo>
+                    <a:pt x="2892434" y="2514392"/>
+                  </a:lnTo>
+                  <a:lnTo>
+                    <a:pt x="2821886" y="2537766"/>
+                  </a:lnTo>
+                  <a:lnTo>
+                    <a:pt x="2751339" y="2560396"/>
+                  </a:lnTo>
+                  <a:lnTo>
+                    <a:pt x="2680792" y="2582306"/>
+                  </a:lnTo>
+                  <a:lnTo>
+                    <a:pt x="2610245" y="2603520"/>
+                  </a:lnTo>
+                  <a:lnTo>
+                    <a:pt x="2539698" y="2624059"/>
+                  </a:lnTo>
+                  <a:lnTo>
+                    <a:pt x="2469151" y="2643945"/>
+                  </a:lnTo>
+                  <a:lnTo>
+                    <a:pt x="2398603" y="2663198"/>
+                  </a:lnTo>
+                  <a:lnTo>
+                    <a:pt x="2328056" y="2681839"/>
+                  </a:lnTo>
+                  <a:lnTo>
+                    <a:pt x="2257509" y="2699888"/>
+                  </a:lnTo>
+                  <a:lnTo>
+                    <a:pt x="2186962" y="2717362"/>
+                  </a:lnTo>
+                  <a:lnTo>
+                    <a:pt x="2116415" y="2734281"/>
+                  </a:lnTo>
+                  <a:lnTo>
+                    <a:pt x="2045868" y="2750662"/>
+                  </a:lnTo>
+                  <a:lnTo>
+                    <a:pt x="1975320" y="2766522"/>
+                  </a:lnTo>
+                  <a:lnTo>
+                    <a:pt x="1904773" y="2781878"/>
+                  </a:lnTo>
+                  <a:lnTo>
+                    <a:pt x="1834226" y="2796745"/>
+                  </a:lnTo>
+                  <a:lnTo>
+                    <a:pt x="1763679" y="2811140"/>
+                  </a:lnTo>
+                  <a:lnTo>
+                    <a:pt x="1693132" y="2825076"/>
+                  </a:lnTo>
+                  <a:lnTo>
+                    <a:pt x="1622584" y="2838570"/>
+                  </a:lnTo>
+                  <a:lnTo>
+                    <a:pt x="1552037" y="2851634"/>
+                  </a:lnTo>
+                  <a:lnTo>
+                    <a:pt x="1481490" y="2864284"/>
+                  </a:lnTo>
+                  <a:lnTo>
+                    <a:pt x="1410943" y="2876530"/>
+                  </a:lnTo>
+                  <a:lnTo>
+                    <a:pt x="1340396" y="2888388"/>
+                  </a:lnTo>
+                  <a:lnTo>
+                    <a:pt x="1269849" y="2899868"/>
+                  </a:lnTo>
+                  <a:lnTo>
+                    <a:pt x="1199301" y="2910983"/>
+                  </a:lnTo>
+                  <a:lnTo>
+                    <a:pt x="1128754" y="2921745"/>
+                  </a:lnTo>
+                  <a:lnTo>
+                    <a:pt x="1058207" y="2932165"/>
+                  </a:lnTo>
+                  <a:lnTo>
+                    <a:pt x="987660" y="2942253"/>
+                  </a:lnTo>
+                  <a:lnTo>
+                    <a:pt x="917113" y="2952020"/>
+                  </a:lnTo>
+                  <a:lnTo>
+                    <a:pt x="846566" y="2961477"/>
+                  </a:lnTo>
+                  <a:lnTo>
+                    <a:pt x="776018" y="2970633"/>
+                  </a:lnTo>
+                  <a:lnTo>
+                    <a:pt x="705471" y="2979498"/>
+                  </a:lnTo>
+                  <a:lnTo>
+                    <a:pt x="634924" y="2988081"/>
+                  </a:lnTo>
+                  <a:lnTo>
+                    <a:pt x="564377" y="2996391"/>
+                  </a:lnTo>
+                  <a:lnTo>
+                    <a:pt x="493830" y="3004437"/>
+                  </a:lnTo>
+                  <a:lnTo>
+                    <a:pt x="423283" y="3012227"/>
+                  </a:lnTo>
+                  <a:lnTo>
+                    <a:pt x="352735" y="3019769"/>
+                  </a:lnTo>
+                  <a:lnTo>
+                    <a:pt x="282188" y="3027072"/>
+                  </a:lnTo>
+                  <a:lnTo>
+                    <a:pt x="211641" y="3034142"/>
+                  </a:lnTo>
+                  <a:lnTo>
+                    <a:pt x="141094" y="3040987"/>
+                  </a:lnTo>
+                  <a:lnTo>
+                    <a:pt x="70547" y="3047615"/>
+                  </a:lnTo>
+                  <a:lnTo>
+                    <a:pt x="0" y="3054032"/>
                   </a:lnTo>
                   <a:close/>
                 </a:path>
@@ -3729,276 +3729,276 @@
           </p:nvSpPr>
           <p:spPr>
             <a:xfrm>
-              <a:off x="1172049" y="2073503"/>
-              <a:ext cx="6230682" cy="2651453"/>
+              <a:off x="1264853" y="2209169"/>
+              <a:ext cx="6137133" cy="2473099"/>
             </a:xfrm>
             <a:custGeom>
               <a:avLst/>
               <a:pathLst>
-                <a:path w="6230682" h="2651453">
+                <a:path w="6137133" h="2473099">
                   <a:moveTo>
-                    <a:pt x="0" y="2421287"/>
+                    <a:pt x="0" y="2258416"/>
                   </a:moveTo>
                   <a:lnTo>
-                    <a:pt x="71622" y="2427445"/>
-                  </a:lnTo>
-                  <a:lnTo>
-                    <a:pt x="143245" y="2433568"/>
-                  </a:lnTo>
-                  <a:lnTo>
-                    <a:pt x="214867" y="2439655"/>
-                  </a:lnTo>
-                  <a:lnTo>
-                    <a:pt x="286490" y="2445707"/>
-                  </a:lnTo>
-                  <a:lnTo>
-                    <a:pt x="358112" y="2451724"/>
-                  </a:lnTo>
-                  <a:lnTo>
-                    <a:pt x="429735" y="2457706"/>
-                  </a:lnTo>
-                  <a:lnTo>
-                    <a:pt x="501357" y="2463653"/>
-                  </a:lnTo>
-                  <a:lnTo>
-                    <a:pt x="572980" y="2469566"/>
-                  </a:lnTo>
-                  <a:lnTo>
-                    <a:pt x="644602" y="2475445"/>
-                  </a:lnTo>
-                  <a:lnTo>
-                    <a:pt x="716225" y="2481289"/>
-                  </a:lnTo>
-                  <a:lnTo>
-                    <a:pt x="787847" y="2487100"/>
-                  </a:lnTo>
-                  <a:lnTo>
-                    <a:pt x="859470" y="2492877"/>
-                  </a:lnTo>
-                  <a:lnTo>
-                    <a:pt x="931092" y="2498620"/>
-                  </a:lnTo>
-                  <a:lnTo>
-                    <a:pt x="1002715" y="2504330"/>
-                  </a:lnTo>
-                  <a:lnTo>
-                    <a:pt x="1074337" y="2510007"/>
-                  </a:lnTo>
-                  <a:lnTo>
-                    <a:pt x="1145960" y="2515652"/>
-                  </a:lnTo>
-                  <a:lnTo>
-                    <a:pt x="1217582" y="2521263"/>
-                  </a:lnTo>
-                  <a:lnTo>
-                    <a:pt x="1289205" y="2526842"/>
-                  </a:lnTo>
-                  <a:lnTo>
-                    <a:pt x="1360827" y="2532389"/>
-                  </a:lnTo>
-                  <a:lnTo>
-                    <a:pt x="1432450" y="2537903"/>
-                  </a:lnTo>
-                  <a:lnTo>
-                    <a:pt x="1504073" y="2543385"/>
-                  </a:lnTo>
-                  <a:lnTo>
-                    <a:pt x="1575695" y="2548836"/>
-                  </a:lnTo>
-                  <a:lnTo>
-                    <a:pt x="1647318" y="2554255"/>
-                  </a:lnTo>
-                  <a:lnTo>
-                    <a:pt x="1718940" y="2559643"/>
-                  </a:lnTo>
-                  <a:lnTo>
-                    <a:pt x="1790563" y="2564999"/>
-                  </a:lnTo>
-                  <a:lnTo>
-                    <a:pt x="1862185" y="2570325"/>
-                  </a:lnTo>
-                  <a:lnTo>
-                    <a:pt x="1933808" y="2575619"/>
-                  </a:lnTo>
-                  <a:lnTo>
-                    <a:pt x="2005430" y="2580883"/>
-                  </a:lnTo>
-                  <a:lnTo>
-                    <a:pt x="2077053" y="2586117"/>
-                  </a:lnTo>
-                  <a:lnTo>
-                    <a:pt x="2148675" y="2591320"/>
-                  </a:lnTo>
-                  <a:lnTo>
-                    <a:pt x="2220298" y="2596492"/>
-                  </a:lnTo>
-                  <a:lnTo>
-                    <a:pt x="2291920" y="2601635"/>
-                  </a:lnTo>
-                  <a:lnTo>
-                    <a:pt x="2363543" y="2606748"/>
-                  </a:lnTo>
-                  <a:lnTo>
-                    <a:pt x="2435165" y="2611832"/>
-                  </a:lnTo>
-                  <a:lnTo>
-                    <a:pt x="2506788" y="2616886"/>
-                  </a:lnTo>
-                  <a:lnTo>
-                    <a:pt x="2578410" y="2621910"/>
-                  </a:lnTo>
-                  <a:lnTo>
-                    <a:pt x="2650033" y="2626906"/>
-                  </a:lnTo>
-                  <a:lnTo>
-                    <a:pt x="2721655" y="2631872"/>
-                  </a:lnTo>
-                  <a:lnTo>
-                    <a:pt x="2793278" y="2636810"/>
-                  </a:lnTo>
-                  <a:lnTo>
-                    <a:pt x="2864901" y="2641719"/>
-                  </a:lnTo>
-                  <a:lnTo>
-                    <a:pt x="2936523" y="2646600"/>
-                  </a:lnTo>
-                  <a:lnTo>
-                    <a:pt x="3008146" y="2651453"/>
-                  </a:lnTo>
-                  <a:lnTo>
-                    <a:pt x="3079768" y="2643110"/>
-                  </a:lnTo>
-                  <a:lnTo>
-                    <a:pt x="3151391" y="2615500"/>
-                  </a:lnTo>
-                  <a:lnTo>
-                    <a:pt x="3223013" y="2586983"/>
-                  </a:lnTo>
-                  <a:lnTo>
-                    <a:pt x="3294636" y="2557530"/>
-                  </a:lnTo>
-                  <a:lnTo>
-                    <a:pt x="3366258" y="2527109"/>
-                  </a:lnTo>
-                  <a:lnTo>
-                    <a:pt x="3437881" y="2495689"/>
-                  </a:lnTo>
-                  <a:lnTo>
-                    <a:pt x="3509503" y="2463237"/>
-                  </a:lnTo>
-                  <a:lnTo>
-                    <a:pt x="3581126" y="2429720"/>
-                  </a:lnTo>
-                  <a:lnTo>
-                    <a:pt x="3652748" y="2395101"/>
-                  </a:lnTo>
-                  <a:lnTo>
-                    <a:pt x="3724371" y="2359345"/>
-                  </a:lnTo>
-                  <a:lnTo>
-                    <a:pt x="3795993" y="2322415"/>
-                  </a:lnTo>
-                  <a:lnTo>
-                    <a:pt x="3867616" y="2284272"/>
-                  </a:lnTo>
-                  <a:lnTo>
-                    <a:pt x="3939238" y="2244877"/>
-                  </a:lnTo>
-                  <a:lnTo>
-                    <a:pt x="4010861" y="2204187"/>
-                  </a:lnTo>
-                  <a:lnTo>
-                    <a:pt x="4082483" y="2162161"/>
-                  </a:lnTo>
-                  <a:lnTo>
-                    <a:pt x="4154106" y="2118755"/>
-                  </a:lnTo>
-                  <a:lnTo>
-                    <a:pt x="4225729" y="2073923"/>
-                  </a:lnTo>
-                  <a:lnTo>
-                    <a:pt x="4297351" y="2027618"/>
-                  </a:lnTo>
-                  <a:lnTo>
-                    <a:pt x="4368974" y="1979793"/>
-                  </a:lnTo>
-                  <a:lnTo>
-                    <a:pt x="4440596" y="1930397"/>
-                  </a:lnTo>
-                  <a:lnTo>
-                    <a:pt x="4512219" y="1879379"/>
-                  </a:lnTo>
-                  <a:lnTo>
-                    <a:pt x="4583841" y="1826685"/>
-                  </a:lnTo>
-                  <a:lnTo>
-                    <a:pt x="4655464" y="1772260"/>
-                  </a:lnTo>
-                  <a:lnTo>
-                    <a:pt x="4727086" y="1716048"/>
-                  </a:lnTo>
-                  <a:lnTo>
-                    <a:pt x="4798709" y="1657989"/>
-                  </a:lnTo>
-                  <a:lnTo>
-                    <a:pt x="4870331" y="1598024"/>
-                  </a:lnTo>
-                  <a:lnTo>
-                    <a:pt x="4941954" y="1536089"/>
-                  </a:lnTo>
-                  <a:lnTo>
-                    <a:pt x="5013576" y="1472120"/>
-                  </a:lnTo>
-                  <a:lnTo>
-                    <a:pt x="5085199" y="1406050"/>
-                  </a:lnTo>
-                  <a:lnTo>
-                    <a:pt x="5156821" y="1337810"/>
-                  </a:lnTo>
-                  <a:lnTo>
-                    <a:pt x="5228444" y="1267328"/>
-                  </a:lnTo>
-                  <a:lnTo>
-                    <a:pt x="5300066" y="1194532"/>
-                  </a:lnTo>
-                  <a:lnTo>
-                    <a:pt x="5371689" y="1119344"/>
-                  </a:lnTo>
-                  <a:lnTo>
-                    <a:pt x="5443311" y="1041688"/>
-                  </a:lnTo>
-                  <a:lnTo>
-                    <a:pt x="5514934" y="961480"/>
-                  </a:lnTo>
-                  <a:lnTo>
-                    <a:pt x="5586557" y="878639"/>
-                  </a:lnTo>
-                  <a:lnTo>
-                    <a:pt x="5658179" y="793076"/>
-                  </a:lnTo>
-                  <a:lnTo>
-                    <a:pt x="5729802" y="704704"/>
-                  </a:lnTo>
-                  <a:lnTo>
-                    <a:pt x="5801424" y="613428"/>
-                  </a:lnTo>
-                  <a:lnTo>
-                    <a:pt x="5873047" y="519155"/>
-                  </a:lnTo>
-                  <a:lnTo>
-                    <a:pt x="5944669" y="421786"/>
-                  </a:lnTo>
-                  <a:lnTo>
-                    <a:pt x="6016292" y="321219"/>
-                  </a:lnTo>
-                  <a:lnTo>
-                    <a:pt x="6087914" y="217348"/>
-                  </a:lnTo>
-                  <a:lnTo>
-                    <a:pt x="6159537" y="110066"/>
-                  </a:lnTo>
-                  <a:lnTo>
-                    <a:pt x="6230682" y="0"/>
+                    <a:pt x="70547" y="2264160"/>
+                  </a:lnTo>
+                  <a:lnTo>
+                    <a:pt x="141094" y="2269871"/>
+                  </a:lnTo>
+                  <a:lnTo>
+                    <a:pt x="211641" y="2275548"/>
+                  </a:lnTo>
+                  <a:lnTo>
+                    <a:pt x="282188" y="2281193"/>
+                  </a:lnTo>
+                  <a:lnTo>
+                    <a:pt x="352735" y="2286805"/>
+                  </a:lnTo>
+                  <a:lnTo>
+                    <a:pt x="423283" y="2292385"/>
+                  </a:lnTo>
+                  <a:lnTo>
+                    <a:pt x="493830" y="2297932"/>
+                  </a:lnTo>
+                  <a:lnTo>
+                    <a:pt x="564377" y="2303447"/>
+                  </a:lnTo>
+                  <a:lnTo>
+                    <a:pt x="634924" y="2308931"/>
+                  </a:lnTo>
+                  <a:lnTo>
+                    <a:pt x="705471" y="2314382"/>
+                  </a:lnTo>
+                  <a:lnTo>
+                    <a:pt x="776018" y="2319802"/>
+                  </a:lnTo>
+                  <a:lnTo>
+                    <a:pt x="846566" y="2325190"/>
+                  </a:lnTo>
+                  <a:lnTo>
+                    <a:pt x="917113" y="2330547"/>
+                  </a:lnTo>
+                  <a:lnTo>
+                    <a:pt x="987660" y="2335873"/>
+                  </a:lnTo>
+                  <a:lnTo>
+                    <a:pt x="1058207" y="2341168"/>
+                  </a:lnTo>
+                  <a:lnTo>
+                    <a:pt x="1128754" y="2346433"/>
+                  </a:lnTo>
+                  <a:lnTo>
+                    <a:pt x="1199301" y="2351667"/>
+                  </a:lnTo>
+                  <a:lnTo>
+                    <a:pt x="1269849" y="2356871"/>
+                  </a:lnTo>
+                  <a:lnTo>
+                    <a:pt x="1340396" y="2362044"/>
+                  </a:lnTo>
+                  <a:lnTo>
+                    <a:pt x="1410943" y="2367188"/>
+                  </a:lnTo>
+                  <a:lnTo>
+                    <a:pt x="1481490" y="2372301"/>
+                  </a:lnTo>
+                  <a:lnTo>
+                    <a:pt x="1552037" y="2377385"/>
+                  </a:lnTo>
+                  <a:lnTo>
+                    <a:pt x="1622584" y="2382440"/>
+                  </a:lnTo>
+                  <a:lnTo>
+                    <a:pt x="1693132" y="2387465"/>
+                  </a:lnTo>
+                  <a:lnTo>
+                    <a:pt x="1763679" y="2392461"/>
+                  </a:lnTo>
+                  <a:lnTo>
+                    <a:pt x="1834226" y="2397428"/>
+                  </a:lnTo>
+                  <a:lnTo>
+                    <a:pt x="1904773" y="2402367"/>
+                  </a:lnTo>
+                  <a:lnTo>
+                    <a:pt x="1975320" y="2407277"/>
+                  </a:lnTo>
+                  <a:lnTo>
+                    <a:pt x="2045868" y="2412158"/>
+                  </a:lnTo>
+                  <a:lnTo>
+                    <a:pt x="2116415" y="2417011"/>
+                  </a:lnTo>
+                  <a:lnTo>
+                    <a:pt x="2186962" y="2421836"/>
+                  </a:lnTo>
+                  <a:lnTo>
+                    <a:pt x="2257509" y="2426633"/>
+                  </a:lnTo>
+                  <a:lnTo>
+                    <a:pt x="2328056" y="2431402"/>
+                  </a:lnTo>
+                  <a:lnTo>
+                    <a:pt x="2398603" y="2436143"/>
+                  </a:lnTo>
+                  <a:lnTo>
+                    <a:pt x="2469151" y="2440857"/>
+                  </a:lnTo>
+                  <a:lnTo>
+                    <a:pt x="2539698" y="2445544"/>
+                  </a:lnTo>
+                  <a:lnTo>
+                    <a:pt x="2610245" y="2450204"/>
+                  </a:lnTo>
+                  <a:lnTo>
+                    <a:pt x="2680792" y="2454836"/>
+                  </a:lnTo>
+                  <a:lnTo>
+                    <a:pt x="2751339" y="2459442"/>
+                  </a:lnTo>
+                  <a:lnTo>
+                    <a:pt x="2821886" y="2464021"/>
+                  </a:lnTo>
+                  <a:lnTo>
+                    <a:pt x="2892434" y="2468573"/>
+                  </a:lnTo>
+                  <a:lnTo>
+                    <a:pt x="2962981" y="2473099"/>
+                  </a:lnTo>
+                  <a:lnTo>
+                    <a:pt x="3033528" y="2465318"/>
+                  </a:lnTo>
+                  <a:lnTo>
+                    <a:pt x="3104075" y="2439565"/>
+                  </a:lnTo>
+                  <a:lnTo>
+                    <a:pt x="3174622" y="2412966"/>
+                  </a:lnTo>
+                  <a:lnTo>
+                    <a:pt x="3245169" y="2385494"/>
+                  </a:lnTo>
+                  <a:lnTo>
+                    <a:pt x="3315717" y="2357120"/>
+                  </a:lnTo>
+                  <a:lnTo>
+                    <a:pt x="3386264" y="2327813"/>
+                  </a:lnTo>
+                  <a:lnTo>
+                    <a:pt x="3456811" y="2297544"/>
+                  </a:lnTo>
+                  <a:lnTo>
+                    <a:pt x="3527358" y="2266281"/>
+                  </a:lnTo>
+                  <a:lnTo>
+                    <a:pt x="3597905" y="2233991"/>
+                  </a:lnTo>
+                  <a:lnTo>
+                    <a:pt x="3668452" y="2200641"/>
+                  </a:lnTo>
+                  <a:lnTo>
+                    <a:pt x="3739000" y="2166195"/>
+                  </a:lnTo>
+                  <a:lnTo>
+                    <a:pt x="3809547" y="2130618"/>
+                  </a:lnTo>
+                  <a:lnTo>
+                    <a:pt x="3880094" y="2093872"/>
+                  </a:lnTo>
+                  <a:lnTo>
+                    <a:pt x="3950641" y="2055920"/>
+                  </a:lnTo>
+                  <a:lnTo>
+                    <a:pt x="4021188" y="2016721"/>
+                  </a:lnTo>
+                  <a:lnTo>
+                    <a:pt x="4091736" y="1976234"/>
+                  </a:lnTo>
+                  <a:lnTo>
+                    <a:pt x="4162283" y="1934418"/>
+                  </a:lnTo>
+                  <a:lnTo>
+                    <a:pt x="4232830" y="1891228"/>
+                  </a:lnTo>
+                  <a:lnTo>
+                    <a:pt x="4303377" y="1846620"/>
+                  </a:lnTo>
+                  <a:lnTo>
+                    <a:pt x="4373924" y="1800546"/>
+                  </a:lnTo>
+                  <a:lnTo>
+                    <a:pt x="4444471" y="1752960"/>
+                  </a:lnTo>
+                  <a:lnTo>
+                    <a:pt x="4515019" y="1703810"/>
+                  </a:lnTo>
+                  <a:lnTo>
+                    <a:pt x="4585566" y="1653047"/>
+                  </a:lnTo>
+                  <a:lnTo>
+                    <a:pt x="4656113" y="1600615"/>
+                  </a:lnTo>
+                  <a:lnTo>
+                    <a:pt x="4726660" y="1546462"/>
+                  </a:lnTo>
+                  <a:lnTo>
+                    <a:pt x="4797207" y="1490531"/>
+                  </a:lnTo>
+                  <a:lnTo>
+                    <a:pt x="4867754" y="1432762"/>
+                  </a:lnTo>
+                  <a:lnTo>
+                    <a:pt x="4938302" y="1373096"/>
+                  </a:lnTo>
+                  <a:lnTo>
+                    <a:pt x="5008849" y="1311470"/>
+                  </a:lnTo>
+                  <a:lnTo>
+                    <a:pt x="5079396" y="1247820"/>
+                  </a:lnTo>
+                  <a:lnTo>
+                    <a:pt x="5149943" y="1182080"/>
+                  </a:lnTo>
+                  <a:lnTo>
+                    <a:pt x="5220490" y="1114180"/>
+                  </a:lnTo>
+                  <a:lnTo>
+                    <a:pt x="5291037" y="1044050"/>
+                  </a:lnTo>
+                  <a:lnTo>
+                    <a:pt x="5361585" y="971617"/>
+                  </a:lnTo>
+                  <a:lnTo>
+                    <a:pt x="5432132" y="896805"/>
+                  </a:lnTo>
+                  <a:lnTo>
+                    <a:pt x="5502679" y="819536"/>
+                  </a:lnTo>
+                  <a:lnTo>
+                    <a:pt x="5573226" y="739729"/>
+                  </a:lnTo>
+                  <a:lnTo>
+                    <a:pt x="5643773" y="657301"/>
+                  </a:lnTo>
+                  <a:lnTo>
+                    <a:pt x="5714320" y="572165"/>
+                  </a:lnTo>
+                  <a:lnTo>
+                    <a:pt x="5784868" y="484234"/>
+                  </a:lnTo>
+                  <a:lnTo>
+                    <a:pt x="5855415" y="393414"/>
+                  </a:lnTo>
+                  <a:lnTo>
+                    <a:pt x="5925962" y="299611"/>
+                  </a:lnTo>
+                  <a:lnTo>
+                    <a:pt x="5996509" y="202728"/>
+                  </a:lnTo>
+                  <a:lnTo>
+                    <a:pt x="6067056" y="102662"/>
+                  </a:lnTo>
+                  <a:lnTo>
+                    <a:pt x="6137133" y="0"/>
                   </a:lnTo>
                 </a:path>
               </a:pathLst>
@@ -4018,312 +4018,312 @@
           </p:nvSpPr>
           <p:spPr>
             <a:xfrm>
-              <a:off x="1172049" y="4729780"/>
-              <a:ext cx="7090630" cy="618004"/>
+              <a:off x="1264853" y="4686768"/>
+              <a:ext cx="6984170" cy="576433"/>
             </a:xfrm>
             <a:custGeom>
               <a:avLst/>
               <a:pathLst>
-                <a:path w="7090630" h="618004">
+                <a:path w="6984170" h="576433">
                   <a:moveTo>
-                    <a:pt x="7090630" y="229924"/>
+                    <a:pt x="6984170" y="214458"/>
                   </a:moveTo>
                   <a:lnTo>
-                    <a:pt x="7019007" y="226440"/>
-                  </a:lnTo>
-                  <a:lnTo>
-                    <a:pt x="6947385" y="222936"/>
-                  </a:lnTo>
-                  <a:lnTo>
-                    <a:pt x="6875762" y="219411"/>
-                  </a:lnTo>
-                  <a:lnTo>
-                    <a:pt x="6804139" y="215866"/>
-                  </a:lnTo>
-                  <a:lnTo>
-                    <a:pt x="6732517" y="212300"/>
-                  </a:lnTo>
-                  <a:lnTo>
-                    <a:pt x="6660894" y="208714"/>
-                  </a:lnTo>
-                  <a:lnTo>
-                    <a:pt x="6589272" y="205106"/>
-                  </a:lnTo>
-                  <a:lnTo>
-                    <a:pt x="6517649" y="201478"/>
-                  </a:lnTo>
-                  <a:lnTo>
-                    <a:pt x="6446027" y="197828"/>
-                  </a:lnTo>
-                  <a:lnTo>
-                    <a:pt x="6374404" y="194157"/>
-                  </a:lnTo>
-                  <a:lnTo>
-                    <a:pt x="6302782" y="190465"/>
-                  </a:lnTo>
-                  <a:lnTo>
-                    <a:pt x="6231159" y="186751"/>
-                  </a:lnTo>
-                  <a:lnTo>
-                    <a:pt x="6159537" y="183016"/>
-                  </a:lnTo>
-                  <a:lnTo>
-                    <a:pt x="6087914" y="179258"/>
-                  </a:lnTo>
-                  <a:lnTo>
-                    <a:pt x="6016292" y="175479"/>
-                  </a:lnTo>
-                  <a:lnTo>
-                    <a:pt x="5944669" y="171678"/>
-                  </a:lnTo>
-                  <a:lnTo>
-                    <a:pt x="5873047" y="167855"/>
-                  </a:lnTo>
-                  <a:lnTo>
-                    <a:pt x="5801424" y="164009"/>
-                  </a:lnTo>
-                  <a:lnTo>
-                    <a:pt x="5729802" y="160141"/>
-                  </a:lnTo>
-                  <a:lnTo>
-                    <a:pt x="5658179" y="156250"/>
-                  </a:lnTo>
-                  <a:lnTo>
-                    <a:pt x="5586557" y="152337"/>
-                  </a:lnTo>
-                  <a:lnTo>
-                    <a:pt x="5514934" y="148401"/>
-                  </a:lnTo>
-                  <a:lnTo>
-                    <a:pt x="5443311" y="144442"/>
-                  </a:lnTo>
-                  <a:lnTo>
-                    <a:pt x="5371689" y="140459"/>
-                  </a:lnTo>
-                  <a:lnTo>
-                    <a:pt x="5300066" y="136454"/>
-                  </a:lnTo>
-                  <a:lnTo>
-                    <a:pt x="5228444" y="132425"/>
-                  </a:lnTo>
-                  <a:lnTo>
-                    <a:pt x="5156821" y="128373"/>
-                  </a:lnTo>
-                  <a:lnTo>
-                    <a:pt x="5085199" y="124297"/>
-                  </a:lnTo>
-                  <a:lnTo>
-                    <a:pt x="5013576" y="120198"/>
-                  </a:lnTo>
-                  <a:lnTo>
-                    <a:pt x="4941954" y="116074"/>
-                  </a:lnTo>
-                  <a:lnTo>
-                    <a:pt x="4870331" y="111927"/>
-                  </a:lnTo>
-                  <a:lnTo>
-                    <a:pt x="4798709" y="107755"/>
-                  </a:lnTo>
-                  <a:lnTo>
-                    <a:pt x="4727086" y="103559"/>
-                  </a:lnTo>
-                  <a:lnTo>
-                    <a:pt x="4655464" y="99338"/>
-                  </a:lnTo>
-                  <a:lnTo>
-                    <a:pt x="4583841" y="95093"/>
-                  </a:lnTo>
-                  <a:lnTo>
-                    <a:pt x="4512219" y="90823"/>
-                  </a:lnTo>
-                  <a:lnTo>
-                    <a:pt x="4440596" y="86528"/>
-                  </a:lnTo>
-                  <a:lnTo>
-                    <a:pt x="4368974" y="82209"/>
-                  </a:lnTo>
-                  <a:lnTo>
-                    <a:pt x="4297351" y="77864"/>
-                  </a:lnTo>
-                  <a:lnTo>
-                    <a:pt x="4225729" y="73493"/>
-                  </a:lnTo>
-                  <a:lnTo>
-                    <a:pt x="4154106" y="69097"/>
-                  </a:lnTo>
-                  <a:lnTo>
-                    <a:pt x="4082483" y="64676"/>
-                  </a:lnTo>
-                  <a:lnTo>
-                    <a:pt x="4010861" y="60229"/>
-                  </a:lnTo>
-                  <a:lnTo>
-                    <a:pt x="3939238" y="55756"/>
-                  </a:lnTo>
-                  <a:lnTo>
-                    <a:pt x="3867616" y="51256"/>
-                  </a:lnTo>
-                  <a:lnTo>
-                    <a:pt x="3795993" y="46731"/>
-                  </a:lnTo>
-                  <a:lnTo>
-                    <a:pt x="3724371" y="42179"/>
-                  </a:lnTo>
-                  <a:lnTo>
-                    <a:pt x="3652748" y="37601"/>
-                  </a:lnTo>
-                  <a:lnTo>
-                    <a:pt x="3581126" y="32996"/>
-                  </a:lnTo>
-                  <a:lnTo>
-                    <a:pt x="3509503" y="28364"/>
-                  </a:lnTo>
-                  <a:lnTo>
-                    <a:pt x="3437881" y="23705"/>
-                  </a:lnTo>
-                  <a:lnTo>
-                    <a:pt x="3366258" y="19019"/>
-                  </a:lnTo>
-                  <a:lnTo>
-                    <a:pt x="3294636" y="14305"/>
-                  </a:lnTo>
-                  <a:lnTo>
-                    <a:pt x="3223013" y="9564"/>
-                  </a:lnTo>
-                  <a:lnTo>
-                    <a:pt x="3151391" y="4796"/>
-                  </a:lnTo>
-                  <a:lnTo>
-                    <a:pt x="3079768" y="0"/>
-                  </a:lnTo>
-                  <a:lnTo>
-                    <a:pt x="3008146" y="13565"/>
-                  </a:lnTo>
-                  <a:lnTo>
-                    <a:pt x="2936523" y="39447"/>
-                  </a:lnTo>
-                  <a:lnTo>
-                    <a:pt x="2864901" y="64505"/>
-                  </a:lnTo>
-                  <a:lnTo>
-                    <a:pt x="2793278" y="88767"/>
-                  </a:lnTo>
-                  <a:lnTo>
-                    <a:pt x="2721655" y="112258"/>
-                  </a:lnTo>
-                  <a:lnTo>
-                    <a:pt x="2650033" y="135001"/>
-                  </a:lnTo>
-                  <a:lnTo>
-                    <a:pt x="2578410" y="157022"/>
-                  </a:lnTo>
-                  <a:lnTo>
-                    <a:pt x="2506788" y="178342"/>
-                  </a:lnTo>
-                  <a:lnTo>
-                    <a:pt x="2435165" y="198984"/>
-                  </a:lnTo>
-                  <a:lnTo>
-                    <a:pt x="2363543" y="218969"/>
-                  </a:lnTo>
-                  <a:lnTo>
-                    <a:pt x="2291920" y="238319"/>
-                  </a:lnTo>
-                  <a:lnTo>
-                    <a:pt x="2220298" y="257054"/>
-                  </a:lnTo>
-                  <a:lnTo>
-                    <a:pt x="2148675" y="275193"/>
-                  </a:lnTo>
-                  <a:lnTo>
-                    <a:pt x="2077053" y="292755"/>
-                  </a:lnTo>
-                  <a:lnTo>
-                    <a:pt x="2005430" y="309759"/>
-                  </a:lnTo>
-                  <a:lnTo>
-                    <a:pt x="1933808" y="326222"/>
-                  </a:lnTo>
-                  <a:lnTo>
-                    <a:pt x="1862185" y="342162"/>
-                  </a:lnTo>
-                  <a:lnTo>
-                    <a:pt x="1790563" y="357594"/>
-                  </a:lnTo>
-                  <a:lnTo>
-                    <a:pt x="1718940" y="372536"/>
-                  </a:lnTo>
-                  <a:lnTo>
-                    <a:pt x="1647318" y="387003"/>
-                  </a:lnTo>
-                  <a:lnTo>
-                    <a:pt x="1575695" y="401010"/>
-                  </a:lnTo>
-                  <a:lnTo>
-                    <a:pt x="1504073" y="414571"/>
-                  </a:lnTo>
-                  <a:lnTo>
-                    <a:pt x="1432450" y="427701"/>
-                  </a:lnTo>
-                  <a:lnTo>
-                    <a:pt x="1360827" y="440413"/>
-                  </a:lnTo>
-                  <a:lnTo>
-                    <a:pt x="1289205" y="452722"/>
-                  </a:lnTo>
-                  <a:lnTo>
-                    <a:pt x="1217582" y="464639"/>
-                  </a:lnTo>
-                  <a:lnTo>
-                    <a:pt x="1145960" y="476176"/>
-                  </a:lnTo>
-                  <a:lnTo>
-                    <a:pt x="1074337" y="487347"/>
-                  </a:lnTo>
-                  <a:lnTo>
-                    <a:pt x="1002715" y="498163"/>
-                  </a:lnTo>
-                  <a:lnTo>
-                    <a:pt x="931092" y="508635"/>
-                  </a:lnTo>
-                  <a:lnTo>
-                    <a:pt x="859470" y="518774"/>
-                  </a:lnTo>
-                  <a:lnTo>
-                    <a:pt x="787847" y="528590"/>
-                  </a:lnTo>
-                  <a:lnTo>
-                    <a:pt x="716225" y="538094"/>
-                  </a:lnTo>
-                  <a:lnTo>
-                    <a:pt x="644602" y="547297"/>
-                  </a:lnTo>
-                  <a:lnTo>
-                    <a:pt x="572980" y="556206"/>
-                  </a:lnTo>
-                  <a:lnTo>
-                    <a:pt x="501357" y="564832"/>
-                  </a:lnTo>
-                  <a:lnTo>
-                    <a:pt x="429735" y="573184"/>
-                  </a:lnTo>
-                  <a:lnTo>
-                    <a:pt x="358112" y="581270"/>
-                  </a:lnTo>
-                  <a:lnTo>
-                    <a:pt x="286490" y="589099"/>
-                  </a:lnTo>
-                  <a:lnTo>
-                    <a:pt x="214867" y="596679"/>
-                  </a:lnTo>
-                  <a:lnTo>
-                    <a:pt x="143245" y="604018"/>
-                  </a:lnTo>
-                  <a:lnTo>
-                    <a:pt x="71622" y="611124"/>
-                  </a:lnTo>
-                  <a:lnTo>
-                    <a:pt x="0" y="618004"/>
+                    <a:pt x="6913622" y="211208"/>
+                  </a:lnTo>
+                  <a:lnTo>
+                    <a:pt x="6843075" y="207940"/>
+                  </a:lnTo>
+                  <a:lnTo>
+                    <a:pt x="6772528" y="204652"/>
+                  </a:lnTo>
+                  <a:lnTo>
+                    <a:pt x="6701981" y="201346"/>
+                  </a:lnTo>
+                  <a:lnTo>
+                    <a:pt x="6631434" y="198020"/>
+                  </a:lnTo>
+                  <a:lnTo>
+                    <a:pt x="6560887" y="194674"/>
+                  </a:lnTo>
+                  <a:lnTo>
+                    <a:pt x="6490339" y="191310"/>
+                  </a:lnTo>
+                  <a:lnTo>
+                    <a:pt x="6419792" y="187925"/>
+                  </a:lnTo>
+                  <a:lnTo>
+                    <a:pt x="6349245" y="184521"/>
+                  </a:lnTo>
+                  <a:lnTo>
+                    <a:pt x="6278698" y="181097"/>
+                  </a:lnTo>
+                  <a:lnTo>
+                    <a:pt x="6208151" y="177653"/>
+                  </a:lnTo>
+                  <a:lnTo>
+                    <a:pt x="6137604" y="174189"/>
+                  </a:lnTo>
+                  <a:lnTo>
+                    <a:pt x="6067056" y="170705"/>
+                  </a:lnTo>
+                  <a:lnTo>
+                    <a:pt x="5996509" y="167200"/>
+                  </a:lnTo>
+                  <a:lnTo>
+                    <a:pt x="5925962" y="163675"/>
+                  </a:lnTo>
+                  <a:lnTo>
+                    <a:pt x="5855415" y="160130"/>
+                  </a:lnTo>
+                  <a:lnTo>
+                    <a:pt x="5784868" y="156564"/>
+                  </a:lnTo>
+                  <a:lnTo>
+                    <a:pt x="5714320" y="152977"/>
+                  </a:lnTo>
+                  <a:lnTo>
+                    <a:pt x="5643773" y="149369"/>
+                  </a:lnTo>
+                  <a:lnTo>
+                    <a:pt x="5573226" y="145740"/>
+                  </a:lnTo>
+                  <a:lnTo>
+                    <a:pt x="5502679" y="142090"/>
+                  </a:lnTo>
+                  <a:lnTo>
+                    <a:pt x="5432132" y="138418"/>
+                  </a:lnTo>
+                  <a:lnTo>
+                    <a:pt x="5361585" y="134726"/>
+                  </a:lnTo>
+                  <a:lnTo>
+                    <a:pt x="5291037" y="131011"/>
+                  </a:lnTo>
+                  <a:lnTo>
+                    <a:pt x="5220490" y="127275"/>
+                  </a:lnTo>
+                  <a:lnTo>
+                    <a:pt x="5149943" y="123518"/>
+                  </a:lnTo>
+                  <a:lnTo>
+                    <a:pt x="5079396" y="119738"/>
+                  </a:lnTo>
+                  <a:lnTo>
+                    <a:pt x="5008849" y="115936"/>
+                  </a:lnTo>
+                  <a:lnTo>
+                    <a:pt x="4938302" y="112112"/>
+                  </a:lnTo>
+                  <a:lnTo>
+                    <a:pt x="4867754" y="108266"/>
+                  </a:lnTo>
+                  <a:lnTo>
+                    <a:pt x="4797207" y="104398"/>
+                  </a:lnTo>
+                  <a:lnTo>
+                    <a:pt x="4726660" y="100506"/>
+                  </a:lnTo>
+                  <a:lnTo>
+                    <a:pt x="4656113" y="96593"/>
+                  </a:lnTo>
+                  <a:lnTo>
+                    <a:pt x="4585566" y="92656"/>
+                  </a:lnTo>
+                  <a:lnTo>
+                    <a:pt x="4515019" y="88696"/>
+                  </a:lnTo>
+                  <a:lnTo>
+                    <a:pt x="4444471" y="84714"/>
+                  </a:lnTo>
+                  <a:lnTo>
+                    <a:pt x="4373924" y="80708"/>
+                  </a:lnTo>
+                  <a:lnTo>
+                    <a:pt x="4303377" y="76679"/>
+                  </a:lnTo>
+                  <a:lnTo>
+                    <a:pt x="4232830" y="72626"/>
+                  </a:lnTo>
+                  <a:lnTo>
+                    <a:pt x="4162283" y="68550"/>
+                  </a:lnTo>
+                  <a:lnTo>
+                    <a:pt x="4091736" y="64449"/>
+                  </a:lnTo>
+                  <a:lnTo>
+                    <a:pt x="4021188" y="60325"/>
+                  </a:lnTo>
+                  <a:lnTo>
+                    <a:pt x="3950641" y="56177"/>
+                  </a:lnTo>
+                  <a:lnTo>
+                    <a:pt x="3880094" y="52005"/>
+                  </a:lnTo>
+                  <a:lnTo>
+                    <a:pt x="3809547" y="47809"/>
+                  </a:lnTo>
+                  <a:lnTo>
+                    <a:pt x="3739000" y="43587"/>
+                  </a:lnTo>
+                  <a:lnTo>
+                    <a:pt x="3668452" y="39342"/>
+                  </a:lnTo>
+                  <a:lnTo>
+                    <a:pt x="3597905" y="35071"/>
+                  </a:lnTo>
+                  <a:lnTo>
+                    <a:pt x="3527358" y="30776"/>
+                  </a:lnTo>
+                  <a:lnTo>
+                    <a:pt x="3456811" y="26456"/>
+                  </a:lnTo>
+                  <a:lnTo>
+                    <a:pt x="3386264" y="22110"/>
+                  </a:lnTo>
+                  <a:lnTo>
+                    <a:pt x="3315717" y="17739"/>
+                  </a:lnTo>
+                  <a:lnTo>
+                    <a:pt x="3245169" y="13343"/>
+                  </a:lnTo>
+                  <a:lnTo>
+                    <a:pt x="3174622" y="8921"/>
+                  </a:lnTo>
+                  <a:lnTo>
+                    <a:pt x="3104075" y="4473"/>
+                  </a:lnTo>
+                  <a:lnTo>
+                    <a:pt x="3033528" y="0"/>
+                  </a:lnTo>
+                  <a:lnTo>
+                    <a:pt x="2962981" y="12652"/>
+                  </a:lnTo>
+                  <a:lnTo>
+                    <a:pt x="2892434" y="36793"/>
+                  </a:lnTo>
+                  <a:lnTo>
+                    <a:pt x="2821886" y="60166"/>
+                  </a:lnTo>
+                  <a:lnTo>
+                    <a:pt x="2751339" y="82796"/>
+                  </a:lnTo>
+                  <a:lnTo>
+                    <a:pt x="2680792" y="104707"/>
+                  </a:lnTo>
+                  <a:lnTo>
+                    <a:pt x="2610245" y="125920"/>
+                  </a:lnTo>
+                  <a:lnTo>
+                    <a:pt x="2539698" y="146459"/>
+                  </a:lnTo>
+                  <a:lnTo>
+                    <a:pt x="2469151" y="166345"/>
+                  </a:lnTo>
+                  <a:lnTo>
+                    <a:pt x="2398603" y="185599"/>
+                  </a:lnTo>
+                  <a:lnTo>
+                    <a:pt x="2328056" y="204240"/>
+                  </a:lnTo>
+                  <a:lnTo>
+                    <a:pt x="2257509" y="222289"/>
+                  </a:lnTo>
+                  <a:lnTo>
+                    <a:pt x="2186962" y="239763"/>
+                  </a:lnTo>
+                  <a:lnTo>
+                    <a:pt x="2116415" y="256682"/>
+                  </a:lnTo>
+                  <a:lnTo>
+                    <a:pt x="2045868" y="273063"/>
+                  </a:lnTo>
+                  <a:lnTo>
+                    <a:pt x="1975320" y="288923"/>
+                  </a:lnTo>
+                  <a:lnTo>
+                    <a:pt x="1904773" y="304278"/>
+                  </a:lnTo>
+                  <a:lnTo>
+                    <a:pt x="1834226" y="319146"/>
+                  </a:lnTo>
+                  <a:lnTo>
+                    <a:pt x="1763679" y="333540"/>
+                  </a:lnTo>
+                  <a:lnTo>
+                    <a:pt x="1693132" y="347477"/>
+                  </a:lnTo>
+                  <a:lnTo>
+                    <a:pt x="1622584" y="360971"/>
+                  </a:lnTo>
+                  <a:lnTo>
+                    <a:pt x="1552037" y="374035"/>
+                  </a:lnTo>
+                  <a:lnTo>
+                    <a:pt x="1481490" y="386684"/>
+                  </a:lnTo>
+                  <a:lnTo>
+                    <a:pt x="1410943" y="398931"/>
+                  </a:lnTo>
+                  <a:lnTo>
+                    <a:pt x="1340396" y="410788"/>
+                  </a:lnTo>
+                  <a:lnTo>
+                    <a:pt x="1269849" y="422269"/>
+                  </a:lnTo>
+                  <a:lnTo>
+                    <a:pt x="1199301" y="433384"/>
+                  </a:lnTo>
+                  <a:lnTo>
+                    <a:pt x="1128754" y="444146"/>
+                  </a:lnTo>
+                  <a:lnTo>
+                    <a:pt x="1058207" y="454565"/>
+                  </a:lnTo>
+                  <a:lnTo>
+                    <a:pt x="987660" y="464654"/>
+                  </a:lnTo>
+                  <a:lnTo>
+                    <a:pt x="917113" y="474421"/>
+                  </a:lnTo>
+                  <a:lnTo>
+                    <a:pt x="846566" y="483878"/>
+                  </a:lnTo>
+                  <a:lnTo>
+                    <a:pt x="776018" y="493034"/>
+                  </a:lnTo>
+                  <a:lnTo>
+                    <a:pt x="705471" y="501899"/>
+                  </a:lnTo>
+                  <a:lnTo>
+                    <a:pt x="634924" y="510482"/>
+                  </a:lnTo>
+                  <a:lnTo>
+                    <a:pt x="564377" y="518792"/>
+                  </a:lnTo>
+                  <a:lnTo>
+                    <a:pt x="493830" y="526838"/>
+                  </a:lnTo>
+                  <a:lnTo>
+                    <a:pt x="423283" y="534628"/>
+                  </a:lnTo>
+                  <a:lnTo>
+                    <a:pt x="352735" y="542170"/>
+                  </a:lnTo>
+                  <a:lnTo>
+                    <a:pt x="282188" y="549472"/>
+                  </a:lnTo>
+                  <a:lnTo>
+                    <a:pt x="211641" y="556543"/>
+                  </a:lnTo>
+                  <a:lnTo>
+                    <a:pt x="141094" y="563388"/>
+                  </a:lnTo>
+                  <a:lnTo>
+                    <a:pt x="70547" y="570016"/>
+                  </a:lnTo>
+                  <a:lnTo>
+                    <a:pt x="0" y="576433"/>
                   </a:lnTo>
                 </a:path>
               </a:pathLst>
@@ -4343,312 +4343,312 @@
           </p:nvSpPr>
           <p:spPr>
             <a:xfrm>
-              <a:off x="1172049" y="3805534"/>
-              <a:ext cx="7090630" cy="1279964"/>
+              <a:off x="1264853" y="3824693"/>
+              <a:ext cx="6984170" cy="1193866"/>
             </a:xfrm>
             <a:custGeom>
               <a:avLst/>
               <a:pathLst>
-                <a:path w="7090630" h="1279964">
+                <a:path w="6984170" h="1193866">
                   <a:moveTo>
-                    <a:pt x="0" y="1279964"/>
+                    <a:pt x="0" y="1193866"/>
                   </a:moveTo>
                   <a:lnTo>
-                    <a:pt x="71622" y="1273671"/>
-                  </a:lnTo>
-                  <a:lnTo>
-                    <a:pt x="143245" y="1267294"/>
-                  </a:lnTo>
-                  <a:lnTo>
-                    <a:pt x="214867" y="1260832"/>
-                  </a:lnTo>
-                  <a:lnTo>
-                    <a:pt x="286490" y="1254284"/>
-                  </a:lnTo>
-                  <a:lnTo>
-                    <a:pt x="358112" y="1247648"/>
-                  </a:lnTo>
-                  <a:lnTo>
-                    <a:pt x="429735" y="1240924"/>
-                  </a:lnTo>
-                  <a:lnTo>
-                    <a:pt x="501357" y="1234110"/>
-                  </a:lnTo>
-                  <a:lnTo>
-                    <a:pt x="572980" y="1227206"/>
-                  </a:lnTo>
-                  <a:lnTo>
-                    <a:pt x="644602" y="1220209"/>
-                  </a:lnTo>
-                  <a:lnTo>
-                    <a:pt x="716225" y="1213119"/>
-                  </a:lnTo>
-                  <a:lnTo>
-                    <a:pt x="787847" y="1205934"/>
-                  </a:lnTo>
-                  <a:lnTo>
-                    <a:pt x="859470" y="1198654"/>
-                  </a:lnTo>
-                  <a:lnTo>
-                    <a:pt x="931092" y="1191276"/>
-                  </a:lnTo>
-                  <a:lnTo>
-                    <a:pt x="1002715" y="1183800"/>
-                  </a:lnTo>
-                  <a:lnTo>
-                    <a:pt x="1074337" y="1176224"/>
-                  </a:lnTo>
-                  <a:lnTo>
-                    <a:pt x="1145960" y="1168547"/>
-                  </a:lnTo>
-                  <a:lnTo>
-                    <a:pt x="1217582" y="1160768"/>
-                  </a:lnTo>
-                  <a:lnTo>
-                    <a:pt x="1289205" y="1152885"/>
-                  </a:lnTo>
-                  <a:lnTo>
-                    <a:pt x="1360827" y="1144896"/>
-                  </a:lnTo>
-                  <a:lnTo>
-                    <a:pt x="1432450" y="1136802"/>
-                  </a:lnTo>
-                  <a:lnTo>
-                    <a:pt x="1504073" y="1128599"/>
-                  </a:lnTo>
-                  <a:lnTo>
-                    <a:pt x="1575695" y="1120287"/>
-                  </a:lnTo>
-                  <a:lnTo>
-                    <a:pt x="1647318" y="1111864"/>
-                  </a:lnTo>
-                  <a:lnTo>
-                    <a:pt x="1718940" y="1103328"/>
-                  </a:lnTo>
-                  <a:lnTo>
-                    <a:pt x="1790563" y="1094679"/>
-                  </a:lnTo>
-                  <a:lnTo>
-                    <a:pt x="1862185" y="1085914"/>
-                  </a:lnTo>
-                  <a:lnTo>
-                    <a:pt x="1933808" y="1077033"/>
-                  </a:lnTo>
-                  <a:lnTo>
-                    <a:pt x="2005430" y="1068033"/>
-                  </a:lnTo>
-                  <a:lnTo>
-                    <a:pt x="2077053" y="1058913"/>
-                  </a:lnTo>
-                  <a:lnTo>
-                    <a:pt x="2148675" y="1049671"/>
-                  </a:lnTo>
-                  <a:lnTo>
-                    <a:pt x="2220298" y="1040306"/>
-                  </a:lnTo>
-                  <a:lnTo>
-                    <a:pt x="2291920" y="1030816"/>
-                  </a:lnTo>
-                  <a:lnTo>
-                    <a:pt x="2363543" y="1021199"/>
-                  </a:lnTo>
-                  <a:lnTo>
-                    <a:pt x="2435165" y="1011454"/>
-                  </a:lnTo>
-                  <a:lnTo>
-                    <a:pt x="2506788" y="1001579"/>
-                  </a:lnTo>
-                  <a:lnTo>
-                    <a:pt x="2578410" y="991573"/>
-                  </a:lnTo>
-                  <a:lnTo>
-                    <a:pt x="2650033" y="981433"/>
-                  </a:lnTo>
-                  <a:lnTo>
-                    <a:pt x="2721655" y="971157"/>
-                  </a:lnTo>
-                  <a:lnTo>
-                    <a:pt x="2793278" y="960745"/>
-                  </a:lnTo>
-                  <a:lnTo>
-                    <a:pt x="2864901" y="950194"/>
-                  </a:lnTo>
-                  <a:lnTo>
-                    <a:pt x="2936523" y="939502"/>
-                  </a:lnTo>
-                  <a:lnTo>
-                    <a:pt x="3008146" y="928667"/>
-                  </a:lnTo>
-                  <a:lnTo>
-                    <a:pt x="3079768" y="917688"/>
-                  </a:lnTo>
-                  <a:lnTo>
-                    <a:pt x="3151391" y="906562"/>
-                  </a:lnTo>
-                  <a:lnTo>
-                    <a:pt x="3223013" y="895288"/>
-                  </a:lnTo>
-                  <a:lnTo>
-                    <a:pt x="3294636" y="883864"/>
-                  </a:lnTo>
-                  <a:lnTo>
-                    <a:pt x="3366258" y="872287"/>
-                  </a:lnTo>
-                  <a:lnTo>
-                    <a:pt x="3437881" y="860555"/>
-                  </a:lnTo>
-                  <a:lnTo>
-                    <a:pt x="3509503" y="848668"/>
-                  </a:lnTo>
-                  <a:lnTo>
-                    <a:pt x="3581126" y="836621"/>
-                  </a:lnTo>
-                  <a:lnTo>
-                    <a:pt x="3652748" y="824414"/>
-                  </a:lnTo>
-                  <a:lnTo>
-                    <a:pt x="3724371" y="812044"/>
-                  </a:lnTo>
-                  <a:lnTo>
-                    <a:pt x="3795993" y="799509"/>
-                  </a:lnTo>
-                  <a:lnTo>
-                    <a:pt x="3867616" y="786807"/>
-                  </a:lnTo>
-                  <a:lnTo>
-                    <a:pt x="3939238" y="773935"/>
-                  </a:lnTo>
-                  <a:lnTo>
-                    <a:pt x="4010861" y="760892"/>
-                  </a:lnTo>
-                  <a:lnTo>
-                    <a:pt x="4082483" y="747675"/>
-                  </a:lnTo>
-                  <a:lnTo>
-                    <a:pt x="4154106" y="734281"/>
-                  </a:lnTo>
-                  <a:lnTo>
-                    <a:pt x="4225729" y="720709"/>
-                  </a:lnTo>
-                  <a:lnTo>
-                    <a:pt x="4297351" y="706956"/>
-                  </a:lnTo>
-                  <a:lnTo>
-                    <a:pt x="4368974" y="693019"/>
-                  </a:lnTo>
-                  <a:lnTo>
-                    <a:pt x="4440596" y="678896"/>
-                  </a:lnTo>
-                  <a:lnTo>
-                    <a:pt x="4512219" y="664585"/>
-                  </a:lnTo>
-                  <a:lnTo>
-                    <a:pt x="4583841" y="650083"/>
-                  </a:lnTo>
-                  <a:lnTo>
-                    <a:pt x="4655464" y="635388"/>
-                  </a:lnTo>
-                  <a:lnTo>
-                    <a:pt x="4727086" y="620496"/>
-                  </a:lnTo>
-                  <a:lnTo>
-                    <a:pt x="4798709" y="605406"/>
-                  </a:lnTo>
-                  <a:lnTo>
-                    <a:pt x="4870331" y="590115"/>
-                  </a:lnTo>
-                  <a:lnTo>
-                    <a:pt x="4941954" y="574619"/>
-                  </a:lnTo>
-                  <a:lnTo>
-                    <a:pt x="5013576" y="558917"/>
-                  </a:lnTo>
-                  <a:lnTo>
-                    <a:pt x="5085199" y="543006"/>
-                  </a:lnTo>
-                  <a:lnTo>
-                    <a:pt x="5156821" y="526882"/>
-                  </a:lnTo>
-                  <a:lnTo>
-                    <a:pt x="5228444" y="510543"/>
-                  </a:lnTo>
-                  <a:lnTo>
-                    <a:pt x="5300066" y="493986"/>
-                  </a:lnTo>
-                  <a:lnTo>
-                    <a:pt x="5371689" y="477208"/>
-                  </a:lnTo>
-                  <a:lnTo>
-                    <a:pt x="5443311" y="460207"/>
-                  </a:lnTo>
-                  <a:lnTo>
-                    <a:pt x="5514934" y="442978"/>
-                  </a:lnTo>
-                  <a:lnTo>
-                    <a:pt x="5586557" y="425520"/>
-                  </a:lnTo>
-                  <a:lnTo>
-                    <a:pt x="5658179" y="407829"/>
-                  </a:lnTo>
-                  <a:lnTo>
-                    <a:pt x="5729802" y="389902"/>
-                  </a:lnTo>
-                  <a:lnTo>
-                    <a:pt x="5801424" y="371736"/>
-                  </a:lnTo>
-                  <a:lnTo>
-                    <a:pt x="5873047" y="353327"/>
-                  </a:lnTo>
-                  <a:lnTo>
-                    <a:pt x="5944669" y="334673"/>
-                  </a:lnTo>
-                  <a:lnTo>
-                    <a:pt x="6016292" y="315770"/>
-                  </a:lnTo>
-                  <a:lnTo>
-                    <a:pt x="6087914" y="296615"/>
-                  </a:lnTo>
-                  <a:lnTo>
-                    <a:pt x="6159537" y="277205"/>
-                  </a:lnTo>
-                  <a:lnTo>
-                    <a:pt x="6231159" y="257535"/>
-                  </a:lnTo>
-                  <a:lnTo>
-                    <a:pt x="6302782" y="237603"/>
-                  </a:lnTo>
-                  <a:lnTo>
-                    <a:pt x="6374404" y="217406"/>
-                  </a:lnTo>
-                  <a:lnTo>
-                    <a:pt x="6446027" y="196938"/>
-                  </a:lnTo>
-                  <a:lnTo>
-                    <a:pt x="6517649" y="176198"/>
-                  </a:lnTo>
-                  <a:lnTo>
-                    <a:pt x="6589272" y="155181"/>
-                  </a:lnTo>
-                  <a:lnTo>
-                    <a:pt x="6660894" y="133884"/>
-                  </a:lnTo>
-                  <a:lnTo>
-                    <a:pt x="6732517" y="112302"/>
-                  </a:lnTo>
-                  <a:lnTo>
-                    <a:pt x="6804139" y="90433"/>
-                  </a:lnTo>
-                  <a:lnTo>
-                    <a:pt x="6875762" y="68272"/>
-                  </a:lnTo>
-                  <a:lnTo>
-                    <a:pt x="6947385" y="45815"/>
-                  </a:lnTo>
-                  <a:lnTo>
-                    <a:pt x="7019007" y="23059"/>
-                  </a:lnTo>
-                  <a:lnTo>
-                    <a:pt x="7090630" y="0"/>
+                    <a:pt x="70547" y="1187996"/>
+                  </a:lnTo>
+                  <a:lnTo>
+                    <a:pt x="141094" y="1182048"/>
+                  </a:lnTo>
+                  <a:lnTo>
+                    <a:pt x="211641" y="1176021"/>
+                  </a:lnTo>
+                  <a:lnTo>
+                    <a:pt x="282188" y="1169913"/>
+                  </a:lnTo>
+                  <a:lnTo>
+                    <a:pt x="352735" y="1163724"/>
+                  </a:lnTo>
+                  <a:lnTo>
+                    <a:pt x="423283" y="1157452"/>
+                  </a:lnTo>
+                  <a:lnTo>
+                    <a:pt x="493830" y="1151096"/>
+                  </a:lnTo>
+                  <a:lnTo>
+                    <a:pt x="564377" y="1144656"/>
+                  </a:lnTo>
+                  <a:lnTo>
+                    <a:pt x="634924" y="1138130"/>
+                  </a:lnTo>
+                  <a:lnTo>
+                    <a:pt x="705471" y="1131517"/>
+                  </a:lnTo>
+                  <a:lnTo>
+                    <a:pt x="776018" y="1124815"/>
+                  </a:lnTo>
+                  <a:lnTo>
+                    <a:pt x="846566" y="1118024"/>
+                  </a:lnTo>
+                  <a:lnTo>
+                    <a:pt x="917113" y="1111143"/>
+                  </a:lnTo>
+                  <a:lnTo>
+                    <a:pt x="987660" y="1104170"/>
+                  </a:lnTo>
+                  <a:lnTo>
+                    <a:pt x="1058207" y="1097104"/>
+                  </a:lnTo>
+                  <a:lnTo>
+                    <a:pt x="1128754" y="1089943"/>
+                  </a:lnTo>
+                  <a:lnTo>
+                    <a:pt x="1199301" y="1082687"/>
+                  </a:lnTo>
+                  <a:lnTo>
+                    <a:pt x="1269849" y="1075334"/>
+                  </a:lnTo>
+                  <a:lnTo>
+                    <a:pt x="1340396" y="1067883"/>
+                  </a:lnTo>
+                  <a:lnTo>
+                    <a:pt x="1410943" y="1060333"/>
+                  </a:lnTo>
+                  <a:lnTo>
+                    <a:pt x="1481490" y="1052682"/>
+                  </a:lnTo>
+                  <a:lnTo>
+                    <a:pt x="1552037" y="1044929"/>
+                  </a:lnTo>
+                  <a:lnTo>
+                    <a:pt x="1622584" y="1037073"/>
+                  </a:lnTo>
+                  <a:lnTo>
+                    <a:pt x="1693132" y="1029111"/>
+                  </a:lnTo>
+                  <a:lnTo>
+                    <a:pt x="1763679" y="1021044"/>
+                  </a:lnTo>
+                  <a:lnTo>
+                    <a:pt x="1834226" y="1012869"/>
+                  </a:lnTo>
+                  <a:lnTo>
+                    <a:pt x="1904773" y="1004585"/>
+                  </a:lnTo>
+                  <a:lnTo>
+                    <a:pt x="1975320" y="996190"/>
+                  </a:lnTo>
+                  <a:lnTo>
+                    <a:pt x="2045868" y="987683"/>
+                  </a:lnTo>
+                  <a:lnTo>
+                    <a:pt x="2116415" y="979063"/>
+                  </a:lnTo>
+                  <a:lnTo>
+                    <a:pt x="2186962" y="970328"/>
+                  </a:lnTo>
+                  <a:lnTo>
+                    <a:pt x="2257509" y="961477"/>
+                  </a:lnTo>
+                  <a:lnTo>
+                    <a:pt x="2328056" y="952507"/>
+                  </a:lnTo>
+                  <a:lnTo>
+                    <a:pt x="2398603" y="943417"/>
+                  </a:lnTo>
+                  <a:lnTo>
+                    <a:pt x="2469151" y="934207"/>
+                  </a:lnTo>
+                  <a:lnTo>
+                    <a:pt x="2539698" y="924873"/>
+                  </a:lnTo>
+                  <a:lnTo>
+                    <a:pt x="2610245" y="915415"/>
+                  </a:lnTo>
+                  <a:lnTo>
+                    <a:pt x="2680792" y="905831"/>
+                  </a:lnTo>
+                  <a:lnTo>
+                    <a:pt x="2751339" y="896119"/>
+                  </a:lnTo>
+                  <a:lnTo>
+                    <a:pt x="2821886" y="886278"/>
+                  </a:lnTo>
+                  <a:lnTo>
+                    <a:pt x="2892434" y="876305"/>
+                  </a:lnTo>
+                  <a:lnTo>
+                    <a:pt x="2962981" y="866199"/>
+                  </a:lnTo>
+                  <a:lnTo>
+                    <a:pt x="3033528" y="855958"/>
+                  </a:lnTo>
+                  <a:lnTo>
+                    <a:pt x="3104075" y="845581"/>
+                  </a:lnTo>
+                  <a:lnTo>
+                    <a:pt x="3174622" y="835065"/>
+                  </a:lnTo>
+                  <a:lnTo>
+                    <a:pt x="3245169" y="824409"/>
+                  </a:lnTo>
+                  <a:lnTo>
+                    <a:pt x="3315717" y="813611"/>
+                  </a:lnTo>
+                  <a:lnTo>
+                    <a:pt x="3386264" y="802669"/>
+                  </a:lnTo>
+                  <a:lnTo>
+                    <a:pt x="3456811" y="791581"/>
+                  </a:lnTo>
+                  <a:lnTo>
+                    <a:pt x="3527358" y="780345"/>
+                  </a:lnTo>
+                  <a:lnTo>
+                    <a:pt x="3597905" y="768959"/>
+                  </a:lnTo>
+                  <a:lnTo>
+                    <a:pt x="3668452" y="757421"/>
+                  </a:lnTo>
+                  <a:lnTo>
+                    <a:pt x="3739000" y="745729"/>
+                  </a:lnTo>
+                  <a:lnTo>
+                    <a:pt x="3809547" y="733881"/>
+                  </a:lnTo>
+                  <a:lnTo>
+                    <a:pt x="3880094" y="721876"/>
+                  </a:lnTo>
+                  <a:lnTo>
+                    <a:pt x="3950641" y="709710"/>
+                  </a:lnTo>
+                  <a:lnTo>
+                    <a:pt x="4021188" y="697382"/>
+                  </a:lnTo>
+                  <a:lnTo>
+                    <a:pt x="4091736" y="684889"/>
+                  </a:lnTo>
+                  <a:lnTo>
+                    <a:pt x="4162283" y="672230"/>
+                  </a:lnTo>
+                  <a:lnTo>
+                    <a:pt x="4232830" y="659401"/>
+                  </a:lnTo>
+                  <a:lnTo>
+                    <a:pt x="4303377" y="646402"/>
+                  </a:lnTo>
+                  <a:lnTo>
+                    <a:pt x="4373924" y="633229"/>
+                  </a:lnTo>
+                  <a:lnTo>
+                    <a:pt x="4444471" y="619881"/>
+                  </a:lnTo>
+                  <a:lnTo>
+                    <a:pt x="4515019" y="606354"/>
+                  </a:lnTo>
+                  <a:lnTo>
+                    <a:pt x="4585566" y="592647"/>
+                  </a:lnTo>
+                  <a:lnTo>
+                    <a:pt x="4656113" y="578758"/>
+                  </a:lnTo>
+                  <a:lnTo>
+                    <a:pt x="4726660" y="564683"/>
+                  </a:lnTo>
+                  <a:lnTo>
+                    <a:pt x="4797207" y="550420"/>
+                  </a:lnTo>
+                  <a:lnTo>
+                    <a:pt x="4867754" y="535967"/>
+                  </a:lnTo>
+                  <a:lnTo>
+                    <a:pt x="4938302" y="521321"/>
+                  </a:lnTo>
+                  <a:lnTo>
+                    <a:pt x="5008849" y="506480"/>
+                  </a:lnTo>
+                  <a:lnTo>
+                    <a:pt x="5079396" y="491440"/>
+                  </a:lnTo>
+                  <a:lnTo>
+                    <a:pt x="5149943" y="476200"/>
+                  </a:lnTo>
+                  <a:lnTo>
+                    <a:pt x="5220490" y="460757"/>
+                  </a:lnTo>
+                  <a:lnTo>
+                    <a:pt x="5291037" y="445108"/>
+                  </a:lnTo>
+                  <a:lnTo>
+                    <a:pt x="5361585" y="429250"/>
+                  </a:lnTo>
+                  <a:lnTo>
+                    <a:pt x="5432132" y="413181"/>
+                  </a:lnTo>
+                  <a:lnTo>
+                    <a:pt x="5502679" y="396897"/>
+                  </a:lnTo>
+                  <a:lnTo>
+                    <a:pt x="5573226" y="380396"/>
+                  </a:lnTo>
+                  <a:lnTo>
+                    <a:pt x="5643773" y="363675"/>
+                  </a:lnTo>
+                  <a:lnTo>
+                    <a:pt x="5714320" y="346731"/>
+                  </a:lnTo>
+                  <a:lnTo>
+                    <a:pt x="5784868" y="329560"/>
+                  </a:lnTo>
+                  <a:lnTo>
+                    <a:pt x="5855415" y="312161"/>
+                  </a:lnTo>
+                  <a:lnTo>
+                    <a:pt x="5925962" y="294530"/>
+                  </a:lnTo>
+                  <a:lnTo>
+                    <a:pt x="5996509" y="276663"/>
+                  </a:lnTo>
+                  <a:lnTo>
+                    <a:pt x="6067056" y="258558"/>
+                  </a:lnTo>
+                  <a:lnTo>
+                    <a:pt x="6137604" y="240212"/>
+                  </a:lnTo>
+                  <a:lnTo>
+                    <a:pt x="6208151" y="221621"/>
+                  </a:lnTo>
+                  <a:lnTo>
+                    <a:pt x="6278698" y="202781"/>
+                  </a:lnTo>
+                  <a:lnTo>
+                    <a:pt x="6349245" y="183691"/>
+                  </a:lnTo>
+                  <a:lnTo>
+                    <a:pt x="6419792" y="164346"/>
+                  </a:lnTo>
+                  <a:lnTo>
+                    <a:pt x="6490339" y="144743"/>
+                  </a:lnTo>
+                  <a:lnTo>
+                    <a:pt x="6560887" y="124878"/>
+                  </a:lnTo>
+                  <a:lnTo>
+                    <a:pt x="6631434" y="104748"/>
+                  </a:lnTo>
+                  <a:lnTo>
+                    <a:pt x="6701981" y="84350"/>
+                  </a:lnTo>
+                  <a:lnTo>
+                    <a:pt x="6772528" y="63680"/>
+                  </a:lnTo>
+                  <a:lnTo>
+                    <a:pt x="6843075" y="42734"/>
+                  </a:lnTo>
+                  <a:lnTo>
+                    <a:pt x="6913622" y="21508"/>
+                  </a:lnTo>
+                  <a:lnTo>
+                    <a:pt x="6984170" y="0"/>
                   </a:lnTo>
                 </a:path>
               </a:pathLst>
@@ -4677,21 +4677,21 @@
           </p:nvSpPr>
           <p:spPr>
             <a:xfrm>
-              <a:off x="817517" y="4727786"/>
-              <a:ext cx="7799693" cy="0"/>
+              <a:off x="915645" y="4684908"/>
+              <a:ext cx="7682587" cy="0"/>
             </a:xfrm>
             <a:custGeom>
               <a:avLst/>
               <a:pathLst>
-                <a:path w="7799693" h="0">
+                <a:path w="7682587" h="0">
                   <a:moveTo>
                     <a:pt x="0" y="0"/>
                   </a:moveTo>
                   <a:lnTo>
-                    <a:pt x="7799693" y="0"/>
-                  </a:lnTo>
-                  <a:lnTo>
-                    <a:pt x="7799693" y="0"/>
+                    <a:pt x="7682587" y="0"/>
+                  </a:lnTo>
+                  <a:lnTo>
+                    <a:pt x="7682587" y="0"/>
                   </a:lnTo>
                 </a:path>
               </a:pathLst>
@@ -4720,15 +4720,15 @@
           </p:nvSpPr>
           <p:spPr>
             <a:xfrm>
-              <a:off x="4222163" y="2073503"/>
-              <a:ext cx="0" cy="3649639"/>
+              <a:off x="4269172" y="2209169"/>
+              <a:ext cx="0" cy="3404141"/>
             </a:xfrm>
             <a:custGeom>
               <a:avLst/>
               <a:pathLst>
-                <a:path w="0" h="3649639">
+                <a:path w="0" h="3404141">
                   <a:moveTo>
-                    <a:pt x="0" y="3649639"/>
+                    <a:pt x="0" y="3404141"/>
                   </a:moveTo>
                   <a:lnTo>
                     <a:pt x="0" y="0"/>
@@ -4763,8 +4763,8 @@
           </p:nvSpPr>
           <p:spPr>
             <a:xfrm>
-              <a:off x="692708" y="5517199"/>
-              <a:ext cx="62179" cy="80101"/>
+              <a:off x="756929" y="5407599"/>
+              <a:ext cx="79004" cy="101955"/>
             </a:xfrm>
             <a:prstGeom prst="rect">
               <a:avLst/>
@@ -4777,7 +4777,7 @@
             <a:p>
               <a:pPr algn="l" marL="0" marR="0" indent="0">
                 <a:lnSpc>
-                  <a:spcPts val="880"/>
+                  <a:spcPts val="1120"/>
                 </a:lnSpc>
                 <a:spcBef>
                   <a:spcPts val="0"/>
@@ -4787,7 +4787,7 @@
                 </a:spcAft>
               </a:pPr>
               <a:r>
-                <a:rPr sz="880">
+                <a:rPr sz="1120">
                   <a:solidFill>
                     <a:srgbClr val="4D4D4D">
                       <a:alpha val="100000"/>
@@ -4809,8 +4809,8 @@
           </p:nvSpPr>
           <p:spPr>
             <a:xfrm>
-              <a:off x="692708" y="4687735"/>
-              <a:ext cx="62179" cy="80101"/>
+              <a:off x="756929" y="4633931"/>
+              <a:ext cx="79004" cy="101955"/>
             </a:xfrm>
             <a:prstGeom prst="rect">
               <a:avLst/>
@@ -4823,7 +4823,7 @@
             <a:p>
               <a:pPr algn="l" marL="0" marR="0" indent="0">
                 <a:lnSpc>
-                  <a:spcPts val="880"/>
+                  <a:spcPts val="1120"/>
                 </a:lnSpc>
                 <a:spcBef>
                   <a:spcPts val="0"/>
@@ -4833,7 +4833,7 @@
                 </a:spcAft>
               </a:pPr>
               <a:r>
-                <a:rPr sz="880">
+                <a:rPr sz="1120">
                   <a:solidFill>
                     <a:srgbClr val="4D4D4D">
                       <a:alpha val="100000"/>
@@ -4855,8 +4855,8 @@
           </p:nvSpPr>
           <p:spPr>
             <a:xfrm>
-              <a:off x="692708" y="3858272"/>
-              <a:ext cx="62179" cy="80101"/>
+              <a:off x="756929" y="3860262"/>
+              <a:ext cx="79004" cy="101955"/>
             </a:xfrm>
             <a:prstGeom prst="rect">
               <a:avLst/>
@@ -4869,7 +4869,7 @@
             <a:p>
               <a:pPr algn="l" marL="0" marR="0" indent="0">
                 <a:lnSpc>
-                  <a:spcPts val="880"/>
+                  <a:spcPts val="1120"/>
                 </a:lnSpc>
                 <a:spcBef>
                   <a:spcPts val="0"/>
@@ -4879,7 +4879,7 @@
                 </a:spcAft>
               </a:pPr>
               <a:r>
-                <a:rPr sz="880">
+                <a:rPr sz="1120">
                   <a:solidFill>
                     <a:srgbClr val="4D4D4D">
                       <a:alpha val="100000"/>
@@ -4901,8 +4901,8 @@
           </p:nvSpPr>
           <p:spPr>
             <a:xfrm>
-              <a:off x="692708" y="3028808"/>
-              <a:ext cx="62179" cy="80101"/>
+              <a:off x="756929" y="3086593"/>
+              <a:ext cx="79004" cy="101955"/>
             </a:xfrm>
             <a:prstGeom prst="rect">
               <a:avLst/>
@@ -4915,7 +4915,7 @@
             <a:p>
               <a:pPr algn="l" marL="0" marR="0" indent="0">
                 <a:lnSpc>
-                  <a:spcPts val="880"/>
+                  <a:spcPts val="1120"/>
                 </a:lnSpc>
                 <a:spcBef>
                   <a:spcPts val="0"/>
@@ -4925,7 +4925,7 @@
                 </a:spcAft>
               </a:pPr>
               <a:r>
-                <a:rPr sz="880">
+                <a:rPr sz="1120">
                   <a:solidFill>
                     <a:srgbClr val="4D4D4D">
                       <a:alpha val="100000"/>
@@ -4947,8 +4947,8 @@
           </p:nvSpPr>
           <p:spPr>
             <a:xfrm>
-              <a:off x="692708" y="2199345"/>
-              <a:ext cx="62179" cy="80101"/>
+              <a:off x="756929" y="2312925"/>
+              <a:ext cx="79004" cy="101955"/>
             </a:xfrm>
             <a:prstGeom prst="rect">
               <a:avLst/>
@@ -4961,7 +4961,7 @@
             <a:p>
               <a:pPr algn="l" marL="0" marR="0" indent="0">
                 <a:lnSpc>
-                  <a:spcPts val="880"/>
+                  <a:spcPts val="1120"/>
                 </a:lnSpc>
                 <a:spcBef>
                   <a:spcPts val="0"/>
@@ -4971,7 +4971,7 @@
                 </a:spcAft>
               </a:pPr>
               <a:r>
-                <a:rPr sz="880">
+                <a:rPr sz="1120">
                   <a:solidFill>
                     <a:srgbClr val="4D4D4D">
                       <a:alpha val="100000"/>
@@ -4993,8 +4993,8 @@
           </p:nvSpPr>
           <p:spPr>
             <a:xfrm>
-              <a:off x="1328653" y="5785772"/>
-              <a:ext cx="223753" cy="80101"/>
+              <a:off x="1387159" y="5693022"/>
+              <a:ext cx="284286" cy="101955"/>
             </a:xfrm>
             <a:prstGeom prst="rect">
               <a:avLst/>
@@ -5007,7 +5007,7 @@
             <a:p>
               <a:pPr algn="l" marL="0" marR="0" indent="0">
                 <a:lnSpc>
-                  <a:spcPts val="880"/>
+                  <a:spcPts val="1120"/>
                 </a:lnSpc>
                 <a:spcBef>
                   <a:spcPts val="0"/>
@@ -5017,7 +5017,7 @@
                 </a:spcAft>
               </a:pPr>
               <a:r>
-                <a:rPr sz="880">
+                <a:rPr sz="1120">
                   <a:solidFill>
                     <a:srgbClr val="4D4D4D">
                       <a:alpha val="100000"/>
@@ -5039,8 +5039,8 @@
           </p:nvSpPr>
           <p:spPr>
             <a:xfrm>
-              <a:off x="2724172" y="5785772"/>
-              <a:ext cx="161574" cy="80101"/>
+              <a:off x="2770605" y="5693022"/>
+              <a:ext cx="205282" cy="101955"/>
             </a:xfrm>
             <a:prstGeom prst="rect">
               <a:avLst/>
@@ -5053,7 +5053,7 @@
             <a:p>
               <a:pPr algn="l" marL="0" marR="0" indent="0">
                 <a:lnSpc>
-                  <a:spcPts val="880"/>
+                  <a:spcPts val="1120"/>
                 </a:lnSpc>
                 <a:spcBef>
                   <a:spcPts val="0"/>
@@ -5063,7 +5063,7 @@
                 </a:spcAft>
               </a:pPr>
               <a:r>
-                <a:rPr sz="880">
+                <a:rPr sz="1120">
                   <a:solidFill>
                     <a:srgbClr val="4D4D4D">
                       <a:alpha val="100000"/>
@@ -5085,8 +5085,8 @@
           </p:nvSpPr>
           <p:spPr>
             <a:xfrm>
-              <a:off x="4138300" y="5785772"/>
-              <a:ext cx="62179" cy="80101"/>
+              <a:off x="4177689" y="5693022"/>
+              <a:ext cx="79004" cy="101955"/>
             </a:xfrm>
             <a:prstGeom prst="rect">
               <a:avLst/>
@@ -5099,7 +5099,7 @@
             <a:p>
               <a:pPr algn="l" marL="0" marR="0" indent="0">
                 <a:lnSpc>
-                  <a:spcPts val="880"/>
+                  <a:spcPts val="1120"/>
                 </a:lnSpc>
                 <a:spcBef>
                   <a:spcPts val="0"/>
@@ -5109,7 +5109,7 @@
                 </a:spcAft>
               </a:pPr>
               <a:r>
-                <a:rPr sz="880">
+                <a:rPr sz="1120">
                   <a:solidFill>
                     <a:srgbClr val="4D4D4D">
                       <a:alpha val="100000"/>
@@ -5131,8 +5131,8 @@
           </p:nvSpPr>
           <p:spPr>
             <a:xfrm>
-              <a:off x="5471640" y="5785772"/>
-              <a:ext cx="124358" cy="80101"/>
+              <a:off x="5482131" y="5693022"/>
+              <a:ext cx="158008" cy="101955"/>
             </a:xfrm>
             <a:prstGeom prst="rect">
               <a:avLst/>
@@ -5145,7 +5145,7 @@
             <a:p>
               <a:pPr algn="l" marL="0" marR="0" indent="0">
                 <a:lnSpc>
-                  <a:spcPts val="880"/>
+                  <a:spcPts val="1120"/>
                 </a:lnSpc>
                 <a:spcBef>
                   <a:spcPts val="0"/>
@@ -5155,7 +5155,7 @@
                 </a:spcAft>
               </a:pPr>
               <a:r>
-                <a:rPr sz="880">
+                <a:rPr sz="1120">
                   <a:solidFill>
                     <a:srgbClr val="4D4D4D">
                       <a:alpha val="100000"/>
@@ -5177,8 +5177,8 @@
           </p:nvSpPr>
           <p:spPr>
             <a:xfrm>
-              <a:off x="6804980" y="5785772"/>
-              <a:ext cx="186537" cy="80101"/>
+              <a:off x="6786573" y="5693022"/>
+              <a:ext cx="237012" cy="101955"/>
             </a:xfrm>
             <a:prstGeom prst="rect">
               <a:avLst/>
@@ -5191,7 +5191,7 @@
             <a:p>
               <a:pPr algn="l" marL="0" marR="0" indent="0">
                 <a:lnSpc>
-                  <a:spcPts val="880"/>
+                  <a:spcPts val="1120"/>
                 </a:lnSpc>
                 <a:spcBef>
                   <a:spcPts val="0"/>
@@ -5201,7 +5201,7 @@
                 </a:spcAft>
               </a:pPr>
               <a:r>
-                <a:rPr sz="880">
+                <a:rPr sz="1120">
                   <a:solidFill>
                     <a:srgbClr val="4D4D4D">
                       <a:alpha val="100000"/>
@@ -5223,8 +5223,8 @@
           </p:nvSpPr>
           <p:spPr>
             <a:xfrm>
-              <a:off x="8169410" y="5785772"/>
-              <a:ext cx="186537" cy="80101"/>
+              <a:off x="8130517" y="5693022"/>
+              <a:ext cx="237012" cy="101955"/>
             </a:xfrm>
             <a:prstGeom prst="rect">
               <a:avLst/>
@@ -5237,7 +5237,7 @@
             <a:p>
               <a:pPr algn="l" marL="0" marR="0" indent="0">
                 <a:lnSpc>
-                  <a:spcPts val="880"/>
+                  <a:spcPts val="1120"/>
                 </a:lnSpc>
                 <a:spcBef>
                   <a:spcPts val="0"/>
@@ -5247,7 +5247,7 @@
                 </a:spcAft>
               </a:pPr>
               <a:r>
-                <a:rPr sz="880">
+                <a:rPr sz="1120">
                   <a:solidFill>
                     <a:srgbClr val="4D4D4D">
                       <a:alpha val="100000"/>
@@ -5269,8 +5269,8 @@
           </p:nvSpPr>
           <p:spPr>
             <a:xfrm>
-              <a:off x="3987536" y="5925448"/>
-              <a:ext cx="1459656" cy="100218"/>
+              <a:off x="3828319" y="5870717"/>
+              <a:ext cx="1857237" cy="127558"/>
             </a:xfrm>
             <a:prstGeom prst="rect">
               <a:avLst/>
@@ -5283,7 +5283,7 @@
             <a:p>
               <a:pPr algn="l" marL="0" marR="0" indent="0">
                 <a:lnSpc>
-                  <a:spcPts val="1100"/>
+                  <a:spcPts val="1400"/>
                 </a:lnSpc>
                 <a:spcBef>
                   <a:spcPts val="0"/>
@@ -5293,7 +5293,7 @@
                 </a:spcAft>
               </a:pPr>
               <a:r>
-                <a:rPr sz="1100">
+                <a:rPr sz="1400">
                   <a:solidFill>
                     <a:srgbClr val="000000">
                       <a:alpha val="100000"/>
@@ -5315,8 +5315,8 @@
           </p:nvSpPr>
           <p:spPr>
             <a:xfrm rot="-5400000">
-              <a:off x="68446" y="3848213"/>
-              <a:ext cx="1016904" cy="100218"/>
+              <a:off x="-37527" y="3847460"/>
+              <a:ext cx="1294150" cy="127558"/>
             </a:xfrm>
             <a:prstGeom prst="rect">
               <a:avLst/>
@@ -5329,7 +5329,7 @@
             <a:p>
               <a:pPr algn="l" marL="0" marR="0" indent="0">
                 <a:lnSpc>
-                  <a:spcPts val="1100"/>
+                  <a:spcPts val="1400"/>
                 </a:lnSpc>
                 <a:spcBef>
                   <a:spcPts val="0"/>
@@ -5339,7 +5339,7 @@
                 </a:spcAft>
               </a:pPr>
               <a:r>
-                <a:rPr sz="1100">
+                <a:rPr sz="1400">
                   <a:solidFill>
                     <a:srgbClr val="000000">
                       <a:alpha val="100000"/>
@@ -5361,8 +5361,8 @@
           </p:nvSpPr>
           <p:spPr>
             <a:xfrm>
-              <a:off x="817517" y="1896563"/>
-              <a:ext cx="4433376" cy="82021"/>
+              <a:off x="915645" y="1977589"/>
+              <a:ext cx="5912784" cy="109362"/>
             </a:xfrm>
             <a:prstGeom prst="rect">
               <a:avLst/>
@@ -5375,7 +5375,7 @@
             <a:p>
               <a:pPr algn="l" marL="0" marR="0" indent="0">
                 <a:lnSpc>
-                  <a:spcPts val="900"/>
+                  <a:spcPts val="1200"/>
                 </a:lnSpc>
                 <a:spcBef>
                   <a:spcPts val="0"/>
@@ -5385,7 +5385,7 @@
                 </a:spcAft>
               </a:pPr>
               <a:r>
-                <a:rPr sz="900">
+                <a:rPr sz="1200">
                   <a:solidFill>
                     <a:srgbClr val="404040">
                       <a:alpha val="100000"/>
@@ -5407,8 +5407,8 @@
           </p:nvSpPr>
           <p:spPr>
             <a:xfrm>
-              <a:off x="817517" y="1669789"/>
-              <a:ext cx="2234793" cy="120152"/>
+              <a:off x="915645" y="1688767"/>
+              <a:ext cx="2845064" cy="153070"/>
             </a:xfrm>
             <a:prstGeom prst="rect">
               <a:avLst/>
@@ -5421,7 +5421,7 @@
             <a:p>
               <a:pPr algn="l" marL="0" marR="0" indent="0">
                 <a:lnSpc>
-                  <a:spcPts val="1320"/>
+                  <a:spcPts val="1680"/>
                 </a:lnSpc>
                 <a:spcBef>
                   <a:spcPts val="0"/>
@@ -5431,7 +5431,7 @@
                 </a:spcAft>
               </a:pPr>
               <a:r>
-                <a:rPr sz="1320">
+                <a:rPr sz="1680">
                   <a:solidFill>
                     <a:srgbClr val="000000">
                       <a:alpha val="100000"/>
